--- a/Working Documents/11.25_Committee Meeting.pptx
+++ b/Working Documents/11.25_Committee Meeting.pptx
@@ -5,7 +5,7 @@
     <p:sldMasterId id="2147483672" r:id="rId1"/>
   </p:sldMasterIdLst>
   <p:notesMasterIdLst>
-    <p:notesMasterId r:id="rId54"/>
+    <p:notesMasterId r:id="rId56"/>
   </p:notesMasterIdLst>
   <p:sldIdLst>
     <p:sldId id="256" r:id="rId2"/>
@@ -30,36 +30,38 @@
     <p:sldId id="294" r:id="rId21"/>
     <p:sldId id="296" r:id="rId22"/>
     <p:sldId id="297" r:id="rId23"/>
-    <p:sldId id="308" r:id="rId24"/>
-    <p:sldId id="309" r:id="rId25"/>
-    <p:sldId id="311" r:id="rId26"/>
-    <p:sldId id="299" r:id="rId27"/>
-    <p:sldId id="314" r:id="rId28"/>
-    <p:sldId id="310" r:id="rId29"/>
-    <p:sldId id="315" r:id="rId30"/>
-    <p:sldId id="316" r:id="rId31"/>
-    <p:sldId id="301" r:id="rId32"/>
-    <p:sldId id="319" r:id="rId33"/>
-    <p:sldId id="317" r:id="rId34"/>
-    <p:sldId id="318" r:id="rId35"/>
-    <p:sldId id="320" r:id="rId36"/>
-    <p:sldId id="312" r:id="rId37"/>
-    <p:sldId id="321" r:id="rId38"/>
-    <p:sldId id="322" r:id="rId39"/>
-    <p:sldId id="313" r:id="rId40"/>
-    <p:sldId id="323" r:id="rId41"/>
-    <p:sldId id="305" r:id="rId42"/>
-    <p:sldId id="298" r:id="rId43"/>
-    <p:sldId id="302" r:id="rId44"/>
-    <p:sldId id="304" r:id="rId45"/>
-    <p:sldId id="306" r:id="rId46"/>
-    <p:sldId id="324" r:id="rId47"/>
-    <p:sldId id="307" r:id="rId48"/>
-    <p:sldId id="292" r:id="rId49"/>
-    <p:sldId id="276" r:id="rId50"/>
-    <p:sldId id="289" r:id="rId51"/>
-    <p:sldId id="277" r:id="rId52"/>
-    <p:sldId id="278" r:id="rId53"/>
+    <p:sldId id="325" r:id="rId24"/>
+    <p:sldId id="308" r:id="rId25"/>
+    <p:sldId id="309" r:id="rId26"/>
+    <p:sldId id="311" r:id="rId27"/>
+    <p:sldId id="299" r:id="rId28"/>
+    <p:sldId id="314" r:id="rId29"/>
+    <p:sldId id="310" r:id="rId30"/>
+    <p:sldId id="315" r:id="rId31"/>
+    <p:sldId id="316" r:id="rId32"/>
+    <p:sldId id="301" r:id="rId33"/>
+    <p:sldId id="319" r:id="rId34"/>
+    <p:sldId id="317" r:id="rId35"/>
+    <p:sldId id="318" r:id="rId36"/>
+    <p:sldId id="320" r:id="rId37"/>
+    <p:sldId id="312" r:id="rId38"/>
+    <p:sldId id="321" r:id="rId39"/>
+    <p:sldId id="322" r:id="rId40"/>
+    <p:sldId id="313" r:id="rId41"/>
+    <p:sldId id="323" r:id="rId42"/>
+    <p:sldId id="305" r:id="rId43"/>
+    <p:sldId id="298" r:id="rId44"/>
+    <p:sldId id="302" r:id="rId45"/>
+    <p:sldId id="326" r:id="rId46"/>
+    <p:sldId id="304" r:id="rId47"/>
+    <p:sldId id="306" r:id="rId48"/>
+    <p:sldId id="324" r:id="rId49"/>
+    <p:sldId id="307" r:id="rId50"/>
+    <p:sldId id="292" r:id="rId51"/>
+    <p:sldId id="276" r:id="rId52"/>
+    <p:sldId id="289" r:id="rId53"/>
+    <p:sldId id="277" r:id="rId54"/>
+    <p:sldId id="278" r:id="rId55"/>
   </p:sldIdLst>
   <p:sldSz cx="12192000" cy="6858000"/>
   <p:notesSz cx="6858000" cy="9144000"/>
@@ -9142,7 +9144,7 @@
           <a:p>
             <a:fld id="{A0428C8E-7BAD-4C37-9F0B-8CBDB03D4496}" type="datetimeFigureOut">
               <a:rPr lang="en-CA" smtClean="0"/>
-              <a:t>21-Nov-2025</a:t>
+              <a:t>24-Nov-2025</a:t>
             </a:fld>
             <a:endParaRPr lang="en-CA"/>
           </a:p>
@@ -10562,7 +10564,7 @@
           <a:p>
             <a:fld id="{50A02E5A-F865-48ED-9E9D-E266E7C2AE07}" type="slidenum">
               <a:rPr lang="en-CA" smtClean="0"/>
-              <a:t>25</a:t>
+              <a:t>26</a:t>
             </a:fld>
             <a:endParaRPr lang="en-CA"/>
           </a:p>
@@ -10653,7 +10655,7 @@
           <a:p>
             <a:fld id="{50A02E5A-F865-48ED-9E9D-E266E7C2AE07}" type="slidenum">
               <a:rPr lang="en-CA" smtClean="0"/>
-              <a:t>28</a:t>
+              <a:t>29</a:t>
             </a:fld>
             <a:endParaRPr lang="en-CA"/>
           </a:p>
@@ -10768,7 +10770,7 @@
           <a:p>
             <a:fld id="{50A02E5A-F865-48ED-9E9D-E266E7C2AE07}" type="slidenum">
               <a:rPr lang="en-CA" smtClean="0"/>
-              <a:t>29</a:t>
+              <a:t>30</a:t>
             </a:fld>
             <a:endParaRPr lang="en-CA"/>
           </a:p>
@@ -10967,7 +10969,7 @@
           <a:p>
             <a:fld id="{50A02E5A-F865-48ED-9E9D-E266E7C2AE07}" type="slidenum">
               <a:rPr lang="en-CA" smtClean="0"/>
-              <a:t>30</a:t>
+              <a:t>31</a:t>
             </a:fld>
             <a:endParaRPr lang="en-CA"/>
           </a:p>
@@ -11051,7 +11053,7 @@
           <a:p>
             <a:fld id="{5C2A1542-6F33-408E-AC39-5232C11A66FF}" type="slidenum">
               <a:rPr lang="en-CA" smtClean="0"/>
-              <a:t>49</a:t>
+              <a:t>51</a:t>
             </a:fld>
             <a:endParaRPr lang="en-CA"/>
           </a:p>
@@ -11171,7 +11173,7 @@
           <a:p>
             <a:fld id="{5C2A1542-6F33-408E-AC39-5232C11A66FF}" type="slidenum">
               <a:rPr lang="en-CA" smtClean="0"/>
-              <a:t>50</a:t>
+              <a:t>52</a:t>
             </a:fld>
             <a:endParaRPr lang="en-CA"/>
           </a:p>
@@ -11255,7 +11257,7 @@
           <a:p>
             <a:fld id="{A4F92E4B-81BE-4B7A-B36D-25EE9615AC65}" type="slidenum">
               <a:rPr lang="en-CA" smtClean="0"/>
-              <a:t>51</a:t>
+              <a:t>53</a:t>
             </a:fld>
             <a:endParaRPr lang="en-CA"/>
           </a:p>
@@ -12194,7 +12196,7 @@
           <a:p>
             <a:fld id="{4192F68B-5CDA-45F8-8FC6-8CC31496F2C0}" type="datetime1">
               <a:rPr lang="en-CA" smtClean="0"/>
-              <a:t>21-Nov-2025</a:t>
+              <a:t>24-Nov-2025</a:t>
             </a:fld>
             <a:endParaRPr lang="en-CA"/>
           </a:p>
@@ -12402,7 +12404,7 @@
           <a:p>
             <a:fld id="{723E7550-8411-4E2E-A2AF-8A063A660948}" type="datetime1">
               <a:rPr lang="en-CA" smtClean="0"/>
-              <a:t>21-Nov-2025</a:t>
+              <a:t>24-Nov-2025</a:t>
             </a:fld>
             <a:endParaRPr lang="en-CA"/>
           </a:p>
@@ -12660,7 +12662,7 @@
           <a:p>
             <a:fld id="{6161E27D-A925-4B3D-83F5-ECDB550EC939}" type="datetime1">
               <a:rPr lang="en-CA" smtClean="0"/>
-              <a:t>21-Nov-2025</a:t>
+              <a:t>24-Nov-2025</a:t>
             </a:fld>
             <a:endParaRPr lang="en-CA"/>
           </a:p>
@@ -12830,7 +12832,7 @@
           <a:p>
             <a:fld id="{BBE08C00-40B8-4EDA-BCF9-010BAB3E9B10}" type="datetime1">
               <a:rPr lang="en-CA" smtClean="0"/>
-              <a:t>21-Nov-2025</a:t>
+              <a:t>24-Nov-2025</a:t>
             </a:fld>
             <a:endParaRPr lang="en-CA"/>
           </a:p>
@@ -13167,7 +13169,7 @@
           <a:p>
             <a:fld id="{575BD93C-08CC-43D5-8845-C649925EFB70}" type="datetime1">
               <a:rPr lang="en-CA" smtClean="0"/>
-              <a:t>21-Nov-2025</a:t>
+              <a:t>24-Nov-2025</a:t>
             </a:fld>
             <a:endParaRPr lang="en-CA"/>
           </a:p>
@@ -13442,7 +13444,7 @@
           <a:p>
             <a:fld id="{C2DD09B4-FF6B-44BE-9FB1-59E724526725}" type="datetime1">
               <a:rPr lang="en-CA" smtClean="0"/>
-              <a:t>21-Nov-2025</a:t>
+              <a:t>24-Nov-2025</a:t>
             </a:fld>
             <a:endParaRPr lang="en-CA"/>
           </a:p>
@@ -13821,7 +13823,7 @@
           <a:p>
             <a:fld id="{1C8EDB9F-AB4A-4644-B1B1-ADD488636EFD}" type="datetime1">
               <a:rPr lang="en-CA" smtClean="0"/>
-              <a:t>21-Nov-2025</a:t>
+              <a:t>24-Nov-2025</a:t>
             </a:fld>
             <a:endParaRPr lang="en-CA"/>
           </a:p>
@@ -13939,7 +13941,7 @@
           <a:p>
             <a:fld id="{2C069573-12B9-4DA2-AE6A-3DF248409BF9}" type="datetime1">
               <a:rPr lang="en-CA" smtClean="0"/>
-              <a:t>21-Nov-2025</a:t>
+              <a:t>24-Nov-2025</a:t>
             </a:fld>
             <a:endParaRPr lang="en-CA"/>
           </a:p>
@@ -14112,7 +14114,7 @@
           <a:p>
             <a:fld id="{B010FC2F-8CC7-4537-A6D2-E86E24CBE470}" type="datetime1">
               <a:rPr lang="en-CA" smtClean="0"/>
-              <a:t>21-Nov-2025</a:t>
+              <a:t>24-Nov-2025</a:t>
             </a:fld>
             <a:endParaRPr lang="en-CA"/>
           </a:p>
@@ -14468,7 +14470,7 @@
           <a:p>
             <a:fld id="{A20AF02B-F510-4E59-9F48-4A2B2B1C7CCC}" type="datetime1">
               <a:rPr lang="en-CA" smtClean="0"/>
-              <a:t>21-Nov-2025</a:t>
+              <a:t>24-Nov-2025</a:t>
             </a:fld>
             <a:endParaRPr lang="en-CA"/>
           </a:p>
@@ -14847,7 +14849,7 @@
           <a:p>
             <a:fld id="{1A796962-FC1B-4478-9758-77DD5C261549}" type="datetime1">
               <a:rPr lang="en-CA" smtClean="0"/>
-              <a:t>21-Nov-2025</a:t>
+              <a:t>24-Nov-2025</a:t>
             </a:fld>
             <a:endParaRPr lang="en-CA"/>
           </a:p>
@@ -15136,7 +15138,7 @@
           <a:p>
             <a:fld id="{35F51464-522D-45AA-8684-534AFC039EDB}" type="datetime1">
               <a:rPr lang="en-CA" smtClean="0"/>
-              <a:t>21-Nov-2025</a:t>
+              <a:t>24-Nov-2025</a:t>
             </a:fld>
             <a:endParaRPr lang="en-CA"/>
           </a:p>
@@ -21114,7 +21116,7 @@
               <a:buChar char="•"/>
             </a:pPr>
             <a:r>
-              <a:rPr lang="en-CA" dirty="0"/>
+              <a:rPr lang="en-CA" sz="2400" dirty="0"/>
               <a:t> Review Thesis Question</a:t>
             </a:r>
           </a:p>
@@ -21124,7 +21126,7 @@
               <a:buChar char="•"/>
             </a:pPr>
             <a:r>
-              <a:rPr lang="en-CA" dirty="0"/>
+              <a:rPr lang="en-CA" sz="2400" dirty="0"/>
               <a:t>Present Project 1 – Total Body Blood Flow Model</a:t>
             </a:r>
           </a:p>
@@ -21134,7 +21136,7 @@
               <a:buChar char="•"/>
             </a:pPr>
             <a:r>
-              <a:rPr lang="en-CA" dirty="0"/>
+              <a:rPr lang="en-CA" sz="2400" dirty="0"/>
               <a:t>Present Preliminary Results of Project 2 – Heterogeneity of Dose: Sweeping Co-60 TBI</a:t>
             </a:r>
           </a:p>
@@ -21144,7 +21146,7 @@
               <a:buChar char="•"/>
             </a:pPr>
             <a:r>
-              <a:rPr lang="en-CA" dirty="0"/>
+              <a:rPr lang="en-CA" sz="2400" dirty="0"/>
               <a:t>Discuss remainder of Project 2 and Project 3</a:t>
             </a:r>
           </a:p>
@@ -21154,7 +21156,7 @@
               <a:buChar char="•"/>
             </a:pPr>
             <a:r>
-              <a:rPr lang="en-CA" dirty="0"/>
+              <a:rPr lang="en-CA" sz="2400" dirty="0"/>
               <a:t>Discuss publications and body of thesis</a:t>
             </a:r>
           </a:p>
@@ -21164,7 +21166,7 @@
               <a:buChar char="•"/>
             </a:pPr>
             <a:r>
-              <a:rPr lang="en-CA" dirty="0"/>
+              <a:rPr lang="en-CA" sz="2400" dirty="0"/>
               <a:t>Questions and Discussions</a:t>
             </a:r>
           </a:p>
@@ -22361,12 +22363,231 @@
           </a:p>
         </p:txBody>
       </p:sp>
+    </p:spTree>
+    <p:extLst>
+      <p:ext uri="{BB962C8B-B14F-4D97-AF65-F5344CB8AC3E}">
+        <p14:creationId xmlns:p14="http://schemas.microsoft.com/office/powerpoint/2010/main" val="486077276"/>
+      </p:ext>
+    </p:extLst>
+  </p:cSld>
+  <p:clrMapOvr>
+    <a:masterClrMapping/>
+  </p:clrMapOvr>
+</p:sld>
+</file>
+
+<file path=ppt/slides/slide23.xml><?xml version="1.0" encoding="utf-8"?>
+<p:sld xmlns:a="http://schemas.openxmlformats.org/drawingml/2006/main" xmlns:r="http://schemas.openxmlformats.org/officeDocument/2006/relationships" xmlns:p="http://schemas.openxmlformats.org/presentationml/2006/main">
+  <p:cSld>
+    <p:spTree>
+      <p:nvGrpSpPr>
+        <p:cNvPr id="1" name="">
+          <a:extLst>
+            <a:ext uri="{FF2B5EF4-FFF2-40B4-BE49-F238E27FC236}">
+              <a16:creationId xmlns:a16="http://schemas.microsoft.com/office/drawing/2014/main" id="{7CC7FE74-7E49-331A-9489-E354C59CC1CF}"/>
+            </a:ext>
+          </a:extLst>
+        </p:cNvPr>
+        <p:cNvGrpSpPr/>
+        <p:nvPr/>
+      </p:nvGrpSpPr>
+      <p:grpSpPr>
+        <a:xfrm>
+          <a:off x="0" y="0"/>
+          <a:ext cx="0" cy="0"/>
+          <a:chOff x="0" y="0"/>
+          <a:chExt cx="0" cy="0"/>
+        </a:xfrm>
+      </p:grpSpPr>
+      <p:sp>
+        <p:nvSpPr>
+          <p:cNvPr id="2" name="Title 1">
+            <a:extLst>
+              <a:ext uri="{FF2B5EF4-FFF2-40B4-BE49-F238E27FC236}">
+                <a16:creationId xmlns:a16="http://schemas.microsoft.com/office/drawing/2014/main" id="{76969549-C90F-5F7E-49DC-D4C6DE50D9F5}"/>
+              </a:ext>
+            </a:extLst>
+          </p:cNvPr>
+          <p:cNvSpPr>
+            <a:spLocks noGrp="1"/>
+          </p:cNvSpPr>
+          <p:nvPr>
+            <p:ph type="title"/>
+          </p:nvPr>
+        </p:nvSpPr>
+        <p:spPr/>
+        <p:txBody>
+          <a:bodyPr/>
+          <a:lstStyle/>
+          <a:p>
+            <a:r>
+              <a:rPr lang="en-CA" dirty="0"/>
+              <a:t>Determining Dose as Function of Time</a:t>
+            </a:r>
+          </a:p>
+        </p:txBody>
+      </p:sp>
+      <p:sp>
+        <p:nvSpPr>
+          <p:cNvPr id="3" name="Content Placeholder 2">
+            <a:extLst>
+              <a:ext uri="{FF2B5EF4-FFF2-40B4-BE49-F238E27FC236}">
+                <a16:creationId xmlns:a16="http://schemas.microsoft.com/office/drawing/2014/main" id="{831D6C18-AAF9-CC8A-BB8B-CD2B1B9AE64F}"/>
+              </a:ext>
+            </a:extLst>
+          </p:cNvPr>
+          <p:cNvSpPr>
+            <a:spLocks noGrp="1"/>
+          </p:cNvSpPr>
+          <p:nvPr>
+            <p:ph idx="1"/>
+          </p:nvPr>
+        </p:nvSpPr>
+        <p:spPr/>
+        <p:txBody>
+          <a:bodyPr/>
+          <a:lstStyle/>
+          <a:p>
+            <a:r>
+              <a:rPr lang="en-CA" dirty="0"/>
+              <a:t>Monte Carlo Simulations </a:t>
+            </a:r>
+          </a:p>
+          <a:p>
+            <a:pPr lvl="1"/>
+            <a:r>
+              <a:rPr lang="en-CA" dirty="0" err="1"/>
+              <a:t>egsNRC</a:t>
+            </a:r>
+            <a:r>
+              <a:rPr lang="en-CA" dirty="0"/>
+              <a:t>: In-house modified </a:t>
+            </a:r>
+            <a:r>
+              <a:rPr lang="en-CA" dirty="0" err="1"/>
+              <a:t>DOSXYZnrc</a:t>
+            </a:r>
+            <a:r>
+              <a:rPr lang="en-CA" dirty="0"/>
+              <a:t> enables spatial-temporal dose deposition calculations</a:t>
+            </a:r>
+          </a:p>
+          <a:p>
+            <a:endParaRPr lang="en-CA" dirty="0"/>
+          </a:p>
+        </p:txBody>
+      </p:sp>
+      <p:sp>
+        <p:nvSpPr>
+          <p:cNvPr id="4" name="Slide Number Placeholder 3">
+            <a:extLst>
+              <a:ext uri="{FF2B5EF4-FFF2-40B4-BE49-F238E27FC236}">
+                <a16:creationId xmlns:a16="http://schemas.microsoft.com/office/drawing/2014/main" id="{BD711E41-2C4C-9FB6-6470-738C52C2C784}"/>
+              </a:ext>
+            </a:extLst>
+          </p:cNvPr>
+          <p:cNvSpPr>
+            <a:spLocks noGrp="1"/>
+          </p:cNvSpPr>
+          <p:nvPr>
+            <p:ph type="sldNum" sz="quarter" idx="12"/>
+          </p:nvPr>
+        </p:nvSpPr>
+        <p:spPr/>
+        <p:txBody>
+          <a:bodyPr/>
+          <a:lstStyle/>
+          <a:p>
+            <a:fld id="{4BAA6517-F367-4EB3-AFA6-036DD26A3111}" type="slidenum">
+              <a:rPr lang="en-CA" smtClean="0"/>
+              <a:t>23</a:t>
+            </a:fld>
+            <a:endParaRPr lang="en-CA"/>
+          </a:p>
+        </p:txBody>
+      </p:sp>
+      <p:sp>
+        <p:nvSpPr>
+          <p:cNvPr id="5" name="TextBox 4">
+            <a:extLst>
+              <a:ext uri="{FF2B5EF4-FFF2-40B4-BE49-F238E27FC236}">
+                <a16:creationId xmlns:a16="http://schemas.microsoft.com/office/drawing/2014/main" id="{385F4362-148D-8A44-46BB-798EFF8E6BD9}"/>
+              </a:ext>
+            </a:extLst>
+          </p:cNvPr>
+          <p:cNvSpPr txBox="1"/>
+          <p:nvPr/>
+        </p:nvSpPr>
+        <p:spPr>
+          <a:xfrm>
+            <a:off x="-1" y="6353086"/>
+            <a:ext cx="11212483" cy="461665"/>
+          </a:xfrm>
+          <a:prstGeom prst="rect">
+            <a:avLst/>
+          </a:prstGeom>
+          <a:noFill/>
+        </p:spPr>
+        <p:txBody>
+          <a:bodyPr wrap="square">
+            <a:spAutoFit/>
+          </a:bodyPr>
+          <a:lstStyle/>
+          <a:p>
+            <a:r>
+              <a:rPr lang="en-CA" sz="1200" dirty="0">
+                <a:solidFill>
+                  <a:srgbClr val="212121"/>
+                </a:solidFill>
+                <a:latin typeface="BlinkMacSystemFont"/>
+              </a:rPr>
+              <a:t>Su, S., Atwal, P., Lobo, J., </a:t>
+            </a:r>
+            <a:r>
+              <a:rPr lang="en-CA" sz="1200" dirty="0" err="1">
+                <a:solidFill>
+                  <a:srgbClr val="212121"/>
+                </a:solidFill>
+                <a:latin typeface="BlinkMacSystemFont"/>
+              </a:rPr>
+              <a:t>Duzenli</a:t>
+            </a:r>
+            <a:r>
+              <a:rPr lang="en-CA" sz="1200" dirty="0">
+                <a:solidFill>
+                  <a:srgbClr val="212121"/>
+                </a:solidFill>
+                <a:latin typeface="BlinkMacSystemFont"/>
+              </a:rPr>
+              <a:t>, C., &amp; Popescu, I. A. (2021). A new </a:t>
+            </a:r>
+            <a:r>
+              <a:rPr lang="en-CA" sz="1200" dirty="0" err="1">
+                <a:solidFill>
+                  <a:srgbClr val="212121"/>
+                </a:solidFill>
+                <a:latin typeface="BlinkMacSystemFont"/>
+              </a:rPr>
+              <a:t>DOSXYZnrc</a:t>
+            </a:r>
+            <a:r>
+              <a:rPr lang="en-CA" sz="1200" dirty="0">
+                <a:solidFill>
+                  <a:srgbClr val="212121"/>
+                </a:solidFill>
+                <a:latin typeface="BlinkMacSystemFont"/>
+              </a:rPr>
+              <a:t> method for Monte Carlo simulations of 4D dose distributions. Physics in Medicine &amp; Biology, 66(24), 245014. </a:t>
+            </a:r>
+          </a:p>
+        </p:txBody>
+      </p:sp>
       <p:pic>
         <p:nvPicPr>
           <p:cNvPr id="7" name="Picture 6">
             <a:extLst>
               <a:ext uri="{FF2B5EF4-FFF2-40B4-BE49-F238E27FC236}">
-                <a16:creationId xmlns:a16="http://schemas.microsoft.com/office/drawing/2014/main" id="{56A097F2-019B-9375-F85B-D1D043F9CBD9}"/>
+                <a16:creationId xmlns:a16="http://schemas.microsoft.com/office/drawing/2014/main" id="{521BC0AD-708D-9F02-37B3-1290E629AC5B}"/>
               </a:ext>
             </a:extLst>
           </p:cNvPr>
@@ -22394,7 +22615,7 @@
     </p:spTree>
     <p:extLst>
       <p:ext uri="{BB962C8B-B14F-4D97-AF65-F5344CB8AC3E}">
-        <p14:creationId xmlns:p14="http://schemas.microsoft.com/office/powerpoint/2010/main" val="486077276"/>
+        <p14:creationId xmlns:p14="http://schemas.microsoft.com/office/powerpoint/2010/main" val="861283148"/>
       </p:ext>
     </p:extLst>
   </p:cSld>
@@ -22404,7 +22625,7 @@
 </p:sld>
 </file>
 
-<file path=ppt/slides/slide23.xml><?xml version="1.0" encoding="utf-8"?>
+<file path=ppt/slides/slide24.xml><?xml version="1.0" encoding="utf-8"?>
 <p:sld xmlns:a="http://schemas.openxmlformats.org/drawingml/2006/main" xmlns:r="http://schemas.openxmlformats.org/officeDocument/2006/relationships" xmlns:p="http://schemas.openxmlformats.org/presentationml/2006/main">
   <p:cSld>
     <p:spTree>
@@ -22528,7 +22749,7 @@
           <a:p>
             <a:fld id="{4BAA6517-F367-4EB3-AFA6-036DD26A3111}" type="slidenum">
               <a:rPr lang="en-CA" smtClean="0"/>
-              <a:t>23</a:t>
+              <a:t>24</a:t>
             </a:fld>
             <a:endParaRPr lang="en-CA"/>
           </a:p>
@@ -22709,7 +22930,7 @@
 </p:sld>
 </file>
 
-<file path=ppt/slides/slide24.xml><?xml version="1.0" encoding="utf-8"?>
+<file path=ppt/slides/slide25.xml><?xml version="1.0" encoding="utf-8"?>
 <p:sld xmlns:a="http://schemas.openxmlformats.org/drawingml/2006/main" xmlns:r="http://schemas.openxmlformats.org/officeDocument/2006/relationships" xmlns:p="http://schemas.openxmlformats.org/presentationml/2006/main">
   <p:cSld>
     <p:spTree>
@@ -22833,7 +23054,7 @@
           <a:p>
             <a:fld id="{4BAA6517-F367-4EB3-AFA6-036DD26A3111}" type="slidenum">
               <a:rPr lang="en-CA" smtClean="0"/>
-              <a:t>24</a:t>
+              <a:t>25</a:t>
             </a:fld>
             <a:endParaRPr lang="en-CA"/>
           </a:p>
@@ -23044,7 +23265,7 @@
 </p:sld>
 </file>
 
-<file path=ppt/slides/slide25.xml><?xml version="1.0" encoding="utf-8"?>
+<file path=ppt/slides/slide26.xml><?xml version="1.0" encoding="utf-8"?>
 <p:sld xmlns:a="http://schemas.openxmlformats.org/drawingml/2006/main" xmlns:r="http://schemas.openxmlformats.org/officeDocument/2006/relationships" xmlns:p="http://schemas.openxmlformats.org/presentationml/2006/main">
   <p:cSld>
     <p:spTree>
@@ -23250,7 +23471,7 @@
           <a:p>
             <a:fld id="{4BAA6517-F367-4EB3-AFA6-036DD26A3111}" type="slidenum">
               <a:rPr lang="en-CA" smtClean="0"/>
-              <a:t>25</a:t>
+              <a:t>26</a:t>
             </a:fld>
             <a:endParaRPr lang="en-CA"/>
           </a:p>
@@ -23369,7 +23590,7 @@
 </p:sld>
 </file>
 
-<file path=ppt/slides/slide26.xml><?xml version="1.0" encoding="utf-8"?>
+<file path=ppt/slides/slide27.xml><?xml version="1.0" encoding="utf-8"?>
 <p:sld xmlns:a="http://schemas.openxmlformats.org/drawingml/2006/main" xmlns:r="http://schemas.openxmlformats.org/officeDocument/2006/relationships" xmlns:p="http://schemas.openxmlformats.org/presentationml/2006/main">
   <p:cSld>
     <p:spTree>
@@ -23437,7 +23658,7 @@
           <a:p>
             <a:fld id="{4BAA6517-F367-4EB3-AFA6-036DD26A3111}" type="slidenum">
               <a:rPr lang="en-CA" smtClean="0"/>
-              <a:t>26</a:t>
+              <a:t>27</a:t>
             </a:fld>
             <a:endParaRPr lang="en-CA"/>
           </a:p>
@@ -23554,8 +23775,8 @@
           </a:ln>
         </p:spPr>
       </p:pic>
-      <mc:AlternateContent xmlns:mc="http://schemas.openxmlformats.org/markup-compatibility/2006">
-        <mc:Choice xmlns:a14="http://schemas.microsoft.com/office/drawing/2010/main" Requires="a14">
+      <mc:AlternateContent xmlns:mc="http://schemas.openxmlformats.org/markup-compatibility/2006" xmlns:a14="http://schemas.microsoft.com/office/drawing/2010/main">
+        <mc:Choice Requires="a14">
           <p:sp>
             <p:nvSpPr>
               <p:cNvPr id="7" name="TextBox 6">
@@ -23619,7 +23840,6 @@
                 </a:r>
               </a:p>
               <a:p>
-                <a:pPr/>
                 <a14:m>
                   <m:oMath xmlns:m="http://schemas.openxmlformats.org/officeDocument/2006/math">
                     <m:sSub>
@@ -23655,7 +23875,6 @@
                 </a:r>
               </a:p>
               <a:p>
-                <a:pPr/>
                 <a14:m>
                   <m:oMath xmlns:m="http://schemas.openxmlformats.org/officeDocument/2006/math">
                     <m:sSub>
@@ -23691,7 +23910,6 @@
                 </a:r>
               </a:p>
               <a:p>
-                <a:pPr/>
                 <a14:m>
                   <m:oMath xmlns:m="http://schemas.openxmlformats.org/officeDocument/2006/math">
                     <m:sSub>
@@ -23744,7 +23962,7 @@
             </p:txBody>
           </p:sp>
         </mc:Choice>
-        <mc:Fallback>
+        <mc:Fallback xmlns="">
           <p:sp>
             <p:nvSpPr>
               <p:cNvPr id="7" name="TextBox 6">
@@ -23802,7 +24020,7 @@
 </p:sld>
 </file>
 
-<file path=ppt/slides/slide27.xml><?xml version="1.0" encoding="utf-8"?>
+<file path=ppt/slides/slide28.xml><?xml version="1.0" encoding="utf-8"?>
 <p:sld xmlns:a="http://schemas.openxmlformats.org/drawingml/2006/main" xmlns:r="http://schemas.openxmlformats.org/officeDocument/2006/relationships" xmlns:p="http://schemas.openxmlformats.org/presentationml/2006/main">
   <p:cSld>
     <p:spTree>
@@ -23876,7 +24094,7 @@
           <a:p>
             <a:fld id="{4BAA6517-F367-4EB3-AFA6-036DD26A3111}" type="slidenum">
               <a:rPr lang="en-CA" smtClean="0"/>
-              <a:t>27</a:t>
+              <a:t>28</a:t>
             </a:fld>
             <a:endParaRPr lang="en-CA"/>
           </a:p>
@@ -23993,8 +24211,8 @@
           </a:ln>
         </p:spPr>
       </p:pic>
-      <mc:AlternateContent xmlns:mc="http://schemas.openxmlformats.org/markup-compatibility/2006">
-        <mc:Choice xmlns:a14="http://schemas.microsoft.com/office/drawing/2010/main" Requires="a14">
+      <mc:AlternateContent xmlns:mc="http://schemas.openxmlformats.org/markup-compatibility/2006" xmlns:a14="http://schemas.microsoft.com/office/drawing/2010/main">
+        <mc:Choice Requires="a14">
           <p:sp>
             <p:nvSpPr>
               <p:cNvPr id="7" name="TextBox 6">
@@ -24180,7 +24398,7 @@
             </p:txBody>
           </p:sp>
         </mc:Choice>
-        <mc:Fallback>
+        <mc:Fallback xmlns="">
           <p:sp>
             <p:nvSpPr>
               <p:cNvPr id="7" name="TextBox 6">
@@ -24290,7 +24508,7 @@
 </p:sld>
 </file>
 
-<file path=ppt/slides/slide28.xml><?xml version="1.0" encoding="utf-8"?>
+<file path=ppt/slides/slide29.xml><?xml version="1.0" encoding="utf-8"?>
 <p:sld xmlns:a="http://schemas.openxmlformats.org/drawingml/2006/main" xmlns:r="http://schemas.openxmlformats.org/officeDocument/2006/relationships" xmlns:p="http://schemas.openxmlformats.org/presentationml/2006/main">
   <p:cSld>
     <p:spTree>
@@ -24493,7 +24711,7 @@
           <a:p>
             <a:fld id="{4BAA6517-F367-4EB3-AFA6-036DD26A3111}" type="slidenum">
               <a:rPr lang="en-CA" smtClean="0"/>
-              <a:t>28</a:t>
+              <a:t>29</a:t>
             </a:fld>
             <a:endParaRPr lang="en-CA"/>
           </a:p>
@@ -24573,403 +24791,6 @@
     <p:extLst>
       <p:ext uri="{BB962C8B-B14F-4D97-AF65-F5344CB8AC3E}">
         <p14:creationId xmlns:p14="http://schemas.microsoft.com/office/powerpoint/2010/main" val="4044717415"/>
-      </p:ext>
-    </p:extLst>
-  </p:cSld>
-  <p:clrMapOvr>
-    <a:masterClrMapping/>
-  </p:clrMapOvr>
-</p:sld>
-</file>
-
-<file path=ppt/slides/slide29.xml><?xml version="1.0" encoding="utf-8"?>
-<p:sld xmlns:a="http://schemas.openxmlformats.org/drawingml/2006/main" xmlns:r="http://schemas.openxmlformats.org/officeDocument/2006/relationships" xmlns:p="http://schemas.openxmlformats.org/presentationml/2006/main">
-  <p:cSld>
-    <p:spTree>
-      <p:nvGrpSpPr>
-        <p:cNvPr id="1" name="">
-          <a:extLst>
-            <a:ext uri="{FF2B5EF4-FFF2-40B4-BE49-F238E27FC236}">
-              <a16:creationId xmlns:a16="http://schemas.microsoft.com/office/drawing/2014/main" id="{F21E0142-28F7-284B-04F3-2755C354A32C}"/>
-            </a:ext>
-          </a:extLst>
-        </p:cNvPr>
-        <p:cNvGrpSpPr/>
-        <p:nvPr/>
-      </p:nvGrpSpPr>
-      <p:grpSpPr>
-        <a:xfrm>
-          <a:off x="0" y="0"/>
-          <a:ext cx="0" cy="0"/>
-          <a:chOff x="0" y="0"/>
-          <a:chExt cx="0" cy="0"/>
-        </a:xfrm>
-      </p:grpSpPr>
-      <p:sp>
-        <p:nvSpPr>
-          <p:cNvPr id="2" name="Title 1">
-            <a:extLst>
-              <a:ext uri="{FF2B5EF4-FFF2-40B4-BE49-F238E27FC236}">
-                <a16:creationId xmlns:a16="http://schemas.microsoft.com/office/drawing/2014/main" id="{6FBCAFBC-D212-0BE0-2E59-6EB35EAA9DD2}"/>
-              </a:ext>
-            </a:extLst>
-          </p:cNvPr>
-          <p:cNvSpPr>
-            <a:spLocks noGrp="1"/>
-          </p:cNvSpPr>
-          <p:nvPr>
-            <p:ph type="title"/>
-          </p:nvPr>
-        </p:nvSpPr>
-        <p:spPr/>
-        <p:txBody>
-          <a:bodyPr/>
-          <a:lstStyle/>
-          <a:p>
-            <a:r>
-              <a:rPr lang="en-CA" dirty="0"/>
-              <a:t>Converting Data: Gy/Particle to Gy </a:t>
-            </a:r>
-          </a:p>
-        </p:txBody>
-      </p:sp>
-      <p:sp>
-        <p:nvSpPr>
-          <p:cNvPr id="3" name="Content Placeholder 2">
-            <a:extLst>
-              <a:ext uri="{FF2B5EF4-FFF2-40B4-BE49-F238E27FC236}">
-                <a16:creationId xmlns:a16="http://schemas.microsoft.com/office/drawing/2014/main" id="{1DF2471F-39C1-862A-3A6E-8933F0BC12DA}"/>
-              </a:ext>
-            </a:extLst>
-          </p:cNvPr>
-          <p:cNvSpPr>
-            <a:spLocks noGrp="1"/>
-          </p:cNvSpPr>
-          <p:nvPr>
-            <p:ph idx="1"/>
-          </p:nvPr>
-        </p:nvSpPr>
-        <p:spPr/>
-        <p:txBody>
-          <a:bodyPr/>
-          <a:lstStyle/>
-          <a:p>
-            <a:pPr>
-              <a:buClr>
-                <a:schemeClr val="accent1">
-                  <a:lumMod val="50000"/>
-                </a:schemeClr>
-              </a:buClr>
-              <a:buFont typeface="Arial" panose="020B0604020202020204" pitchFamily="34" charset="0"/>
-              <a:buChar char="•"/>
-            </a:pPr>
-            <a:r>
-              <a:rPr lang="en-CA" dirty="0"/>
-              <a:t> For Co-60: number of particles is a function of activity</a:t>
-            </a:r>
-          </a:p>
-          <a:p>
-            <a:pPr>
-              <a:buClr>
-                <a:schemeClr val="accent1">
-                  <a:lumMod val="50000"/>
-                </a:schemeClr>
-              </a:buClr>
-              <a:buFont typeface="Arial" panose="020B0604020202020204" pitchFamily="34" charset="0"/>
-              <a:buChar char="•"/>
-            </a:pPr>
-            <a:r>
-              <a:rPr lang="en-CA" dirty="0"/>
-              <a:t> At the time of commissioning a Co-60 source the activity is measured (</a:t>
-            </a:r>
-            <a:r>
-              <a:rPr lang="en-CA" dirty="0" err="1"/>
-              <a:t>cGy</a:t>
-            </a:r>
-            <a:r>
-              <a:rPr lang="en-CA" dirty="0"/>
-              <a:t>/min)</a:t>
-            </a:r>
-          </a:p>
-          <a:p>
-            <a:pPr>
-              <a:buClr>
-                <a:schemeClr val="accent1">
-                  <a:lumMod val="50000"/>
-                </a:schemeClr>
-              </a:buClr>
-              <a:buFont typeface="Arial" panose="020B0604020202020204" pitchFamily="34" charset="0"/>
-              <a:buChar char="•"/>
-            </a:pPr>
-            <a:r>
-              <a:rPr lang="en-CA" dirty="0"/>
-              <a:t>We wanted to know the </a:t>
-            </a:r>
-            <a:r>
-              <a:rPr lang="en-CA" u="sng" dirty="0"/>
-              <a:t>particles/min </a:t>
-            </a:r>
-            <a:r>
-              <a:rPr lang="en-CA" dirty="0"/>
-              <a:t>of the source </a:t>
-            </a:r>
-          </a:p>
-          <a:p>
-            <a:pPr lvl="1">
-              <a:buClr>
-                <a:schemeClr val="accent1">
-                  <a:lumMod val="50000"/>
-                </a:schemeClr>
-              </a:buClr>
-              <a:buFont typeface="Arial" panose="020B0604020202020204" pitchFamily="34" charset="0"/>
-              <a:buChar char="•"/>
-            </a:pPr>
-            <a:r>
-              <a:rPr lang="en-CA" dirty="0"/>
-              <a:t>TG-51 performed during commissioning of the source</a:t>
-            </a:r>
-          </a:p>
-          <a:p>
-            <a:pPr lvl="1">
-              <a:buClr>
-                <a:schemeClr val="accent1">
-                  <a:lumMod val="50000"/>
-                </a:schemeClr>
-              </a:buClr>
-              <a:buFont typeface="Arial" panose="020B0604020202020204" pitchFamily="34" charset="0"/>
-              <a:buChar char="•"/>
-            </a:pPr>
-            <a:r>
-              <a:rPr lang="en-CA" dirty="0"/>
-              <a:t>Mimic TG-51 geometry in MC and calculate the Gy/particle at the location of the dosimeter</a:t>
-            </a:r>
-          </a:p>
-          <a:p>
-            <a:pPr lvl="1">
-              <a:buClr>
-                <a:schemeClr val="accent1">
-                  <a:lumMod val="50000"/>
-                </a:schemeClr>
-              </a:buClr>
-              <a:buFont typeface="Arial" panose="020B0604020202020204" pitchFamily="34" charset="0"/>
-              <a:buChar char="•"/>
-            </a:pPr>
-            <a:r>
-              <a:rPr lang="en-CA" dirty="0"/>
-              <a:t>Ran 10 simulations, with 8 billion particles each</a:t>
-            </a:r>
-          </a:p>
-          <a:p>
-            <a:pPr>
-              <a:buClr>
-                <a:schemeClr val="accent1">
-                  <a:lumMod val="50000"/>
-                </a:schemeClr>
-              </a:buClr>
-              <a:buFont typeface="Arial" panose="020B0604020202020204" pitchFamily="34" charset="0"/>
-              <a:buChar char="•"/>
-            </a:pPr>
-            <a:endParaRPr lang="en-CA" dirty="0"/>
-          </a:p>
-          <a:p>
-            <a:pPr marL="201168" lvl="1" indent="0">
-              <a:buClr>
-                <a:schemeClr val="accent1">
-                  <a:lumMod val="50000"/>
-                </a:schemeClr>
-              </a:buClr>
-              <a:buNone/>
-            </a:pPr>
-            <a:endParaRPr lang="en-CA" dirty="0"/>
-          </a:p>
-          <a:p>
-            <a:pPr marL="0" indent="0">
-              <a:buClr>
-                <a:schemeClr val="accent1">
-                  <a:lumMod val="50000"/>
-                </a:schemeClr>
-              </a:buClr>
-              <a:buNone/>
-            </a:pPr>
-            <a:endParaRPr lang="en-CA" dirty="0"/>
-          </a:p>
-          <a:p>
-            <a:pPr marL="0" indent="0">
-              <a:buClr>
-                <a:schemeClr val="accent1">
-                  <a:lumMod val="50000"/>
-                </a:schemeClr>
-              </a:buClr>
-              <a:buNone/>
-            </a:pPr>
-            <a:endParaRPr lang="en-CA" dirty="0"/>
-          </a:p>
-          <a:p>
-            <a:pPr lvl="1">
-              <a:buClr>
-                <a:schemeClr val="accent1">
-                  <a:lumMod val="50000"/>
-                </a:schemeClr>
-              </a:buClr>
-              <a:buFont typeface="Arial" panose="020B0604020202020204" pitchFamily="34" charset="0"/>
-              <a:buChar char="•"/>
-            </a:pPr>
-            <a:endParaRPr lang="en-CA" dirty="0"/>
-          </a:p>
-        </p:txBody>
-      </p:sp>
-      <p:sp>
-        <p:nvSpPr>
-          <p:cNvPr id="4" name="Slide Number Placeholder 3">
-            <a:extLst>
-              <a:ext uri="{FF2B5EF4-FFF2-40B4-BE49-F238E27FC236}">
-                <a16:creationId xmlns:a16="http://schemas.microsoft.com/office/drawing/2014/main" id="{CAC7CFB2-1D12-C0EA-5EEC-1D9DFF5934A1}"/>
-              </a:ext>
-            </a:extLst>
-          </p:cNvPr>
-          <p:cNvSpPr>
-            <a:spLocks noGrp="1"/>
-          </p:cNvSpPr>
-          <p:nvPr>
-            <p:ph type="sldNum" sz="quarter" idx="12"/>
-          </p:nvPr>
-        </p:nvSpPr>
-        <p:spPr/>
-        <p:txBody>
-          <a:bodyPr/>
-          <a:lstStyle/>
-          <a:p>
-            <a:fld id="{4BAA6517-F367-4EB3-AFA6-036DD26A3111}" type="slidenum">
-              <a:rPr lang="en-CA" smtClean="0"/>
-              <a:t>29</a:t>
-            </a:fld>
-            <a:endParaRPr lang="en-CA"/>
-          </a:p>
-        </p:txBody>
-      </p:sp>
-      <p:sp>
-        <p:nvSpPr>
-          <p:cNvPr id="6" name="TextBox 5">
-            <a:extLst>
-              <a:ext uri="{FF2B5EF4-FFF2-40B4-BE49-F238E27FC236}">
-                <a16:creationId xmlns:a16="http://schemas.microsoft.com/office/drawing/2014/main" id="{AB8EE22B-D614-85CD-9CC5-CB7FAD0BB97D}"/>
-              </a:ext>
-            </a:extLst>
-          </p:cNvPr>
-          <p:cNvSpPr txBox="1"/>
-          <p:nvPr/>
-        </p:nvSpPr>
-        <p:spPr>
-          <a:xfrm>
-            <a:off x="-1" y="6353086"/>
-            <a:ext cx="11212483" cy="461665"/>
-          </a:xfrm>
-          <a:prstGeom prst="rect">
-            <a:avLst/>
-          </a:prstGeom>
-          <a:noFill/>
-        </p:spPr>
-        <p:txBody>
-          <a:bodyPr wrap="square">
-            <a:spAutoFit/>
-          </a:bodyPr>
-          <a:lstStyle/>
-          <a:p>
-            <a:r>
-              <a:rPr lang="en-CA" sz="1200" dirty="0"/>
-              <a:t>Burns, L., Teke, T., Popescu, I. A., &amp; </a:t>
-            </a:r>
-            <a:r>
-              <a:rPr lang="en-CA" sz="1200" dirty="0" err="1"/>
-              <a:t>Duzenli</a:t>
-            </a:r>
-            <a:r>
-              <a:rPr lang="en-CA" sz="1200" dirty="0"/>
-              <a:t>, C. (2019). Monte Carlo Dosimetry of Organ Doses from a Sweeping-Beam Total Body Irradiation Technique: Feasibility and First Results. In L. </a:t>
-            </a:r>
-            <a:r>
-              <a:rPr lang="en-CA" sz="1200" dirty="0" err="1"/>
-              <a:t>Lhotska</a:t>
-            </a:r>
-            <a:r>
-              <a:rPr lang="en-CA" sz="1200" dirty="0"/>
-              <a:t>, L. </a:t>
-            </a:r>
-            <a:r>
-              <a:rPr lang="en-CA" sz="1200" dirty="0" err="1"/>
-              <a:t>Sukupova</a:t>
-            </a:r>
-            <a:r>
-              <a:rPr lang="en-CA" sz="1200" dirty="0"/>
-              <a:t>, I. Lacković, &amp; G. S. Ibbott (Eds.), </a:t>
-            </a:r>
-            <a:r>
-              <a:rPr lang="en-CA" sz="1200" i="1" dirty="0"/>
-              <a:t>World Congress on Medical Physics and Biomedical Engineering 2018</a:t>
-            </a:r>
-            <a:r>
-              <a:rPr lang="en-CA" sz="1200" dirty="0"/>
-              <a:t> (pp. 421–427). Springer. </a:t>
-            </a:r>
-            <a:endParaRPr lang="en-CA" sz="1200" dirty="0">
-              <a:effectLst/>
-            </a:endParaRPr>
-          </a:p>
-        </p:txBody>
-      </p:sp>
-      <p:sp>
-        <p:nvSpPr>
-          <p:cNvPr id="5" name="Rectangle 4">
-            <a:extLst>
-              <a:ext uri="{FF2B5EF4-FFF2-40B4-BE49-F238E27FC236}">
-                <a16:creationId xmlns:a16="http://schemas.microsoft.com/office/drawing/2014/main" id="{1C42BFEE-AA92-9DAB-8EEB-AD7B3111B76D}"/>
-              </a:ext>
-            </a:extLst>
-          </p:cNvPr>
-          <p:cNvSpPr/>
-          <p:nvPr/>
-        </p:nvSpPr>
-        <p:spPr>
-          <a:xfrm>
-            <a:off x="1097280" y="4127156"/>
-            <a:ext cx="3558746" cy="370703"/>
-          </a:xfrm>
-          <a:prstGeom prst="rect">
-            <a:avLst/>
-          </a:prstGeom>
-        </p:spPr>
-        <p:style>
-          <a:lnRef idx="2">
-            <a:schemeClr val="accent1">
-              <a:shade val="15000"/>
-            </a:schemeClr>
-          </a:lnRef>
-          <a:fillRef idx="1">
-            <a:schemeClr val="accent1"/>
-          </a:fillRef>
-          <a:effectRef idx="0">
-            <a:schemeClr val="accent1"/>
-          </a:effectRef>
-          <a:fontRef idx="minor">
-            <a:schemeClr val="lt1"/>
-          </a:fontRef>
-        </p:style>
-        <p:txBody>
-          <a:bodyPr rtlCol="0" anchor="ctr"/>
-          <a:lstStyle/>
-          <a:p>
-            <a:pPr algn="ctr"/>
-            <a:r>
-              <a:rPr lang="en-CA" dirty="0"/>
-              <a:t>9.76 E 14 particles per minute</a:t>
-            </a:r>
-          </a:p>
-        </p:txBody>
-      </p:sp>
-    </p:spTree>
-    <p:extLst>
-      <p:ext uri="{BB962C8B-B14F-4D97-AF65-F5344CB8AC3E}">
-        <p14:creationId xmlns:p14="http://schemas.microsoft.com/office/powerpoint/2010/main" val="3377416237"/>
       </p:ext>
     </p:extLst>
   </p:cSld>
@@ -25129,6 +24950,403 @@
         <p:cNvPr id="1" name="">
           <a:extLst>
             <a:ext uri="{FF2B5EF4-FFF2-40B4-BE49-F238E27FC236}">
+              <a16:creationId xmlns:a16="http://schemas.microsoft.com/office/drawing/2014/main" id="{F21E0142-28F7-284B-04F3-2755C354A32C}"/>
+            </a:ext>
+          </a:extLst>
+        </p:cNvPr>
+        <p:cNvGrpSpPr/>
+        <p:nvPr/>
+      </p:nvGrpSpPr>
+      <p:grpSpPr>
+        <a:xfrm>
+          <a:off x="0" y="0"/>
+          <a:ext cx="0" cy="0"/>
+          <a:chOff x="0" y="0"/>
+          <a:chExt cx="0" cy="0"/>
+        </a:xfrm>
+      </p:grpSpPr>
+      <p:sp>
+        <p:nvSpPr>
+          <p:cNvPr id="2" name="Title 1">
+            <a:extLst>
+              <a:ext uri="{FF2B5EF4-FFF2-40B4-BE49-F238E27FC236}">
+                <a16:creationId xmlns:a16="http://schemas.microsoft.com/office/drawing/2014/main" id="{6FBCAFBC-D212-0BE0-2E59-6EB35EAA9DD2}"/>
+              </a:ext>
+            </a:extLst>
+          </p:cNvPr>
+          <p:cNvSpPr>
+            <a:spLocks noGrp="1"/>
+          </p:cNvSpPr>
+          <p:nvPr>
+            <p:ph type="title"/>
+          </p:nvPr>
+        </p:nvSpPr>
+        <p:spPr/>
+        <p:txBody>
+          <a:bodyPr/>
+          <a:lstStyle/>
+          <a:p>
+            <a:r>
+              <a:rPr lang="en-CA" dirty="0"/>
+              <a:t>Converting Data: Gy/Particle to Gy </a:t>
+            </a:r>
+          </a:p>
+        </p:txBody>
+      </p:sp>
+      <p:sp>
+        <p:nvSpPr>
+          <p:cNvPr id="3" name="Content Placeholder 2">
+            <a:extLst>
+              <a:ext uri="{FF2B5EF4-FFF2-40B4-BE49-F238E27FC236}">
+                <a16:creationId xmlns:a16="http://schemas.microsoft.com/office/drawing/2014/main" id="{1DF2471F-39C1-862A-3A6E-8933F0BC12DA}"/>
+              </a:ext>
+            </a:extLst>
+          </p:cNvPr>
+          <p:cNvSpPr>
+            <a:spLocks noGrp="1"/>
+          </p:cNvSpPr>
+          <p:nvPr>
+            <p:ph idx="1"/>
+          </p:nvPr>
+        </p:nvSpPr>
+        <p:spPr/>
+        <p:txBody>
+          <a:bodyPr/>
+          <a:lstStyle/>
+          <a:p>
+            <a:pPr>
+              <a:buClr>
+                <a:schemeClr val="accent1">
+                  <a:lumMod val="50000"/>
+                </a:schemeClr>
+              </a:buClr>
+              <a:buFont typeface="Arial" panose="020B0604020202020204" pitchFamily="34" charset="0"/>
+              <a:buChar char="•"/>
+            </a:pPr>
+            <a:r>
+              <a:rPr lang="en-CA" dirty="0"/>
+              <a:t> For Co-60: number of particles is a function of activity</a:t>
+            </a:r>
+          </a:p>
+          <a:p>
+            <a:pPr>
+              <a:buClr>
+                <a:schemeClr val="accent1">
+                  <a:lumMod val="50000"/>
+                </a:schemeClr>
+              </a:buClr>
+              <a:buFont typeface="Arial" panose="020B0604020202020204" pitchFamily="34" charset="0"/>
+              <a:buChar char="•"/>
+            </a:pPr>
+            <a:r>
+              <a:rPr lang="en-CA" dirty="0"/>
+              <a:t> At the time of commissioning a Co-60 source the activity is measured (</a:t>
+            </a:r>
+            <a:r>
+              <a:rPr lang="en-CA" dirty="0" err="1"/>
+              <a:t>cGy</a:t>
+            </a:r>
+            <a:r>
+              <a:rPr lang="en-CA" dirty="0"/>
+              <a:t>/min)</a:t>
+            </a:r>
+          </a:p>
+          <a:p>
+            <a:pPr>
+              <a:buClr>
+                <a:schemeClr val="accent1">
+                  <a:lumMod val="50000"/>
+                </a:schemeClr>
+              </a:buClr>
+              <a:buFont typeface="Arial" panose="020B0604020202020204" pitchFamily="34" charset="0"/>
+              <a:buChar char="•"/>
+            </a:pPr>
+            <a:r>
+              <a:rPr lang="en-CA" dirty="0"/>
+              <a:t>We wanted to know the </a:t>
+            </a:r>
+            <a:r>
+              <a:rPr lang="en-CA" u="sng" dirty="0"/>
+              <a:t>particles/min </a:t>
+            </a:r>
+            <a:r>
+              <a:rPr lang="en-CA" dirty="0"/>
+              <a:t>of the source </a:t>
+            </a:r>
+          </a:p>
+          <a:p>
+            <a:pPr lvl="1">
+              <a:buClr>
+                <a:schemeClr val="accent1">
+                  <a:lumMod val="50000"/>
+                </a:schemeClr>
+              </a:buClr>
+              <a:buFont typeface="Arial" panose="020B0604020202020204" pitchFamily="34" charset="0"/>
+              <a:buChar char="•"/>
+            </a:pPr>
+            <a:r>
+              <a:rPr lang="en-CA" dirty="0"/>
+              <a:t>TG-51 performed during commissioning of the source</a:t>
+            </a:r>
+          </a:p>
+          <a:p>
+            <a:pPr lvl="1">
+              <a:buClr>
+                <a:schemeClr val="accent1">
+                  <a:lumMod val="50000"/>
+                </a:schemeClr>
+              </a:buClr>
+              <a:buFont typeface="Arial" panose="020B0604020202020204" pitchFamily="34" charset="0"/>
+              <a:buChar char="•"/>
+            </a:pPr>
+            <a:r>
+              <a:rPr lang="en-CA" dirty="0"/>
+              <a:t>Mimic TG-51 geometry in MC and calculate the Gy/particle at the location of the dosimeter</a:t>
+            </a:r>
+          </a:p>
+          <a:p>
+            <a:pPr lvl="1">
+              <a:buClr>
+                <a:schemeClr val="accent1">
+                  <a:lumMod val="50000"/>
+                </a:schemeClr>
+              </a:buClr>
+              <a:buFont typeface="Arial" panose="020B0604020202020204" pitchFamily="34" charset="0"/>
+              <a:buChar char="•"/>
+            </a:pPr>
+            <a:r>
+              <a:rPr lang="en-CA" dirty="0"/>
+              <a:t>Ran 10 simulations, with 8 billion particles each</a:t>
+            </a:r>
+          </a:p>
+          <a:p>
+            <a:pPr>
+              <a:buClr>
+                <a:schemeClr val="accent1">
+                  <a:lumMod val="50000"/>
+                </a:schemeClr>
+              </a:buClr>
+              <a:buFont typeface="Arial" panose="020B0604020202020204" pitchFamily="34" charset="0"/>
+              <a:buChar char="•"/>
+            </a:pPr>
+            <a:endParaRPr lang="en-CA" dirty="0"/>
+          </a:p>
+          <a:p>
+            <a:pPr marL="201168" lvl="1" indent="0">
+              <a:buClr>
+                <a:schemeClr val="accent1">
+                  <a:lumMod val="50000"/>
+                </a:schemeClr>
+              </a:buClr>
+              <a:buNone/>
+            </a:pPr>
+            <a:endParaRPr lang="en-CA" dirty="0"/>
+          </a:p>
+          <a:p>
+            <a:pPr marL="0" indent="0">
+              <a:buClr>
+                <a:schemeClr val="accent1">
+                  <a:lumMod val="50000"/>
+                </a:schemeClr>
+              </a:buClr>
+              <a:buNone/>
+            </a:pPr>
+            <a:endParaRPr lang="en-CA" dirty="0"/>
+          </a:p>
+          <a:p>
+            <a:pPr marL="0" indent="0">
+              <a:buClr>
+                <a:schemeClr val="accent1">
+                  <a:lumMod val="50000"/>
+                </a:schemeClr>
+              </a:buClr>
+              <a:buNone/>
+            </a:pPr>
+            <a:endParaRPr lang="en-CA" dirty="0"/>
+          </a:p>
+          <a:p>
+            <a:pPr lvl="1">
+              <a:buClr>
+                <a:schemeClr val="accent1">
+                  <a:lumMod val="50000"/>
+                </a:schemeClr>
+              </a:buClr>
+              <a:buFont typeface="Arial" panose="020B0604020202020204" pitchFamily="34" charset="0"/>
+              <a:buChar char="•"/>
+            </a:pPr>
+            <a:endParaRPr lang="en-CA" dirty="0"/>
+          </a:p>
+        </p:txBody>
+      </p:sp>
+      <p:sp>
+        <p:nvSpPr>
+          <p:cNvPr id="4" name="Slide Number Placeholder 3">
+            <a:extLst>
+              <a:ext uri="{FF2B5EF4-FFF2-40B4-BE49-F238E27FC236}">
+                <a16:creationId xmlns:a16="http://schemas.microsoft.com/office/drawing/2014/main" id="{CAC7CFB2-1D12-C0EA-5EEC-1D9DFF5934A1}"/>
+              </a:ext>
+            </a:extLst>
+          </p:cNvPr>
+          <p:cNvSpPr>
+            <a:spLocks noGrp="1"/>
+          </p:cNvSpPr>
+          <p:nvPr>
+            <p:ph type="sldNum" sz="quarter" idx="12"/>
+          </p:nvPr>
+        </p:nvSpPr>
+        <p:spPr/>
+        <p:txBody>
+          <a:bodyPr/>
+          <a:lstStyle/>
+          <a:p>
+            <a:fld id="{4BAA6517-F367-4EB3-AFA6-036DD26A3111}" type="slidenum">
+              <a:rPr lang="en-CA" smtClean="0"/>
+              <a:t>30</a:t>
+            </a:fld>
+            <a:endParaRPr lang="en-CA"/>
+          </a:p>
+        </p:txBody>
+      </p:sp>
+      <p:sp>
+        <p:nvSpPr>
+          <p:cNvPr id="6" name="TextBox 5">
+            <a:extLst>
+              <a:ext uri="{FF2B5EF4-FFF2-40B4-BE49-F238E27FC236}">
+                <a16:creationId xmlns:a16="http://schemas.microsoft.com/office/drawing/2014/main" id="{AB8EE22B-D614-85CD-9CC5-CB7FAD0BB97D}"/>
+              </a:ext>
+            </a:extLst>
+          </p:cNvPr>
+          <p:cNvSpPr txBox="1"/>
+          <p:nvPr/>
+        </p:nvSpPr>
+        <p:spPr>
+          <a:xfrm>
+            <a:off x="-1" y="6353086"/>
+            <a:ext cx="11212483" cy="461665"/>
+          </a:xfrm>
+          <a:prstGeom prst="rect">
+            <a:avLst/>
+          </a:prstGeom>
+          <a:noFill/>
+        </p:spPr>
+        <p:txBody>
+          <a:bodyPr wrap="square">
+            <a:spAutoFit/>
+          </a:bodyPr>
+          <a:lstStyle/>
+          <a:p>
+            <a:r>
+              <a:rPr lang="en-CA" sz="1200" dirty="0"/>
+              <a:t>Burns, L., Teke, T., Popescu, I. A., &amp; </a:t>
+            </a:r>
+            <a:r>
+              <a:rPr lang="en-CA" sz="1200" dirty="0" err="1"/>
+              <a:t>Duzenli</a:t>
+            </a:r>
+            <a:r>
+              <a:rPr lang="en-CA" sz="1200" dirty="0"/>
+              <a:t>, C. (2019). Monte Carlo Dosimetry of Organ Doses from a Sweeping-Beam Total Body Irradiation Technique: Feasibility and First Results. In L. </a:t>
+            </a:r>
+            <a:r>
+              <a:rPr lang="en-CA" sz="1200" dirty="0" err="1"/>
+              <a:t>Lhotska</a:t>
+            </a:r>
+            <a:r>
+              <a:rPr lang="en-CA" sz="1200" dirty="0"/>
+              <a:t>, L. </a:t>
+            </a:r>
+            <a:r>
+              <a:rPr lang="en-CA" sz="1200" dirty="0" err="1"/>
+              <a:t>Sukupova</a:t>
+            </a:r>
+            <a:r>
+              <a:rPr lang="en-CA" sz="1200" dirty="0"/>
+              <a:t>, I. Lacković, &amp; G. S. Ibbott (Eds.), </a:t>
+            </a:r>
+            <a:r>
+              <a:rPr lang="en-CA" sz="1200" i="1" dirty="0"/>
+              <a:t>World Congress on Medical Physics and Biomedical Engineering 2018</a:t>
+            </a:r>
+            <a:r>
+              <a:rPr lang="en-CA" sz="1200" dirty="0"/>
+              <a:t> (pp. 421–427). Springer. </a:t>
+            </a:r>
+            <a:endParaRPr lang="en-CA" sz="1200" dirty="0">
+              <a:effectLst/>
+            </a:endParaRPr>
+          </a:p>
+        </p:txBody>
+      </p:sp>
+      <p:sp>
+        <p:nvSpPr>
+          <p:cNvPr id="5" name="Rectangle 4">
+            <a:extLst>
+              <a:ext uri="{FF2B5EF4-FFF2-40B4-BE49-F238E27FC236}">
+                <a16:creationId xmlns:a16="http://schemas.microsoft.com/office/drawing/2014/main" id="{1C42BFEE-AA92-9DAB-8EEB-AD7B3111B76D}"/>
+              </a:ext>
+            </a:extLst>
+          </p:cNvPr>
+          <p:cNvSpPr/>
+          <p:nvPr/>
+        </p:nvSpPr>
+        <p:spPr>
+          <a:xfrm>
+            <a:off x="1097280" y="4127156"/>
+            <a:ext cx="3558746" cy="370703"/>
+          </a:xfrm>
+          <a:prstGeom prst="rect">
+            <a:avLst/>
+          </a:prstGeom>
+        </p:spPr>
+        <p:style>
+          <a:lnRef idx="2">
+            <a:schemeClr val="accent1">
+              <a:shade val="15000"/>
+            </a:schemeClr>
+          </a:lnRef>
+          <a:fillRef idx="1">
+            <a:schemeClr val="accent1"/>
+          </a:fillRef>
+          <a:effectRef idx="0">
+            <a:schemeClr val="accent1"/>
+          </a:effectRef>
+          <a:fontRef idx="minor">
+            <a:schemeClr val="lt1"/>
+          </a:fontRef>
+        </p:style>
+        <p:txBody>
+          <a:bodyPr rtlCol="0" anchor="ctr"/>
+          <a:lstStyle/>
+          <a:p>
+            <a:pPr algn="ctr"/>
+            <a:r>
+              <a:rPr lang="en-CA" dirty="0"/>
+              <a:t>9.76 E 14 particles per minute</a:t>
+            </a:r>
+          </a:p>
+        </p:txBody>
+      </p:sp>
+    </p:spTree>
+    <p:extLst>
+      <p:ext uri="{BB962C8B-B14F-4D97-AF65-F5344CB8AC3E}">
+        <p14:creationId xmlns:p14="http://schemas.microsoft.com/office/powerpoint/2010/main" val="3377416237"/>
+      </p:ext>
+    </p:extLst>
+  </p:cSld>
+  <p:clrMapOvr>
+    <a:masterClrMapping/>
+  </p:clrMapOvr>
+</p:sld>
+</file>
+
+<file path=ppt/slides/slide31.xml><?xml version="1.0" encoding="utf-8"?>
+<p:sld xmlns:a="http://schemas.openxmlformats.org/drawingml/2006/main" xmlns:r="http://schemas.openxmlformats.org/officeDocument/2006/relationships" xmlns:p="http://schemas.openxmlformats.org/presentationml/2006/main">
+  <p:cSld>
+    <p:spTree>
+      <p:nvGrpSpPr>
+        <p:cNvPr id="1" name="">
+          <a:extLst>
+            <a:ext uri="{FF2B5EF4-FFF2-40B4-BE49-F238E27FC236}">
               <a16:creationId xmlns:a16="http://schemas.microsoft.com/office/drawing/2014/main" id="{0686E2D9-75F8-3AD8-DCB2-3AD96A860E39}"/>
             </a:ext>
           </a:extLst>
@@ -25172,8 +25390,8 @@
           </a:p>
         </p:txBody>
       </p:sp>
-      <mc:AlternateContent xmlns:mc="http://schemas.openxmlformats.org/markup-compatibility/2006">
-        <mc:Choice xmlns:a14="http://schemas.microsoft.com/office/drawing/2010/main" Requires="a14">
+      <mc:AlternateContent xmlns:mc="http://schemas.openxmlformats.org/markup-compatibility/2006" xmlns:a14="http://schemas.microsoft.com/office/drawing/2010/main">
+        <mc:Choice Requires="a14">
           <p:sp>
             <p:nvSpPr>
               <p:cNvPr id="3" name="Content Placeholder 2">
@@ -25554,7 +25772,7 @@
             </p:txBody>
           </p:sp>
         </mc:Choice>
-        <mc:Fallback>
+        <mc:Fallback xmlns="">
           <p:sp>
             <p:nvSpPr>
               <p:cNvPr id="3" name="Content Placeholder 2">
@@ -25617,7 +25835,7 @@
           <a:p>
             <a:fld id="{4BAA6517-F367-4EB3-AFA6-036DD26A3111}" type="slidenum">
               <a:rPr lang="en-CA" smtClean="0"/>
-              <a:t>30</a:t>
+              <a:t>31</a:t>
             </a:fld>
             <a:endParaRPr lang="en-CA"/>
           </a:p>
@@ -25755,7 +25973,7 @@
 </p:sld>
 </file>
 
-<file path=ppt/slides/slide31.xml><?xml version="1.0" encoding="utf-8"?>
+<file path=ppt/slides/slide32.xml><?xml version="1.0" encoding="utf-8"?>
 <p:sld xmlns:a="http://schemas.openxmlformats.org/drawingml/2006/main" xmlns:r="http://schemas.openxmlformats.org/officeDocument/2006/relationships" xmlns:p="http://schemas.openxmlformats.org/presentationml/2006/main">
   <p:cSld>
     <p:spTree>
@@ -25899,7 +26117,7 @@
           <a:p>
             <a:fld id="{4BAA6517-F367-4EB3-AFA6-036DD26A3111}" type="slidenum">
               <a:rPr lang="en-CA" smtClean="0"/>
-              <a:t>31</a:t>
+              <a:t>32</a:t>
             </a:fld>
             <a:endParaRPr lang="en-CA"/>
           </a:p>
@@ -26073,7 +26291,7 @@
 </p:sld>
 </file>
 
-<file path=ppt/slides/slide32.xml><?xml version="1.0" encoding="utf-8"?>
+<file path=ppt/slides/slide33.xml><?xml version="1.0" encoding="utf-8"?>
 <p:sld xmlns:a="http://schemas.openxmlformats.org/drawingml/2006/main" xmlns:r="http://schemas.openxmlformats.org/officeDocument/2006/relationships" xmlns:p="http://schemas.openxmlformats.org/presentationml/2006/main">
   <p:cSld>
     <p:spTree>
@@ -26223,7 +26441,7 @@
           <a:p>
             <a:fld id="{4BAA6517-F367-4EB3-AFA6-036DD26A3111}" type="slidenum">
               <a:rPr lang="en-CA" smtClean="0"/>
-              <a:t>32</a:t>
+              <a:t>33</a:t>
             </a:fld>
             <a:endParaRPr lang="en-CA"/>
           </a:p>
@@ -26540,7 +26758,7 @@
 </p:sld>
 </file>
 
-<file path=ppt/slides/slide33.xml><?xml version="1.0" encoding="utf-8"?>
+<file path=ppt/slides/slide34.xml><?xml version="1.0" encoding="utf-8"?>
 <p:sld xmlns:a="http://schemas.openxmlformats.org/drawingml/2006/main" xmlns:r="http://schemas.openxmlformats.org/officeDocument/2006/relationships" xmlns:p="http://schemas.openxmlformats.org/presentationml/2006/main">
   <p:cSld>
     <p:spTree>
@@ -26690,7 +26908,7 @@
           <a:p>
             <a:fld id="{4BAA6517-F367-4EB3-AFA6-036DD26A3111}" type="slidenum">
               <a:rPr lang="en-CA" smtClean="0"/>
-              <a:t>33</a:t>
+              <a:t>34</a:t>
             </a:fld>
             <a:endParaRPr lang="en-CA"/>
           </a:p>
@@ -27078,7 +27296,7 @@
 </p:sld>
 </file>
 
-<file path=ppt/slides/slide34.xml><?xml version="1.0" encoding="utf-8"?>
+<file path=ppt/slides/slide35.xml><?xml version="1.0" encoding="utf-8"?>
 <p:sld xmlns:a="http://schemas.openxmlformats.org/drawingml/2006/main" xmlns:r="http://schemas.openxmlformats.org/officeDocument/2006/relationships" xmlns:p="http://schemas.openxmlformats.org/presentationml/2006/main">
   <p:cSld>
     <p:spTree>
@@ -27228,7 +27446,7 @@
           <a:p>
             <a:fld id="{4BAA6517-F367-4EB3-AFA6-036DD26A3111}" type="slidenum">
               <a:rPr lang="en-CA" smtClean="0"/>
-              <a:t>34</a:t>
+              <a:t>35</a:t>
             </a:fld>
             <a:endParaRPr lang="en-CA"/>
           </a:p>
@@ -27579,7 +27797,7 @@
 </p:sld>
 </file>
 
-<file path=ppt/slides/slide35.xml><?xml version="1.0" encoding="utf-8"?>
+<file path=ppt/slides/slide36.xml><?xml version="1.0" encoding="utf-8"?>
 <p:sld xmlns:a="http://schemas.openxmlformats.org/drawingml/2006/main" xmlns:r="http://schemas.openxmlformats.org/officeDocument/2006/relationships" xmlns:p="http://schemas.openxmlformats.org/presentationml/2006/main">
   <p:cSld>
     <p:spTree>
@@ -27729,7 +27947,7 @@
           <a:p>
             <a:fld id="{4BAA6517-F367-4EB3-AFA6-036DD26A3111}" type="slidenum">
               <a:rPr lang="en-CA" smtClean="0"/>
-              <a:t>35</a:t>
+              <a:t>36</a:t>
             </a:fld>
             <a:endParaRPr lang="en-CA"/>
           </a:p>
@@ -28090,7 +28308,7 @@
 </p:sld>
 </file>
 
-<file path=ppt/slides/slide36.xml><?xml version="1.0" encoding="utf-8"?>
+<file path=ppt/slides/slide37.xml><?xml version="1.0" encoding="utf-8"?>
 <p:sld xmlns:a="http://schemas.openxmlformats.org/drawingml/2006/main" xmlns:r="http://schemas.openxmlformats.org/officeDocument/2006/relationships" xmlns:p="http://schemas.openxmlformats.org/presentationml/2006/main">
   <p:cSld>
     <p:spTree>
@@ -28215,7 +28433,7 @@
           <a:p>
             <a:fld id="{4BAA6517-F367-4EB3-AFA6-036DD26A3111}" type="slidenum">
               <a:rPr lang="en-CA" smtClean="0"/>
-              <a:t>36</a:t>
+              <a:t>37</a:t>
             </a:fld>
             <a:endParaRPr lang="en-CA"/>
           </a:p>
@@ -28234,7 +28452,7 @@
 </p:sld>
 </file>
 
-<file path=ppt/slides/slide37.xml><?xml version="1.0" encoding="utf-8"?>
+<file path=ppt/slides/slide38.xml><?xml version="1.0" encoding="utf-8"?>
 <p:sld xmlns:a="http://schemas.openxmlformats.org/drawingml/2006/main" xmlns:r="http://schemas.openxmlformats.org/officeDocument/2006/relationships" xmlns:p="http://schemas.openxmlformats.org/presentationml/2006/main">
   <p:cSld>
     <p:spTree>
@@ -28378,7 +28596,7 @@
           <a:p>
             <a:fld id="{4BAA6517-F367-4EB3-AFA6-036DD26A3111}" type="slidenum">
               <a:rPr lang="en-CA" smtClean="0"/>
-              <a:t>37</a:t>
+              <a:t>38</a:t>
             </a:fld>
             <a:endParaRPr lang="en-CA"/>
           </a:p>
@@ -28397,7 +28615,7 @@
 </p:sld>
 </file>
 
-<file path=ppt/slides/slide38.xml><?xml version="1.0" encoding="utf-8"?>
+<file path=ppt/slides/slide39.xml><?xml version="1.0" encoding="utf-8"?>
 <p:sld xmlns:a="http://schemas.openxmlformats.org/drawingml/2006/main" xmlns:r="http://schemas.openxmlformats.org/officeDocument/2006/relationships" xmlns:p="http://schemas.openxmlformats.org/presentationml/2006/main">
   <p:cSld>
     <p:spTree>
@@ -28529,7 +28747,7 @@
           <a:p>
             <a:fld id="{4BAA6517-F367-4EB3-AFA6-036DD26A3111}" type="slidenum">
               <a:rPr lang="en-CA" smtClean="0"/>
-              <a:t>38</a:t>
+              <a:t>39</a:t>
             </a:fld>
             <a:endParaRPr lang="en-CA"/>
           </a:p>
@@ -28548,7 +28766,195 @@
 </p:sld>
 </file>
 
-<file path=ppt/slides/slide39.xml><?xml version="1.0" encoding="utf-8"?>
+<file path=ppt/slides/slide4.xml><?xml version="1.0" encoding="utf-8"?>
+<p:sld xmlns:a="http://schemas.openxmlformats.org/drawingml/2006/main" xmlns:r="http://schemas.openxmlformats.org/officeDocument/2006/relationships" xmlns:p="http://schemas.openxmlformats.org/presentationml/2006/main">
+  <p:cSld>
+    <p:spTree>
+      <p:nvGrpSpPr>
+        <p:cNvPr id="1" name=""/>
+        <p:cNvGrpSpPr/>
+        <p:nvPr/>
+      </p:nvGrpSpPr>
+      <p:grpSpPr>
+        <a:xfrm>
+          <a:off x="0" y="0"/>
+          <a:ext cx="0" cy="0"/>
+          <a:chOff x="0" y="0"/>
+          <a:chExt cx="0" cy="0"/>
+        </a:xfrm>
+      </p:grpSpPr>
+      <p:sp>
+        <p:nvSpPr>
+          <p:cNvPr id="2" name="Title 1">
+            <a:extLst>
+              <a:ext uri="{FF2B5EF4-FFF2-40B4-BE49-F238E27FC236}">
+                <a16:creationId xmlns:a16="http://schemas.microsoft.com/office/drawing/2014/main" id="{B0740988-6744-1734-F5BE-D27ADC304665}"/>
+              </a:ext>
+            </a:extLst>
+          </p:cNvPr>
+          <p:cNvSpPr>
+            <a:spLocks noGrp="1"/>
+          </p:cNvSpPr>
+          <p:nvPr>
+            <p:ph type="title"/>
+          </p:nvPr>
+        </p:nvSpPr>
+        <p:spPr>
+          <a:xfrm>
+            <a:off x="1097280" y="286603"/>
+            <a:ext cx="10058400" cy="1450757"/>
+          </a:xfrm>
+        </p:spPr>
+        <p:txBody>
+          <a:bodyPr>
+            <a:normAutofit/>
+          </a:bodyPr>
+          <a:lstStyle/>
+          <a:p>
+            <a:r>
+              <a:rPr lang="en-CA" dirty="0"/>
+              <a:t>Thesis Proposal: Reviewed</a:t>
+            </a:r>
+          </a:p>
+        </p:txBody>
+      </p:sp>
+      <p:sp>
+        <p:nvSpPr>
+          <p:cNvPr id="3" name="Content Placeholder 2">
+            <a:extLst>
+              <a:ext uri="{FF2B5EF4-FFF2-40B4-BE49-F238E27FC236}">
+                <a16:creationId xmlns:a16="http://schemas.microsoft.com/office/drawing/2014/main" id="{F53430AD-B666-A202-060D-B0383A6AD396}"/>
+              </a:ext>
+            </a:extLst>
+          </p:cNvPr>
+          <p:cNvSpPr>
+            <a:spLocks noGrp="1"/>
+          </p:cNvSpPr>
+          <p:nvPr>
+            <p:ph idx="1"/>
+          </p:nvPr>
+        </p:nvSpPr>
+        <p:spPr>
+          <a:xfrm>
+            <a:off x="1097279" y="1845734"/>
+            <a:ext cx="6454987" cy="4023360"/>
+          </a:xfrm>
+        </p:spPr>
+        <p:txBody>
+          <a:bodyPr>
+            <a:normAutofit/>
+          </a:bodyPr>
+          <a:lstStyle/>
+          <a:p>
+            <a:r>
+              <a:rPr lang="en-US" dirty="0"/>
+              <a:t>In-silico, track the flow of blood voxels through a </a:t>
+            </a:r>
+            <a:r>
+              <a:rPr lang="en-US" u="sng" dirty="0"/>
+              <a:t>whole-body phantom</a:t>
+            </a:r>
+            <a:r>
+              <a:rPr lang="en-US" dirty="0"/>
+              <a:t> undergoing TBI, calculate their cumulative dose, and compare the dose to the voxels.</a:t>
+            </a:r>
+          </a:p>
+          <a:p>
+            <a:r>
+              <a:rPr lang="en-US" dirty="0"/>
+              <a:t>Whole Body Phantom (4D XCAT) model will unite a blood flow model and Monte Carlo (MC) Simulations to determine dose.</a:t>
+            </a:r>
+          </a:p>
+          <a:p>
+            <a:r>
+              <a:rPr lang="en-US" dirty="0"/>
+              <a:t>Model the following delivery methods in MC:</a:t>
+            </a:r>
+          </a:p>
+          <a:p>
+            <a:pPr lvl="1">
+              <a:buFont typeface="Arial" panose="020B0604020202020204" pitchFamily="34" charset="0"/>
+              <a:buChar char="•"/>
+            </a:pPr>
+            <a:r>
+              <a:rPr lang="en-US" dirty="0"/>
+              <a:t>Sweeping Co-60 </a:t>
+            </a:r>
+          </a:p>
+          <a:p>
+            <a:pPr lvl="1">
+              <a:buFont typeface="Arial" panose="020B0604020202020204" pitchFamily="34" charset="0"/>
+              <a:buChar char="•"/>
+            </a:pPr>
+            <a:r>
+              <a:rPr lang="en-US" dirty="0"/>
+              <a:t>Extended POP </a:t>
+            </a:r>
+          </a:p>
+          <a:p>
+            <a:pPr lvl="1">
+              <a:buFont typeface="Arial" panose="020B0604020202020204" pitchFamily="34" charset="0"/>
+              <a:buChar char="•"/>
+            </a:pPr>
+            <a:r>
+              <a:rPr lang="en-US" dirty="0"/>
+              <a:t>VMAT TBI</a:t>
+            </a:r>
+          </a:p>
+          <a:p>
+            <a:endParaRPr lang="en-CA" dirty="0"/>
+          </a:p>
+          <a:p>
+            <a:pPr marL="0" indent="0">
+              <a:buNone/>
+            </a:pPr>
+            <a:endParaRPr lang="en-CA" dirty="0"/>
+          </a:p>
+        </p:txBody>
+      </p:sp>
+      <p:pic>
+        <p:nvPicPr>
+          <p:cNvPr id="4" name="Picture 3">
+            <a:extLst>
+              <a:ext uri="{FF2B5EF4-FFF2-40B4-BE49-F238E27FC236}">
+                <a16:creationId xmlns:a16="http://schemas.microsoft.com/office/drawing/2014/main" id="{480263E8-46DC-95E0-079F-D585E49A6418}"/>
+              </a:ext>
+            </a:extLst>
+          </p:cNvPr>
+          <p:cNvPicPr>
+            <a:picLocks noChangeAspect="1"/>
+          </p:cNvPicPr>
+          <p:nvPr/>
+        </p:nvPicPr>
+        <p:blipFill>
+          <a:blip r:embed="rId3"/>
+          <a:srcRect l="5965" r="1345"/>
+          <a:stretch/>
+        </p:blipFill>
+        <p:spPr>
+          <a:xfrm>
+            <a:off x="8020570" y="1916318"/>
+            <a:ext cx="3564878" cy="3471012"/>
+          </a:xfrm>
+          <a:prstGeom prst="rect">
+            <a:avLst/>
+          </a:prstGeom>
+        </p:spPr>
+      </p:pic>
+    </p:spTree>
+    <p:extLst>
+      <p:ext uri="{BB962C8B-B14F-4D97-AF65-F5344CB8AC3E}">
+        <p14:creationId xmlns:p14="http://schemas.microsoft.com/office/powerpoint/2010/main" val="1839444309"/>
+      </p:ext>
+    </p:extLst>
+  </p:cSld>
+  <p:clrMapOvr>
+    <a:masterClrMapping/>
+  </p:clrMapOvr>
+</p:sld>
+</file>
+
+<file path=ppt/slides/slide40.xml><?xml version="1.0" encoding="utf-8"?>
 <p:sld xmlns:a="http://schemas.openxmlformats.org/drawingml/2006/main" xmlns:r="http://schemas.openxmlformats.org/officeDocument/2006/relationships" xmlns:p="http://schemas.openxmlformats.org/presentationml/2006/main">
   <p:cSld>
     <p:spTree>
@@ -28680,7 +29086,7 @@
           <a:p>
             <a:fld id="{4BAA6517-F367-4EB3-AFA6-036DD26A3111}" type="slidenum">
               <a:rPr lang="en-CA" smtClean="0"/>
-              <a:t>39</a:t>
+              <a:t>40</a:t>
             </a:fld>
             <a:endParaRPr lang="en-CA"/>
           </a:p>
@@ -28920,201 +29326,7 @@
 </p:sld>
 </file>
 
-<file path=ppt/slides/slide4.xml><?xml version="1.0" encoding="utf-8"?>
-<p:sld xmlns:a="http://schemas.openxmlformats.org/drawingml/2006/main" xmlns:r="http://schemas.openxmlformats.org/officeDocument/2006/relationships" xmlns:p="http://schemas.openxmlformats.org/presentationml/2006/main">
-  <p:cSld>
-    <p:spTree>
-      <p:nvGrpSpPr>
-        <p:cNvPr id="1" name=""/>
-        <p:cNvGrpSpPr/>
-        <p:nvPr/>
-      </p:nvGrpSpPr>
-      <p:grpSpPr>
-        <a:xfrm>
-          <a:off x="0" y="0"/>
-          <a:ext cx="0" cy="0"/>
-          <a:chOff x="0" y="0"/>
-          <a:chExt cx="0" cy="0"/>
-        </a:xfrm>
-      </p:grpSpPr>
-      <p:sp>
-        <p:nvSpPr>
-          <p:cNvPr id="2" name="Title 1">
-            <a:extLst>
-              <a:ext uri="{FF2B5EF4-FFF2-40B4-BE49-F238E27FC236}">
-                <a16:creationId xmlns:a16="http://schemas.microsoft.com/office/drawing/2014/main" id="{B0740988-6744-1734-F5BE-D27ADC304665}"/>
-              </a:ext>
-            </a:extLst>
-          </p:cNvPr>
-          <p:cNvSpPr>
-            <a:spLocks noGrp="1"/>
-          </p:cNvSpPr>
-          <p:nvPr>
-            <p:ph type="title"/>
-          </p:nvPr>
-        </p:nvSpPr>
-        <p:spPr>
-          <a:xfrm>
-            <a:off x="1097280" y="286603"/>
-            <a:ext cx="10058400" cy="1450757"/>
-          </a:xfrm>
-        </p:spPr>
-        <p:txBody>
-          <a:bodyPr>
-            <a:normAutofit/>
-          </a:bodyPr>
-          <a:lstStyle/>
-          <a:p>
-            <a:r>
-              <a:rPr lang="en-CA" dirty="0"/>
-              <a:t>Thesis Proposal: Reviewed</a:t>
-            </a:r>
-          </a:p>
-        </p:txBody>
-      </p:sp>
-      <p:sp>
-        <p:nvSpPr>
-          <p:cNvPr id="3" name="Content Placeholder 2">
-            <a:extLst>
-              <a:ext uri="{FF2B5EF4-FFF2-40B4-BE49-F238E27FC236}">
-                <a16:creationId xmlns:a16="http://schemas.microsoft.com/office/drawing/2014/main" id="{F53430AD-B666-A202-060D-B0383A6AD396}"/>
-              </a:ext>
-            </a:extLst>
-          </p:cNvPr>
-          <p:cNvSpPr>
-            <a:spLocks noGrp="1"/>
-          </p:cNvSpPr>
-          <p:nvPr>
-            <p:ph idx="1"/>
-          </p:nvPr>
-        </p:nvSpPr>
-        <p:spPr>
-          <a:xfrm>
-            <a:off x="1097279" y="1845734"/>
-            <a:ext cx="6454987" cy="4023360"/>
-          </a:xfrm>
-        </p:spPr>
-        <p:txBody>
-          <a:bodyPr>
-            <a:normAutofit/>
-          </a:bodyPr>
-          <a:lstStyle/>
-          <a:p>
-            <a:r>
-              <a:rPr lang="en-US" dirty="0"/>
-              <a:t>In-silico, track the flow of blood voxels through a </a:t>
-            </a:r>
-            <a:r>
-              <a:rPr lang="en-US" u="sng" dirty="0"/>
-              <a:t>whole-body phantom</a:t>
-            </a:r>
-            <a:r>
-              <a:rPr lang="en-US" dirty="0"/>
-              <a:t> undergoing TBI, calculate their cumulative dose, and compare the dose to the voxels.</a:t>
-            </a:r>
-          </a:p>
-          <a:p>
-            <a:r>
-              <a:rPr lang="en-US" dirty="0"/>
-              <a:t>Whole Body Phantom (4D XCAT) model will unite a blood flow model and Monte Carlo (MC) Simulations to determine dose.</a:t>
-            </a:r>
-          </a:p>
-          <a:p>
-            <a:r>
-              <a:rPr lang="en-US" dirty="0"/>
-              <a:t>Model the following delivery methods in MC:</a:t>
-            </a:r>
-          </a:p>
-          <a:p>
-            <a:pPr lvl="1">
-              <a:buFont typeface="Arial" panose="020B0604020202020204" pitchFamily="34" charset="0"/>
-              <a:buChar char="•"/>
-            </a:pPr>
-            <a:r>
-              <a:rPr lang="en-US" dirty="0"/>
-              <a:t>Sweeping Co-60 </a:t>
-            </a:r>
-          </a:p>
-          <a:p>
-            <a:pPr lvl="1">
-              <a:buFont typeface="Arial" panose="020B0604020202020204" pitchFamily="34" charset="0"/>
-              <a:buChar char="•"/>
-            </a:pPr>
-            <a:r>
-              <a:rPr lang="en-US" dirty="0"/>
-              <a:t>Extended POP </a:t>
-            </a:r>
-          </a:p>
-          <a:p>
-            <a:pPr lvl="1">
-              <a:buFont typeface="Arial" panose="020B0604020202020204" pitchFamily="34" charset="0"/>
-              <a:buChar char="•"/>
-            </a:pPr>
-            <a:r>
-              <a:rPr lang="en-US" dirty="0"/>
-              <a:t>VMAT TBI (Q: what variables are we able to adjust if we want to assess variations in VMAT)</a:t>
-            </a:r>
-          </a:p>
-          <a:p>
-            <a:pPr marL="0" indent="0">
-              <a:buNone/>
-            </a:pPr>
-            <a:endParaRPr lang="en-US" dirty="0"/>
-          </a:p>
-          <a:p>
-            <a:endParaRPr lang="en-CA" dirty="0"/>
-          </a:p>
-          <a:p>
-            <a:pPr marL="0" indent="0">
-              <a:buNone/>
-            </a:pPr>
-            <a:endParaRPr lang="en-CA" dirty="0"/>
-          </a:p>
-        </p:txBody>
-      </p:sp>
-      <p:pic>
-        <p:nvPicPr>
-          <p:cNvPr id="4" name="Picture 3">
-            <a:extLst>
-              <a:ext uri="{FF2B5EF4-FFF2-40B4-BE49-F238E27FC236}">
-                <a16:creationId xmlns:a16="http://schemas.microsoft.com/office/drawing/2014/main" id="{480263E8-46DC-95E0-079F-D585E49A6418}"/>
-              </a:ext>
-            </a:extLst>
-          </p:cNvPr>
-          <p:cNvPicPr>
-            <a:picLocks noChangeAspect="1"/>
-          </p:cNvPicPr>
-          <p:nvPr/>
-        </p:nvPicPr>
-        <p:blipFill>
-          <a:blip r:embed="rId3"/>
-          <a:srcRect l="5965" r="1345"/>
-          <a:stretch/>
-        </p:blipFill>
-        <p:spPr>
-          <a:xfrm>
-            <a:off x="8020570" y="1916318"/>
-            <a:ext cx="3564878" cy="3471012"/>
-          </a:xfrm>
-          <a:prstGeom prst="rect">
-            <a:avLst/>
-          </a:prstGeom>
-        </p:spPr>
-      </p:pic>
-    </p:spTree>
-    <p:extLst>
-      <p:ext uri="{BB962C8B-B14F-4D97-AF65-F5344CB8AC3E}">
-        <p14:creationId xmlns:p14="http://schemas.microsoft.com/office/powerpoint/2010/main" val="1839444309"/>
-      </p:ext>
-    </p:extLst>
-  </p:cSld>
-  <p:clrMapOvr>
-    <a:masterClrMapping/>
-  </p:clrMapOvr>
-</p:sld>
-</file>
-
-<file path=ppt/slides/slide40.xml><?xml version="1.0" encoding="utf-8"?>
+<file path=ppt/slides/slide41.xml><?xml version="1.0" encoding="utf-8"?>
 <p:sld xmlns:a="http://schemas.openxmlformats.org/drawingml/2006/main" xmlns:r="http://schemas.openxmlformats.org/officeDocument/2006/relationships" xmlns:p="http://schemas.openxmlformats.org/presentationml/2006/main">
   <p:cSld>
     <p:spTree>
@@ -29246,7 +29458,7 @@
           <a:p>
             <a:fld id="{4BAA6517-F367-4EB3-AFA6-036DD26A3111}" type="slidenum">
               <a:rPr lang="en-CA" smtClean="0"/>
-              <a:t>40</a:t>
+              <a:t>41</a:t>
             </a:fld>
             <a:endParaRPr lang="en-CA"/>
           </a:p>
@@ -29747,8 +29959,8 @@
           </a:fontRef>
         </p:style>
       </p:cxnSp>
-      <mc:AlternateContent xmlns:mc="http://schemas.openxmlformats.org/markup-compatibility/2006">
-        <mc:Choice xmlns:a14="http://schemas.microsoft.com/office/drawing/2010/main" Requires="a14">
+      <mc:AlternateContent xmlns:mc="http://schemas.openxmlformats.org/markup-compatibility/2006" xmlns:a14="http://schemas.microsoft.com/office/drawing/2010/main">
+        <mc:Choice Requires="a14">
           <p:sp>
             <p:nvSpPr>
               <p:cNvPr id="43" name="TextBox 42">
@@ -29970,7 +30182,7 @@
             </p:txBody>
           </p:sp>
         </mc:Choice>
-        <mc:Fallback>
+        <mc:Fallback xmlns="">
           <p:sp>
             <p:nvSpPr>
               <p:cNvPr id="43" name="TextBox 42">
@@ -30028,7 +30240,7 @@
 </p:sld>
 </file>
 
-<file path=ppt/slides/slide41.xml><?xml version="1.0" encoding="utf-8"?>
+<file path=ppt/slides/slide42.xml><?xml version="1.0" encoding="utf-8"?>
 <p:sld xmlns:a="http://schemas.openxmlformats.org/drawingml/2006/main" xmlns:r="http://schemas.openxmlformats.org/officeDocument/2006/relationships" xmlns:p="http://schemas.openxmlformats.org/presentationml/2006/main">
   <p:cSld>
     <p:spTree>
@@ -30079,7 +30291,7 @@
           <a:p>
             <a:fld id="{1E5564C7-97C0-40C1-9717-452594735347}" type="slidenum">
               <a:rPr lang="en-CA" smtClean="0"/>
-              <a:t>41</a:t>
+              <a:t>42</a:t>
             </a:fld>
             <a:endParaRPr lang="en-CA" dirty="0"/>
           </a:p>
@@ -30544,7 +30756,7 @@
 </p:sld>
 </file>
 
-<file path=ppt/slides/slide42.xml><?xml version="1.0" encoding="utf-8"?>
+<file path=ppt/slides/slide43.xml><?xml version="1.0" encoding="utf-8"?>
 <p:sld xmlns:a="http://schemas.openxmlformats.org/drawingml/2006/main" xmlns:r="http://schemas.openxmlformats.org/officeDocument/2006/relationships" xmlns:p="http://schemas.openxmlformats.org/presentationml/2006/main">
   <p:cSld>
     <p:spTree>
@@ -30641,7 +30853,7 @@
           <a:p>
             <a:fld id="{4BAA6517-F367-4EB3-AFA6-036DD26A3111}" type="slidenum">
               <a:rPr lang="en-CA" smtClean="0"/>
-              <a:t>42</a:t>
+              <a:t>43</a:t>
             </a:fld>
             <a:endParaRPr lang="en-CA"/>
           </a:p>
@@ -30765,118 +30977,6 @@
 </p:sld>
 </file>
 
-<file path=ppt/slides/slide43.xml><?xml version="1.0" encoding="utf-8"?>
-<p:sld xmlns:a="http://schemas.openxmlformats.org/drawingml/2006/main" xmlns:r="http://schemas.openxmlformats.org/officeDocument/2006/relationships" xmlns:p="http://schemas.openxmlformats.org/presentationml/2006/main">
-  <p:cSld>
-    <p:spTree>
-      <p:nvGrpSpPr>
-        <p:cNvPr id="1" name=""/>
-        <p:cNvGrpSpPr/>
-        <p:nvPr/>
-      </p:nvGrpSpPr>
-      <p:grpSpPr>
-        <a:xfrm>
-          <a:off x="0" y="0"/>
-          <a:ext cx="0" cy="0"/>
-          <a:chOff x="0" y="0"/>
-          <a:chExt cx="0" cy="0"/>
-        </a:xfrm>
-      </p:grpSpPr>
-      <p:sp>
-        <p:nvSpPr>
-          <p:cNvPr id="2" name="Title 1">
-            <a:extLst>
-              <a:ext uri="{FF2B5EF4-FFF2-40B4-BE49-F238E27FC236}">
-                <a16:creationId xmlns:a16="http://schemas.microsoft.com/office/drawing/2014/main" id="{2E44EE16-A1D3-22CD-7446-48A3D420BBE8}"/>
-              </a:ext>
-            </a:extLst>
-          </p:cNvPr>
-          <p:cNvSpPr>
-            <a:spLocks noGrp="1"/>
-          </p:cNvSpPr>
-          <p:nvPr>
-            <p:ph type="title"/>
-          </p:nvPr>
-        </p:nvSpPr>
-        <p:spPr/>
-        <p:txBody>
-          <a:bodyPr/>
-          <a:lstStyle/>
-          <a:p>
-            <a:r>
-              <a:rPr lang="en-CA" dirty="0"/>
-              <a:t>Prelim Dose Results</a:t>
-            </a:r>
-          </a:p>
-        </p:txBody>
-      </p:sp>
-      <p:sp>
-        <p:nvSpPr>
-          <p:cNvPr id="3" name="Content Placeholder 2">
-            <a:extLst>
-              <a:ext uri="{FF2B5EF4-FFF2-40B4-BE49-F238E27FC236}">
-                <a16:creationId xmlns:a16="http://schemas.microsoft.com/office/drawing/2014/main" id="{9F76F799-8EF1-F95F-AD0C-E58757AA1445}"/>
-              </a:ext>
-            </a:extLst>
-          </p:cNvPr>
-          <p:cNvSpPr>
-            <a:spLocks noGrp="1"/>
-          </p:cNvSpPr>
-          <p:nvPr>
-            <p:ph idx="1"/>
-          </p:nvPr>
-        </p:nvSpPr>
-        <p:spPr/>
-        <p:txBody>
-          <a:bodyPr/>
-          <a:lstStyle/>
-          <a:p>
-            <a:endParaRPr lang="en-CA"/>
-          </a:p>
-        </p:txBody>
-      </p:sp>
-      <p:sp>
-        <p:nvSpPr>
-          <p:cNvPr id="4" name="Slide Number Placeholder 3">
-            <a:extLst>
-              <a:ext uri="{FF2B5EF4-FFF2-40B4-BE49-F238E27FC236}">
-                <a16:creationId xmlns:a16="http://schemas.microsoft.com/office/drawing/2014/main" id="{B750ACFE-9686-E12C-F0E5-70869E1CF91B}"/>
-              </a:ext>
-            </a:extLst>
-          </p:cNvPr>
-          <p:cNvSpPr>
-            <a:spLocks noGrp="1"/>
-          </p:cNvSpPr>
-          <p:nvPr>
-            <p:ph type="sldNum" sz="quarter" idx="12"/>
-          </p:nvPr>
-        </p:nvSpPr>
-        <p:spPr/>
-        <p:txBody>
-          <a:bodyPr/>
-          <a:lstStyle/>
-          <a:p>
-            <a:fld id="{4BAA6517-F367-4EB3-AFA6-036DD26A3111}" type="slidenum">
-              <a:rPr lang="en-CA" smtClean="0"/>
-              <a:t>43</a:t>
-            </a:fld>
-            <a:endParaRPr lang="en-CA"/>
-          </a:p>
-        </p:txBody>
-      </p:sp>
-    </p:spTree>
-    <p:extLst>
-      <p:ext uri="{BB962C8B-B14F-4D97-AF65-F5344CB8AC3E}">
-        <p14:creationId xmlns:p14="http://schemas.microsoft.com/office/powerpoint/2010/main" val="1582952101"/>
-      </p:ext>
-    </p:extLst>
-  </p:cSld>
-  <p:clrMapOvr>
-    <a:masterClrMapping/>
-  </p:clrMapOvr>
-</p:sld>
-</file>
-
 <file path=ppt/slides/slide44.xml><?xml version="1.0" encoding="utf-8"?>
 <p:sld xmlns:a="http://schemas.openxmlformats.org/drawingml/2006/main" xmlns:r="http://schemas.openxmlformats.org/officeDocument/2006/relationships" xmlns:p="http://schemas.openxmlformats.org/presentationml/2006/main">
   <p:cSld>
@@ -30899,7 +30999,7 @@
           <p:cNvPr id="2" name="Title 1">
             <a:extLst>
               <a:ext uri="{FF2B5EF4-FFF2-40B4-BE49-F238E27FC236}">
-                <a16:creationId xmlns:a16="http://schemas.microsoft.com/office/drawing/2014/main" id="{9042161B-7CDF-F28C-41E7-F4D22FAADFCA}"/>
+                <a16:creationId xmlns:a16="http://schemas.microsoft.com/office/drawing/2014/main" id="{2E44EE16-A1D3-22CD-7446-48A3D420BBE8}"/>
               </a:ext>
             </a:extLst>
           </p:cNvPr>
@@ -30917,62 +31017,7 @@
           <a:p>
             <a:r>
               <a:rPr lang="en-CA" dirty="0"/>
-              <a:t>Anticaption for Projects 3</a:t>
-            </a:r>
-          </a:p>
-        </p:txBody>
-      </p:sp>
-      <p:sp>
-        <p:nvSpPr>
-          <p:cNvPr id="3" name="Content Placeholder 2">
-            <a:extLst>
-              <a:ext uri="{FF2B5EF4-FFF2-40B4-BE49-F238E27FC236}">
-                <a16:creationId xmlns:a16="http://schemas.microsoft.com/office/drawing/2014/main" id="{6E3F26EC-8641-6786-F377-F9E210E48069}"/>
-              </a:ext>
-            </a:extLst>
-          </p:cNvPr>
-          <p:cNvSpPr>
-            <a:spLocks noGrp="1"/>
-          </p:cNvSpPr>
-          <p:nvPr>
-            <p:ph idx="1"/>
-          </p:nvPr>
-        </p:nvSpPr>
-        <p:spPr/>
-        <p:txBody>
-          <a:bodyPr/>
-          <a:lstStyle/>
-          <a:p>
-            <a:r>
-              <a:rPr lang="en-US" dirty="0"/>
-              <a:t>Model the following:</a:t>
-            </a:r>
-          </a:p>
-          <a:p>
-            <a:pPr lvl="1"/>
-            <a:r>
-              <a:rPr lang="en-US" dirty="0"/>
-              <a:t>Extended POP: most common in Canada as of 2017  </a:t>
-            </a:r>
-          </a:p>
-          <a:p>
-            <a:pPr lvl="1"/>
-            <a:r>
-              <a:rPr lang="en-US" dirty="0"/>
-              <a:t>TBI VMAT: as delivered at BC Cancer – Vancouver</a:t>
-            </a:r>
-          </a:p>
-          <a:p>
-            <a:pPr lvl="2"/>
-            <a:r>
-              <a:rPr lang="en-US" dirty="0"/>
-              <a:t>Q: Are their variables we can vary during the treatment planning process?</a:t>
-            </a:r>
-          </a:p>
-          <a:p>
-            <a:r>
-              <a:rPr lang="en-CA" dirty="0"/>
-              <a:t>Compare the standard deviation of the dose to the BVs for all treatments</a:t>
+              <a:t>Prelim Dose Results</a:t>
             </a:r>
           </a:p>
         </p:txBody>
@@ -30982,7 +31027,7 @@
           <p:cNvPr id="4" name="Slide Number Placeholder 3">
             <a:extLst>
               <a:ext uri="{FF2B5EF4-FFF2-40B4-BE49-F238E27FC236}">
-                <a16:creationId xmlns:a16="http://schemas.microsoft.com/office/drawing/2014/main" id="{13756F0E-AACC-4950-1B4D-D99BD134EFD4}"/>
+                <a16:creationId xmlns:a16="http://schemas.microsoft.com/office/drawing/2014/main" id="{B750ACFE-9686-E12C-F0E5-70869E1CF91B}"/>
               </a:ext>
             </a:extLst>
           </p:cNvPr>
@@ -31006,45 +31051,499 @@
           </a:p>
         </p:txBody>
       </p:sp>
-      <p:sp>
-        <p:nvSpPr>
-          <p:cNvPr id="6" name="TextBox 5">
-            <a:extLst>
-              <a:ext uri="{FF2B5EF4-FFF2-40B4-BE49-F238E27FC236}">
-                <a16:creationId xmlns:a16="http://schemas.microsoft.com/office/drawing/2014/main" id="{1E5CA64C-3F42-93AF-F7C6-81ACDD9AC1CE}"/>
-              </a:ext>
-            </a:extLst>
-          </p:cNvPr>
-          <p:cNvSpPr txBox="1"/>
-          <p:nvPr/>
-        </p:nvSpPr>
-        <p:spPr>
-          <a:xfrm>
-            <a:off x="-76201" y="6411514"/>
-            <a:ext cx="10620376" cy="461665"/>
-          </a:xfrm>
-          <a:prstGeom prst="rect">
-            <a:avLst/>
-          </a:prstGeom>
-          <a:noFill/>
-        </p:spPr>
-        <p:txBody>
-          <a:bodyPr wrap="square">
-            <a:spAutoFit/>
-          </a:bodyPr>
-          <a:lstStyle/>
-          <a:p>
-            <a:r>
-              <a:rPr lang="en-US" sz="1200" dirty="0"/>
-              <a:t>R. C. N. Studinski, D. J. Fraser, R. S. Samant, and M. S. MacPherson, “Current practice in total-body irradiation: results of a Canada-wide survey,” Curr Oncol, vol. 24, no. 3, pp. 181–186, June 2017.</a:t>
-            </a:r>
-          </a:p>
-        </p:txBody>
-      </p:sp>
+      <p:graphicFrame>
+        <p:nvGraphicFramePr>
+          <p:cNvPr id="8" name="Content Placeholder 7">
+            <a:extLst>
+              <a:ext uri="{FF2B5EF4-FFF2-40B4-BE49-F238E27FC236}">
+                <a16:creationId xmlns:a16="http://schemas.microsoft.com/office/drawing/2014/main" id="{6BEA700C-1B2C-3F73-8257-68B799D05DAD}"/>
+              </a:ext>
+            </a:extLst>
+          </p:cNvPr>
+          <p:cNvGraphicFramePr>
+            <a:graphicFrameLocks noGrp="1"/>
+          </p:cNvGraphicFramePr>
+          <p:nvPr>
+            <p:ph idx="1"/>
+            <p:extLst>
+              <p:ext uri="{D42A27DB-BD31-4B8C-83A1-F6EECF244321}">
+                <p14:modId xmlns:p14="http://schemas.microsoft.com/office/powerpoint/2010/main" val="4242674288"/>
+              </p:ext>
+            </p:extLst>
+          </p:nvPr>
+        </p:nvGraphicFramePr>
+        <p:xfrm>
+          <a:off x="9046475" y="1912165"/>
+          <a:ext cx="2675968" cy="4023360"/>
+        </p:xfrm>
+        <a:graphic>
+          <a:graphicData uri="http://schemas.openxmlformats.org/drawingml/2006/table">
+            <a:tbl>
+              <a:tblPr bandRow="1">
+                <a:tableStyleId>{5C22544A-7EE6-4342-B048-85BDC9FD1C3A}</a:tableStyleId>
+              </a:tblPr>
+              <a:tblGrid>
+                <a:gridCol w="1337984">
+                  <a:extLst>
+                    <a:ext uri="{9D8B030D-6E8A-4147-A177-3AD203B41FA5}">
+                      <a16:colId xmlns:a16="http://schemas.microsoft.com/office/drawing/2014/main" val="917422986"/>
+                    </a:ext>
+                  </a:extLst>
+                </a:gridCol>
+                <a:gridCol w="1337984">
+                  <a:extLst>
+                    <a:ext uri="{9D8B030D-6E8A-4147-A177-3AD203B41FA5}">
+                      <a16:colId xmlns:a16="http://schemas.microsoft.com/office/drawing/2014/main" val="3736676220"/>
+                    </a:ext>
+                  </a:extLst>
+                </a:gridCol>
+              </a:tblGrid>
+              <a:tr h="370840">
+                <a:tc>
+                  <a:txBody>
+                    <a:bodyPr/>
+                    <a:lstStyle/>
+                    <a:p>
+                      <a:r>
+                        <a:rPr lang="en-US" dirty="0"/>
+                        <a:t>Number of Blood Volumes</a:t>
+                      </a:r>
+                      <a:endParaRPr lang="en-CA" dirty="0"/>
+                    </a:p>
+                  </a:txBody>
+                  <a:tcPr/>
+                </a:tc>
+                <a:tc>
+                  <a:txBody>
+                    <a:bodyPr/>
+                    <a:lstStyle/>
+                    <a:p>
+                      <a:r>
+                        <a:rPr lang="en-US" u="sng" dirty="0"/>
+                        <a:t>1E4</a:t>
+                      </a:r>
+                      <a:endParaRPr lang="en-CA" u="sng" dirty="0"/>
+                    </a:p>
+                  </a:txBody>
+                  <a:tcPr/>
+                </a:tc>
+                <a:extLst>
+                  <a:ext uri="{0D108BD9-81ED-4DB2-BD59-A6C34878D82A}">
+                    <a16:rowId xmlns:a16="http://schemas.microsoft.com/office/drawing/2014/main" val="1000427557"/>
+                  </a:ext>
+                </a:extLst>
+              </a:tr>
+              <a:tr h="355711">
+                <a:tc>
+                  <a:txBody>
+                    <a:bodyPr/>
+                    <a:lstStyle/>
+                    <a:p>
+                      <a:r>
+                        <a:rPr lang="en-US" dirty="0"/>
+                        <a:t>Time step size (s)</a:t>
+                      </a:r>
+                      <a:endParaRPr lang="en-CA" dirty="0"/>
+                    </a:p>
+                  </a:txBody>
+                  <a:tcPr/>
+                </a:tc>
+                <a:tc>
+                  <a:txBody>
+                    <a:bodyPr/>
+                    <a:lstStyle/>
+                    <a:p>
+                      <a:r>
+                        <a:rPr lang="en-US" dirty="0"/>
+                        <a:t>0.002 </a:t>
+                      </a:r>
+                      <a:endParaRPr lang="en-CA" dirty="0"/>
+                    </a:p>
+                  </a:txBody>
+                  <a:tcPr/>
+                </a:tc>
+                <a:extLst>
+                  <a:ext uri="{0D108BD9-81ED-4DB2-BD59-A6C34878D82A}">
+                    <a16:rowId xmlns:a16="http://schemas.microsoft.com/office/drawing/2014/main" val="657170188"/>
+                  </a:ext>
+                </a:extLst>
+              </a:tr>
+              <a:tr h="370840">
+                <a:tc>
+                  <a:txBody>
+                    <a:bodyPr/>
+                    <a:lstStyle/>
+                    <a:p>
+                      <a:r>
+                        <a:rPr lang="en-US" dirty="0"/>
+                        <a:t>Time to Steady State (s)</a:t>
+                      </a:r>
+                      <a:endParaRPr lang="en-CA" dirty="0"/>
+                    </a:p>
+                  </a:txBody>
+                  <a:tcPr/>
+                </a:tc>
+                <a:tc>
+                  <a:txBody>
+                    <a:bodyPr/>
+                    <a:lstStyle/>
+                    <a:p>
+                      <a:r>
+                        <a:rPr lang="en-US" dirty="0"/>
+                        <a:t>382 </a:t>
+                      </a:r>
+                      <a:endParaRPr lang="en-CA" dirty="0"/>
+                    </a:p>
+                  </a:txBody>
+                  <a:tcPr/>
+                </a:tc>
+                <a:extLst>
+                  <a:ext uri="{0D108BD9-81ED-4DB2-BD59-A6C34878D82A}">
+                    <a16:rowId xmlns:a16="http://schemas.microsoft.com/office/drawing/2014/main" val="1442426439"/>
+                  </a:ext>
+                </a:extLst>
+              </a:tr>
+              <a:tr h="370840">
+                <a:tc>
+                  <a:txBody>
+                    <a:bodyPr/>
+                    <a:lstStyle/>
+                    <a:p>
+                      <a:r>
+                        <a:rPr lang="en-US" dirty="0"/>
+                        <a:t>Delivery per Field (s)</a:t>
+                      </a:r>
+                      <a:endParaRPr lang="en-CA" dirty="0"/>
+                    </a:p>
+                  </a:txBody>
+                  <a:tcPr/>
+                </a:tc>
+                <a:tc>
+                  <a:txBody>
+                    <a:bodyPr/>
+                    <a:lstStyle/>
+                    <a:p>
+                      <a:r>
+                        <a:rPr lang="en-US" dirty="0"/>
+                        <a:t>408.6</a:t>
+                      </a:r>
+                      <a:endParaRPr lang="en-CA" dirty="0"/>
+                    </a:p>
+                  </a:txBody>
+                  <a:tcPr/>
+                </a:tc>
+                <a:extLst>
+                  <a:ext uri="{0D108BD9-81ED-4DB2-BD59-A6C34878D82A}">
+                    <a16:rowId xmlns:a16="http://schemas.microsoft.com/office/drawing/2014/main" val="3059569768"/>
+                  </a:ext>
+                </a:extLst>
+              </a:tr>
+              <a:tr h="370840">
+                <a:tc>
+                  <a:txBody>
+                    <a:bodyPr/>
+                    <a:lstStyle/>
+                    <a:p>
+                      <a:r>
+                        <a:rPr lang="en-US" dirty="0"/>
+                        <a:t>Time to “Flip” Patient (s)</a:t>
+                      </a:r>
+                      <a:endParaRPr lang="en-CA" dirty="0"/>
+                    </a:p>
+                  </a:txBody>
+                  <a:tcPr/>
+                </a:tc>
+                <a:tc>
+                  <a:txBody>
+                    <a:bodyPr/>
+                    <a:lstStyle/>
+                    <a:p>
+                      <a:r>
+                        <a:rPr lang="en-US" dirty="0"/>
+                        <a:t>900 </a:t>
+                      </a:r>
+                      <a:endParaRPr lang="en-CA" dirty="0"/>
+                    </a:p>
+                  </a:txBody>
+                  <a:tcPr/>
+                </a:tc>
+                <a:extLst>
+                  <a:ext uri="{0D108BD9-81ED-4DB2-BD59-A6C34878D82A}">
+                    <a16:rowId xmlns:a16="http://schemas.microsoft.com/office/drawing/2014/main" val="3426520378"/>
+                  </a:ext>
+                </a:extLst>
+              </a:tr>
+            </a:tbl>
+          </a:graphicData>
+        </a:graphic>
+      </p:graphicFrame>
+      <mc:AlternateContent xmlns:mc="http://schemas.openxmlformats.org/markup-compatibility/2006">
+        <mc:Choice xmlns:a14="http://schemas.microsoft.com/office/drawing/2010/main" Requires="a14">
+          <p:sp>
+            <p:nvSpPr>
+              <p:cNvPr id="9" name="TextBox 8">
+                <a:extLst>
+                  <a:ext uri="{FF2B5EF4-FFF2-40B4-BE49-F238E27FC236}">
+                    <a16:creationId xmlns:a16="http://schemas.microsoft.com/office/drawing/2014/main" id="{12CEF275-1B5F-C739-6C10-D7C55BDA70BD}"/>
+                  </a:ext>
+                </a:extLst>
+              </p:cNvPr>
+              <p:cNvSpPr txBox="1"/>
+              <p:nvPr/>
+            </p:nvSpPr>
+            <p:spPr>
+              <a:xfrm>
+                <a:off x="1210962" y="1960605"/>
+                <a:ext cx="5909566" cy="3322063"/>
+              </a:xfrm>
+              <a:prstGeom prst="rect">
+                <a:avLst/>
+              </a:prstGeom>
+              <a:noFill/>
+            </p:spPr>
+            <p:txBody>
+              <a:bodyPr wrap="none" rtlCol="0">
+                <a:spAutoFit/>
+              </a:bodyPr>
+              <a:lstStyle/>
+              <a:p>
+                <a:pPr marL="285750" indent="-285750">
+                  <a:buFont typeface="Arial" panose="020B0604020202020204" pitchFamily="34" charset="0"/>
+                  <a:buChar char="•"/>
+                </a:pPr>
+                <a:r>
+                  <a:rPr lang="en-US" dirty="0"/>
+                  <a:t>Monte Carlo</a:t>
+                </a:r>
+              </a:p>
+              <a:p>
+                <a:pPr marL="742950" lvl="1" indent="-285750">
+                  <a:buFont typeface="Arial" panose="020B0604020202020204" pitchFamily="34" charset="0"/>
+                  <a:buChar char="•"/>
+                </a:pPr>
+                <a:r>
+                  <a:rPr lang="en-US" dirty="0"/>
+                  <a:t>Ran AP and PA fields</a:t>
+                </a:r>
+              </a:p>
+              <a:p>
+                <a:pPr marL="742950" lvl="1" indent="-285750">
+                  <a:buFont typeface="Arial" panose="020B0604020202020204" pitchFamily="34" charset="0"/>
+                  <a:buChar char="•"/>
+                </a:pPr>
+                <a:r>
+                  <a:rPr lang="en-US" dirty="0"/>
+                  <a:t>2 billion particles each</a:t>
+                </a:r>
+              </a:p>
+              <a:p>
+                <a:pPr marL="742950" lvl="1" indent="-285750">
+                  <a:buFont typeface="Arial" panose="020B0604020202020204" pitchFamily="34" charset="0"/>
+                  <a:buChar char="•"/>
+                </a:pPr>
+                <a:r>
+                  <a:rPr lang="en-US" dirty="0"/>
+                  <a:t>Produced 4D Dose files with vessels as VOI</a:t>
+                </a:r>
+              </a:p>
+              <a:p>
+                <a:pPr marL="742950" lvl="1" indent="-285750">
+                  <a:buFont typeface="Arial" panose="020B0604020202020204" pitchFamily="34" charset="0"/>
+                  <a:buChar char="•"/>
+                </a:pPr>
+                <a:endParaRPr lang="en-US" dirty="0"/>
+              </a:p>
+              <a:p>
+                <a:pPr marL="285750" indent="-285750">
+                  <a:buFont typeface="Arial" panose="020B0604020202020204" pitchFamily="34" charset="0"/>
+                  <a:buChar char="•"/>
+                </a:pPr>
+                <a:r>
+                  <a:rPr lang="en-US" dirty="0"/>
+                  <a:t>Blood Flow Simulation</a:t>
+                </a:r>
+              </a:p>
+              <a:p>
+                <a:pPr marL="742950" lvl="1" indent="-285750">
+                  <a:buFont typeface="Arial" panose="020B0604020202020204" pitchFamily="34" charset="0"/>
+                  <a:buChar char="•"/>
+                </a:pPr>
+                <a:r>
+                  <a:rPr lang="en-US" dirty="0"/>
+                  <a:t>Ran a smaller number of particles (&lt;1E5)</a:t>
+                </a:r>
+              </a:p>
+              <a:p>
+                <a:pPr marL="742950" lvl="1" indent="-285750">
+                  <a:buFont typeface="Arial" panose="020B0604020202020204" pitchFamily="34" charset="0"/>
+                  <a:buChar char="•"/>
+                </a:pPr>
+                <a:r>
+                  <a:rPr lang="en-US" dirty="0"/>
+                  <a:t>Only tracking dose delivered within the blood vessels</a:t>
+                </a:r>
+              </a:p>
+              <a:p>
+                <a:pPr marL="742950" lvl="1" indent="-285750">
+                  <a:buFont typeface="Arial" panose="020B0604020202020204" pitchFamily="34" charset="0"/>
+                  <a:buChar char="•"/>
+                </a:pPr>
+                <a:r>
+                  <a:rPr lang="en-US" dirty="0"/>
+                  <a:t>Weighted dose results with:</a:t>
+                </a:r>
+              </a:p>
+              <a:p>
+                <a:pPr marL="1200150" lvl="2" indent="-285750">
+                  <a:buFont typeface="Arial" panose="020B0604020202020204" pitchFamily="34" charset="0"/>
+                  <a:buChar char="•"/>
+                </a:pPr>
+                <a14:m>
+                  <m:oMath xmlns:m="http://schemas.openxmlformats.org/officeDocument/2006/math">
+                    <m:r>
+                      <a:rPr lang="en-US" sz="2800" b="0" i="1" smtClean="0">
+                        <a:latin typeface="Cambria Math" panose="02040503050406030204" pitchFamily="18" charset="0"/>
+                      </a:rPr>
+                      <m:t>𝑤</m:t>
+                    </m:r>
+                    <m:r>
+                      <a:rPr lang="en-US" sz="2800" b="0" i="1" smtClean="0">
+                        <a:latin typeface="Cambria Math" panose="02040503050406030204" pitchFamily="18" charset="0"/>
+                      </a:rPr>
+                      <m:t>= </m:t>
+                    </m:r>
+                    <m:f>
+                      <m:fPr>
+                        <m:ctrlPr>
+                          <a:rPr lang="en-US" sz="2800" b="0" i="1" smtClean="0">
+                            <a:latin typeface="Cambria Math" panose="02040503050406030204" pitchFamily="18" charset="0"/>
+                          </a:rPr>
+                        </m:ctrlPr>
+                      </m:fPr>
+                      <m:num>
+                        <m:r>
+                          <a:rPr lang="en-US" sz="2800" b="0" i="1" smtClean="0">
+                            <a:latin typeface="Cambria Math" panose="02040503050406030204" pitchFamily="18" charset="0"/>
+                          </a:rPr>
+                          <m:t>2 </m:t>
+                        </m:r>
+                        <m:r>
+                          <a:rPr lang="en-US" sz="2800" b="0" i="1" smtClean="0">
+                            <a:latin typeface="Cambria Math" panose="02040503050406030204" pitchFamily="18" charset="0"/>
+                            <a:ea typeface="Cambria Math" panose="02040503050406030204" pitchFamily="18" charset="0"/>
+                          </a:rPr>
+                          <m:t>∙ </m:t>
+                        </m:r>
+                        <m:sSub>
+                          <m:sSubPr>
+                            <m:ctrlPr>
+                              <a:rPr lang="en-US" sz="2800" b="0" i="1" smtClean="0">
+                                <a:latin typeface="Cambria Math" panose="02040503050406030204" pitchFamily="18" charset="0"/>
+                              </a:rPr>
+                            </m:ctrlPr>
+                          </m:sSubPr>
+                          <m:e>
+                            <m:r>
+                              <a:rPr lang="en-US" sz="2800" b="0" i="1" smtClean="0">
+                                <a:latin typeface="Cambria Math" panose="02040503050406030204" pitchFamily="18" charset="0"/>
+                              </a:rPr>
+                              <m:t>𝑇</m:t>
+                            </m:r>
+                          </m:e>
+                          <m:sub>
+                            <m:r>
+                              <a:rPr lang="en-US" sz="2800" b="0" i="1" smtClean="0">
+                                <a:latin typeface="Cambria Math" panose="02040503050406030204" pitchFamily="18" charset="0"/>
+                              </a:rPr>
+                              <m:t>𝑓𝑖𝑒𝑙𝑑</m:t>
+                            </m:r>
+                          </m:sub>
+                        </m:sSub>
+                      </m:num>
+                      <m:den>
+                        <m:sSub>
+                          <m:sSubPr>
+                            <m:ctrlPr>
+                              <a:rPr lang="en-US" sz="2800" b="0" i="1" smtClean="0">
+                                <a:latin typeface="Cambria Math" panose="02040503050406030204" pitchFamily="18" charset="0"/>
+                              </a:rPr>
+                            </m:ctrlPr>
+                          </m:sSubPr>
+                          <m:e>
+                            <m:r>
+                              <a:rPr lang="en-US" sz="2800" b="0" i="1" smtClean="0">
+                                <a:latin typeface="Cambria Math" panose="02040503050406030204" pitchFamily="18" charset="0"/>
+                              </a:rPr>
+                              <m:t>𝑇</m:t>
+                            </m:r>
+                          </m:e>
+                          <m:sub>
+                            <m:r>
+                              <a:rPr lang="en-US" sz="2800" b="0" i="1" smtClean="0">
+                                <a:latin typeface="Cambria Math" panose="02040503050406030204" pitchFamily="18" charset="0"/>
+                              </a:rPr>
+                              <m:t>𝑒𝑥𝑝𝑜𝑠𝑢𝑟𝑒</m:t>
+                            </m:r>
+                          </m:sub>
+                        </m:sSub>
+                      </m:den>
+                    </m:f>
+                  </m:oMath>
+                </a14:m>
+                <a:endParaRPr lang="en-US" sz="2800" dirty="0"/>
+              </a:p>
+            </p:txBody>
+          </p:sp>
+        </mc:Choice>
+        <mc:Fallback>
+          <p:sp>
+            <p:nvSpPr>
+              <p:cNvPr id="9" name="TextBox 8">
+                <a:extLst>
+                  <a:ext uri="{FF2B5EF4-FFF2-40B4-BE49-F238E27FC236}">
+                    <a16:creationId xmlns:a16="http://schemas.microsoft.com/office/drawing/2014/main" id="{12CEF275-1B5F-C739-6C10-D7C55BDA70BD}"/>
+                  </a:ext>
+                </a:extLst>
+              </p:cNvPr>
+              <p:cNvSpPr txBox="1">
+                <a:spLocks noRot="1" noChangeAspect="1" noMove="1" noResize="1" noEditPoints="1" noAdjustHandles="1" noChangeArrowheads="1" noChangeShapeType="1" noTextEdit="1"/>
+              </p:cNvSpPr>
+              <p:nvPr/>
+            </p:nvSpPr>
+            <p:spPr>
+              <a:xfrm>
+                <a:off x="1210962" y="1960605"/>
+                <a:ext cx="5909566" cy="3322063"/>
+              </a:xfrm>
+              <a:prstGeom prst="rect">
+                <a:avLst/>
+              </a:prstGeom>
+              <a:blipFill>
+                <a:blip r:embed="rId2"/>
+                <a:stretch>
+                  <a:fillRect l="-722" t="-1101" r="-206"/>
+                </a:stretch>
+              </a:blipFill>
+            </p:spPr>
+            <p:txBody>
+              <a:bodyPr/>
+              <a:lstStyle/>
+              <a:p>
+                <a:r>
+                  <a:rPr lang="en-CA">
+                    <a:noFill/>
+                  </a:rPr>
+                  <a:t> </a:t>
+                </a:r>
+              </a:p>
+            </p:txBody>
+          </p:sp>
+        </mc:Fallback>
+      </mc:AlternateContent>
     </p:spTree>
     <p:extLst>
       <p:ext uri="{BB962C8B-B14F-4D97-AF65-F5344CB8AC3E}">
-        <p14:creationId xmlns:p14="http://schemas.microsoft.com/office/powerpoint/2010/main" val="1703520566"/>
+        <p14:creationId xmlns:p14="http://schemas.microsoft.com/office/powerpoint/2010/main" val="1582952101"/>
       </p:ext>
     </p:extLst>
   </p:cSld>
@@ -31055,6 +31554,583 @@
 </file>
 
 <file path=ppt/slides/slide45.xml><?xml version="1.0" encoding="utf-8"?>
+<p:sld xmlns:a="http://schemas.openxmlformats.org/drawingml/2006/main" xmlns:r="http://schemas.openxmlformats.org/officeDocument/2006/relationships" xmlns:p="http://schemas.openxmlformats.org/presentationml/2006/main">
+  <p:cSld>
+    <p:spTree>
+      <p:nvGrpSpPr>
+        <p:cNvPr id="1" name="">
+          <a:extLst>
+            <a:ext uri="{FF2B5EF4-FFF2-40B4-BE49-F238E27FC236}">
+              <a16:creationId xmlns:a16="http://schemas.microsoft.com/office/drawing/2014/main" id="{2F2729D6-7118-2AD6-C347-1DF1F90B494D}"/>
+            </a:ext>
+          </a:extLst>
+        </p:cNvPr>
+        <p:cNvGrpSpPr/>
+        <p:nvPr/>
+      </p:nvGrpSpPr>
+      <p:grpSpPr>
+        <a:xfrm>
+          <a:off x="0" y="0"/>
+          <a:ext cx="0" cy="0"/>
+          <a:chOff x="0" y="0"/>
+          <a:chExt cx="0" cy="0"/>
+        </a:xfrm>
+      </p:grpSpPr>
+      <p:sp>
+        <p:nvSpPr>
+          <p:cNvPr id="2" name="Title 1">
+            <a:extLst>
+              <a:ext uri="{FF2B5EF4-FFF2-40B4-BE49-F238E27FC236}">
+                <a16:creationId xmlns:a16="http://schemas.microsoft.com/office/drawing/2014/main" id="{80A2470D-C81C-6F2B-6020-41AF8978D8AB}"/>
+              </a:ext>
+            </a:extLst>
+          </p:cNvPr>
+          <p:cNvSpPr>
+            <a:spLocks noGrp="1"/>
+          </p:cNvSpPr>
+          <p:nvPr>
+            <p:ph type="title"/>
+          </p:nvPr>
+        </p:nvSpPr>
+        <p:spPr/>
+        <p:txBody>
+          <a:bodyPr/>
+          <a:lstStyle/>
+          <a:p>
+            <a:r>
+              <a:rPr lang="en-CA" dirty="0"/>
+              <a:t>Prelim Dose Results</a:t>
+            </a:r>
+          </a:p>
+        </p:txBody>
+      </p:sp>
+      <p:sp>
+        <p:nvSpPr>
+          <p:cNvPr id="4" name="Slide Number Placeholder 3">
+            <a:extLst>
+              <a:ext uri="{FF2B5EF4-FFF2-40B4-BE49-F238E27FC236}">
+                <a16:creationId xmlns:a16="http://schemas.microsoft.com/office/drawing/2014/main" id="{5273EFC6-3006-30E3-AC28-ED4776A53D83}"/>
+              </a:ext>
+            </a:extLst>
+          </p:cNvPr>
+          <p:cNvSpPr>
+            <a:spLocks noGrp="1"/>
+          </p:cNvSpPr>
+          <p:nvPr>
+            <p:ph type="sldNum" sz="quarter" idx="12"/>
+          </p:nvPr>
+        </p:nvSpPr>
+        <p:spPr/>
+        <p:txBody>
+          <a:bodyPr/>
+          <a:lstStyle/>
+          <a:p>
+            <a:fld id="{4BAA6517-F367-4EB3-AFA6-036DD26A3111}" type="slidenum">
+              <a:rPr lang="en-CA" smtClean="0"/>
+              <a:t>45</a:t>
+            </a:fld>
+            <a:endParaRPr lang="en-CA"/>
+          </a:p>
+        </p:txBody>
+      </p:sp>
+      <p:graphicFrame>
+        <p:nvGraphicFramePr>
+          <p:cNvPr id="8" name="Content Placeholder 7">
+            <a:extLst>
+              <a:ext uri="{FF2B5EF4-FFF2-40B4-BE49-F238E27FC236}">
+                <a16:creationId xmlns:a16="http://schemas.microsoft.com/office/drawing/2014/main" id="{4E5122EF-A248-5DCC-0797-283450E8ECF0}"/>
+              </a:ext>
+            </a:extLst>
+          </p:cNvPr>
+          <p:cNvGraphicFramePr>
+            <a:graphicFrameLocks noGrp="1"/>
+          </p:cNvGraphicFramePr>
+          <p:nvPr>
+            <p:ph idx="1"/>
+          </p:nvPr>
+        </p:nvGraphicFramePr>
+        <p:xfrm>
+          <a:off x="9046475" y="1912165"/>
+          <a:ext cx="2675968" cy="4023360"/>
+        </p:xfrm>
+        <a:graphic>
+          <a:graphicData uri="http://schemas.openxmlformats.org/drawingml/2006/table">
+            <a:tbl>
+              <a:tblPr bandRow="1">
+                <a:tableStyleId>{5C22544A-7EE6-4342-B048-85BDC9FD1C3A}</a:tableStyleId>
+              </a:tblPr>
+              <a:tblGrid>
+                <a:gridCol w="1337984">
+                  <a:extLst>
+                    <a:ext uri="{9D8B030D-6E8A-4147-A177-3AD203B41FA5}">
+                      <a16:colId xmlns:a16="http://schemas.microsoft.com/office/drawing/2014/main" val="917422986"/>
+                    </a:ext>
+                  </a:extLst>
+                </a:gridCol>
+                <a:gridCol w="1337984">
+                  <a:extLst>
+                    <a:ext uri="{9D8B030D-6E8A-4147-A177-3AD203B41FA5}">
+                      <a16:colId xmlns:a16="http://schemas.microsoft.com/office/drawing/2014/main" val="3736676220"/>
+                    </a:ext>
+                  </a:extLst>
+                </a:gridCol>
+              </a:tblGrid>
+              <a:tr h="370840">
+                <a:tc>
+                  <a:txBody>
+                    <a:bodyPr/>
+                    <a:lstStyle/>
+                    <a:p>
+                      <a:r>
+                        <a:rPr lang="en-US" dirty="0"/>
+                        <a:t>Number of Blood Volumes</a:t>
+                      </a:r>
+                      <a:endParaRPr lang="en-CA" dirty="0"/>
+                    </a:p>
+                  </a:txBody>
+                  <a:tcPr/>
+                </a:tc>
+                <a:tc>
+                  <a:txBody>
+                    <a:bodyPr/>
+                    <a:lstStyle/>
+                    <a:p>
+                      <a:r>
+                        <a:rPr lang="en-US" u="sng" dirty="0"/>
+                        <a:t>1E4</a:t>
+                      </a:r>
+                      <a:endParaRPr lang="en-CA" u="sng" dirty="0"/>
+                    </a:p>
+                  </a:txBody>
+                  <a:tcPr/>
+                </a:tc>
+                <a:extLst>
+                  <a:ext uri="{0D108BD9-81ED-4DB2-BD59-A6C34878D82A}">
+                    <a16:rowId xmlns:a16="http://schemas.microsoft.com/office/drawing/2014/main" val="1000427557"/>
+                  </a:ext>
+                </a:extLst>
+              </a:tr>
+              <a:tr h="355711">
+                <a:tc>
+                  <a:txBody>
+                    <a:bodyPr/>
+                    <a:lstStyle/>
+                    <a:p>
+                      <a:r>
+                        <a:rPr lang="en-US" dirty="0"/>
+                        <a:t>Time step size (s)</a:t>
+                      </a:r>
+                      <a:endParaRPr lang="en-CA" dirty="0"/>
+                    </a:p>
+                  </a:txBody>
+                  <a:tcPr/>
+                </a:tc>
+                <a:tc>
+                  <a:txBody>
+                    <a:bodyPr/>
+                    <a:lstStyle/>
+                    <a:p>
+                      <a:r>
+                        <a:rPr lang="en-US" dirty="0"/>
+                        <a:t>0.002 </a:t>
+                      </a:r>
+                      <a:endParaRPr lang="en-CA" dirty="0"/>
+                    </a:p>
+                  </a:txBody>
+                  <a:tcPr/>
+                </a:tc>
+                <a:extLst>
+                  <a:ext uri="{0D108BD9-81ED-4DB2-BD59-A6C34878D82A}">
+                    <a16:rowId xmlns:a16="http://schemas.microsoft.com/office/drawing/2014/main" val="657170188"/>
+                  </a:ext>
+                </a:extLst>
+              </a:tr>
+              <a:tr h="370840">
+                <a:tc>
+                  <a:txBody>
+                    <a:bodyPr/>
+                    <a:lstStyle/>
+                    <a:p>
+                      <a:r>
+                        <a:rPr lang="en-US" dirty="0"/>
+                        <a:t>Time to Steady State (s)</a:t>
+                      </a:r>
+                      <a:endParaRPr lang="en-CA" dirty="0"/>
+                    </a:p>
+                  </a:txBody>
+                  <a:tcPr/>
+                </a:tc>
+                <a:tc>
+                  <a:txBody>
+                    <a:bodyPr/>
+                    <a:lstStyle/>
+                    <a:p>
+                      <a:r>
+                        <a:rPr lang="en-US" dirty="0"/>
+                        <a:t>382 </a:t>
+                      </a:r>
+                      <a:endParaRPr lang="en-CA" dirty="0"/>
+                    </a:p>
+                  </a:txBody>
+                  <a:tcPr/>
+                </a:tc>
+                <a:extLst>
+                  <a:ext uri="{0D108BD9-81ED-4DB2-BD59-A6C34878D82A}">
+                    <a16:rowId xmlns:a16="http://schemas.microsoft.com/office/drawing/2014/main" val="1442426439"/>
+                  </a:ext>
+                </a:extLst>
+              </a:tr>
+              <a:tr h="370840">
+                <a:tc>
+                  <a:txBody>
+                    <a:bodyPr/>
+                    <a:lstStyle/>
+                    <a:p>
+                      <a:r>
+                        <a:rPr lang="en-US" dirty="0"/>
+                        <a:t>Delivery per Field (s)</a:t>
+                      </a:r>
+                      <a:endParaRPr lang="en-CA" dirty="0"/>
+                    </a:p>
+                  </a:txBody>
+                  <a:tcPr/>
+                </a:tc>
+                <a:tc>
+                  <a:txBody>
+                    <a:bodyPr/>
+                    <a:lstStyle/>
+                    <a:p>
+                      <a:r>
+                        <a:rPr lang="en-US" dirty="0"/>
+                        <a:t>408.6</a:t>
+                      </a:r>
+                      <a:endParaRPr lang="en-CA" dirty="0"/>
+                    </a:p>
+                  </a:txBody>
+                  <a:tcPr/>
+                </a:tc>
+                <a:extLst>
+                  <a:ext uri="{0D108BD9-81ED-4DB2-BD59-A6C34878D82A}">
+                    <a16:rowId xmlns:a16="http://schemas.microsoft.com/office/drawing/2014/main" val="3059569768"/>
+                  </a:ext>
+                </a:extLst>
+              </a:tr>
+              <a:tr h="370840">
+                <a:tc>
+                  <a:txBody>
+                    <a:bodyPr/>
+                    <a:lstStyle/>
+                    <a:p>
+                      <a:r>
+                        <a:rPr lang="en-US" dirty="0"/>
+                        <a:t>Time to “Flip” Patient (s)</a:t>
+                      </a:r>
+                      <a:endParaRPr lang="en-CA" dirty="0"/>
+                    </a:p>
+                  </a:txBody>
+                  <a:tcPr/>
+                </a:tc>
+                <a:tc>
+                  <a:txBody>
+                    <a:bodyPr/>
+                    <a:lstStyle/>
+                    <a:p>
+                      <a:r>
+                        <a:rPr lang="en-US" dirty="0"/>
+                        <a:t>900 </a:t>
+                      </a:r>
+                      <a:endParaRPr lang="en-CA" dirty="0"/>
+                    </a:p>
+                  </a:txBody>
+                  <a:tcPr/>
+                </a:tc>
+                <a:extLst>
+                  <a:ext uri="{0D108BD9-81ED-4DB2-BD59-A6C34878D82A}">
+                    <a16:rowId xmlns:a16="http://schemas.microsoft.com/office/drawing/2014/main" val="3426520378"/>
+                  </a:ext>
+                </a:extLst>
+              </a:tr>
+            </a:tbl>
+          </a:graphicData>
+        </a:graphic>
+      </p:graphicFrame>
+      <mc:AlternateContent xmlns:mc="http://schemas.openxmlformats.org/markup-compatibility/2006">
+        <mc:Choice xmlns:a14="http://schemas.microsoft.com/office/drawing/2010/main" Requires="a14">
+          <p:sp>
+            <p:nvSpPr>
+              <p:cNvPr id="9" name="TextBox 8">
+                <a:extLst>
+                  <a:ext uri="{FF2B5EF4-FFF2-40B4-BE49-F238E27FC236}">
+                    <a16:creationId xmlns:a16="http://schemas.microsoft.com/office/drawing/2014/main" id="{2D065BF3-4A40-AB02-20A1-C039CFC400CF}"/>
+                  </a:ext>
+                </a:extLst>
+              </p:cNvPr>
+              <p:cNvSpPr txBox="1"/>
+              <p:nvPr/>
+            </p:nvSpPr>
+            <p:spPr>
+              <a:xfrm>
+                <a:off x="1210962" y="1960605"/>
+                <a:ext cx="5909566" cy="3322063"/>
+              </a:xfrm>
+              <a:prstGeom prst="rect">
+                <a:avLst/>
+              </a:prstGeom>
+              <a:noFill/>
+            </p:spPr>
+            <p:txBody>
+              <a:bodyPr wrap="none" rtlCol="0">
+                <a:spAutoFit/>
+              </a:bodyPr>
+              <a:lstStyle/>
+              <a:p>
+                <a:pPr marL="285750" indent="-285750">
+                  <a:buFont typeface="Arial" panose="020B0604020202020204" pitchFamily="34" charset="0"/>
+                  <a:buChar char="•"/>
+                </a:pPr>
+                <a:r>
+                  <a:rPr lang="en-US" dirty="0"/>
+                  <a:t>Monte Carlo</a:t>
+                </a:r>
+              </a:p>
+              <a:p>
+                <a:pPr marL="742950" lvl="1" indent="-285750">
+                  <a:buFont typeface="Arial" panose="020B0604020202020204" pitchFamily="34" charset="0"/>
+                  <a:buChar char="•"/>
+                </a:pPr>
+                <a:r>
+                  <a:rPr lang="en-US" dirty="0"/>
+                  <a:t>Ran AP and PA fields</a:t>
+                </a:r>
+              </a:p>
+              <a:p>
+                <a:pPr marL="742950" lvl="1" indent="-285750">
+                  <a:buFont typeface="Arial" panose="020B0604020202020204" pitchFamily="34" charset="0"/>
+                  <a:buChar char="•"/>
+                </a:pPr>
+                <a:r>
+                  <a:rPr lang="en-US" dirty="0"/>
+                  <a:t>2 billion particles each</a:t>
+                </a:r>
+              </a:p>
+              <a:p>
+                <a:pPr marL="742950" lvl="1" indent="-285750">
+                  <a:buFont typeface="Arial" panose="020B0604020202020204" pitchFamily="34" charset="0"/>
+                  <a:buChar char="•"/>
+                </a:pPr>
+                <a:r>
+                  <a:rPr lang="en-US" dirty="0"/>
+                  <a:t>Produced 4D Dose files with vessels as VOI</a:t>
+                </a:r>
+              </a:p>
+              <a:p>
+                <a:pPr marL="742950" lvl="1" indent="-285750">
+                  <a:buFont typeface="Arial" panose="020B0604020202020204" pitchFamily="34" charset="0"/>
+                  <a:buChar char="•"/>
+                </a:pPr>
+                <a:endParaRPr lang="en-US" dirty="0"/>
+              </a:p>
+              <a:p>
+                <a:pPr marL="285750" indent="-285750">
+                  <a:buFont typeface="Arial" panose="020B0604020202020204" pitchFamily="34" charset="0"/>
+                  <a:buChar char="•"/>
+                </a:pPr>
+                <a:r>
+                  <a:rPr lang="en-US" dirty="0"/>
+                  <a:t>Blood Flow Simulation</a:t>
+                </a:r>
+              </a:p>
+              <a:p>
+                <a:pPr marL="742950" lvl="1" indent="-285750">
+                  <a:buFont typeface="Arial" panose="020B0604020202020204" pitchFamily="34" charset="0"/>
+                  <a:buChar char="•"/>
+                </a:pPr>
+                <a:r>
+                  <a:rPr lang="en-US" dirty="0"/>
+                  <a:t>Ran a smaller number of particles (&lt;1E5)</a:t>
+                </a:r>
+              </a:p>
+              <a:p>
+                <a:pPr marL="742950" lvl="1" indent="-285750">
+                  <a:buFont typeface="Arial" panose="020B0604020202020204" pitchFamily="34" charset="0"/>
+                  <a:buChar char="•"/>
+                </a:pPr>
+                <a:r>
+                  <a:rPr lang="en-US" dirty="0"/>
+                  <a:t>Only tracking dose delivered within the blood vessels</a:t>
+                </a:r>
+              </a:p>
+              <a:p>
+                <a:pPr marL="742950" lvl="1" indent="-285750">
+                  <a:buFont typeface="Arial" panose="020B0604020202020204" pitchFamily="34" charset="0"/>
+                  <a:buChar char="•"/>
+                </a:pPr>
+                <a:r>
+                  <a:rPr lang="en-US" dirty="0"/>
+                  <a:t>Weighted dose results with:</a:t>
+                </a:r>
+              </a:p>
+              <a:p>
+                <a:pPr marL="1200150" lvl="2" indent="-285750">
+                  <a:buFont typeface="Arial" panose="020B0604020202020204" pitchFamily="34" charset="0"/>
+                  <a:buChar char="•"/>
+                </a:pPr>
+                <a14:m>
+                  <m:oMath xmlns:m="http://schemas.openxmlformats.org/officeDocument/2006/math">
+                    <m:r>
+                      <a:rPr lang="en-US" sz="2800" b="0" i="1" smtClean="0">
+                        <a:latin typeface="Cambria Math" panose="02040503050406030204" pitchFamily="18" charset="0"/>
+                      </a:rPr>
+                      <m:t>𝑤</m:t>
+                    </m:r>
+                    <m:r>
+                      <a:rPr lang="en-US" sz="2800" b="0" i="1" smtClean="0">
+                        <a:latin typeface="Cambria Math" panose="02040503050406030204" pitchFamily="18" charset="0"/>
+                      </a:rPr>
+                      <m:t>= </m:t>
+                    </m:r>
+                    <m:f>
+                      <m:fPr>
+                        <m:ctrlPr>
+                          <a:rPr lang="en-US" sz="2800" b="0" i="1" smtClean="0">
+                            <a:latin typeface="Cambria Math" panose="02040503050406030204" pitchFamily="18" charset="0"/>
+                          </a:rPr>
+                        </m:ctrlPr>
+                      </m:fPr>
+                      <m:num>
+                        <m:r>
+                          <a:rPr lang="en-US" sz="2800" b="0" i="1" smtClean="0">
+                            <a:latin typeface="Cambria Math" panose="02040503050406030204" pitchFamily="18" charset="0"/>
+                          </a:rPr>
+                          <m:t>2 </m:t>
+                        </m:r>
+                        <m:r>
+                          <a:rPr lang="en-US" sz="2800" b="0" i="1" smtClean="0">
+                            <a:latin typeface="Cambria Math" panose="02040503050406030204" pitchFamily="18" charset="0"/>
+                            <a:ea typeface="Cambria Math" panose="02040503050406030204" pitchFamily="18" charset="0"/>
+                          </a:rPr>
+                          <m:t>∙ </m:t>
+                        </m:r>
+                        <m:sSub>
+                          <m:sSubPr>
+                            <m:ctrlPr>
+                              <a:rPr lang="en-US" sz="2800" b="0" i="1" smtClean="0">
+                                <a:latin typeface="Cambria Math" panose="02040503050406030204" pitchFamily="18" charset="0"/>
+                              </a:rPr>
+                            </m:ctrlPr>
+                          </m:sSubPr>
+                          <m:e>
+                            <m:r>
+                              <a:rPr lang="en-US" sz="2800" b="0" i="1" smtClean="0">
+                                <a:latin typeface="Cambria Math" panose="02040503050406030204" pitchFamily="18" charset="0"/>
+                              </a:rPr>
+                              <m:t>𝑇</m:t>
+                            </m:r>
+                          </m:e>
+                          <m:sub>
+                            <m:r>
+                              <a:rPr lang="en-US" sz="2800" b="0" i="1" smtClean="0">
+                                <a:latin typeface="Cambria Math" panose="02040503050406030204" pitchFamily="18" charset="0"/>
+                              </a:rPr>
+                              <m:t>𝑓𝑖𝑒𝑙𝑑</m:t>
+                            </m:r>
+                          </m:sub>
+                        </m:sSub>
+                      </m:num>
+                      <m:den>
+                        <m:sSub>
+                          <m:sSubPr>
+                            <m:ctrlPr>
+                              <a:rPr lang="en-US" sz="2800" b="0" i="1" smtClean="0">
+                                <a:latin typeface="Cambria Math" panose="02040503050406030204" pitchFamily="18" charset="0"/>
+                              </a:rPr>
+                            </m:ctrlPr>
+                          </m:sSubPr>
+                          <m:e>
+                            <m:r>
+                              <a:rPr lang="en-US" sz="2800" b="0" i="1" smtClean="0">
+                                <a:latin typeface="Cambria Math" panose="02040503050406030204" pitchFamily="18" charset="0"/>
+                              </a:rPr>
+                              <m:t>𝑇</m:t>
+                            </m:r>
+                          </m:e>
+                          <m:sub>
+                            <m:r>
+                              <a:rPr lang="en-US" sz="2800" b="0" i="1" smtClean="0">
+                                <a:latin typeface="Cambria Math" panose="02040503050406030204" pitchFamily="18" charset="0"/>
+                              </a:rPr>
+                              <m:t>𝑒𝑥𝑝𝑜𝑠𝑢𝑟𝑒</m:t>
+                            </m:r>
+                          </m:sub>
+                        </m:sSub>
+                      </m:den>
+                    </m:f>
+                  </m:oMath>
+                </a14:m>
+                <a:endParaRPr lang="en-US" sz="2800" dirty="0"/>
+              </a:p>
+            </p:txBody>
+          </p:sp>
+        </mc:Choice>
+        <mc:Fallback>
+          <p:sp>
+            <p:nvSpPr>
+              <p:cNvPr id="9" name="TextBox 8">
+                <a:extLst>
+                  <a:ext uri="{FF2B5EF4-FFF2-40B4-BE49-F238E27FC236}">
+                    <a16:creationId xmlns:a16="http://schemas.microsoft.com/office/drawing/2014/main" id="{2D065BF3-4A40-AB02-20A1-C039CFC400CF}"/>
+                  </a:ext>
+                </a:extLst>
+              </p:cNvPr>
+              <p:cNvSpPr txBox="1">
+                <a:spLocks noRot="1" noChangeAspect="1" noMove="1" noResize="1" noEditPoints="1" noAdjustHandles="1" noChangeArrowheads="1" noChangeShapeType="1" noTextEdit="1"/>
+              </p:cNvSpPr>
+              <p:nvPr/>
+            </p:nvSpPr>
+            <p:spPr>
+              <a:xfrm>
+                <a:off x="1210962" y="1960605"/>
+                <a:ext cx="5909566" cy="3322063"/>
+              </a:xfrm>
+              <a:prstGeom prst="rect">
+                <a:avLst/>
+              </a:prstGeom>
+              <a:blipFill>
+                <a:blip r:embed="rId2"/>
+                <a:stretch>
+                  <a:fillRect l="-722" t="-1101" r="-206"/>
+                </a:stretch>
+              </a:blipFill>
+            </p:spPr>
+            <p:txBody>
+              <a:bodyPr/>
+              <a:lstStyle/>
+              <a:p>
+                <a:r>
+                  <a:rPr lang="en-CA">
+                    <a:noFill/>
+                  </a:rPr>
+                  <a:t> </a:t>
+                </a:r>
+              </a:p>
+            </p:txBody>
+          </p:sp>
+        </mc:Fallback>
+      </mc:AlternateContent>
+    </p:spTree>
+    <p:extLst>
+      <p:ext uri="{BB962C8B-B14F-4D97-AF65-F5344CB8AC3E}">
+        <p14:creationId xmlns:p14="http://schemas.microsoft.com/office/powerpoint/2010/main" val="1679021110"/>
+      </p:ext>
+    </p:extLst>
+  </p:cSld>
+  <p:clrMapOvr>
+    <a:masterClrMapping/>
+  </p:clrMapOvr>
+</p:sld>
+</file>
+
+<file path=ppt/slides/slide46.xml><?xml version="1.0" encoding="utf-8"?>
 <p:sld xmlns:a="http://schemas.openxmlformats.org/drawingml/2006/main" xmlns:r="http://schemas.openxmlformats.org/officeDocument/2006/relationships" xmlns:p="http://schemas.openxmlformats.org/presentationml/2006/main">
   <p:cSld>
     <p:spTree>
@@ -31076,7 +32152,7 @@
           <p:cNvPr id="2" name="Title 1">
             <a:extLst>
               <a:ext uri="{FF2B5EF4-FFF2-40B4-BE49-F238E27FC236}">
-                <a16:creationId xmlns:a16="http://schemas.microsoft.com/office/drawing/2014/main" id="{3EDEF5C6-E751-BA09-05B4-81E901FCDD87}"/>
+                <a16:creationId xmlns:a16="http://schemas.microsoft.com/office/drawing/2014/main" id="{9042161B-7CDF-F28C-41E7-F4D22FAADFCA}"/>
               </a:ext>
             </a:extLst>
           </p:cNvPr>
@@ -31094,7 +32170,7 @@
           <a:p>
             <a:r>
               <a:rPr lang="en-CA" dirty="0"/>
-              <a:t>Publications Anticipated and Issues</a:t>
+              <a:t>Anticaption for Projects 3</a:t>
             </a:r>
           </a:p>
         </p:txBody>
@@ -31104,7 +32180,7 @@
           <p:cNvPr id="3" name="Content Placeholder 2">
             <a:extLst>
               <a:ext uri="{FF2B5EF4-FFF2-40B4-BE49-F238E27FC236}">
-                <a16:creationId xmlns:a16="http://schemas.microsoft.com/office/drawing/2014/main" id="{F471E1CA-CE51-C89C-79CA-FD3BEA12F86E}"/>
+                <a16:creationId xmlns:a16="http://schemas.microsoft.com/office/drawing/2014/main" id="{6E3F26EC-8641-6786-F377-F9E210E48069}"/>
               </a:ext>
             </a:extLst>
           </p:cNvPr>
@@ -31122,25 +32198,35 @@
           <a:p>
             <a:r>
               <a:rPr lang="en-US" dirty="0"/>
-              <a:t>Submitted Project 1 – Blood Flow Model to Physics in Medicine &amp; Biology and the paper was rejected.</a:t>
-            </a:r>
-          </a:p>
-          <a:p>
+              <a:t>Model the following:</a:t>
+            </a:r>
+          </a:p>
+          <a:p>
+            <a:pPr lvl="1"/>
             <a:r>
               <a:rPr lang="en-US" dirty="0"/>
-              <a:t>The </a:t>
-            </a:r>
-            <a:r>
-              <a:rPr lang="en-US" u="sng" dirty="0"/>
-              <a:t>lack of dosimetric results </a:t>
-            </a:r>
+              <a:t>Extended POP: most common in Canada as of 2017  </a:t>
+            </a:r>
+          </a:p>
+          <a:p>
+            <a:pPr lvl="1"/>
             <a:r>
               <a:rPr lang="en-US" dirty="0"/>
-              <a:t>was a significant piece of feedback. </a:t>
-            </a:r>
-          </a:p>
-          <a:p>
-            <a:endParaRPr lang="en-US" dirty="0"/>
+              <a:t>TBI VMAT: as delivered at BC Cancer – Vancouver</a:t>
+            </a:r>
+          </a:p>
+          <a:p>
+            <a:pPr lvl="2"/>
+            <a:r>
+              <a:rPr lang="en-US" dirty="0"/>
+              <a:t>Q: Are their variables we can vary during the treatment planning process?</a:t>
+            </a:r>
+          </a:p>
+          <a:p>
+            <a:r>
+              <a:rPr lang="en-CA" dirty="0"/>
+              <a:t>Compare the standard deviation of the dose to the BVs for all treatments</a:t>
+            </a:r>
           </a:p>
         </p:txBody>
       </p:sp>
@@ -31149,7 +32235,7 @@
           <p:cNvPr id="4" name="Slide Number Placeholder 3">
             <a:extLst>
               <a:ext uri="{FF2B5EF4-FFF2-40B4-BE49-F238E27FC236}">
-                <a16:creationId xmlns:a16="http://schemas.microsoft.com/office/drawing/2014/main" id="{9661F0E0-CD0C-229E-5D94-ADA60FEBC43E}"/>
+                <a16:creationId xmlns:a16="http://schemas.microsoft.com/office/drawing/2014/main" id="{13756F0E-AACC-4950-1B4D-D99BD134EFD4}"/>
               </a:ext>
             </a:extLst>
           </p:cNvPr>
@@ -31167,182 +32253,51 @@
           <a:p>
             <a:fld id="{4BAA6517-F367-4EB3-AFA6-036DD26A3111}" type="slidenum">
               <a:rPr lang="en-CA" smtClean="0"/>
-              <a:t>45</a:t>
+              <a:t>46</a:t>
             </a:fld>
             <a:endParaRPr lang="en-CA"/>
+          </a:p>
+        </p:txBody>
+      </p:sp>
+      <p:sp>
+        <p:nvSpPr>
+          <p:cNvPr id="6" name="TextBox 5">
+            <a:extLst>
+              <a:ext uri="{FF2B5EF4-FFF2-40B4-BE49-F238E27FC236}">
+                <a16:creationId xmlns:a16="http://schemas.microsoft.com/office/drawing/2014/main" id="{1E5CA64C-3F42-93AF-F7C6-81ACDD9AC1CE}"/>
+              </a:ext>
+            </a:extLst>
+          </p:cNvPr>
+          <p:cNvSpPr txBox="1"/>
+          <p:nvPr/>
+        </p:nvSpPr>
+        <p:spPr>
+          <a:xfrm>
+            <a:off x="-76201" y="6411514"/>
+            <a:ext cx="10620376" cy="461665"/>
+          </a:xfrm>
+          <a:prstGeom prst="rect">
+            <a:avLst/>
+          </a:prstGeom>
+          <a:noFill/>
+        </p:spPr>
+        <p:txBody>
+          <a:bodyPr wrap="square">
+            <a:spAutoFit/>
+          </a:bodyPr>
+          <a:lstStyle/>
+          <a:p>
+            <a:r>
+              <a:rPr lang="en-US" sz="1200" dirty="0"/>
+              <a:t>R. C. N. Studinski, D. J. Fraser, R. S. Samant, and M. S. MacPherson, “Current practice in total-body irradiation: results of a Canada-wide survey,” Curr Oncol, vol. 24, no. 3, pp. 181–186, June 2017.</a:t>
+            </a:r>
           </a:p>
         </p:txBody>
       </p:sp>
     </p:spTree>
     <p:extLst>
       <p:ext uri="{BB962C8B-B14F-4D97-AF65-F5344CB8AC3E}">
-        <p14:creationId xmlns:p14="http://schemas.microsoft.com/office/powerpoint/2010/main" val="3593878075"/>
-      </p:ext>
-    </p:extLst>
-  </p:cSld>
-  <p:clrMapOvr>
-    <a:masterClrMapping/>
-  </p:clrMapOvr>
-</p:sld>
-</file>
-
-<file path=ppt/slides/slide46.xml><?xml version="1.0" encoding="utf-8"?>
-<p:sld xmlns:a="http://schemas.openxmlformats.org/drawingml/2006/main" xmlns:r="http://schemas.openxmlformats.org/officeDocument/2006/relationships" xmlns:p="http://schemas.openxmlformats.org/presentationml/2006/main">
-  <p:cSld>
-    <p:spTree>
-      <p:nvGrpSpPr>
-        <p:cNvPr id="1" name="">
-          <a:extLst>
-            <a:ext uri="{FF2B5EF4-FFF2-40B4-BE49-F238E27FC236}">
-              <a16:creationId xmlns:a16="http://schemas.microsoft.com/office/drawing/2014/main" id="{240DDD84-5641-F71A-C05D-536E601B5101}"/>
-            </a:ext>
-          </a:extLst>
-        </p:cNvPr>
-        <p:cNvGrpSpPr/>
-        <p:nvPr/>
-      </p:nvGrpSpPr>
-      <p:grpSpPr>
-        <a:xfrm>
-          <a:off x="0" y="0"/>
-          <a:ext cx="0" cy="0"/>
-          <a:chOff x="0" y="0"/>
-          <a:chExt cx="0" cy="0"/>
-        </a:xfrm>
-      </p:grpSpPr>
-      <p:sp>
-        <p:nvSpPr>
-          <p:cNvPr id="2" name="Title 1">
-            <a:extLst>
-              <a:ext uri="{FF2B5EF4-FFF2-40B4-BE49-F238E27FC236}">
-                <a16:creationId xmlns:a16="http://schemas.microsoft.com/office/drawing/2014/main" id="{244D802E-A03A-8FA2-6ADC-CCED3F92AB51}"/>
-              </a:ext>
-            </a:extLst>
-          </p:cNvPr>
-          <p:cNvSpPr>
-            <a:spLocks noGrp="1"/>
-          </p:cNvSpPr>
-          <p:nvPr>
-            <p:ph type="title"/>
-          </p:nvPr>
-        </p:nvSpPr>
-        <p:spPr/>
-        <p:txBody>
-          <a:bodyPr/>
-          <a:lstStyle/>
-          <a:p>
-            <a:r>
-              <a:rPr lang="en-CA" dirty="0"/>
-              <a:t>Publications Anticipated and Issues</a:t>
-            </a:r>
-          </a:p>
-        </p:txBody>
-      </p:sp>
-      <p:sp>
-        <p:nvSpPr>
-          <p:cNvPr id="3" name="Content Placeholder 2">
-            <a:extLst>
-              <a:ext uri="{FF2B5EF4-FFF2-40B4-BE49-F238E27FC236}">
-                <a16:creationId xmlns:a16="http://schemas.microsoft.com/office/drawing/2014/main" id="{D78AFEF8-EA74-A617-8AE6-3A2063A11381}"/>
-              </a:ext>
-            </a:extLst>
-          </p:cNvPr>
-          <p:cNvSpPr>
-            <a:spLocks noGrp="1"/>
-          </p:cNvSpPr>
-          <p:nvPr>
-            <p:ph idx="1"/>
-          </p:nvPr>
-        </p:nvSpPr>
-        <p:spPr/>
-        <p:txBody>
-          <a:bodyPr/>
-          <a:lstStyle/>
-          <a:p>
-            <a:r>
-              <a:rPr lang="en-US" dirty="0"/>
-              <a:t>Submitted Project 1 – Blood Flow Model to Physics in Medicine &amp; Biology and the paper was rejected.</a:t>
-            </a:r>
-          </a:p>
-          <a:p>
-            <a:r>
-              <a:rPr lang="en-US" dirty="0"/>
-              <a:t>The </a:t>
-            </a:r>
-            <a:r>
-              <a:rPr lang="en-US" u="sng" dirty="0"/>
-              <a:t>lack of dosimetric results </a:t>
-            </a:r>
-            <a:r>
-              <a:rPr lang="en-US" dirty="0"/>
-              <a:t>was a significant piece of feedback. </a:t>
-            </a:r>
-          </a:p>
-          <a:p>
-            <a:r>
-              <a:rPr lang="en-US" dirty="0"/>
-              <a:t>Options:</a:t>
-            </a:r>
-          </a:p>
-          <a:p>
-            <a:pPr marL="457200" indent="-457200">
-              <a:buFont typeface="+mj-lt"/>
-              <a:buAutoNum type="arabicPeriod"/>
-            </a:pPr>
-            <a:r>
-              <a:rPr lang="en-US" dirty="0"/>
-              <a:t>Re-submit with additional focus on validation metrics (other piece of feedback)</a:t>
-            </a:r>
-          </a:p>
-          <a:p>
-            <a:pPr marL="457200" indent="-457200">
-              <a:buFont typeface="+mj-lt"/>
-              <a:buAutoNum type="arabicPeriod"/>
-            </a:pPr>
-            <a:r>
-              <a:rPr lang="en-US" dirty="0"/>
-              <a:t>Combine Project 1 and Project 2 into a </a:t>
-            </a:r>
-            <a:r>
-              <a:rPr lang="en-US"/>
-              <a:t>singular publication</a:t>
-            </a:r>
-            <a:endParaRPr lang="en-US" dirty="0"/>
-          </a:p>
-        </p:txBody>
-      </p:sp>
-      <p:sp>
-        <p:nvSpPr>
-          <p:cNvPr id="4" name="Slide Number Placeholder 3">
-            <a:extLst>
-              <a:ext uri="{FF2B5EF4-FFF2-40B4-BE49-F238E27FC236}">
-                <a16:creationId xmlns:a16="http://schemas.microsoft.com/office/drawing/2014/main" id="{C35B1131-8F79-7AEC-7E17-ECEDC79F99D0}"/>
-              </a:ext>
-            </a:extLst>
-          </p:cNvPr>
-          <p:cNvSpPr>
-            <a:spLocks noGrp="1"/>
-          </p:cNvSpPr>
-          <p:nvPr>
-            <p:ph type="sldNum" sz="quarter" idx="12"/>
-          </p:nvPr>
-        </p:nvSpPr>
-        <p:spPr/>
-        <p:txBody>
-          <a:bodyPr/>
-          <a:lstStyle/>
-          <a:p>
-            <a:fld id="{4BAA6517-F367-4EB3-AFA6-036DD26A3111}" type="slidenum">
-              <a:rPr lang="en-CA" smtClean="0"/>
-              <a:t>46</a:t>
-            </a:fld>
-            <a:endParaRPr lang="en-CA"/>
-          </a:p>
-        </p:txBody>
-      </p:sp>
-    </p:spTree>
-    <p:extLst>
-      <p:ext uri="{BB962C8B-B14F-4D97-AF65-F5344CB8AC3E}">
-        <p14:creationId xmlns:p14="http://schemas.microsoft.com/office/powerpoint/2010/main" val="1362057303"/>
+        <p14:creationId xmlns:p14="http://schemas.microsoft.com/office/powerpoint/2010/main" val="1703520566"/>
       </p:ext>
     </p:extLst>
   </p:cSld>
@@ -31374,7 +32329,7 @@
           <p:cNvPr id="2" name="Title 1">
             <a:extLst>
               <a:ext uri="{FF2B5EF4-FFF2-40B4-BE49-F238E27FC236}">
-                <a16:creationId xmlns:a16="http://schemas.microsoft.com/office/drawing/2014/main" id="{F535EC0F-8FB7-5780-47B9-FF7762017EC9}"/>
+                <a16:creationId xmlns:a16="http://schemas.microsoft.com/office/drawing/2014/main" id="{3EDEF5C6-E751-BA09-05B4-81E901FCDD87}"/>
               </a:ext>
             </a:extLst>
           </p:cNvPr>
@@ -31382,37 +32337,7 @@
             <a:spLocks noGrp="1"/>
           </p:cNvSpPr>
           <p:nvPr>
-            <p:ph type="ctrTitle"/>
-          </p:nvPr>
-        </p:nvSpPr>
-        <p:spPr/>
-        <p:txBody>
-          <a:bodyPr>
-            <a:normAutofit fontScale="90000"/>
-          </a:bodyPr>
-          <a:lstStyle/>
-          <a:p>
-            <a:r>
-              <a:rPr lang="en-CA" dirty="0"/>
-              <a:t>Big Question: Do you feel like the outlined work meets the requirement to fill the body of my thesis?</a:t>
-            </a:r>
-          </a:p>
-        </p:txBody>
-      </p:sp>
-      <p:sp>
-        <p:nvSpPr>
-          <p:cNvPr id="3" name="Subtitle 2">
-            <a:extLst>
-              <a:ext uri="{FF2B5EF4-FFF2-40B4-BE49-F238E27FC236}">
-                <a16:creationId xmlns:a16="http://schemas.microsoft.com/office/drawing/2014/main" id="{AE81CEBC-BCCE-7303-A4F1-D1D30EB13CDC}"/>
-              </a:ext>
-            </a:extLst>
-          </p:cNvPr>
-          <p:cNvSpPr>
-            <a:spLocks noGrp="1"/>
-          </p:cNvSpPr>
-          <p:nvPr>
-            <p:ph type="subTitle" idx="1"/>
+            <p:ph type="title"/>
           </p:nvPr>
         </p:nvSpPr>
         <p:spPr/>
@@ -31420,7 +32345,55 @@
           <a:bodyPr/>
           <a:lstStyle/>
           <a:p>
-            <a:endParaRPr lang="en-CA" dirty="0"/>
+            <a:r>
+              <a:rPr lang="en-CA" dirty="0"/>
+              <a:t>Publications Anticipated and Issues</a:t>
+            </a:r>
+          </a:p>
+        </p:txBody>
+      </p:sp>
+      <p:sp>
+        <p:nvSpPr>
+          <p:cNvPr id="3" name="Content Placeholder 2">
+            <a:extLst>
+              <a:ext uri="{FF2B5EF4-FFF2-40B4-BE49-F238E27FC236}">
+                <a16:creationId xmlns:a16="http://schemas.microsoft.com/office/drawing/2014/main" id="{F471E1CA-CE51-C89C-79CA-FD3BEA12F86E}"/>
+              </a:ext>
+            </a:extLst>
+          </p:cNvPr>
+          <p:cNvSpPr>
+            <a:spLocks noGrp="1"/>
+          </p:cNvSpPr>
+          <p:nvPr>
+            <p:ph idx="1"/>
+          </p:nvPr>
+        </p:nvSpPr>
+        <p:spPr/>
+        <p:txBody>
+          <a:bodyPr/>
+          <a:lstStyle/>
+          <a:p>
+            <a:r>
+              <a:rPr lang="en-US" dirty="0"/>
+              <a:t>Submitted Project 1 – Blood Flow Model to Physics in Medicine &amp; Biology and the paper was rejected.</a:t>
+            </a:r>
+          </a:p>
+          <a:p>
+            <a:r>
+              <a:rPr lang="en-US" dirty="0"/>
+              <a:t>The </a:t>
+            </a:r>
+            <a:r>
+              <a:rPr lang="en-US" u="sng" dirty="0"/>
+              <a:t>lack of dosimetric results </a:t>
+            </a:r>
+            <a:r>
+              <a:rPr lang="en-US" dirty="0"/>
+              <a:t>was a significant piece of feedback. </a:t>
+            </a:r>
+          </a:p>
+          <a:p>
+            <a:endParaRPr lang="en-US" dirty="0"/>
           </a:p>
         </p:txBody>
       </p:sp>
@@ -31429,7 +32402,7 @@
           <p:cNvPr id="4" name="Slide Number Placeholder 3">
             <a:extLst>
               <a:ext uri="{FF2B5EF4-FFF2-40B4-BE49-F238E27FC236}">
-                <a16:creationId xmlns:a16="http://schemas.microsoft.com/office/drawing/2014/main" id="{EA34D409-7197-5D88-7B2A-5228A145AB20}"/>
+                <a16:creationId xmlns:a16="http://schemas.microsoft.com/office/drawing/2014/main" id="{9661F0E0-CD0C-229E-5D94-ADA60FEBC43E}"/>
               </a:ext>
             </a:extLst>
           </p:cNvPr>
@@ -31456,7 +32429,7 @@
     </p:spTree>
     <p:extLst>
       <p:ext uri="{BB962C8B-B14F-4D97-AF65-F5344CB8AC3E}">
-        <p14:creationId xmlns:p14="http://schemas.microsoft.com/office/powerpoint/2010/main" val="3042671859"/>
+        <p14:creationId xmlns:p14="http://schemas.microsoft.com/office/powerpoint/2010/main" val="3593878075"/>
       </p:ext>
     </p:extLst>
   </p:cSld>
@@ -31471,7 +32444,13 @@
   <p:cSld>
     <p:spTree>
       <p:nvGrpSpPr>
-        <p:cNvPr id="1" name=""/>
+        <p:cNvPr id="1" name="">
+          <a:extLst>
+            <a:ext uri="{FF2B5EF4-FFF2-40B4-BE49-F238E27FC236}">
+              <a16:creationId xmlns:a16="http://schemas.microsoft.com/office/drawing/2014/main" id="{240DDD84-5641-F71A-C05D-536E601B5101}"/>
+            </a:ext>
+          </a:extLst>
+        </p:cNvPr>
         <p:cNvGrpSpPr/>
         <p:nvPr/>
       </p:nvGrpSpPr>
@@ -31488,7 +32467,7 @@
           <p:cNvPr id="2" name="Title 1">
             <a:extLst>
               <a:ext uri="{FF2B5EF4-FFF2-40B4-BE49-F238E27FC236}">
-                <a16:creationId xmlns:a16="http://schemas.microsoft.com/office/drawing/2014/main" id="{E278983D-EBB6-683C-94AD-CAED3B799030}"/>
+                <a16:creationId xmlns:a16="http://schemas.microsoft.com/office/drawing/2014/main" id="{244D802E-A03A-8FA2-6ADC-CCED3F92AB51}"/>
               </a:ext>
             </a:extLst>
           </p:cNvPr>
@@ -31506,17 +32485,95 @@
           <a:p>
             <a:r>
               <a:rPr lang="en-CA" dirty="0"/>
-              <a:t>Thank you.</a:t>
+              <a:t>Publications Anticipated and Issues</a:t>
             </a:r>
           </a:p>
         </p:txBody>
       </p:sp>
       <p:sp>
         <p:nvSpPr>
-          <p:cNvPr id="3" name="Slide Number Placeholder 2">
-            <a:extLst>
-              <a:ext uri="{FF2B5EF4-FFF2-40B4-BE49-F238E27FC236}">
-                <a16:creationId xmlns:a16="http://schemas.microsoft.com/office/drawing/2014/main" id="{07CB0118-3CE2-03A0-E7ED-D643FAD19369}"/>
+          <p:cNvPr id="3" name="Content Placeholder 2">
+            <a:extLst>
+              <a:ext uri="{FF2B5EF4-FFF2-40B4-BE49-F238E27FC236}">
+                <a16:creationId xmlns:a16="http://schemas.microsoft.com/office/drawing/2014/main" id="{D78AFEF8-EA74-A617-8AE6-3A2063A11381}"/>
+              </a:ext>
+            </a:extLst>
+          </p:cNvPr>
+          <p:cNvSpPr>
+            <a:spLocks noGrp="1"/>
+          </p:cNvSpPr>
+          <p:nvPr>
+            <p:ph idx="1"/>
+          </p:nvPr>
+        </p:nvSpPr>
+        <p:spPr/>
+        <p:txBody>
+          <a:bodyPr/>
+          <a:lstStyle/>
+          <a:p>
+            <a:r>
+              <a:rPr lang="en-US" dirty="0"/>
+              <a:t>Submitted Project 1 – Blood Flow Model to Physics in Medicine &amp; Biology and the paper was rejected.</a:t>
+            </a:r>
+          </a:p>
+          <a:p>
+            <a:r>
+              <a:rPr lang="en-US" dirty="0"/>
+              <a:t>The </a:t>
+            </a:r>
+            <a:r>
+              <a:rPr lang="en-US" u="sng" dirty="0"/>
+              <a:t>lack of dosimetric results </a:t>
+            </a:r>
+            <a:r>
+              <a:rPr lang="en-US" dirty="0"/>
+              <a:t>was a significant piece of feedback. </a:t>
+            </a:r>
+          </a:p>
+          <a:p>
+            <a:r>
+              <a:rPr lang="en-US" dirty="0"/>
+              <a:t>Options:</a:t>
+            </a:r>
+          </a:p>
+          <a:p>
+            <a:pPr marL="457200" indent="-457200">
+              <a:buClr>
+                <a:schemeClr val="accent1">
+                  <a:lumMod val="50000"/>
+                </a:schemeClr>
+              </a:buClr>
+              <a:buFont typeface="+mj-lt"/>
+              <a:buAutoNum type="arabicPeriod"/>
+            </a:pPr>
+            <a:r>
+              <a:rPr lang="en-US" dirty="0"/>
+              <a:t>Re-submit with additional focus on validation metrics (other piece of feedback)</a:t>
+            </a:r>
+          </a:p>
+          <a:p>
+            <a:pPr marL="457200" indent="-457200">
+              <a:buClr>
+                <a:schemeClr val="accent1">
+                  <a:lumMod val="50000"/>
+                </a:schemeClr>
+              </a:buClr>
+              <a:buFont typeface="+mj-lt"/>
+              <a:buAutoNum type="arabicPeriod"/>
+            </a:pPr>
+            <a:r>
+              <a:rPr lang="en-US" dirty="0"/>
+              <a:t>Combine Project 1 and Project 2 into a singular publication</a:t>
+            </a:r>
+          </a:p>
+        </p:txBody>
+      </p:sp>
+      <p:sp>
+        <p:nvSpPr>
+          <p:cNvPr id="4" name="Slide Number Placeholder 3">
+            <a:extLst>
+              <a:ext uri="{FF2B5EF4-FFF2-40B4-BE49-F238E27FC236}">
+                <a16:creationId xmlns:a16="http://schemas.microsoft.com/office/drawing/2014/main" id="{C35B1131-8F79-7AEC-7E17-ECEDC79F99D0}"/>
               </a:ext>
             </a:extLst>
           </p:cNvPr>
@@ -31543,7 +32600,7 @@
     </p:spTree>
     <p:extLst>
       <p:ext uri="{BB962C8B-B14F-4D97-AF65-F5344CB8AC3E}">
-        <p14:creationId xmlns:p14="http://schemas.microsoft.com/office/powerpoint/2010/main" val="4088362699"/>
+        <p14:creationId xmlns:p14="http://schemas.microsoft.com/office/powerpoint/2010/main" val="1362057303"/>
       </p:ext>
     </p:extLst>
   </p:cSld>
@@ -31572,6 +32629,120 @@
       </p:grpSpPr>
       <p:sp>
         <p:nvSpPr>
+          <p:cNvPr id="2" name="Title 1">
+            <a:extLst>
+              <a:ext uri="{FF2B5EF4-FFF2-40B4-BE49-F238E27FC236}">
+                <a16:creationId xmlns:a16="http://schemas.microsoft.com/office/drawing/2014/main" id="{F535EC0F-8FB7-5780-47B9-FF7762017EC9}"/>
+              </a:ext>
+            </a:extLst>
+          </p:cNvPr>
+          <p:cNvSpPr>
+            <a:spLocks noGrp="1"/>
+          </p:cNvSpPr>
+          <p:nvPr>
+            <p:ph type="ctrTitle"/>
+          </p:nvPr>
+        </p:nvSpPr>
+        <p:spPr/>
+        <p:txBody>
+          <a:bodyPr>
+            <a:normAutofit fontScale="90000"/>
+          </a:bodyPr>
+          <a:lstStyle/>
+          <a:p>
+            <a:r>
+              <a:rPr lang="en-CA" dirty="0"/>
+              <a:t>Big Question: Do you feel like the outlined work meets the requirement to fill the body of my thesis?</a:t>
+            </a:r>
+          </a:p>
+        </p:txBody>
+      </p:sp>
+      <p:sp>
+        <p:nvSpPr>
+          <p:cNvPr id="3" name="Subtitle 2">
+            <a:extLst>
+              <a:ext uri="{FF2B5EF4-FFF2-40B4-BE49-F238E27FC236}">
+                <a16:creationId xmlns:a16="http://schemas.microsoft.com/office/drawing/2014/main" id="{AE81CEBC-BCCE-7303-A4F1-D1D30EB13CDC}"/>
+              </a:ext>
+            </a:extLst>
+          </p:cNvPr>
+          <p:cNvSpPr>
+            <a:spLocks noGrp="1"/>
+          </p:cNvSpPr>
+          <p:nvPr>
+            <p:ph type="subTitle" idx="1"/>
+          </p:nvPr>
+        </p:nvSpPr>
+        <p:spPr/>
+        <p:txBody>
+          <a:bodyPr/>
+          <a:lstStyle/>
+          <a:p>
+            <a:endParaRPr lang="en-CA" dirty="0"/>
+          </a:p>
+        </p:txBody>
+      </p:sp>
+      <p:sp>
+        <p:nvSpPr>
+          <p:cNvPr id="4" name="Slide Number Placeholder 3">
+            <a:extLst>
+              <a:ext uri="{FF2B5EF4-FFF2-40B4-BE49-F238E27FC236}">
+                <a16:creationId xmlns:a16="http://schemas.microsoft.com/office/drawing/2014/main" id="{EA34D409-7197-5D88-7B2A-5228A145AB20}"/>
+              </a:ext>
+            </a:extLst>
+          </p:cNvPr>
+          <p:cNvSpPr>
+            <a:spLocks noGrp="1"/>
+          </p:cNvSpPr>
+          <p:nvPr>
+            <p:ph type="sldNum" sz="quarter" idx="12"/>
+          </p:nvPr>
+        </p:nvSpPr>
+        <p:spPr/>
+        <p:txBody>
+          <a:bodyPr/>
+          <a:lstStyle/>
+          <a:p>
+            <a:fld id="{4BAA6517-F367-4EB3-AFA6-036DD26A3111}" type="slidenum">
+              <a:rPr lang="en-CA" smtClean="0"/>
+              <a:t>49</a:t>
+            </a:fld>
+            <a:endParaRPr lang="en-CA"/>
+          </a:p>
+        </p:txBody>
+      </p:sp>
+    </p:spTree>
+    <p:extLst>
+      <p:ext uri="{BB962C8B-B14F-4D97-AF65-F5344CB8AC3E}">
+        <p14:creationId xmlns:p14="http://schemas.microsoft.com/office/powerpoint/2010/main" val="3042671859"/>
+      </p:ext>
+    </p:extLst>
+  </p:cSld>
+  <p:clrMapOvr>
+    <a:masterClrMapping/>
+  </p:clrMapOvr>
+</p:sld>
+</file>
+
+<file path=ppt/slides/slide5.xml><?xml version="1.0" encoding="utf-8"?>
+<p:sld xmlns:a="http://schemas.openxmlformats.org/drawingml/2006/main" xmlns:r="http://schemas.openxmlformats.org/officeDocument/2006/relationships" xmlns:p="http://schemas.openxmlformats.org/presentationml/2006/main">
+  <p:cSld>
+    <p:spTree>
+      <p:nvGrpSpPr>
+        <p:cNvPr id="1" name=""/>
+        <p:cNvGrpSpPr/>
+        <p:nvPr/>
+      </p:nvGrpSpPr>
+      <p:grpSpPr>
+        <a:xfrm>
+          <a:off x="0" y="0"/>
+          <a:ext cx="0" cy="0"/>
+          <a:chOff x="0" y="0"/>
+          <a:chExt cx="0" cy="0"/>
+        </a:xfrm>
+      </p:grpSpPr>
+      <p:sp>
+        <p:nvSpPr>
           <p:cNvPr id="6" name="Slide Number Placeholder 5">
             <a:extLst>
               <a:ext uri="{FF2B5EF4-FFF2-40B4-BE49-F238E27FC236}">
@@ -31598,7 +32769,665 @@
           <a:p>
             <a:fld id="{1E5564C7-97C0-40C1-9717-452594735347}" type="slidenum">
               <a:rPr lang="en-CA" smtClean="0"/>
-              <a:t>49</a:t>
+              <a:t>5</a:t>
+            </a:fld>
+            <a:endParaRPr lang="en-CA" dirty="0"/>
+          </a:p>
+        </p:txBody>
+      </p:sp>
+      <p:sp>
+        <p:nvSpPr>
+          <p:cNvPr id="4" name="Rectangle: Rounded Corners 3">
+            <a:extLst>
+              <a:ext uri="{FF2B5EF4-FFF2-40B4-BE49-F238E27FC236}">
+                <a16:creationId xmlns:a16="http://schemas.microsoft.com/office/drawing/2014/main" id="{C18478FF-6B83-B8B6-6E25-37D82C9B56F7}"/>
+              </a:ext>
+            </a:extLst>
+          </p:cNvPr>
+          <p:cNvSpPr/>
+          <p:nvPr/>
+        </p:nvSpPr>
+        <p:spPr>
+          <a:xfrm>
+            <a:off x="2351314" y="751957"/>
+            <a:ext cx="7489371" cy="2008409"/>
+          </a:xfrm>
+          <a:prstGeom prst="roundRect">
+            <a:avLst/>
+          </a:prstGeom>
+          <a:solidFill>
+            <a:schemeClr val="accent1"/>
+          </a:solidFill>
+          <a:ln>
+            <a:noFill/>
+          </a:ln>
+        </p:spPr>
+        <p:style>
+          <a:lnRef idx="2">
+            <a:schemeClr val="accent1">
+              <a:shade val="15000"/>
+            </a:schemeClr>
+          </a:lnRef>
+          <a:fillRef idx="1">
+            <a:schemeClr val="accent1"/>
+          </a:fillRef>
+          <a:effectRef idx="0">
+            <a:schemeClr val="accent1"/>
+          </a:effectRef>
+          <a:fontRef idx="minor">
+            <a:schemeClr val="lt1"/>
+          </a:fontRef>
+        </p:style>
+        <p:txBody>
+          <a:bodyPr rtlCol="0" anchor="ctr"/>
+          <a:lstStyle/>
+          <a:p>
+            <a:pPr algn="ctr"/>
+            <a:r>
+              <a:rPr lang="en-US" sz="3600" dirty="0">
+                <a:solidFill>
+                  <a:schemeClr val="bg1"/>
+                </a:solidFill>
+              </a:rPr>
+              <a:t>What is the heterogeneity of dose to the circulating blood volume during TBI?</a:t>
+            </a:r>
+            <a:endParaRPr lang="en-CA" sz="3600" dirty="0">
+              <a:solidFill>
+                <a:schemeClr val="bg1"/>
+              </a:solidFill>
+            </a:endParaRPr>
+          </a:p>
+        </p:txBody>
+      </p:sp>
+      <p:sp>
+        <p:nvSpPr>
+          <p:cNvPr id="14" name="Rectangle: Rounded Corners 13">
+            <a:extLst>
+              <a:ext uri="{FF2B5EF4-FFF2-40B4-BE49-F238E27FC236}">
+                <a16:creationId xmlns:a16="http://schemas.microsoft.com/office/drawing/2014/main" id="{3EABC374-3118-1735-2855-34CF3258D774}"/>
+              </a:ext>
+            </a:extLst>
+          </p:cNvPr>
+          <p:cNvSpPr/>
+          <p:nvPr/>
+        </p:nvSpPr>
+        <p:spPr>
+          <a:xfrm>
+            <a:off x="342000" y="3953361"/>
+            <a:ext cx="3197678" cy="2277835"/>
+          </a:xfrm>
+          <a:prstGeom prst="roundRect">
+            <a:avLst/>
+          </a:prstGeom>
+          <a:solidFill>
+            <a:schemeClr val="accent1"/>
+          </a:solidFill>
+          <a:ln>
+            <a:noFill/>
+          </a:ln>
+        </p:spPr>
+        <p:style>
+          <a:lnRef idx="2">
+            <a:schemeClr val="accent1">
+              <a:shade val="15000"/>
+            </a:schemeClr>
+          </a:lnRef>
+          <a:fillRef idx="1">
+            <a:schemeClr val="accent1"/>
+          </a:fillRef>
+          <a:effectRef idx="0">
+            <a:schemeClr val="accent1"/>
+          </a:effectRef>
+          <a:fontRef idx="minor">
+            <a:schemeClr val="lt1"/>
+          </a:fontRef>
+        </p:style>
+        <p:txBody>
+          <a:bodyPr rtlCol="0" anchor="ctr"/>
+          <a:lstStyle/>
+          <a:p>
+            <a:pPr algn="ctr"/>
+            <a:r>
+              <a:rPr lang="en-US" sz="3600" dirty="0"/>
+              <a:t>Determine dose deposition in time</a:t>
+            </a:r>
+            <a:endParaRPr lang="en-CA" sz="3600" dirty="0"/>
+          </a:p>
+        </p:txBody>
+      </p:sp>
+      <p:sp>
+        <p:nvSpPr>
+          <p:cNvPr id="15" name="Rectangle: Rounded Corners 14">
+            <a:extLst>
+              <a:ext uri="{FF2B5EF4-FFF2-40B4-BE49-F238E27FC236}">
+                <a16:creationId xmlns:a16="http://schemas.microsoft.com/office/drawing/2014/main" id="{377DA0B4-CB4D-A702-23E4-9DD05A9E2375}"/>
+              </a:ext>
+            </a:extLst>
+          </p:cNvPr>
+          <p:cNvSpPr/>
+          <p:nvPr/>
+        </p:nvSpPr>
+        <p:spPr>
+          <a:xfrm>
+            <a:off x="4497161" y="3961881"/>
+            <a:ext cx="3197678" cy="2277835"/>
+          </a:xfrm>
+          <a:prstGeom prst="roundRect">
+            <a:avLst/>
+          </a:prstGeom>
+          <a:solidFill>
+            <a:schemeClr val="accent1"/>
+          </a:solidFill>
+          <a:ln>
+            <a:solidFill>
+              <a:schemeClr val="accent2">
+                <a:lumMod val="75000"/>
+              </a:schemeClr>
+            </a:solidFill>
+          </a:ln>
+        </p:spPr>
+        <p:style>
+          <a:lnRef idx="2">
+            <a:schemeClr val="accent1">
+              <a:shade val="15000"/>
+            </a:schemeClr>
+          </a:lnRef>
+          <a:fillRef idx="1">
+            <a:schemeClr val="accent1"/>
+          </a:fillRef>
+          <a:effectRef idx="0">
+            <a:schemeClr val="accent1"/>
+          </a:effectRef>
+          <a:fontRef idx="minor">
+            <a:schemeClr val="lt1"/>
+          </a:fontRef>
+        </p:style>
+        <p:txBody>
+          <a:bodyPr rtlCol="0" anchor="ctr"/>
+          <a:lstStyle/>
+          <a:p>
+            <a:pPr algn="ctr"/>
+            <a:r>
+              <a:rPr lang="en-US" sz="3600" dirty="0"/>
+              <a:t>Track blood flow through the body</a:t>
+            </a:r>
+            <a:endParaRPr lang="en-CA" sz="3600" dirty="0"/>
+          </a:p>
+        </p:txBody>
+      </p:sp>
+      <p:sp>
+        <p:nvSpPr>
+          <p:cNvPr id="17" name="Rectangle: Rounded Corners 16">
+            <a:extLst>
+              <a:ext uri="{FF2B5EF4-FFF2-40B4-BE49-F238E27FC236}">
+                <a16:creationId xmlns:a16="http://schemas.microsoft.com/office/drawing/2014/main" id="{25DF2847-7B8C-697E-BC1D-62C4E847C5DC}"/>
+              </a:ext>
+            </a:extLst>
+          </p:cNvPr>
+          <p:cNvSpPr/>
+          <p:nvPr/>
+        </p:nvSpPr>
+        <p:spPr>
+          <a:xfrm>
+            <a:off x="8652322" y="3953360"/>
+            <a:ext cx="3197678" cy="2277835"/>
+          </a:xfrm>
+          <a:prstGeom prst="roundRect">
+            <a:avLst/>
+          </a:prstGeom>
+          <a:solidFill>
+            <a:schemeClr val="accent1"/>
+          </a:solidFill>
+          <a:ln>
+            <a:noFill/>
+          </a:ln>
+        </p:spPr>
+        <p:style>
+          <a:lnRef idx="2">
+            <a:schemeClr val="accent1">
+              <a:shade val="15000"/>
+            </a:schemeClr>
+          </a:lnRef>
+          <a:fillRef idx="1">
+            <a:schemeClr val="accent1"/>
+          </a:fillRef>
+          <a:effectRef idx="0">
+            <a:schemeClr val="accent1"/>
+          </a:effectRef>
+          <a:fontRef idx="minor">
+            <a:schemeClr val="lt1"/>
+          </a:fontRef>
+        </p:style>
+        <p:txBody>
+          <a:bodyPr rtlCol="0" anchor="ctr"/>
+          <a:lstStyle/>
+          <a:p>
+            <a:pPr algn="ctr"/>
+            <a:r>
+              <a:rPr lang="en-US" sz="3600" dirty="0">
+                <a:solidFill>
+                  <a:schemeClr val="bg1"/>
+                </a:solidFill>
+              </a:rPr>
+              <a:t>Model various TBI treatments</a:t>
+            </a:r>
+            <a:endParaRPr lang="en-CA" sz="3600" dirty="0">
+              <a:solidFill>
+                <a:schemeClr val="bg1"/>
+              </a:solidFill>
+            </a:endParaRPr>
+          </a:p>
+        </p:txBody>
+      </p:sp>
+      <p:cxnSp>
+        <p:nvCxnSpPr>
+          <p:cNvPr id="19" name="Straight Connector 18">
+            <a:extLst>
+              <a:ext uri="{FF2B5EF4-FFF2-40B4-BE49-F238E27FC236}">
+                <a16:creationId xmlns:a16="http://schemas.microsoft.com/office/drawing/2014/main" id="{9B7C0BCA-D334-4F3D-9DBC-4046F67404C5}"/>
+              </a:ext>
+            </a:extLst>
+          </p:cNvPr>
+          <p:cNvCxnSpPr>
+            <a:stCxn id="14" idx="0"/>
+            <a:endCxn id="4" idx="2"/>
+          </p:cNvCxnSpPr>
+          <p:nvPr/>
+        </p:nvCxnSpPr>
+        <p:spPr>
+          <a:xfrm flipV="1">
+            <a:off x="1940839" y="2760366"/>
+            <a:ext cx="4155161" cy="1192995"/>
+          </a:xfrm>
+          <a:prstGeom prst="line">
+            <a:avLst/>
+          </a:prstGeom>
+          <a:ln w="19050" cap="flat" cmpd="sng" algn="ctr">
+            <a:solidFill>
+              <a:schemeClr val="accent1"/>
+            </a:solidFill>
+            <a:prstDash val="solid"/>
+            <a:round/>
+            <a:headEnd type="none" w="med" len="med"/>
+            <a:tailEnd type="none" w="med" len="med"/>
+          </a:ln>
+        </p:spPr>
+        <p:style>
+          <a:lnRef idx="0">
+            <a:scrgbClr r="0" g="0" b="0"/>
+          </a:lnRef>
+          <a:fillRef idx="0">
+            <a:scrgbClr r="0" g="0" b="0"/>
+          </a:fillRef>
+          <a:effectRef idx="0">
+            <a:scrgbClr r="0" g="0" b="0"/>
+          </a:effectRef>
+          <a:fontRef idx="minor">
+            <a:schemeClr val="tx1"/>
+          </a:fontRef>
+        </p:style>
+      </p:cxnSp>
+      <p:cxnSp>
+        <p:nvCxnSpPr>
+          <p:cNvPr id="20" name="Straight Connector 19">
+            <a:extLst>
+              <a:ext uri="{FF2B5EF4-FFF2-40B4-BE49-F238E27FC236}">
+                <a16:creationId xmlns:a16="http://schemas.microsoft.com/office/drawing/2014/main" id="{74D9F3D4-D022-BE1D-3FD7-E262CC61E2B7}"/>
+              </a:ext>
+            </a:extLst>
+          </p:cNvPr>
+          <p:cNvCxnSpPr>
+            <a:cxnSpLocks/>
+            <a:stCxn id="15" idx="0"/>
+            <a:endCxn id="4" idx="2"/>
+          </p:cNvCxnSpPr>
+          <p:nvPr/>
+        </p:nvCxnSpPr>
+        <p:spPr>
+          <a:xfrm flipV="1">
+            <a:off x="6096000" y="2760366"/>
+            <a:ext cx="0" cy="1201515"/>
+          </a:xfrm>
+          <a:prstGeom prst="line">
+            <a:avLst/>
+          </a:prstGeom>
+          <a:ln w="19050" cap="flat" cmpd="sng" algn="ctr">
+            <a:solidFill>
+              <a:schemeClr val="accent1"/>
+            </a:solidFill>
+            <a:prstDash val="solid"/>
+            <a:round/>
+            <a:headEnd type="none" w="med" len="med"/>
+            <a:tailEnd type="none" w="med" len="med"/>
+          </a:ln>
+        </p:spPr>
+        <p:style>
+          <a:lnRef idx="0">
+            <a:scrgbClr r="0" g="0" b="0"/>
+          </a:lnRef>
+          <a:fillRef idx="0">
+            <a:scrgbClr r="0" g="0" b="0"/>
+          </a:fillRef>
+          <a:effectRef idx="0">
+            <a:scrgbClr r="0" g="0" b="0"/>
+          </a:effectRef>
+          <a:fontRef idx="minor">
+            <a:schemeClr val="tx1"/>
+          </a:fontRef>
+        </p:style>
+      </p:cxnSp>
+      <p:cxnSp>
+        <p:nvCxnSpPr>
+          <p:cNvPr id="23" name="Straight Connector 22">
+            <a:extLst>
+              <a:ext uri="{FF2B5EF4-FFF2-40B4-BE49-F238E27FC236}">
+                <a16:creationId xmlns:a16="http://schemas.microsoft.com/office/drawing/2014/main" id="{F535A133-F7F0-142B-3A4C-20C5BA16087A}"/>
+              </a:ext>
+            </a:extLst>
+          </p:cNvPr>
+          <p:cNvCxnSpPr>
+            <a:cxnSpLocks/>
+            <a:stCxn id="17" idx="0"/>
+            <a:endCxn id="4" idx="2"/>
+          </p:cNvCxnSpPr>
+          <p:nvPr/>
+        </p:nvCxnSpPr>
+        <p:spPr>
+          <a:xfrm flipH="1" flipV="1">
+            <a:off x="6096000" y="2760366"/>
+            <a:ext cx="4155161" cy="1192994"/>
+          </a:xfrm>
+          <a:prstGeom prst="line">
+            <a:avLst/>
+          </a:prstGeom>
+          <a:ln w="19050" cap="flat" cmpd="sng" algn="ctr">
+            <a:solidFill>
+              <a:schemeClr val="accent1"/>
+            </a:solidFill>
+            <a:prstDash val="solid"/>
+            <a:round/>
+            <a:headEnd type="none" w="med" len="med"/>
+            <a:tailEnd type="none" w="med" len="med"/>
+          </a:ln>
+        </p:spPr>
+        <p:style>
+          <a:lnRef idx="0">
+            <a:scrgbClr r="0" g="0" b="0"/>
+          </a:lnRef>
+          <a:fillRef idx="0">
+            <a:scrgbClr r="0" g="0" b="0"/>
+          </a:fillRef>
+          <a:effectRef idx="0">
+            <a:scrgbClr r="0" g="0" b="0"/>
+          </a:effectRef>
+          <a:fontRef idx="minor">
+            <a:schemeClr val="tx1"/>
+          </a:fontRef>
+        </p:style>
+      </p:cxnSp>
+      <p:sp>
+        <p:nvSpPr>
+          <p:cNvPr id="2" name="TextBox 1">
+            <a:extLst>
+              <a:ext uri="{FF2B5EF4-FFF2-40B4-BE49-F238E27FC236}">
+                <a16:creationId xmlns:a16="http://schemas.microsoft.com/office/drawing/2014/main" id="{47C596D3-EE64-8890-2FB0-8ACEA2A6242E}"/>
+              </a:ext>
+            </a:extLst>
+          </p:cNvPr>
+          <p:cNvSpPr txBox="1"/>
+          <p:nvPr/>
+        </p:nvSpPr>
+        <p:spPr>
+          <a:xfrm>
+            <a:off x="4497161" y="3534032"/>
+            <a:ext cx="3197677" cy="369332"/>
+          </a:xfrm>
+          <a:prstGeom prst="rect">
+            <a:avLst/>
+          </a:prstGeom>
+          <a:solidFill>
+            <a:schemeClr val="accent1">
+              <a:lumMod val="20000"/>
+              <a:lumOff val="80000"/>
+            </a:schemeClr>
+          </a:solidFill>
+          <a:ln>
+            <a:solidFill>
+              <a:schemeClr val="accent2">
+                <a:lumMod val="75000"/>
+              </a:schemeClr>
+            </a:solidFill>
+          </a:ln>
+        </p:spPr>
+        <p:txBody>
+          <a:bodyPr wrap="square" rtlCol="0">
+            <a:spAutoFit/>
+          </a:bodyPr>
+          <a:lstStyle/>
+          <a:p>
+            <a:pPr algn="ctr"/>
+            <a:r>
+              <a:rPr lang="en-CA" dirty="0"/>
+              <a:t>Presented at COMP 2025</a:t>
+            </a:r>
+          </a:p>
+        </p:txBody>
+      </p:sp>
+    </p:spTree>
+    <p:extLst>
+      <p:ext uri="{BB962C8B-B14F-4D97-AF65-F5344CB8AC3E}">
+        <p14:creationId xmlns:p14="http://schemas.microsoft.com/office/powerpoint/2010/main" val="1375378903"/>
+      </p:ext>
+    </p:extLst>
+  </p:cSld>
+  <p:clrMapOvr>
+    <a:masterClrMapping/>
+  </p:clrMapOvr>
+</p:sld>
+</file>
+
+<file path=ppt/slides/slide50.xml><?xml version="1.0" encoding="utf-8"?>
+<p:sld xmlns:a="http://schemas.openxmlformats.org/drawingml/2006/main" xmlns:r="http://schemas.openxmlformats.org/officeDocument/2006/relationships" xmlns:p="http://schemas.openxmlformats.org/presentationml/2006/main">
+  <p:cSld>
+    <p:spTree>
+      <p:nvGrpSpPr>
+        <p:cNvPr id="1" name=""/>
+        <p:cNvGrpSpPr/>
+        <p:nvPr/>
+      </p:nvGrpSpPr>
+      <p:grpSpPr>
+        <a:xfrm>
+          <a:off x="0" y="0"/>
+          <a:ext cx="0" cy="0"/>
+          <a:chOff x="0" y="0"/>
+          <a:chExt cx="0" cy="0"/>
+        </a:xfrm>
+      </p:grpSpPr>
+      <p:sp>
+        <p:nvSpPr>
+          <p:cNvPr id="2" name="Title 1">
+            <a:extLst>
+              <a:ext uri="{FF2B5EF4-FFF2-40B4-BE49-F238E27FC236}">
+                <a16:creationId xmlns:a16="http://schemas.microsoft.com/office/drawing/2014/main" id="{E278983D-EBB6-683C-94AD-CAED3B799030}"/>
+              </a:ext>
+            </a:extLst>
+          </p:cNvPr>
+          <p:cNvSpPr>
+            <a:spLocks noGrp="1"/>
+          </p:cNvSpPr>
+          <p:nvPr>
+            <p:ph type="title"/>
+          </p:nvPr>
+        </p:nvSpPr>
+        <p:spPr/>
+        <p:txBody>
+          <a:bodyPr/>
+          <a:lstStyle/>
+          <a:p>
+            <a:r>
+              <a:rPr lang="en-CA" dirty="0"/>
+              <a:t>Thank you.</a:t>
+            </a:r>
+          </a:p>
+        </p:txBody>
+      </p:sp>
+      <p:sp>
+        <p:nvSpPr>
+          <p:cNvPr id="3" name="Slide Number Placeholder 2">
+            <a:extLst>
+              <a:ext uri="{FF2B5EF4-FFF2-40B4-BE49-F238E27FC236}">
+                <a16:creationId xmlns:a16="http://schemas.microsoft.com/office/drawing/2014/main" id="{07CB0118-3CE2-03A0-E7ED-D643FAD19369}"/>
+              </a:ext>
+            </a:extLst>
+          </p:cNvPr>
+          <p:cNvSpPr>
+            <a:spLocks noGrp="1"/>
+          </p:cNvSpPr>
+          <p:nvPr>
+            <p:ph type="sldNum" sz="quarter" idx="12"/>
+          </p:nvPr>
+        </p:nvSpPr>
+        <p:spPr/>
+        <p:txBody>
+          <a:bodyPr/>
+          <a:lstStyle/>
+          <a:p>
+            <a:fld id="{4BAA6517-F367-4EB3-AFA6-036DD26A3111}" type="slidenum">
+              <a:rPr lang="en-CA" smtClean="0"/>
+              <a:t>50</a:t>
+            </a:fld>
+            <a:endParaRPr lang="en-CA"/>
+          </a:p>
+        </p:txBody>
+      </p:sp>
+      <p:sp>
+        <p:nvSpPr>
+          <p:cNvPr id="4" name="TextBox 3">
+            <a:extLst>
+              <a:ext uri="{FF2B5EF4-FFF2-40B4-BE49-F238E27FC236}">
+                <a16:creationId xmlns:a16="http://schemas.microsoft.com/office/drawing/2014/main" id="{19852B46-B54C-4E6C-E740-7995F03FCA56}"/>
+              </a:ext>
+            </a:extLst>
+          </p:cNvPr>
+          <p:cNvSpPr txBox="1"/>
+          <p:nvPr/>
+        </p:nvSpPr>
+        <p:spPr>
+          <a:xfrm>
+            <a:off x="1200150" y="2047875"/>
+            <a:ext cx="9248750" cy="2246769"/>
+          </a:xfrm>
+          <a:prstGeom prst="rect">
+            <a:avLst/>
+          </a:prstGeom>
+          <a:noFill/>
+        </p:spPr>
+        <p:txBody>
+          <a:bodyPr wrap="none" rtlCol="0">
+            <a:spAutoFit/>
+          </a:bodyPr>
+          <a:lstStyle/>
+          <a:p>
+            <a:r>
+              <a:rPr lang="en-US" sz="2800" dirty="0"/>
+              <a:t>Questions for you:</a:t>
+            </a:r>
+          </a:p>
+          <a:p>
+            <a:pPr marL="285750" indent="-285750">
+              <a:buFont typeface="Arial" panose="020B0604020202020204" pitchFamily="34" charset="0"/>
+              <a:buChar char="•"/>
+            </a:pPr>
+            <a:r>
+              <a:rPr lang="en-US" sz="2800" dirty="0"/>
+              <a:t>Thoughts on publication issue?</a:t>
+            </a:r>
+          </a:p>
+          <a:p>
+            <a:pPr marL="285750" indent="-285750">
+              <a:buFont typeface="Arial" panose="020B0604020202020204" pitchFamily="34" charset="0"/>
+              <a:buChar char="•"/>
+            </a:pPr>
+            <a:r>
+              <a:rPr lang="en-US" sz="2800" dirty="0"/>
+              <a:t>Thoughts on work and future work constituting a full thesis?</a:t>
+            </a:r>
+          </a:p>
+          <a:p>
+            <a:pPr marL="285750" indent="-285750">
+              <a:buFont typeface="Arial" panose="020B0604020202020204" pitchFamily="34" charset="0"/>
+              <a:buChar char="•"/>
+            </a:pPr>
+            <a:endParaRPr lang="en-US" sz="2800" dirty="0"/>
+          </a:p>
+          <a:p>
+            <a:r>
+              <a:rPr lang="en-US" sz="2800" dirty="0"/>
+              <a:t>Questions for me?</a:t>
+            </a:r>
+            <a:endParaRPr lang="en-CA" sz="2800" dirty="0"/>
+          </a:p>
+        </p:txBody>
+      </p:sp>
+    </p:spTree>
+    <p:extLst>
+      <p:ext uri="{BB962C8B-B14F-4D97-AF65-F5344CB8AC3E}">
+        <p14:creationId xmlns:p14="http://schemas.microsoft.com/office/powerpoint/2010/main" val="4088362699"/>
+      </p:ext>
+    </p:extLst>
+  </p:cSld>
+  <p:clrMapOvr>
+    <a:masterClrMapping/>
+  </p:clrMapOvr>
+</p:sld>
+</file>
+
+<file path=ppt/slides/slide51.xml><?xml version="1.0" encoding="utf-8"?>
+<p:sld xmlns:a="http://schemas.openxmlformats.org/drawingml/2006/main" xmlns:r="http://schemas.openxmlformats.org/officeDocument/2006/relationships" xmlns:p="http://schemas.openxmlformats.org/presentationml/2006/main">
+  <p:cSld>
+    <p:spTree>
+      <p:nvGrpSpPr>
+        <p:cNvPr id="1" name=""/>
+        <p:cNvGrpSpPr/>
+        <p:nvPr/>
+      </p:nvGrpSpPr>
+      <p:grpSpPr>
+        <a:xfrm>
+          <a:off x="0" y="0"/>
+          <a:ext cx="0" cy="0"/>
+          <a:chOff x="0" y="0"/>
+          <a:chExt cx="0" cy="0"/>
+        </a:xfrm>
+      </p:grpSpPr>
+      <p:sp>
+        <p:nvSpPr>
+          <p:cNvPr id="6" name="Slide Number Placeholder 5">
+            <a:extLst>
+              <a:ext uri="{FF2B5EF4-FFF2-40B4-BE49-F238E27FC236}">
+                <a16:creationId xmlns:a16="http://schemas.microsoft.com/office/drawing/2014/main" id="{74FB7EC2-71BA-402D-7669-A778C3CC61F4}"/>
+              </a:ext>
+            </a:extLst>
+          </p:cNvPr>
+          <p:cNvSpPr>
+            <a:spLocks noGrp="1"/>
+          </p:cNvSpPr>
+          <p:nvPr>
+            <p:ph type="sldNum" sz="quarter" idx="12"/>
+          </p:nvPr>
+        </p:nvSpPr>
+        <p:spPr>
+          <a:xfrm>
+            <a:off x="9282793" y="6420757"/>
+            <a:ext cx="2743200" cy="365125"/>
+          </a:xfrm>
+        </p:spPr>
+        <p:txBody>
+          <a:bodyPr/>
+          <a:lstStyle/>
+          <a:p>
+            <a:fld id="{1E5564C7-97C0-40C1-9717-452594735347}" type="slidenum">
+              <a:rPr lang="en-CA" smtClean="0"/>
+              <a:t>51</a:t>
             </a:fld>
             <a:endParaRPr lang="en-CA" dirty="0"/>
           </a:p>
@@ -32194,509 +34023,7 @@
 </p:sld>
 </file>
 
-<file path=ppt/slides/slide5.xml><?xml version="1.0" encoding="utf-8"?>
-<p:sld xmlns:a="http://schemas.openxmlformats.org/drawingml/2006/main" xmlns:r="http://schemas.openxmlformats.org/officeDocument/2006/relationships" xmlns:p="http://schemas.openxmlformats.org/presentationml/2006/main">
-  <p:cSld>
-    <p:spTree>
-      <p:nvGrpSpPr>
-        <p:cNvPr id="1" name=""/>
-        <p:cNvGrpSpPr/>
-        <p:nvPr/>
-      </p:nvGrpSpPr>
-      <p:grpSpPr>
-        <a:xfrm>
-          <a:off x="0" y="0"/>
-          <a:ext cx="0" cy="0"/>
-          <a:chOff x="0" y="0"/>
-          <a:chExt cx="0" cy="0"/>
-        </a:xfrm>
-      </p:grpSpPr>
-      <p:sp>
-        <p:nvSpPr>
-          <p:cNvPr id="6" name="Slide Number Placeholder 5">
-            <a:extLst>
-              <a:ext uri="{FF2B5EF4-FFF2-40B4-BE49-F238E27FC236}">
-                <a16:creationId xmlns:a16="http://schemas.microsoft.com/office/drawing/2014/main" id="{74FB7EC2-71BA-402D-7669-A778C3CC61F4}"/>
-              </a:ext>
-            </a:extLst>
-          </p:cNvPr>
-          <p:cNvSpPr>
-            <a:spLocks noGrp="1"/>
-          </p:cNvSpPr>
-          <p:nvPr>
-            <p:ph type="sldNum" sz="quarter" idx="12"/>
-          </p:nvPr>
-        </p:nvSpPr>
-        <p:spPr>
-          <a:xfrm>
-            <a:off x="9282793" y="6420757"/>
-            <a:ext cx="2743200" cy="365125"/>
-          </a:xfrm>
-        </p:spPr>
-        <p:txBody>
-          <a:bodyPr/>
-          <a:lstStyle/>
-          <a:p>
-            <a:fld id="{1E5564C7-97C0-40C1-9717-452594735347}" type="slidenum">
-              <a:rPr lang="en-CA" smtClean="0"/>
-              <a:t>5</a:t>
-            </a:fld>
-            <a:endParaRPr lang="en-CA" dirty="0"/>
-          </a:p>
-        </p:txBody>
-      </p:sp>
-      <p:sp>
-        <p:nvSpPr>
-          <p:cNvPr id="4" name="Rectangle: Rounded Corners 3">
-            <a:extLst>
-              <a:ext uri="{FF2B5EF4-FFF2-40B4-BE49-F238E27FC236}">
-                <a16:creationId xmlns:a16="http://schemas.microsoft.com/office/drawing/2014/main" id="{C18478FF-6B83-B8B6-6E25-37D82C9B56F7}"/>
-              </a:ext>
-            </a:extLst>
-          </p:cNvPr>
-          <p:cNvSpPr/>
-          <p:nvPr/>
-        </p:nvSpPr>
-        <p:spPr>
-          <a:xfrm>
-            <a:off x="2351314" y="751957"/>
-            <a:ext cx="7489371" cy="2008409"/>
-          </a:xfrm>
-          <a:prstGeom prst="roundRect">
-            <a:avLst/>
-          </a:prstGeom>
-          <a:solidFill>
-            <a:schemeClr val="accent1"/>
-          </a:solidFill>
-          <a:ln>
-            <a:noFill/>
-          </a:ln>
-        </p:spPr>
-        <p:style>
-          <a:lnRef idx="2">
-            <a:schemeClr val="accent1">
-              <a:shade val="15000"/>
-            </a:schemeClr>
-          </a:lnRef>
-          <a:fillRef idx="1">
-            <a:schemeClr val="accent1"/>
-          </a:fillRef>
-          <a:effectRef idx="0">
-            <a:schemeClr val="accent1"/>
-          </a:effectRef>
-          <a:fontRef idx="minor">
-            <a:schemeClr val="lt1"/>
-          </a:fontRef>
-        </p:style>
-        <p:txBody>
-          <a:bodyPr rtlCol="0" anchor="ctr"/>
-          <a:lstStyle/>
-          <a:p>
-            <a:pPr algn="ctr"/>
-            <a:r>
-              <a:rPr lang="en-US" sz="3600" dirty="0">
-                <a:solidFill>
-                  <a:schemeClr val="bg1"/>
-                </a:solidFill>
-              </a:rPr>
-              <a:t>What is the heterogeneity of dose to the circulating blood volume during TBI?</a:t>
-            </a:r>
-            <a:endParaRPr lang="en-CA" sz="3600" dirty="0">
-              <a:solidFill>
-                <a:schemeClr val="bg1"/>
-              </a:solidFill>
-            </a:endParaRPr>
-          </a:p>
-        </p:txBody>
-      </p:sp>
-      <p:sp>
-        <p:nvSpPr>
-          <p:cNvPr id="14" name="Rectangle: Rounded Corners 13">
-            <a:extLst>
-              <a:ext uri="{FF2B5EF4-FFF2-40B4-BE49-F238E27FC236}">
-                <a16:creationId xmlns:a16="http://schemas.microsoft.com/office/drawing/2014/main" id="{3EABC374-3118-1735-2855-34CF3258D774}"/>
-              </a:ext>
-            </a:extLst>
-          </p:cNvPr>
-          <p:cNvSpPr/>
-          <p:nvPr/>
-        </p:nvSpPr>
-        <p:spPr>
-          <a:xfrm>
-            <a:off x="342000" y="3953361"/>
-            <a:ext cx="3197678" cy="2277835"/>
-          </a:xfrm>
-          <a:prstGeom prst="roundRect">
-            <a:avLst/>
-          </a:prstGeom>
-          <a:solidFill>
-            <a:schemeClr val="accent1"/>
-          </a:solidFill>
-          <a:ln>
-            <a:noFill/>
-          </a:ln>
-        </p:spPr>
-        <p:style>
-          <a:lnRef idx="2">
-            <a:schemeClr val="accent1">
-              <a:shade val="15000"/>
-            </a:schemeClr>
-          </a:lnRef>
-          <a:fillRef idx="1">
-            <a:schemeClr val="accent1"/>
-          </a:fillRef>
-          <a:effectRef idx="0">
-            <a:schemeClr val="accent1"/>
-          </a:effectRef>
-          <a:fontRef idx="minor">
-            <a:schemeClr val="lt1"/>
-          </a:fontRef>
-        </p:style>
-        <p:txBody>
-          <a:bodyPr rtlCol="0" anchor="ctr"/>
-          <a:lstStyle/>
-          <a:p>
-            <a:pPr algn="ctr"/>
-            <a:r>
-              <a:rPr lang="en-US" sz="3600" dirty="0"/>
-              <a:t>Determine dose deposition in time</a:t>
-            </a:r>
-            <a:endParaRPr lang="en-CA" sz="3600" dirty="0"/>
-          </a:p>
-        </p:txBody>
-      </p:sp>
-      <p:sp>
-        <p:nvSpPr>
-          <p:cNvPr id="15" name="Rectangle: Rounded Corners 14">
-            <a:extLst>
-              <a:ext uri="{FF2B5EF4-FFF2-40B4-BE49-F238E27FC236}">
-                <a16:creationId xmlns:a16="http://schemas.microsoft.com/office/drawing/2014/main" id="{377DA0B4-CB4D-A702-23E4-9DD05A9E2375}"/>
-              </a:ext>
-            </a:extLst>
-          </p:cNvPr>
-          <p:cNvSpPr/>
-          <p:nvPr/>
-        </p:nvSpPr>
-        <p:spPr>
-          <a:xfrm>
-            <a:off x="4497161" y="3961881"/>
-            <a:ext cx="3197678" cy="2277835"/>
-          </a:xfrm>
-          <a:prstGeom prst="roundRect">
-            <a:avLst/>
-          </a:prstGeom>
-          <a:solidFill>
-            <a:schemeClr val="accent1"/>
-          </a:solidFill>
-          <a:ln>
-            <a:solidFill>
-              <a:schemeClr val="accent2">
-                <a:lumMod val="75000"/>
-              </a:schemeClr>
-            </a:solidFill>
-          </a:ln>
-        </p:spPr>
-        <p:style>
-          <a:lnRef idx="2">
-            <a:schemeClr val="accent1">
-              <a:shade val="15000"/>
-            </a:schemeClr>
-          </a:lnRef>
-          <a:fillRef idx="1">
-            <a:schemeClr val="accent1"/>
-          </a:fillRef>
-          <a:effectRef idx="0">
-            <a:schemeClr val="accent1"/>
-          </a:effectRef>
-          <a:fontRef idx="minor">
-            <a:schemeClr val="lt1"/>
-          </a:fontRef>
-        </p:style>
-        <p:txBody>
-          <a:bodyPr rtlCol="0" anchor="ctr"/>
-          <a:lstStyle/>
-          <a:p>
-            <a:pPr algn="ctr"/>
-            <a:r>
-              <a:rPr lang="en-US" sz="3600" dirty="0"/>
-              <a:t>Track blood flow through the body</a:t>
-            </a:r>
-            <a:endParaRPr lang="en-CA" sz="3600" dirty="0"/>
-          </a:p>
-        </p:txBody>
-      </p:sp>
-      <p:sp>
-        <p:nvSpPr>
-          <p:cNvPr id="17" name="Rectangle: Rounded Corners 16">
-            <a:extLst>
-              <a:ext uri="{FF2B5EF4-FFF2-40B4-BE49-F238E27FC236}">
-                <a16:creationId xmlns:a16="http://schemas.microsoft.com/office/drawing/2014/main" id="{25DF2847-7B8C-697E-BC1D-62C4E847C5DC}"/>
-              </a:ext>
-            </a:extLst>
-          </p:cNvPr>
-          <p:cNvSpPr/>
-          <p:nvPr/>
-        </p:nvSpPr>
-        <p:spPr>
-          <a:xfrm>
-            <a:off x="8652322" y="3953360"/>
-            <a:ext cx="3197678" cy="2277835"/>
-          </a:xfrm>
-          <a:prstGeom prst="roundRect">
-            <a:avLst/>
-          </a:prstGeom>
-          <a:solidFill>
-            <a:schemeClr val="accent1"/>
-          </a:solidFill>
-          <a:ln>
-            <a:noFill/>
-          </a:ln>
-        </p:spPr>
-        <p:style>
-          <a:lnRef idx="2">
-            <a:schemeClr val="accent1">
-              <a:shade val="15000"/>
-            </a:schemeClr>
-          </a:lnRef>
-          <a:fillRef idx="1">
-            <a:schemeClr val="accent1"/>
-          </a:fillRef>
-          <a:effectRef idx="0">
-            <a:schemeClr val="accent1"/>
-          </a:effectRef>
-          <a:fontRef idx="minor">
-            <a:schemeClr val="lt1"/>
-          </a:fontRef>
-        </p:style>
-        <p:txBody>
-          <a:bodyPr rtlCol="0" anchor="ctr"/>
-          <a:lstStyle/>
-          <a:p>
-            <a:pPr algn="ctr"/>
-            <a:r>
-              <a:rPr lang="en-US" sz="3600" dirty="0">
-                <a:solidFill>
-                  <a:schemeClr val="bg1"/>
-                </a:solidFill>
-              </a:rPr>
-              <a:t>Model various TBI treatments</a:t>
-            </a:r>
-            <a:endParaRPr lang="en-CA" sz="3600" dirty="0">
-              <a:solidFill>
-                <a:schemeClr val="bg1"/>
-              </a:solidFill>
-            </a:endParaRPr>
-          </a:p>
-        </p:txBody>
-      </p:sp>
-      <p:cxnSp>
-        <p:nvCxnSpPr>
-          <p:cNvPr id="19" name="Straight Connector 18">
-            <a:extLst>
-              <a:ext uri="{FF2B5EF4-FFF2-40B4-BE49-F238E27FC236}">
-                <a16:creationId xmlns:a16="http://schemas.microsoft.com/office/drawing/2014/main" id="{9B7C0BCA-D334-4F3D-9DBC-4046F67404C5}"/>
-              </a:ext>
-            </a:extLst>
-          </p:cNvPr>
-          <p:cNvCxnSpPr>
-            <a:stCxn id="14" idx="0"/>
-            <a:endCxn id="4" idx="2"/>
-          </p:cNvCxnSpPr>
-          <p:nvPr/>
-        </p:nvCxnSpPr>
-        <p:spPr>
-          <a:xfrm flipV="1">
-            <a:off x="1940839" y="2760366"/>
-            <a:ext cx="4155161" cy="1192995"/>
-          </a:xfrm>
-          <a:prstGeom prst="line">
-            <a:avLst/>
-          </a:prstGeom>
-          <a:ln w="19050" cap="flat" cmpd="sng" algn="ctr">
-            <a:solidFill>
-              <a:schemeClr val="accent1"/>
-            </a:solidFill>
-            <a:prstDash val="solid"/>
-            <a:round/>
-            <a:headEnd type="none" w="med" len="med"/>
-            <a:tailEnd type="none" w="med" len="med"/>
-          </a:ln>
-        </p:spPr>
-        <p:style>
-          <a:lnRef idx="0">
-            <a:scrgbClr r="0" g="0" b="0"/>
-          </a:lnRef>
-          <a:fillRef idx="0">
-            <a:scrgbClr r="0" g="0" b="0"/>
-          </a:fillRef>
-          <a:effectRef idx="0">
-            <a:scrgbClr r="0" g="0" b="0"/>
-          </a:effectRef>
-          <a:fontRef idx="minor">
-            <a:schemeClr val="tx1"/>
-          </a:fontRef>
-        </p:style>
-      </p:cxnSp>
-      <p:cxnSp>
-        <p:nvCxnSpPr>
-          <p:cNvPr id="20" name="Straight Connector 19">
-            <a:extLst>
-              <a:ext uri="{FF2B5EF4-FFF2-40B4-BE49-F238E27FC236}">
-                <a16:creationId xmlns:a16="http://schemas.microsoft.com/office/drawing/2014/main" id="{74D9F3D4-D022-BE1D-3FD7-E262CC61E2B7}"/>
-              </a:ext>
-            </a:extLst>
-          </p:cNvPr>
-          <p:cNvCxnSpPr>
-            <a:cxnSpLocks/>
-            <a:stCxn id="15" idx="0"/>
-            <a:endCxn id="4" idx="2"/>
-          </p:cNvCxnSpPr>
-          <p:nvPr/>
-        </p:nvCxnSpPr>
-        <p:spPr>
-          <a:xfrm flipV="1">
-            <a:off x="6096000" y="2760366"/>
-            <a:ext cx="0" cy="1201515"/>
-          </a:xfrm>
-          <a:prstGeom prst="line">
-            <a:avLst/>
-          </a:prstGeom>
-          <a:ln w="19050" cap="flat" cmpd="sng" algn="ctr">
-            <a:solidFill>
-              <a:schemeClr val="accent1"/>
-            </a:solidFill>
-            <a:prstDash val="solid"/>
-            <a:round/>
-            <a:headEnd type="none" w="med" len="med"/>
-            <a:tailEnd type="none" w="med" len="med"/>
-          </a:ln>
-        </p:spPr>
-        <p:style>
-          <a:lnRef idx="0">
-            <a:scrgbClr r="0" g="0" b="0"/>
-          </a:lnRef>
-          <a:fillRef idx="0">
-            <a:scrgbClr r="0" g="0" b="0"/>
-          </a:fillRef>
-          <a:effectRef idx="0">
-            <a:scrgbClr r="0" g="0" b="0"/>
-          </a:effectRef>
-          <a:fontRef idx="minor">
-            <a:schemeClr val="tx1"/>
-          </a:fontRef>
-        </p:style>
-      </p:cxnSp>
-      <p:cxnSp>
-        <p:nvCxnSpPr>
-          <p:cNvPr id="23" name="Straight Connector 22">
-            <a:extLst>
-              <a:ext uri="{FF2B5EF4-FFF2-40B4-BE49-F238E27FC236}">
-                <a16:creationId xmlns:a16="http://schemas.microsoft.com/office/drawing/2014/main" id="{F535A133-F7F0-142B-3A4C-20C5BA16087A}"/>
-              </a:ext>
-            </a:extLst>
-          </p:cNvPr>
-          <p:cNvCxnSpPr>
-            <a:cxnSpLocks/>
-            <a:stCxn id="17" idx="0"/>
-            <a:endCxn id="4" idx="2"/>
-          </p:cNvCxnSpPr>
-          <p:nvPr/>
-        </p:nvCxnSpPr>
-        <p:spPr>
-          <a:xfrm flipH="1" flipV="1">
-            <a:off x="6096000" y="2760366"/>
-            <a:ext cx="4155161" cy="1192994"/>
-          </a:xfrm>
-          <a:prstGeom prst="line">
-            <a:avLst/>
-          </a:prstGeom>
-          <a:ln w="19050" cap="flat" cmpd="sng" algn="ctr">
-            <a:solidFill>
-              <a:schemeClr val="accent1"/>
-            </a:solidFill>
-            <a:prstDash val="solid"/>
-            <a:round/>
-            <a:headEnd type="none" w="med" len="med"/>
-            <a:tailEnd type="none" w="med" len="med"/>
-          </a:ln>
-        </p:spPr>
-        <p:style>
-          <a:lnRef idx="0">
-            <a:scrgbClr r="0" g="0" b="0"/>
-          </a:lnRef>
-          <a:fillRef idx="0">
-            <a:scrgbClr r="0" g="0" b="0"/>
-          </a:fillRef>
-          <a:effectRef idx="0">
-            <a:scrgbClr r="0" g="0" b="0"/>
-          </a:effectRef>
-          <a:fontRef idx="minor">
-            <a:schemeClr val="tx1"/>
-          </a:fontRef>
-        </p:style>
-      </p:cxnSp>
-      <p:sp>
-        <p:nvSpPr>
-          <p:cNvPr id="2" name="TextBox 1">
-            <a:extLst>
-              <a:ext uri="{FF2B5EF4-FFF2-40B4-BE49-F238E27FC236}">
-                <a16:creationId xmlns:a16="http://schemas.microsoft.com/office/drawing/2014/main" id="{47C596D3-EE64-8890-2FB0-8ACEA2A6242E}"/>
-              </a:ext>
-            </a:extLst>
-          </p:cNvPr>
-          <p:cNvSpPr txBox="1"/>
-          <p:nvPr/>
-        </p:nvSpPr>
-        <p:spPr>
-          <a:xfrm>
-            <a:off x="4497161" y="3534032"/>
-            <a:ext cx="3197677" cy="369332"/>
-          </a:xfrm>
-          <a:prstGeom prst="rect">
-            <a:avLst/>
-          </a:prstGeom>
-          <a:solidFill>
-            <a:schemeClr val="accent1">
-              <a:lumMod val="20000"/>
-              <a:lumOff val="80000"/>
-            </a:schemeClr>
-          </a:solidFill>
-          <a:ln>
-            <a:solidFill>
-              <a:schemeClr val="accent2">
-                <a:lumMod val="75000"/>
-              </a:schemeClr>
-            </a:solidFill>
-          </a:ln>
-        </p:spPr>
-        <p:txBody>
-          <a:bodyPr wrap="square" rtlCol="0">
-            <a:spAutoFit/>
-          </a:bodyPr>
-          <a:lstStyle/>
-          <a:p>
-            <a:pPr algn="ctr"/>
-            <a:r>
-              <a:rPr lang="en-CA" dirty="0"/>
-              <a:t>Presented at COMP 2025</a:t>
-            </a:r>
-          </a:p>
-        </p:txBody>
-      </p:sp>
-    </p:spTree>
-    <p:extLst>
-      <p:ext uri="{BB962C8B-B14F-4D97-AF65-F5344CB8AC3E}">
-        <p14:creationId xmlns:p14="http://schemas.microsoft.com/office/powerpoint/2010/main" val="1375378903"/>
-      </p:ext>
-    </p:extLst>
-  </p:cSld>
-  <p:clrMapOvr>
-    <a:masterClrMapping/>
-  </p:clrMapOvr>
-</p:sld>
-</file>
-
-<file path=ppt/slides/slide50.xml><?xml version="1.0" encoding="utf-8"?>
+<file path=ppt/slides/slide52.xml><?xml version="1.0" encoding="utf-8"?>
 <p:sld xmlns:a="http://schemas.openxmlformats.org/drawingml/2006/main" xmlns:r="http://schemas.openxmlformats.org/officeDocument/2006/relationships" xmlns:p="http://schemas.openxmlformats.org/presentationml/2006/main">
   <p:cSld>
     <p:spTree>
@@ -32747,7 +34074,7 @@
           <a:p>
             <a:fld id="{1E5564C7-97C0-40C1-9717-452594735347}" type="slidenum">
               <a:rPr lang="en-CA" smtClean="0"/>
-              <a:t>50</a:t>
+              <a:t>52</a:t>
             </a:fld>
             <a:endParaRPr lang="en-CA" dirty="0"/>
           </a:p>
@@ -33250,7 +34577,7 @@
 </p:sld>
 </file>
 
-<file path=ppt/slides/slide51.xml><?xml version="1.0" encoding="utf-8"?>
+<file path=ppt/slides/slide53.xml><?xml version="1.0" encoding="utf-8"?>
 <p:sld xmlns:a="http://schemas.openxmlformats.org/drawingml/2006/main" xmlns:r="http://schemas.openxmlformats.org/officeDocument/2006/relationships" xmlns:p="http://schemas.openxmlformats.org/presentationml/2006/main">
   <p:cSld>
     <p:spTree>
@@ -33295,7 +34622,7 @@
           <a:p>
             <a:fld id="{1E5564C7-97C0-40C1-9717-452594735347}" type="slidenum">
               <a:rPr lang="en-CA" smtClean="0"/>
-              <a:t>51</a:t>
+              <a:t>53</a:t>
             </a:fld>
             <a:endParaRPr lang="en-CA" dirty="0"/>
           </a:p>
@@ -34406,7 +35733,7 @@
 </p:sld>
 </file>
 
-<file path=ppt/slides/slide52.xml><?xml version="1.0" encoding="utf-8"?>
+<file path=ppt/slides/slide54.xml><?xml version="1.0" encoding="utf-8"?>
 <p:sld xmlns:a="http://schemas.openxmlformats.org/drawingml/2006/main" xmlns:r="http://schemas.openxmlformats.org/officeDocument/2006/relationships" xmlns:p="http://schemas.openxmlformats.org/presentationml/2006/main">
   <p:cSld>
     <p:spTree>
@@ -34451,7 +35778,7 @@
           <a:p>
             <a:fld id="{1E5564C7-97C0-40C1-9717-452594735347}" type="slidenum">
               <a:rPr lang="en-CA" smtClean="0"/>
-              <a:t>52</a:t>
+              <a:t>54</a:t>
             </a:fld>
             <a:endParaRPr lang="en-CA" dirty="0"/>
           </a:p>

--- a/Working Documents/11.25_Committee Meeting.pptx
+++ b/Working Documents/11.25_Committee Meeting.pptx
@@ -5,7 +5,7 @@
     <p:sldMasterId id="2147483672" r:id="rId1"/>
   </p:sldMasterIdLst>
   <p:notesMasterIdLst>
-    <p:notesMasterId r:id="rId56"/>
+    <p:notesMasterId r:id="rId57"/>
   </p:notesMasterIdLst>
   <p:sldIdLst>
     <p:sldId id="256" r:id="rId2"/>
@@ -42,26 +42,27 @@
     <p:sldId id="301" r:id="rId33"/>
     <p:sldId id="319" r:id="rId34"/>
     <p:sldId id="317" r:id="rId35"/>
-    <p:sldId id="318" r:id="rId36"/>
-    <p:sldId id="320" r:id="rId37"/>
-    <p:sldId id="312" r:id="rId38"/>
-    <p:sldId id="321" r:id="rId39"/>
-    <p:sldId id="322" r:id="rId40"/>
-    <p:sldId id="313" r:id="rId41"/>
-    <p:sldId id="323" r:id="rId42"/>
-    <p:sldId id="305" r:id="rId43"/>
-    <p:sldId id="298" r:id="rId44"/>
-    <p:sldId id="302" r:id="rId45"/>
+    <p:sldId id="320" r:id="rId36"/>
+    <p:sldId id="312" r:id="rId37"/>
+    <p:sldId id="321" r:id="rId38"/>
+    <p:sldId id="322" r:id="rId39"/>
+    <p:sldId id="313" r:id="rId40"/>
+    <p:sldId id="323" r:id="rId41"/>
+    <p:sldId id="305" r:id="rId42"/>
+    <p:sldId id="298" r:id="rId43"/>
+    <p:sldId id="302" r:id="rId44"/>
+    <p:sldId id="328" r:id="rId45"/>
     <p:sldId id="326" r:id="rId46"/>
-    <p:sldId id="304" r:id="rId47"/>
-    <p:sldId id="306" r:id="rId48"/>
-    <p:sldId id="324" r:id="rId49"/>
-    <p:sldId id="307" r:id="rId50"/>
-    <p:sldId id="292" r:id="rId51"/>
-    <p:sldId id="276" r:id="rId52"/>
-    <p:sldId id="289" r:id="rId53"/>
-    <p:sldId id="277" r:id="rId54"/>
-    <p:sldId id="278" r:id="rId55"/>
+    <p:sldId id="327" r:id="rId47"/>
+    <p:sldId id="304" r:id="rId48"/>
+    <p:sldId id="306" r:id="rId49"/>
+    <p:sldId id="324" r:id="rId50"/>
+    <p:sldId id="307" r:id="rId51"/>
+    <p:sldId id="292" r:id="rId52"/>
+    <p:sldId id="276" r:id="rId53"/>
+    <p:sldId id="289" r:id="rId54"/>
+    <p:sldId id="277" r:id="rId55"/>
+    <p:sldId id="278" r:id="rId56"/>
   </p:sldIdLst>
   <p:sldSz cx="12192000" cy="6858000"/>
   <p:notesSz cx="6858000" cy="9144000"/>
@@ -9144,7 +9145,7 @@
           <a:p>
             <a:fld id="{A0428C8E-7BAD-4C37-9F0B-8CBDB03D4496}" type="datetimeFigureOut">
               <a:rPr lang="en-CA" smtClean="0"/>
-              <a:t>24-Nov-2025</a:t>
+              <a:t>25-Nov-2025</a:t>
             </a:fld>
             <a:endParaRPr lang="en-CA"/>
           </a:p>
@@ -11053,7 +11054,7 @@
           <a:p>
             <a:fld id="{5C2A1542-6F33-408E-AC39-5232C11A66FF}" type="slidenum">
               <a:rPr lang="en-CA" smtClean="0"/>
-              <a:t>51</a:t>
+              <a:t>52</a:t>
             </a:fld>
             <a:endParaRPr lang="en-CA"/>
           </a:p>
@@ -11173,7 +11174,7 @@
           <a:p>
             <a:fld id="{5C2A1542-6F33-408E-AC39-5232C11A66FF}" type="slidenum">
               <a:rPr lang="en-CA" smtClean="0"/>
-              <a:t>52</a:t>
+              <a:t>53</a:t>
             </a:fld>
             <a:endParaRPr lang="en-CA"/>
           </a:p>
@@ -11257,7 +11258,7 @@
           <a:p>
             <a:fld id="{A4F92E4B-81BE-4B7A-B36D-25EE9615AC65}" type="slidenum">
               <a:rPr lang="en-CA" smtClean="0"/>
-              <a:t>53</a:t>
+              <a:t>54</a:t>
             </a:fld>
             <a:endParaRPr lang="en-CA"/>
           </a:p>
@@ -12196,7 +12197,7 @@
           <a:p>
             <a:fld id="{4192F68B-5CDA-45F8-8FC6-8CC31496F2C0}" type="datetime1">
               <a:rPr lang="en-CA" smtClean="0"/>
-              <a:t>24-Nov-2025</a:t>
+              <a:t>25-Nov-2025</a:t>
             </a:fld>
             <a:endParaRPr lang="en-CA"/>
           </a:p>
@@ -12404,7 +12405,7 @@
           <a:p>
             <a:fld id="{723E7550-8411-4E2E-A2AF-8A063A660948}" type="datetime1">
               <a:rPr lang="en-CA" smtClean="0"/>
-              <a:t>24-Nov-2025</a:t>
+              <a:t>25-Nov-2025</a:t>
             </a:fld>
             <a:endParaRPr lang="en-CA"/>
           </a:p>
@@ -12662,7 +12663,7 @@
           <a:p>
             <a:fld id="{6161E27D-A925-4B3D-83F5-ECDB550EC939}" type="datetime1">
               <a:rPr lang="en-CA" smtClean="0"/>
-              <a:t>24-Nov-2025</a:t>
+              <a:t>25-Nov-2025</a:t>
             </a:fld>
             <a:endParaRPr lang="en-CA"/>
           </a:p>
@@ -12832,7 +12833,7 @@
           <a:p>
             <a:fld id="{BBE08C00-40B8-4EDA-BCF9-010BAB3E9B10}" type="datetime1">
               <a:rPr lang="en-CA" smtClean="0"/>
-              <a:t>24-Nov-2025</a:t>
+              <a:t>25-Nov-2025</a:t>
             </a:fld>
             <a:endParaRPr lang="en-CA"/>
           </a:p>
@@ -13169,7 +13170,7 @@
           <a:p>
             <a:fld id="{575BD93C-08CC-43D5-8845-C649925EFB70}" type="datetime1">
               <a:rPr lang="en-CA" smtClean="0"/>
-              <a:t>24-Nov-2025</a:t>
+              <a:t>25-Nov-2025</a:t>
             </a:fld>
             <a:endParaRPr lang="en-CA"/>
           </a:p>
@@ -13444,7 +13445,7 @@
           <a:p>
             <a:fld id="{C2DD09B4-FF6B-44BE-9FB1-59E724526725}" type="datetime1">
               <a:rPr lang="en-CA" smtClean="0"/>
-              <a:t>24-Nov-2025</a:t>
+              <a:t>25-Nov-2025</a:t>
             </a:fld>
             <a:endParaRPr lang="en-CA"/>
           </a:p>
@@ -13823,7 +13824,7 @@
           <a:p>
             <a:fld id="{1C8EDB9F-AB4A-4644-B1B1-ADD488636EFD}" type="datetime1">
               <a:rPr lang="en-CA" smtClean="0"/>
-              <a:t>24-Nov-2025</a:t>
+              <a:t>25-Nov-2025</a:t>
             </a:fld>
             <a:endParaRPr lang="en-CA"/>
           </a:p>
@@ -13941,7 +13942,7 @@
           <a:p>
             <a:fld id="{2C069573-12B9-4DA2-AE6A-3DF248409BF9}" type="datetime1">
               <a:rPr lang="en-CA" smtClean="0"/>
-              <a:t>24-Nov-2025</a:t>
+              <a:t>25-Nov-2025</a:t>
             </a:fld>
             <a:endParaRPr lang="en-CA"/>
           </a:p>
@@ -14114,7 +14115,7 @@
           <a:p>
             <a:fld id="{B010FC2F-8CC7-4537-A6D2-E86E24CBE470}" type="datetime1">
               <a:rPr lang="en-CA" smtClean="0"/>
-              <a:t>24-Nov-2025</a:t>
+              <a:t>25-Nov-2025</a:t>
             </a:fld>
             <a:endParaRPr lang="en-CA"/>
           </a:p>
@@ -14470,7 +14471,7 @@
           <a:p>
             <a:fld id="{A20AF02B-F510-4E59-9F48-4A2B2B1C7CCC}" type="datetime1">
               <a:rPr lang="en-CA" smtClean="0"/>
-              <a:t>24-Nov-2025</a:t>
+              <a:t>25-Nov-2025</a:t>
             </a:fld>
             <a:endParaRPr lang="en-CA"/>
           </a:p>
@@ -14849,7 +14850,7 @@
           <a:p>
             <a:fld id="{1A796962-FC1B-4478-9758-77DD5C261549}" type="datetime1">
               <a:rPr lang="en-CA" smtClean="0"/>
-              <a:t>24-Nov-2025</a:t>
+              <a:t>25-Nov-2025</a:t>
             </a:fld>
             <a:endParaRPr lang="en-CA"/>
           </a:p>
@@ -15138,7 +15139,7 @@
           <a:p>
             <a:fld id="{35F51464-522D-45AA-8684-534AFC039EDB}" type="datetime1">
               <a:rPr lang="en-CA" smtClean="0"/>
-              <a:t>24-Nov-2025</a:t>
+              <a:t>25-Nov-2025</a:t>
             </a:fld>
             <a:endParaRPr lang="en-CA"/>
           </a:p>
@@ -21117,7 +21118,7 @@
             </a:pPr>
             <a:r>
               <a:rPr lang="en-CA" sz="2400" dirty="0"/>
-              <a:t> Review Thesis Question</a:t>
+              <a:t>Review Thesis Question</a:t>
             </a:r>
           </a:p>
           <a:p>
@@ -25390,8 +25391,8 @@
           </a:p>
         </p:txBody>
       </p:sp>
-      <mc:AlternateContent xmlns:mc="http://schemas.openxmlformats.org/markup-compatibility/2006" xmlns:a14="http://schemas.microsoft.com/office/drawing/2010/main">
-        <mc:Choice Requires="a14">
+      <mc:AlternateContent xmlns:mc="http://schemas.openxmlformats.org/markup-compatibility/2006">
+        <mc:Choice xmlns:a14="http://schemas.microsoft.com/office/drawing/2010/main" Requires="a14">
           <p:sp>
             <p:nvSpPr>
               <p:cNvPr id="3" name="Content Placeholder 2">
@@ -25572,31 +25573,7 @@
                       <a:rPr lang="en-CA" b="0" i="1" smtClean="0">
                         <a:latin typeface="Cambria Math" panose="02040503050406030204" pitchFamily="18" charset="0"/>
                       </a:rPr>
-                      <m:t> </m:t>
-                    </m:r>
-                    <m:r>
-                      <a:rPr lang="en-CA" b="0" i="1" smtClean="0">
-                        <a:latin typeface="Cambria Math" panose="02040503050406030204" pitchFamily="18" charset="0"/>
-                      </a:rPr>
-                      <m:t>𝑝𝑒𝑟</m:t>
-                    </m:r>
-                    <m:r>
-                      <a:rPr lang="en-CA" b="0" i="1" smtClean="0">
-                        <a:latin typeface="Cambria Math" panose="02040503050406030204" pitchFamily="18" charset="0"/>
-                      </a:rPr>
-                      <m:t> </m:t>
-                    </m:r>
-                    <m:r>
-                      <a:rPr lang="en-US" b="0" i="1" smtClean="0">
-                        <a:latin typeface="Cambria Math" panose="02040503050406030204" pitchFamily="18" charset="0"/>
-                      </a:rPr>
-                      <m:t>𝑡𝑖𝑚𝑒𝑠𝑡𝑒𝑝</m:t>
-                    </m:r>
-                    <m:r>
-                      <a:rPr lang="en-CA" b="0" i="1" smtClean="0">
-                        <a:latin typeface="Cambria Math" panose="02040503050406030204" pitchFamily="18" charset="0"/>
-                      </a:rPr>
-                      <m:t>=</m:t>
+                      <m:t> =</m:t>
                     </m:r>
                     <m:r>
                       <a:rPr lang="en-CA" i="1">
@@ -25772,7 +25749,7 @@
             </p:txBody>
           </p:sp>
         </mc:Choice>
-        <mc:Fallback xmlns="">
+        <mc:Fallback>
           <p:sp>
             <p:nvSpPr>
               <p:cNvPr id="3" name="Content Placeholder 2">
@@ -26067,7 +26044,7 @@
           <a:p>
             <a:r>
               <a:rPr lang="en-CA" sz="1300" dirty="0"/>
-              <a:t>Dose (Gy/Particle), Voxel Index, Time of Event (sec)</a:t>
+              <a:t>Dose (Gy),        Voxel Index,         Time of Event (sec)</a:t>
             </a:r>
           </a:p>
           <a:p>
@@ -26447,6 +26424,331 @@
           </a:p>
         </p:txBody>
       </p:sp>
+      <p:sp>
+        <p:nvSpPr>
+          <p:cNvPr id="5" name="Content Placeholder 2">
+            <a:extLst>
+              <a:ext uri="{FF2B5EF4-FFF2-40B4-BE49-F238E27FC236}">
+                <a16:creationId xmlns:a16="http://schemas.microsoft.com/office/drawing/2014/main" id="{96BCEFCE-D633-5122-9429-E5AD5DEAB943}"/>
+              </a:ext>
+            </a:extLst>
+          </p:cNvPr>
+          <p:cNvSpPr txBox="1">
+            <a:spLocks/>
+          </p:cNvSpPr>
+          <p:nvPr/>
+        </p:nvSpPr>
+        <p:spPr>
+          <a:xfrm>
+            <a:off x="1097280" y="1845733"/>
+            <a:ext cx="3827145" cy="2487369"/>
+          </a:xfrm>
+          <a:prstGeom prst="rect">
+            <a:avLst/>
+          </a:prstGeom>
+          <a:solidFill>
+            <a:schemeClr val="accent1">
+              <a:lumMod val="20000"/>
+              <a:lumOff val="80000"/>
+            </a:schemeClr>
+          </a:solidFill>
+          <a:ln>
+            <a:solidFill>
+              <a:schemeClr val="accent1">
+                <a:lumMod val="50000"/>
+              </a:schemeClr>
+            </a:solidFill>
+          </a:ln>
+        </p:spPr>
+        <p:txBody>
+          <a:bodyPr vert="horz" lIns="0" tIns="45720" rIns="0" bIns="45720" rtlCol="0">
+            <a:normAutofit/>
+          </a:bodyPr>
+          <a:lstStyle>
+            <a:lvl1pPr marL="91440" indent="-91440" algn="l" defTabSz="914400" rtl="0" eaLnBrk="1" latinLnBrk="0" hangingPunct="1">
+              <a:lnSpc>
+                <a:spcPct val="90000"/>
+              </a:lnSpc>
+              <a:spcBef>
+                <a:spcPts val="1200"/>
+              </a:spcBef>
+              <a:spcAft>
+                <a:spcPts val="200"/>
+              </a:spcAft>
+              <a:buClr>
+                <a:schemeClr val="accent1"/>
+              </a:buClr>
+              <a:buSzPct val="100000"/>
+              <a:buFont typeface="Calibri" panose="020F0502020204030204" pitchFamily="34" charset="0"/>
+              <a:buChar char=" "/>
+              <a:defRPr sz="2000" kern="1200">
+                <a:solidFill>
+                  <a:schemeClr val="tx1">
+                    <a:lumMod val="75000"/>
+                    <a:lumOff val="25000"/>
+                  </a:schemeClr>
+                </a:solidFill>
+                <a:latin typeface="+mn-lt"/>
+                <a:ea typeface="+mn-ea"/>
+                <a:cs typeface="+mn-cs"/>
+              </a:defRPr>
+            </a:lvl1pPr>
+            <a:lvl2pPr marL="384048" indent="-182880" algn="l" defTabSz="914400" rtl="0" eaLnBrk="1" latinLnBrk="0" hangingPunct="1">
+              <a:lnSpc>
+                <a:spcPct val="90000"/>
+              </a:lnSpc>
+              <a:spcBef>
+                <a:spcPts val="200"/>
+              </a:spcBef>
+              <a:spcAft>
+                <a:spcPts val="400"/>
+              </a:spcAft>
+              <a:buClr>
+                <a:schemeClr val="accent1"/>
+              </a:buClr>
+              <a:buFont typeface="Calibri" pitchFamily="34" charset="0"/>
+              <a:buChar char="◦"/>
+              <a:defRPr sz="1800" kern="1200">
+                <a:solidFill>
+                  <a:schemeClr val="tx1">
+                    <a:lumMod val="75000"/>
+                    <a:lumOff val="25000"/>
+                  </a:schemeClr>
+                </a:solidFill>
+                <a:latin typeface="+mn-lt"/>
+                <a:ea typeface="+mn-ea"/>
+                <a:cs typeface="+mn-cs"/>
+              </a:defRPr>
+            </a:lvl2pPr>
+            <a:lvl3pPr marL="566928" indent="-182880" algn="l" defTabSz="914400" rtl="0" eaLnBrk="1" latinLnBrk="0" hangingPunct="1">
+              <a:lnSpc>
+                <a:spcPct val="90000"/>
+              </a:lnSpc>
+              <a:spcBef>
+                <a:spcPts val="200"/>
+              </a:spcBef>
+              <a:spcAft>
+                <a:spcPts val="400"/>
+              </a:spcAft>
+              <a:buClr>
+                <a:schemeClr val="accent1"/>
+              </a:buClr>
+              <a:buFont typeface="Calibri" pitchFamily="34" charset="0"/>
+              <a:buChar char="◦"/>
+              <a:defRPr sz="1400" kern="1200">
+                <a:solidFill>
+                  <a:schemeClr val="tx1">
+                    <a:lumMod val="75000"/>
+                    <a:lumOff val="25000"/>
+                  </a:schemeClr>
+                </a:solidFill>
+                <a:latin typeface="+mn-lt"/>
+                <a:ea typeface="+mn-ea"/>
+                <a:cs typeface="+mn-cs"/>
+              </a:defRPr>
+            </a:lvl3pPr>
+            <a:lvl4pPr marL="749808" indent="-182880" algn="l" defTabSz="914400" rtl="0" eaLnBrk="1" latinLnBrk="0" hangingPunct="1">
+              <a:lnSpc>
+                <a:spcPct val="90000"/>
+              </a:lnSpc>
+              <a:spcBef>
+                <a:spcPts val="200"/>
+              </a:spcBef>
+              <a:spcAft>
+                <a:spcPts val="400"/>
+              </a:spcAft>
+              <a:buClr>
+                <a:schemeClr val="accent1"/>
+              </a:buClr>
+              <a:buFont typeface="Calibri" pitchFamily="34" charset="0"/>
+              <a:buChar char="◦"/>
+              <a:defRPr sz="1400" kern="1200">
+                <a:solidFill>
+                  <a:schemeClr val="tx1">
+                    <a:lumMod val="75000"/>
+                    <a:lumOff val="25000"/>
+                  </a:schemeClr>
+                </a:solidFill>
+                <a:latin typeface="+mn-lt"/>
+                <a:ea typeface="+mn-ea"/>
+                <a:cs typeface="+mn-cs"/>
+              </a:defRPr>
+            </a:lvl4pPr>
+            <a:lvl5pPr marL="932688" indent="-182880" algn="l" defTabSz="914400" rtl="0" eaLnBrk="1" latinLnBrk="0" hangingPunct="1">
+              <a:lnSpc>
+                <a:spcPct val="90000"/>
+              </a:lnSpc>
+              <a:spcBef>
+                <a:spcPts val="200"/>
+              </a:spcBef>
+              <a:spcAft>
+                <a:spcPts val="400"/>
+              </a:spcAft>
+              <a:buClr>
+                <a:schemeClr val="accent1"/>
+              </a:buClr>
+              <a:buFont typeface="Calibri" pitchFamily="34" charset="0"/>
+              <a:buChar char="◦"/>
+              <a:defRPr sz="1400" kern="1200">
+                <a:solidFill>
+                  <a:schemeClr val="tx1">
+                    <a:lumMod val="75000"/>
+                    <a:lumOff val="25000"/>
+                  </a:schemeClr>
+                </a:solidFill>
+                <a:latin typeface="+mn-lt"/>
+                <a:ea typeface="+mn-ea"/>
+                <a:cs typeface="+mn-cs"/>
+              </a:defRPr>
+            </a:lvl5pPr>
+            <a:lvl6pPr marL="1100000" indent="-228600" algn="l" defTabSz="914400" rtl="0" eaLnBrk="1" latinLnBrk="0" hangingPunct="1">
+              <a:lnSpc>
+                <a:spcPct val="90000"/>
+              </a:lnSpc>
+              <a:spcBef>
+                <a:spcPts val="200"/>
+              </a:spcBef>
+              <a:spcAft>
+                <a:spcPts val="400"/>
+              </a:spcAft>
+              <a:buClr>
+                <a:schemeClr val="accent1"/>
+              </a:buClr>
+              <a:buFont typeface="Calibri" pitchFamily="34" charset="0"/>
+              <a:buChar char="◦"/>
+              <a:defRPr sz="1400" kern="1200">
+                <a:solidFill>
+                  <a:schemeClr val="tx1">
+                    <a:lumMod val="75000"/>
+                    <a:lumOff val="25000"/>
+                  </a:schemeClr>
+                </a:solidFill>
+                <a:latin typeface="+mn-lt"/>
+                <a:ea typeface="+mn-ea"/>
+                <a:cs typeface="+mn-cs"/>
+              </a:defRPr>
+            </a:lvl6pPr>
+            <a:lvl7pPr marL="1300000" indent="-228600" algn="l" defTabSz="914400" rtl="0" eaLnBrk="1" latinLnBrk="0" hangingPunct="1">
+              <a:lnSpc>
+                <a:spcPct val="90000"/>
+              </a:lnSpc>
+              <a:spcBef>
+                <a:spcPts val="200"/>
+              </a:spcBef>
+              <a:spcAft>
+                <a:spcPts val="400"/>
+              </a:spcAft>
+              <a:buClr>
+                <a:schemeClr val="accent1"/>
+              </a:buClr>
+              <a:buFont typeface="Calibri" pitchFamily="34" charset="0"/>
+              <a:buChar char="◦"/>
+              <a:defRPr sz="1400" kern="1200">
+                <a:solidFill>
+                  <a:schemeClr val="tx1">
+                    <a:lumMod val="75000"/>
+                    <a:lumOff val="25000"/>
+                  </a:schemeClr>
+                </a:solidFill>
+                <a:latin typeface="+mn-lt"/>
+                <a:ea typeface="+mn-ea"/>
+                <a:cs typeface="+mn-cs"/>
+              </a:defRPr>
+            </a:lvl7pPr>
+            <a:lvl8pPr marL="1500000" indent="-228600" algn="l" defTabSz="914400" rtl="0" eaLnBrk="1" latinLnBrk="0" hangingPunct="1">
+              <a:lnSpc>
+                <a:spcPct val="90000"/>
+              </a:lnSpc>
+              <a:spcBef>
+                <a:spcPts val="200"/>
+              </a:spcBef>
+              <a:spcAft>
+                <a:spcPts val="400"/>
+              </a:spcAft>
+              <a:buClr>
+                <a:schemeClr val="accent1"/>
+              </a:buClr>
+              <a:buFont typeface="Calibri" pitchFamily="34" charset="0"/>
+              <a:buChar char="◦"/>
+              <a:defRPr sz="1400" kern="1200">
+                <a:solidFill>
+                  <a:schemeClr val="tx1">
+                    <a:lumMod val="75000"/>
+                    <a:lumOff val="25000"/>
+                  </a:schemeClr>
+                </a:solidFill>
+                <a:latin typeface="+mn-lt"/>
+                <a:ea typeface="+mn-ea"/>
+                <a:cs typeface="+mn-cs"/>
+              </a:defRPr>
+            </a:lvl8pPr>
+            <a:lvl9pPr marL="1700000" indent="-228600" algn="l" defTabSz="914400" rtl="0" eaLnBrk="1" latinLnBrk="0" hangingPunct="1">
+              <a:lnSpc>
+                <a:spcPct val="90000"/>
+              </a:lnSpc>
+              <a:spcBef>
+                <a:spcPts val="200"/>
+              </a:spcBef>
+              <a:spcAft>
+                <a:spcPts val="400"/>
+              </a:spcAft>
+              <a:buClr>
+                <a:schemeClr val="accent1"/>
+              </a:buClr>
+              <a:buFont typeface="Calibri" pitchFamily="34" charset="0"/>
+              <a:buChar char="◦"/>
+              <a:defRPr sz="1400" kern="1200">
+                <a:solidFill>
+                  <a:schemeClr val="tx1">
+                    <a:lumMod val="75000"/>
+                    <a:lumOff val="25000"/>
+                  </a:schemeClr>
+                </a:solidFill>
+                <a:latin typeface="+mn-lt"/>
+                <a:ea typeface="+mn-ea"/>
+                <a:cs typeface="+mn-cs"/>
+              </a:defRPr>
+            </a:lvl9pPr>
+          </a:lstStyle>
+          <a:p>
+            <a:r>
+              <a:rPr lang="en-CA" dirty="0"/>
+              <a:t>Converted 4DMC Results</a:t>
+            </a:r>
+          </a:p>
+          <a:p>
+            <a:r>
+              <a:rPr lang="en-CA" sz="1300" dirty="0"/>
+              <a:t>Dose (Gy),        Voxel Index,         Time of Event (sec)</a:t>
+            </a:r>
+          </a:p>
+          <a:p>
+            <a:pPr marL="0" indent="0">
+              <a:buFont typeface="Calibri" panose="020F0502020204030204" pitchFamily="34" charset="0"/>
+              <a:buNone/>
+            </a:pPr>
+            <a:r>
+              <a:rPr lang="en-CA" dirty="0"/>
+              <a:t> </a:t>
+            </a:r>
+            <a:endParaRPr lang="en-CA" b="1" dirty="0"/>
+          </a:p>
+          <a:p>
+            <a:pPr marL="0" indent="0">
+              <a:buFont typeface="Calibri" panose="020F0502020204030204" pitchFamily="34" charset="0"/>
+              <a:buNone/>
+            </a:pPr>
+            <a:endParaRPr lang="en-CA" b="1" dirty="0"/>
+          </a:p>
+          <a:p>
+            <a:pPr marL="0" indent="0">
+              <a:buFont typeface="Calibri" panose="020F0502020204030204" pitchFamily="34" charset="0"/>
+              <a:buNone/>
+            </a:pPr>
+            <a:endParaRPr lang="en-CA" dirty="0"/>
+          </a:p>
+        </p:txBody>
+      </p:sp>
       <p:cxnSp>
         <p:nvCxnSpPr>
           <p:cNvPr id="6" name="Straight Connector 5">
@@ -26914,6 +27216,331 @@
           </a:p>
         </p:txBody>
       </p:sp>
+      <p:sp>
+        <p:nvSpPr>
+          <p:cNvPr id="5" name="Content Placeholder 2">
+            <a:extLst>
+              <a:ext uri="{FF2B5EF4-FFF2-40B4-BE49-F238E27FC236}">
+                <a16:creationId xmlns:a16="http://schemas.microsoft.com/office/drawing/2014/main" id="{50298933-F547-E943-AEBF-82F974037C6C}"/>
+              </a:ext>
+            </a:extLst>
+          </p:cNvPr>
+          <p:cNvSpPr txBox="1">
+            <a:spLocks/>
+          </p:cNvSpPr>
+          <p:nvPr/>
+        </p:nvSpPr>
+        <p:spPr>
+          <a:xfrm>
+            <a:off x="1097279" y="1842822"/>
+            <a:ext cx="3827145" cy="2487369"/>
+          </a:xfrm>
+          <a:prstGeom prst="rect">
+            <a:avLst/>
+          </a:prstGeom>
+          <a:solidFill>
+            <a:schemeClr val="accent1">
+              <a:lumMod val="20000"/>
+              <a:lumOff val="80000"/>
+            </a:schemeClr>
+          </a:solidFill>
+          <a:ln>
+            <a:solidFill>
+              <a:schemeClr val="accent1">
+                <a:lumMod val="50000"/>
+              </a:schemeClr>
+            </a:solidFill>
+          </a:ln>
+        </p:spPr>
+        <p:txBody>
+          <a:bodyPr vert="horz" lIns="0" tIns="45720" rIns="0" bIns="45720" rtlCol="0">
+            <a:normAutofit/>
+          </a:bodyPr>
+          <a:lstStyle>
+            <a:lvl1pPr marL="91440" indent="-91440" algn="l" defTabSz="914400" rtl="0" eaLnBrk="1" latinLnBrk="0" hangingPunct="1">
+              <a:lnSpc>
+                <a:spcPct val="90000"/>
+              </a:lnSpc>
+              <a:spcBef>
+                <a:spcPts val="1200"/>
+              </a:spcBef>
+              <a:spcAft>
+                <a:spcPts val="200"/>
+              </a:spcAft>
+              <a:buClr>
+                <a:schemeClr val="accent1"/>
+              </a:buClr>
+              <a:buSzPct val="100000"/>
+              <a:buFont typeface="Calibri" panose="020F0502020204030204" pitchFamily="34" charset="0"/>
+              <a:buChar char=" "/>
+              <a:defRPr sz="2000" kern="1200">
+                <a:solidFill>
+                  <a:schemeClr val="tx1">
+                    <a:lumMod val="75000"/>
+                    <a:lumOff val="25000"/>
+                  </a:schemeClr>
+                </a:solidFill>
+                <a:latin typeface="+mn-lt"/>
+                <a:ea typeface="+mn-ea"/>
+                <a:cs typeface="+mn-cs"/>
+              </a:defRPr>
+            </a:lvl1pPr>
+            <a:lvl2pPr marL="384048" indent="-182880" algn="l" defTabSz="914400" rtl="0" eaLnBrk="1" latinLnBrk="0" hangingPunct="1">
+              <a:lnSpc>
+                <a:spcPct val="90000"/>
+              </a:lnSpc>
+              <a:spcBef>
+                <a:spcPts val="200"/>
+              </a:spcBef>
+              <a:spcAft>
+                <a:spcPts val="400"/>
+              </a:spcAft>
+              <a:buClr>
+                <a:schemeClr val="accent1"/>
+              </a:buClr>
+              <a:buFont typeface="Calibri" pitchFamily="34" charset="0"/>
+              <a:buChar char="◦"/>
+              <a:defRPr sz="1800" kern="1200">
+                <a:solidFill>
+                  <a:schemeClr val="tx1">
+                    <a:lumMod val="75000"/>
+                    <a:lumOff val="25000"/>
+                  </a:schemeClr>
+                </a:solidFill>
+                <a:latin typeface="+mn-lt"/>
+                <a:ea typeface="+mn-ea"/>
+                <a:cs typeface="+mn-cs"/>
+              </a:defRPr>
+            </a:lvl2pPr>
+            <a:lvl3pPr marL="566928" indent="-182880" algn="l" defTabSz="914400" rtl="0" eaLnBrk="1" latinLnBrk="0" hangingPunct="1">
+              <a:lnSpc>
+                <a:spcPct val="90000"/>
+              </a:lnSpc>
+              <a:spcBef>
+                <a:spcPts val="200"/>
+              </a:spcBef>
+              <a:spcAft>
+                <a:spcPts val="400"/>
+              </a:spcAft>
+              <a:buClr>
+                <a:schemeClr val="accent1"/>
+              </a:buClr>
+              <a:buFont typeface="Calibri" pitchFamily="34" charset="0"/>
+              <a:buChar char="◦"/>
+              <a:defRPr sz="1400" kern="1200">
+                <a:solidFill>
+                  <a:schemeClr val="tx1">
+                    <a:lumMod val="75000"/>
+                    <a:lumOff val="25000"/>
+                  </a:schemeClr>
+                </a:solidFill>
+                <a:latin typeface="+mn-lt"/>
+                <a:ea typeface="+mn-ea"/>
+                <a:cs typeface="+mn-cs"/>
+              </a:defRPr>
+            </a:lvl3pPr>
+            <a:lvl4pPr marL="749808" indent="-182880" algn="l" defTabSz="914400" rtl="0" eaLnBrk="1" latinLnBrk="0" hangingPunct="1">
+              <a:lnSpc>
+                <a:spcPct val="90000"/>
+              </a:lnSpc>
+              <a:spcBef>
+                <a:spcPts val="200"/>
+              </a:spcBef>
+              <a:spcAft>
+                <a:spcPts val="400"/>
+              </a:spcAft>
+              <a:buClr>
+                <a:schemeClr val="accent1"/>
+              </a:buClr>
+              <a:buFont typeface="Calibri" pitchFamily="34" charset="0"/>
+              <a:buChar char="◦"/>
+              <a:defRPr sz="1400" kern="1200">
+                <a:solidFill>
+                  <a:schemeClr val="tx1">
+                    <a:lumMod val="75000"/>
+                    <a:lumOff val="25000"/>
+                  </a:schemeClr>
+                </a:solidFill>
+                <a:latin typeface="+mn-lt"/>
+                <a:ea typeface="+mn-ea"/>
+                <a:cs typeface="+mn-cs"/>
+              </a:defRPr>
+            </a:lvl4pPr>
+            <a:lvl5pPr marL="932688" indent="-182880" algn="l" defTabSz="914400" rtl="0" eaLnBrk="1" latinLnBrk="0" hangingPunct="1">
+              <a:lnSpc>
+                <a:spcPct val="90000"/>
+              </a:lnSpc>
+              <a:spcBef>
+                <a:spcPts val="200"/>
+              </a:spcBef>
+              <a:spcAft>
+                <a:spcPts val="400"/>
+              </a:spcAft>
+              <a:buClr>
+                <a:schemeClr val="accent1"/>
+              </a:buClr>
+              <a:buFont typeface="Calibri" pitchFamily="34" charset="0"/>
+              <a:buChar char="◦"/>
+              <a:defRPr sz="1400" kern="1200">
+                <a:solidFill>
+                  <a:schemeClr val="tx1">
+                    <a:lumMod val="75000"/>
+                    <a:lumOff val="25000"/>
+                  </a:schemeClr>
+                </a:solidFill>
+                <a:latin typeface="+mn-lt"/>
+                <a:ea typeface="+mn-ea"/>
+                <a:cs typeface="+mn-cs"/>
+              </a:defRPr>
+            </a:lvl5pPr>
+            <a:lvl6pPr marL="1100000" indent="-228600" algn="l" defTabSz="914400" rtl="0" eaLnBrk="1" latinLnBrk="0" hangingPunct="1">
+              <a:lnSpc>
+                <a:spcPct val="90000"/>
+              </a:lnSpc>
+              <a:spcBef>
+                <a:spcPts val="200"/>
+              </a:spcBef>
+              <a:spcAft>
+                <a:spcPts val="400"/>
+              </a:spcAft>
+              <a:buClr>
+                <a:schemeClr val="accent1"/>
+              </a:buClr>
+              <a:buFont typeface="Calibri" pitchFamily="34" charset="0"/>
+              <a:buChar char="◦"/>
+              <a:defRPr sz="1400" kern="1200">
+                <a:solidFill>
+                  <a:schemeClr val="tx1">
+                    <a:lumMod val="75000"/>
+                    <a:lumOff val="25000"/>
+                  </a:schemeClr>
+                </a:solidFill>
+                <a:latin typeface="+mn-lt"/>
+                <a:ea typeface="+mn-ea"/>
+                <a:cs typeface="+mn-cs"/>
+              </a:defRPr>
+            </a:lvl6pPr>
+            <a:lvl7pPr marL="1300000" indent="-228600" algn="l" defTabSz="914400" rtl="0" eaLnBrk="1" latinLnBrk="0" hangingPunct="1">
+              <a:lnSpc>
+                <a:spcPct val="90000"/>
+              </a:lnSpc>
+              <a:spcBef>
+                <a:spcPts val="200"/>
+              </a:spcBef>
+              <a:spcAft>
+                <a:spcPts val="400"/>
+              </a:spcAft>
+              <a:buClr>
+                <a:schemeClr val="accent1"/>
+              </a:buClr>
+              <a:buFont typeface="Calibri" pitchFamily="34" charset="0"/>
+              <a:buChar char="◦"/>
+              <a:defRPr sz="1400" kern="1200">
+                <a:solidFill>
+                  <a:schemeClr val="tx1">
+                    <a:lumMod val="75000"/>
+                    <a:lumOff val="25000"/>
+                  </a:schemeClr>
+                </a:solidFill>
+                <a:latin typeface="+mn-lt"/>
+                <a:ea typeface="+mn-ea"/>
+                <a:cs typeface="+mn-cs"/>
+              </a:defRPr>
+            </a:lvl7pPr>
+            <a:lvl8pPr marL="1500000" indent="-228600" algn="l" defTabSz="914400" rtl="0" eaLnBrk="1" latinLnBrk="0" hangingPunct="1">
+              <a:lnSpc>
+                <a:spcPct val="90000"/>
+              </a:lnSpc>
+              <a:spcBef>
+                <a:spcPts val="200"/>
+              </a:spcBef>
+              <a:spcAft>
+                <a:spcPts val="400"/>
+              </a:spcAft>
+              <a:buClr>
+                <a:schemeClr val="accent1"/>
+              </a:buClr>
+              <a:buFont typeface="Calibri" pitchFamily="34" charset="0"/>
+              <a:buChar char="◦"/>
+              <a:defRPr sz="1400" kern="1200">
+                <a:solidFill>
+                  <a:schemeClr val="tx1">
+                    <a:lumMod val="75000"/>
+                    <a:lumOff val="25000"/>
+                  </a:schemeClr>
+                </a:solidFill>
+                <a:latin typeface="+mn-lt"/>
+                <a:ea typeface="+mn-ea"/>
+                <a:cs typeface="+mn-cs"/>
+              </a:defRPr>
+            </a:lvl8pPr>
+            <a:lvl9pPr marL="1700000" indent="-228600" algn="l" defTabSz="914400" rtl="0" eaLnBrk="1" latinLnBrk="0" hangingPunct="1">
+              <a:lnSpc>
+                <a:spcPct val="90000"/>
+              </a:lnSpc>
+              <a:spcBef>
+                <a:spcPts val="200"/>
+              </a:spcBef>
+              <a:spcAft>
+                <a:spcPts val="400"/>
+              </a:spcAft>
+              <a:buClr>
+                <a:schemeClr val="accent1"/>
+              </a:buClr>
+              <a:buFont typeface="Calibri" pitchFamily="34" charset="0"/>
+              <a:buChar char="◦"/>
+              <a:defRPr sz="1400" kern="1200">
+                <a:solidFill>
+                  <a:schemeClr val="tx1">
+                    <a:lumMod val="75000"/>
+                    <a:lumOff val="25000"/>
+                  </a:schemeClr>
+                </a:solidFill>
+                <a:latin typeface="+mn-lt"/>
+                <a:ea typeface="+mn-ea"/>
+                <a:cs typeface="+mn-cs"/>
+              </a:defRPr>
+            </a:lvl9pPr>
+          </a:lstStyle>
+          <a:p>
+            <a:r>
+              <a:rPr lang="en-CA" dirty="0"/>
+              <a:t>Converted 4DMC Results</a:t>
+            </a:r>
+          </a:p>
+          <a:p>
+            <a:r>
+              <a:rPr lang="en-CA" sz="1300" dirty="0"/>
+              <a:t>Dose (Gy),        Voxel Index,         Time of Event (sec)</a:t>
+            </a:r>
+          </a:p>
+          <a:p>
+            <a:pPr marL="0" indent="0">
+              <a:buFont typeface="Calibri" panose="020F0502020204030204" pitchFamily="34" charset="0"/>
+              <a:buNone/>
+            </a:pPr>
+            <a:r>
+              <a:rPr lang="en-CA" dirty="0"/>
+              <a:t> </a:t>
+            </a:r>
+            <a:endParaRPr lang="en-CA" b="1" dirty="0"/>
+          </a:p>
+          <a:p>
+            <a:pPr marL="0" indent="0">
+              <a:buFont typeface="Calibri" panose="020F0502020204030204" pitchFamily="34" charset="0"/>
+              <a:buNone/>
+            </a:pPr>
+            <a:endParaRPr lang="en-CA" b="1" dirty="0"/>
+          </a:p>
+          <a:p>
+            <a:pPr marL="0" indent="0">
+              <a:buFont typeface="Calibri" panose="020F0502020204030204" pitchFamily="34" charset="0"/>
+              <a:buNone/>
+            </a:pPr>
+            <a:endParaRPr lang="en-CA" dirty="0"/>
+          </a:p>
+        </p:txBody>
+      </p:sp>
       <p:cxnSp>
         <p:nvCxnSpPr>
           <p:cNvPr id="6" name="Straight Connector 5">
@@ -27304,7 +27931,7 @@
         <p:cNvPr id="1" name="">
           <a:extLst>
             <a:ext uri="{FF2B5EF4-FFF2-40B4-BE49-F238E27FC236}">
-              <a16:creationId xmlns:a16="http://schemas.microsoft.com/office/drawing/2014/main" id="{1E9E9ACC-F2BE-38F9-2BCD-6437E94DDFD9}"/>
+              <a16:creationId xmlns:a16="http://schemas.microsoft.com/office/drawing/2014/main" id="{8DCEFF16-6ED8-4401-82CE-1E55D32EA231}"/>
             </a:ext>
           </a:extLst>
         </p:cNvPr>
@@ -27324,7 +27951,7 @@
           <p:cNvPr id="2" name="Title 1">
             <a:extLst>
               <a:ext uri="{FF2B5EF4-FFF2-40B4-BE49-F238E27FC236}">
-                <a16:creationId xmlns:a16="http://schemas.microsoft.com/office/drawing/2014/main" id="{F1F163BE-1431-2423-14C4-7D90826E3B0A}"/>
+                <a16:creationId xmlns:a16="http://schemas.microsoft.com/office/drawing/2014/main" id="{E862DDD1-53DB-16B5-C57C-023C65248999}"/>
               </a:ext>
             </a:extLst>
           </p:cNvPr>
@@ -27352,7 +27979,7 @@
           <p:cNvPr id="3" name="Content Placeholder 2">
             <a:extLst>
               <a:ext uri="{FF2B5EF4-FFF2-40B4-BE49-F238E27FC236}">
-                <a16:creationId xmlns:a16="http://schemas.microsoft.com/office/drawing/2014/main" id="{7C6222B2-6E39-B81D-5A54-8BF5950F8D08}"/>
+                <a16:creationId xmlns:a16="http://schemas.microsoft.com/office/drawing/2014/main" id="{C2160650-0D6F-CF4A-6226-94319056E5B0}"/>
               </a:ext>
             </a:extLst>
           </p:cNvPr>
@@ -27428,7 +28055,7 @@
           <p:cNvPr id="4" name="Slide Number Placeholder 3">
             <a:extLst>
               <a:ext uri="{FF2B5EF4-FFF2-40B4-BE49-F238E27FC236}">
-                <a16:creationId xmlns:a16="http://schemas.microsoft.com/office/drawing/2014/main" id="{209288F9-407A-575D-0623-81CADB77D30F}"/>
+                <a16:creationId xmlns:a16="http://schemas.microsoft.com/office/drawing/2014/main" id="{2DD5B366-CB97-D3ED-DD1A-A9CDDD70F5BA}"/>
               </a:ext>
             </a:extLst>
           </p:cNvPr>
@@ -27452,12 +28079,337 @@
           </a:p>
         </p:txBody>
       </p:sp>
+      <p:sp>
+        <p:nvSpPr>
+          <p:cNvPr id="5" name="Content Placeholder 2">
+            <a:extLst>
+              <a:ext uri="{FF2B5EF4-FFF2-40B4-BE49-F238E27FC236}">
+                <a16:creationId xmlns:a16="http://schemas.microsoft.com/office/drawing/2014/main" id="{EC09B7F6-0FE0-14B8-9F52-369070327078}"/>
+              </a:ext>
+            </a:extLst>
+          </p:cNvPr>
+          <p:cNvSpPr txBox="1">
+            <a:spLocks/>
+          </p:cNvSpPr>
+          <p:nvPr/>
+        </p:nvSpPr>
+        <p:spPr>
+          <a:xfrm>
+            <a:off x="1097279" y="1845733"/>
+            <a:ext cx="3827145" cy="2487369"/>
+          </a:xfrm>
+          <a:prstGeom prst="rect">
+            <a:avLst/>
+          </a:prstGeom>
+          <a:solidFill>
+            <a:schemeClr val="accent1">
+              <a:lumMod val="20000"/>
+              <a:lumOff val="80000"/>
+            </a:schemeClr>
+          </a:solidFill>
+          <a:ln>
+            <a:solidFill>
+              <a:schemeClr val="accent1">
+                <a:lumMod val="50000"/>
+              </a:schemeClr>
+            </a:solidFill>
+          </a:ln>
+        </p:spPr>
+        <p:txBody>
+          <a:bodyPr vert="horz" lIns="0" tIns="45720" rIns="0" bIns="45720" rtlCol="0">
+            <a:normAutofit/>
+          </a:bodyPr>
+          <a:lstStyle>
+            <a:lvl1pPr marL="91440" indent="-91440" algn="l" defTabSz="914400" rtl="0" eaLnBrk="1" latinLnBrk="0" hangingPunct="1">
+              <a:lnSpc>
+                <a:spcPct val="90000"/>
+              </a:lnSpc>
+              <a:spcBef>
+                <a:spcPts val="1200"/>
+              </a:spcBef>
+              <a:spcAft>
+                <a:spcPts val="200"/>
+              </a:spcAft>
+              <a:buClr>
+                <a:schemeClr val="accent1"/>
+              </a:buClr>
+              <a:buSzPct val="100000"/>
+              <a:buFont typeface="Calibri" panose="020F0502020204030204" pitchFamily="34" charset="0"/>
+              <a:buChar char=" "/>
+              <a:defRPr sz="2000" kern="1200">
+                <a:solidFill>
+                  <a:schemeClr val="tx1">
+                    <a:lumMod val="75000"/>
+                    <a:lumOff val="25000"/>
+                  </a:schemeClr>
+                </a:solidFill>
+                <a:latin typeface="+mn-lt"/>
+                <a:ea typeface="+mn-ea"/>
+                <a:cs typeface="+mn-cs"/>
+              </a:defRPr>
+            </a:lvl1pPr>
+            <a:lvl2pPr marL="384048" indent="-182880" algn="l" defTabSz="914400" rtl="0" eaLnBrk="1" latinLnBrk="0" hangingPunct="1">
+              <a:lnSpc>
+                <a:spcPct val="90000"/>
+              </a:lnSpc>
+              <a:spcBef>
+                <a:spcPts val="200"/>
+              </a:spcBef>
+              <a:spcAft>
+                <a:spcPts val="400"/>
+              </a:spcAft>
+              <a:buClr>
+                <a:schemeClr val="accent1"/>
+              </a:buClr>
+              <a:buFont typeface="Calibri" pitchFamily="34" charset="0"/>
+              <a:buChar char="◦"/>
+              <a:defRPr sz="1800" kern="1200">
+                <a:solidFill>
+                  <a:schemeClr val="tx1">
+                    <a:lumMod val="75000"/>
+                    <a:lumOff val="25000"/>
+                  </a:schemeClr>
+                </a:solidFill>
+                <a:latin typeface="+mn-lt"/>
+                <a:ea typeface="+mn-ea"/>
+                <a:cs typeface="+mn-cs"/>
+              </a:defRPr>
+            </a:lvl2pPr>
+            <a:lvl3pPr marL="566928" indent="-182880" algn="l" defTabSz="914400" rtl="0" eaLnBrk="1" latinLnBrk="0" hangingPunct="1">
+              <a:lnSpc>
+                <a:spcPct val="90000"/>
+              </a:lnSpc>
+              <a:spcBef>
+                <a:spcPts val="200"/>
+              </a:spcBef>
+              <a:spcAft>
+                <a:spcPts val="400"/>
+              </a:spcAft>
+              <a:buClr>
+                <a:schemeClr val="accent1"/>
+              </a:buClr>
+              <a:buFont typeface="Calibri" pitchFamily="34" charset="0"/>
+              <a:buChar char="◦"/>
+              <a:defRPr sz="1400" kern="1200">
+                <a:solidFill>
+                  <a:schemeClr val="tx1">
+                    <a:lumMod val="75000"/>
+                    <a:lumOff val="25000"/>
+                  </a:schemeClr>
+                </a:solidFill>
+                <a:latin typeface="+mn-lt"/>
+                <a:ea typeface="+mn-ea"/>
+                <a:cs typeface="+mn-cs"/>
+              </a:defRPr>
+            </a:lvl3pPr>
+            <a:lvl4pPr marL="749808" indent="-182880" algn="l" defTabSz="914400" rtl="0" eaLnBrk="1" latinLnBrk="0" hangingPunct="1">
+              <a:lnSpc>
+                <a:spcPct val="90000"/>
+              </a:lnSpc>
+              <a:spcBef>
+                <a:spcPts val="200"/>
+              </a:spcBef>
+              <a:spcAft>
+                <a:spcPts val="400"/>
+              </a:spcAft>
+              <a:buClr>
+                <a:schemeClr val="accent1"/>
+              </a:buClr>
+              <a:buFont typeface="Calibri" pitchFamily="34" charset="0"/>
+              <a:buChar char="◦"/>
+              <a:defRPr sz="1400" kern="1200">
+                <a:solidFill>
+                  <a:schemeClr val="tx1">
+                    <a:lumMod val="75000"/>
+                    <a:lumOff val="25000"/>
+                  </a:schemeClr>
+                </a:solidFill>
+                <a:latin typeface="+mn-lt"/>
+                <a:ea typeface="+mn-ea"/>
+                <a:cs typeface="+mn-cs"/>
+              </a:defRPr>
+            </a:lvl4pPr>
+            <a:lvl5pPr marL="932688" indent="-182880" algn="l" defTabSz="914400" rtl="0" eaLnBrk="1" latinLnBrk="0" hangingPunct="1">
+              <a:lnSpc>
+                <a:spcPct val="90000"/>
+              </a:lnSpc>
+              <a:spcBef>
+                <a:spcPts val="200"/>
+              </a:spcBef>
+              <a:spcAft>
+                <a:spcPts val="400"/>
+              </a:spcAft>
+              <a:buClr>
+                <a:schemeClr val="accent1"/>
+              </a:buClr>
+              <a:buFont typeface="Calibri" pitchFamily="34" charset="0"/>
+              <a:buChar char="◦"/>
+              <a:defRPr sz="1400" kern="1200">
+                <a:solidFill>
+                  <a:schemeClr val="tx1">
+                    <a:lumMod val="75000"/>
+                    <a:lumOff val="25000"/>
+                  </a:schemeClr>
+                </a:solidFill>
+                <a:latin typeface="+mn-lt"/>
+                <a:ea typeface="+mn-ea"/>
+                <a:cs typeface="+mn-cs"/>
+              </a:defRPr>
+            </a:lvl5pPr>
+            <a:lvl6pPr marL="1100000" indent="-228600" algn="l" defTabSz="914400" rtl="0" eaLnBrk="1" latinLnBrk="0" hangingPunct="1">
+              <a:lnSpc>
+                <a:spcPct val="90000"/>
+              </a:lnSpc>
+              <a:spcBef>
+                <a:spcPts val="200"/>
+              </a:spcBef>
+              <a:spcAft>
+                <a:spcPts val="400"/>
+              </a:spcAft>
+              <a:buClr>
+                <a:schemeClr val="accent1"/>
+              </a:buClr>
+              <a:buFont typeface="Calibri" pitchFamily="34" charset="0"/>
+              <a:buChar char="◦"/>
+              <a:defRPr sz="1400" kern="1200">
+                <a:solidFill>
+                  <a:schemeClr val="tx1">
+                    <a:lumMod val="75000"/>
+                    <a:lumOff val="25000"/>
+                  </a:schemeClr>
+                </a:solidFill>
+                <a:latin typeface="+mn-lt"/>
+                <a:ea typeface="+mn-ea"/>
+                <a:cs typeface="+mn-cs"/>
+              </a:defRPr>
+            </a:lvl6pPr>
+            <a:lvl7pPr marL="1300000" indent="-228600" algn="l" defTabSz="914400" rtl="0" eaLnBrk="1" latinLnBrk="0" hangingPunct="1">
+              <a:lnSpc>
+                <a:spcPct val="90000"/>
+              </a:lnSpc>
+              <a:spcBef>
+                <a:spcPts val="200"/>
+              </a:spcBef>
+              <a:spcAft>
+                <a:spcPts val="400"/>
+              </a:spcAft>
+              <a:buClr>
+                <a:schemeClr val="accent1"/>
+              </a:buClr>
+              <a:buFont typeface="Calibri" pitchFamily="34" charset="0"/>
+              <a:buChar char="◦"/>
+              <a:defRPr sz="1400" kern="1200">
+                <a:solidFill>
+                  <a:schemeClr val="tx1">
+                    <a:lumMod val="75000"/>
+                    <a:lumOff val="25000"/>
+                  </a:schemeClr>
+                </a:solidFill>
+                <a:latin typeface="+mn-lt"/>
+                <a:ea typeface="+mn-ea"/>
+                <a:cs typeface="+mn-cs"/>
+              </a:defRPr>
+            </a:lvl7pPr>
+            <a:lvl8pPr marL="1500000" indent="-228600" algn="l" defTabSz="914400" rtl="0" eaLnBrk="1" latinLnBrk="0" hangingPunct="1">
+              <a:lnSpc>
+                <a:spcPct val="90000"/>
+              </a:lnSpc>
+              <a:spcBef>
+                <a:spcPts val="200"/>
+              </a:spcBef>
+              <a:spcAft>
+                <a:spcPts val="400"/>
+              </a:spcAft>
+              <a:buClr>
+                <a:schemeClr val="accent1"/>
+              </a:buClr>
+              <a:buFont typeface="Calibri" pitchFamily="34" charset="0"/>
+              <a:buChar char="◦"/>
+              <a:defRPr sz="1400" kern="1200">
+                <a:solidFill>
+                  <a:schemeClr val="tx1">
+                    <a:lumMod val="75000"/>
+                    <a:lumOff val="25000"/>
+                  </a:schemeClr>
+                </a:solidFill>
+                <a:latin typeface="+mn-lt"/>
+                <a:ea typeface="+mn-ea"/>
+                <a:cs typeface="+mn-cs"/>
+              </a:defRPr>
+            </a:lvl8pPr>
+            <a:lvl9pPr marL="1700000" indent="-228600" algn="l" defTabSz="914400" rtl="0" eaLnBrk="1" latinLnBrk="0" hangingPunct="1">
+              <a:lnSpc>
+                <a:spcPct val="90000"/>
+              </a:lnSpc>
+              <a:spcBef>
+                <a:spcPts val="200"/>
+              </a:spcBef>
+              <a:spcAft>
+                <a:spcPts val="400"/>
+              </a:spcAft>
+              <a:buClr>
+                <a:schemeClr val="accent1"/>
+              </a:buClr>
+              <a:buFont typeface="Calibri" pitchFamily="34" charset="0"/>
+              <a:buChar char="◦"/>
+              <a:defRPr sz="1400" kern="1200">
+                <a:solidFill>
+                  <a:schemeClr val="tx1">
+                    <a:lumMod val="75000"/>
+                    <a:lumOff val="25000"/>
+                  </a:schemeClr>
+                </a:solidFill>
+                <a:latin typeface="+mn-lt"/>
+                <a:ea typeface="+mn-ea"/>
+                <a:cs typeface="+mn-cs"/>
+              </a:defRPr>
+            </a:lvl9pPr>
+          </a:lstStyle>
+          <a:p>
+            <a:r>
+              <a:rPr lang="en-CA"/>
+              <a:t>Converted 4DMC Results</a:t>
+            </a:r>
+          </a:p>
+          <a:p>
+            <a:r>
+              <a:rPr lang="en-CA" sz="1300"/>
+              <a:t>Dose (Gy),        Voxel Index,         Time of Event (sec)</a:t>
+            </a:r>
+          </a:p>
+          <a:p>
+            <a:pPr marL="0" indent="0">
+              <a:buFont typeface="Calibri" panose="020F0502020204030204" pitchFamily="34" charset="0"/>
+              <a:buNone/>
+            </a:pPr>
+            <a:r>
+              <a:rPr lang="en-CA"/>
+              <a:t> </a:t>
+            </a:r>
+            <a:endParaRPr lang="en-CA" b="1"/>
+          </a:p>
+          <a:p>
+            <a:pPr marL="0" indent="0">
+              <a:buFont typeface="Calibri" panose="020F0502020204030204" pitchFamily="34" charset="0"/>
+              <a:buNone/>
+            </a:pPr>
+            <a:endParaRPr lang="en-CA" b="1"/>
+          </a:p>
+          <a:p>
+            <a:pPr marL="0" indent="0">
+              <a:buFont typeface="Calibri" panose="020F0502020204030204" pitchFamily="34" charset="0"/>
+              <a:buNone/>
+            </a:pPr>
+            <a:endParaRPr lang="en-CA" dirty="0"/>
+          </a:p>
+        </p:txBody>
+      </p:sp>
       <p:cxnSp>
         <p:nvCxnSpPr>
           <p:cNvPr id="6" name="Straight Connector 5">
             <a:extLst>
               <a:ext uri="{FF2B5EF4-FFF2-40B4-BE49-F238E27FC236}">
-                <a16:creationId xmlns:a16="http://schemas.microsoft.com/office/drawing/2014/main" id="{BDD3A50A-53F9-A184-6FA8-BE4C15AB5907}"/>
+                <a16:creationId xmlns:a16="http://schemas.microsoft.com/office/drawing/2014/main" id="{5BEF1186-DD57-2639-B6DF-CF0407949E61}"/>
               </a:ext>
             </a:extLst>
           </p:cNvPr>
@@ -27496,7 +28448,7 @@
           <p:cNvPr id="7" name="Straight Connector 6">
             <a:extLst>
               <a:ext uri="{FF2B5EF4-FFF2-40B4-BE49-F238E27FC236}">
-                <a16:creationId xmlns:a16="http://schemas.microsoft.com/office/drawing/2014/main" id="{338D26FF-AF24-210A-5381-DA5630E159D4}"/>
+                <a16:creationId xmlns:a16="http://schemas.microsoft.com/office/drawing/2014/main" id="{25FF3103-6206-F489-CA86-9731ABC36EDD}"/>
               </a:ext>
             </a:extLst>
           </p:cNvPr>
@@ -27535,7 +28487,7 @@
           <p:cNvPr id="8" name="Straight Connector 7">
             <a:extLst>
               <a:ext uri="{FF2B5EF4-FFF2-40B4-BE49-F238E27FC236}">
-                <a16:creationId xmlns:a16="http://schemas.microsoft.com/office/drawing/2014/main" id="{C2B92FC7-9218-7437-2050-72E19D5A5E6E}"/>
+                <a16:creationId xmlns:a16="http://schemas.microsoft.com/office/drawing/2014/main" id="{3B1514DF-3D3D-3A4F-B458-BDCB832D8C7E}"/>
               </a:ext>
             </a:extLst>
           </p:cNvPr>
@@ -27574,7 +28526,7 @@
           <p:cNvPr id="9" name="TextBox 8">
             <a:extLst>
               <a:ext uri="{FF2B5EF4-FFF2-40B4-BE49-F238E27FC236}">
-                <a16:creationId xmlns:a16="http://schemas.microsoft.com/office/drawing/2014/main" id="{258DE501-12ED-8A17-2510-D67081B83293}"/>
+                <a16:creationId xmlns:a16="http://schemas.microsoft.com/office/drawing/2014/main" id="{9292A5BC-B039-D6FF-B901-161F9428B02C}"/>
               </a:ext>
             </a:extLst>
           </p:cNvPr>
@@ -27673,7 +28625,7 @@
             </a:r>
             <a:r>
               <a:rPr lang="en-CA" dirty="0"/>
-              <a:t>(Gy/particle) </a:t>
+              <a:t>(Gy) </a:t>
             </a:r>
           </a:p>
           <a:p>
@@ -27686,7 +28638,7 @@
           <p:cNvPr id="10" name="Arrow: Down 9">
             <a:extLst>
               <a:ext uri="{FF2B5EF4-FFF2-40B4-BE49-F238E27FC236}">
-                <a16:creationId xmlns:a16="http://schemas.microsoft.com/office/drawing/2014/main" id="{7D5F507C-A603-860A-9581-4AD1520C67DA}"/>
+                <a16:creationId xmlns:a16="http://schemas.microsoft.com/office/drawing/2014/main" id="{80266417-23A5-381A-F85C-85EDD72798F6}"/>
               </a:ext>
             </a:extLst>
           </p:cNvPr>
@@ -27735,7 +28687,7 @@
           <p:cNvPr id="22" name="Arc 21">
             <a:extLst>
               <a:ext uri="{FF2B5EF4-FFF2-40B4-BE49-F238E27FC236}">
-                <a16:creationId xmlns:a16="http://schemas.microsoft.com/office/drawing/2014/main" id="{ABBDE17B-0E55-4850-E0A6-DA3E485F9A50}"/>
+                <a16:creationId xmlns:a16="http://schemas.microsoft.com/office/drawing/2014/main" id="{27EE9C2B-6459-2C6C-8D5C-81764BAA92F3}"/>
               </a:ext>
             </a:extLst>
           </p:cNvPr>
@@ -27787,7 +28739,7 @@
     </p:spTree>
     <p:extLst>
       <p:ext uri="{BB962C8B-B14F-4D97-AF65-F5344CB8AC3E}">
-        <p14:creationId xmlns:p14="http://schemas.microsoft.com/office/powerpoint/2010/main" val="4229400629"/>
+        <p14:creationId xmlns:p14="http://schemas.microsoft.com/office/powerpoint/2010/main" val="966650535"/>
       </p:ext>
     </p:extLst>
   </p:cSld>
@@ -27798,517 +28750,6 @@
 </file>
 
 <file path=ppt/slides/slide36.xml><?xml version="1.0" encoding="utf-8"?>
-<p:sld xmlns:a="http://schemas.openxmlformats.org/drawingml/2006/main" xmlns:r="http://schemas.openxmlformats.org/officeDocument/2006/relationships" xmlns:p="http://schemas.openxmlformats.org/presentationml/2006/main">
-  <p:cSld>
-    <p:spTree>
-      <p:nvGrpSpPr>
-        <p:cNvPr id="1" name="">
-          <a:extLst>
-            <a:ext uri="{FF2B5EF4-FFF2-40B4-BE49-F238E27FC236}">
-              <a16:creationId xmlns:a16="http://schemas.microsoft.com/office/drawing/2014/main" id="{8DCEFF16-6ED8-4401-82CE-1E55D32EA231}"/>
-            </a:ext>
-          </a:extLst>
-        </p:cNvPr>
-        <p:cNvGrpSpPr/>
-        <p:nvPr/>
-      </p:nvGrpSpPr>
-      <p:grpSpPr>
-        <a:xfrm>
-          <a:off x="0" y="0"/>
-          <a:ext cx="0" cy="0"/>
-          <a:chOff x="0" y="0"/>
-          <a:chExt cx="0" cy="0"/>
-        </a:xfrm>
-      </p:grpSpPr>
-      <p:sp>
-        <p:nvSpPr>
-          <p:cNvPr id="2" name="Title 1">
-            <a:extLst>
-              <a:ext uri="{FF2B5EF4-FFF2-40B4-BE49-F238E27FC236}">
-                <a16:creationId xmlns:a16="http://schemas.microsoft.com/office/drawing/2014/main" id="{E862DDD1-53DB-16B5-C57C-023C65248999}"/>
-              </a:ext>
-            </a:extLst>
-          </p:cNvPr>
-          <p:cNvSpPr>
-            <a:spLocks noGrp="1"/>
-          </p:cNvSpPr>
-          <p:nvPr>
-            <p:ph type="title"/>
-          </p:nvPr>
-        </p:nvSpPr>
-        <p:spPr/>
-        <p:txBody>
-          <a:bodyPr/>
-          <a:lstStyle/>
-          <a:p>
-            <a:r>
-              <a:rPr lang="en-CA" dirty="0"/>
-              <a:t>How we pull dose to voxel</a:t>
-            </a:r>
-          </a:p>
-        </p:txBody>
-      </p:sp>
-      <p:sp>
-        <p:nvSpPr>
-          <p:cNvPr id="3" name="Content Placeholder 2">
-            <a:extLst>
-              <a:ext uri="{FF2B5EF4-FFF2-40B4-BE49-F238E27FC236}">
-                <a16:creationId xmlns:a16="http://schemas.microsoft.com/office/drawing/2014/main" id="{C2160650-0D6F-CF4A-6226-94319056E5B0}"/>
-              </a:ext>
-            </a:extLst>
-          </p:cNvPr>
-          <p:cNvSpPr>
-            <a:spLocks noGrp="1"/>
-          </p:cNvSpPr>
-          <p:nvPr>
-            <p:ph idx="1"/>
-          </p:nvPr>
-        </p:nvSpPr>
-        <p:spPr>
-          <a:xfrm>
-            <a:off x="1097280" y="1845734"/>
-            <a:ext cx="3827145" cy="2487369"/>
-          </a:xfrm>
-          <a:solidFill>
-            <a:schemeClr val="accent1">
-              <a:lumMod val="20000"/>
-              <a:lumOff val="80000"/>
-            </a:schemeClr>
-          </a:solidFill>
-          <a:ln>
-            <a:solidFill>
-              <a:schemeClr val="accent1">
-                <a:lumMod val="50000"/>
-              </a:schemeClr>
-            </a:solidFill>
-          </a:ln>
-        </p:spPr>
-        <p:txBody>
-          <a:bodyPr>
-            <a:normAutofit/>
-          </a:bodyPr>
-          <a:lstStyle/>
-          <a:p>
-            <a:r>
-              <a:rPr lang="en-CA" dirty="0"/>
-              <a:t>Converted 4DMC Results</a:t>
-            </a:r>
-          </a:p>
-          <a:p>
-            <a:r>
-              <a:rPr lang="en-CA" sz="1300" dirty="0"/>
-              <a:t>Dose (Gy/Particle), Voxel Index, Time of Event (sec)</a:t>
-            </a:r>
-          </a:p>
-          <a:p>
-            <a:pPr marL="0" indent="0">
-              <a:buNone/>
-            </a:pPr>
-            <a:r>
-              <a:rPr lang="en-CA" dirty="0"/>
-              <a:t> </a:t>
-            </a:r>
-            <a:endParaRPr lang="en-CA" b="1" dirty="0"/>
-          </a:p>
-          <a:p>
-            <a:pPr marL="0" indent="0">
-              <a:buNone/>
-            </a:pPr>
-            <a:endParaRPr lang="en-CA" b="1" dirty="0"/>
-          </a:p>
-          <a:p>
-            <a:pPr marL="0" indent="0">
-              <a:buNone/>
-            </a:pPr>
-            <a:endParaRPr lang="en-CA" dirty="0"/>
-          </a:p>
-        </p:txBody>
-      </p:sp>
-      <p:sp>
-        <p:nvSpPr>
-          <p:cNvPr id="4" name="Slide Number Placeholder 3">
-            <a:extLst>
-              <a:ext uri="{FF2B5EF4-FFF2-40B4-BE49-F238E27FC236}">
-                <a16:creationId xmlns:a16="http://schemas.microsoft.com/office/drawing/2014/main" id="{2DD5B366-CB97-D3ED-DD1A-A9CDDD70F5BA}"/>
-              </a:ext>
-            </a:extLst>
-          </p:cNvPr>
-          <p:cNvSpPr>
-            <a:spLocks noGrp="1"/>
-          </p:cNvSpPr>
-          <p:nvPr>
-            <p:ph type="sldNum" sz="quarter" idx="12"/>
-          </p:nvPr>
-        </p:nvSpPr>
-        <p:spPr/>
-        <p:txBody>
-          <a:bodyPr/>
-          <a:lstStyle/>
-          <a:p>
-            <a:fld id="{4BAA6517-F367-4EB3-AFA6-036DD26A3111}" type="slidenum">
-              <a:rPr lang="en-CA" smtClean="0"/>
-              <a:t>36</a:t>
-            </a:fld>
-            <a:endParaRPr lang="en-CA"/>
-          </a:p>
-        </p:txBody>
-      </p:sp>
-      <p:cxnSp>
-        <p:nvCxnSpPr>
-          <p:cNvPr id="6" name="Straight Connector 5">
-            <a:extLst>
-              <a:ext uri="{FF2B5EF4-FFF2-40B4-BE49-F238E27FC236}">
-                <a16:creationId xmlns:a16="http://schemas.microsoft.com/office/drawing/2014/main" id="{5BEF1186-DD57-2639-B6DF-CF0407949E61}"/>
-              </a:ext>
-            </a:extLst>
-          </p:cNvPr>
-          <p:cNvCxnSpPr/>
-          <p:nvPr/>
-        </p:nvCxnSpPr>
-        <p:spPr>
-          <a:xfrm>
-            <a:off x="1482811" y="2586681"/>
-            <a:ext cx="0" cy="1515762"/>
-          </a:xfrm>
-          <a:prstGeom prst="line">
-            <a:avLst/>
-          </a:prstGeom>
-          <a:ln w="38100">
-            <a:prstDash val="sysDot"/>
-          </a:ln>
-        </p:spPr>
-        <p:style>
-          <a:lnRef idx="1">
-            <a:schemeClr val="accent1"/>
-          </a:lnRef>
-          <a:fillRef idx="0">
-            <a:schemeClr val="accent1"/>
-          </a:fillRef>
-          <a:effectRef idx="0">
-            <a:schemeClr val="accent1"/>
-          </a:effectRef>
-          <a:fontRef idx="minor">
-            <a:schemeClr val="tx1"/>
-          </a:fontRef>
-        </p:style>
-      </p:cxnSp>
-      <p:cxnSp>
-        <p:nvCxnSpPr>
-          <p:cNvPr id="7" name="Straight Connector 6">
-            <a:extLst>
-              <a:ext uri="{FF2B5EF4-FFF2-40B4-BE49-F238E27FC236}">
-                <a16:creationId xmlns:a16="http://schemas.microsoft.com/office/drawing/2014/main" id="{25FF3103-6206-F489-CA86-9731ABC36EDD}"/>
-              </a:ext>
-            </a:extLst>
-          </p:cNvPr>
-          <p:cNvCxnSpPr/>
-          <p:nvPr/>
-        </p:nvCxnSpPr>
-        <p:spPr>
-          <a:xfrm>
-            <a:off x="2776707" y="2586681"/>
-            <a:ext cx="0" cy="1515762"/>
-          </a:xfrm>
-          <a:prstGeom prst="line">
-            <a:avLst/>
-          </a:prstGeom>
-          <a:ln w="38100">
-            <a:prstDash val="sysDot"/>
-          </a:ln>
-        </p:spPr>
-        <p:style>
-          <a:lnRef idx="1">
-            <a:schemeClr val="accent1"/>
-          </a:lnRef>
-          <a:fillRef idx="0">
-            <a:schemeClr val="accent1"/>
-          </a:fillRef>
-          <a:effectRef idx="0">
-            <a:schemeClr val="accent1"/>
-          </a:effectRef>
-          <a:fontRef idx="minor">
-            <a:schemeClr val="tx1"/>
-          </a:fontRef>
-        </p:style>
-      </p:cxnSp>
-      <p:cxnSp>
-        <p:nvCxnSpPr>
-          <p:cNvPr id="8" name="Straight Connector 7">
-            <a:extLst>
-              <a:ext uri="{FF2B5EF4-FFF2-40B4-BE49-F238E27FC236}">
-                <a16:creationId xmlns:a16="http://schemas.microsoft.com/office/drawing/2014/main" id="{3B1514DF-3D3D-3A4F-B458-BDCB832D8C7E}"/>
-              </a:ext>
-            </a:extLst>
-          </p:cNvPr>
-          <p:cNvCxnSpPr/>
-          <p:nvPr/>
-        </p:nvCxnSpPr>
-        <p:spPr>
-          <a:xfrm>
-            <a:off x="3899354" y="2586681"/>
-            <a:ext cx="0" cy="1515762"/>
-          </a:xfrm>
-          <a:prstGeom prst="line">
-            <a:avLst/>
-          </a:prstGeom>
-          <a:ln w="38100">
-            <a:prstDash val="sysDot"/>
-          </a:ln>
-        </p:spPr>
-        <p:style>
-          <a:lnRef idx="1">
-            <a:schemeClr val="accent1"/>
-          </a:lnRef>
-          <a:fillRef idx="0">
-            <a:schemeClr val="accent1"/>
-          </a:fillRef>
-          <a:effectRef idx="0">
-            <a:schemeClr val="accent1"/>
-          </a:effectRef>
-          <a:fontRef idx="minor">
-            <a:schemeClr val="tx1"/>
-          </a:fontRef>
-        </p:style>
-      </p:cxnSp>
-      <p:sp>
-        <p:nvSpPr>
-          <p:cNvPr id="9" name="TextBox 8">
-            <a:extLst>
-              <a:ext uri="{FF2B5EF4-FFF2-40B4-BE49-F238E27FC236}">
-                <a16:creationId xmlns:a16="http://schemas.microsoft.com/office/drawing/2014/main" id="{9292A5BC-B039-D6FF-B901-161F9428B02C}"/>
-              </a:ext>
-            </a:extLst>
-          </p:cNvPr>
-          <p:cNvSpPr txBox="1"/>
-          <p:nvPr/>
-        </p:nvSpPr>
-        <p:spPr>
-          <a:xfrm>
-            <a:off x="7465995" y="1845734"/>
-            <a:ext cx="4593038" cy="3693319"/>
-          </a:xfrm>
-          <a:prstGeom prst="rect">
-            <a:avLst/>
-          </a:prstGeom>
-          <a:noFill/>
-        </p:spPr>
-        <p:txBody>
-          <a:bodyPr wrap="square" rtlCol="0">
-            <a:spAutoFit/>
-          </a:bodyPr>
-          <a:lstStyle/>
-          <a:p>
-            <a:r>
-              <a:rPr lang="en-CA" dirty="0"/>
-              <a:t>Blood Flow Tracking Simulation</a:t>
-            </a:r>
-          </a:p>
-          <a:p>
-            <a:endParaRPr lang="en-CA" dirty="0"/>
-          </a:p>
-          <a:p>
-            <a:r>
-              <a:rPr lang="en-CA" dirty="0"/>
-              <a:t>Per time step per blood voxel:</a:t>
-            </a:r>
-          </a:p>
-          <a:p>
-            <a:pPr marL="285750" indent="-285750">
-              <a:buFont typeface="Arial" panose="020B0604020202020204" pitchFamily="34" charset="0"/>
-              <a:buChar char="•"/>
-            </a:pPr>
-            <a:r>
-              <a:rPr lang="en-CA" dirty="0"/>
-              <a:t>Location:</a:t>
-            </a:r>
-          </a:p>
-          <a:p>
-            <a:pPr marL="742950" lvl="1" indent="-285750">
-              <a:buFont typeface="Arial" panose="020B0604020202020204" pitchFamily="34" charset="0"/>
-              <a:buChar char="•"/>
-            </a:pPr>
-            <a:r>
-              <a:rPr lang="en-CA" dirty="0"/>
-              <a:t>Position along length of the vessel</a:t>
-            </a:r>
-          </a:p>
-          <a:p>
-            <a:pPr lvl="1"/>
-            <a:endParaRPr lang="en-CA" dirty="0"/>
-          </a:p>
-          <a:p>
-            <a:pPr marL="742950" lvl="1" indent="-285750">
-              <a:buFont typeface="Arial" panose="020B0604020202020204" pitchFamily="34" charset="0"/>
-              <a:buChar char="•"/>
-            </a:pPr>
-            <a:r>
-              <a:rPr lang="en-CA" dirty="0"/>
-              <a:t>Voxel location</a:t>
-            </a:r>
-          </a:p>
-          <a:p>
-            <a:pPr marL="285750" indent="-285750">
-              <a:buFont typeface="Arial" panose="020B0604020202020204" pitchFamily="34" charset="0"/>
-              <a:buChar char="•"/>
-            </a:pPr>
-            <a:r>
-              <a:rPr lang="en-CA" dirty="0"/>
-              <a:t>Time within the simulation</a:t>
-            </a:r>
-          </a:p>
-          <a:p>
-            <a:pPr marL="285750" indent="-285750">
-              <a:buFont typeface="Arial" panose="020B0604020202020204" pitchFamily="34" charset="0"/>
-              <a:buChar char="•"/>
-            </a:pPr>
-            <a:endParaRPr lang="en-CA" dirty="0"/>
-          </a:p>
-          <a:p>
-            <a:pPr marL="285750" indent="-285750">
-              <a:buFont typeface="Arial" panose="020B0604020202020204" pitchFamily="34" charset="0"/>
-              <a:buChar char="•"/>
-            </a:pPr>
-            <a:r>
-              <a:rPr lang="en-CA" u="sng" dirty="0"/>
-              <a:t>Dose to voxel </a:t>
-            </a:r>
-            <a:r>
-              <a:rPr lang="en-CA" dirty="0"/>
-              <a:t>(Gy/particle) </a:t>
-            </a:r>
-          </a:p>
-          <a:p>
-            <a:endParaRPr lang="en-CA" dirty="0"/>
-          </a:p>
-          <a:p>
-            <a:pPr marL="285750" indent="-285750">
-              <a:buFont typeface="Arial" panose="020B0604020202020204" pitchFamily="34" charset="0"/>
-              <a:buChar char="•"/>
-            </a:pPr>
-            <a:r>
-              <a:rPr lang="en-CA" dirty="0"/>
-              <a:t>Dose (Gy) = Gy/particle * particle/min *time step </a:t>
-            </a:r>
-          </a:p>
-        </p:txBody>
-      </p:sp>
-      <p:sp>
-        <p:nvSpPr>
-          <p:cNvPr id="10" name="Arrow: Down 9">
-            <a:extLst>
-              <a:ext uri="{FF2B5EF4-FFF2-40B4-BE49-F238E27FC236}">
-                <a16:creationId xmlns:a16="http://schemas.microsoft.com/office/drawing/2014/main" id="{80266417-23A5-381A-F85C-85EDD72798F6}"/>
-              </a:ext>
-            </a:extLst>
-          </p:cNvPr>
-          <p:cNvSpPr/>
-          <p:nvPr/>
-        </p:nvSpPr>
-        <p:spPr>
-          <a:xfrm>
-            <a:off x="7760150" y="3312151"/>
-            <a:ext cx="2452255" cy="233698"/>
-          </a:xfrm>
-          <a:prstGeom prst="downArrow">
-            <a:avLst/>
-          </a:prstGeom>
-        </p:spPr>
-        <p:style>
-          <a:lnRef idx="2">
-            <a:schemeClr val="accent2">
-              <a:shade val="15000"/>
-            </a:schemeClr>
-          </a:lnRef>
-          <a:fillRef idx="1">
-            <a:schemeClr val="accent2"/>
-          </a:fillRef>
-          <a:effectRef idx="0">
-            <a:schemeClr val="accent2"/>
-          </a:effectRef>
-          <a:fontRef idx="minor">
-            <a:schemeClr val="lt1"/>
-          </a:fontRef>
-        </p:style>
-        <p:txBody>
-          <a:bodyPr rtlCol="0" anchor="ctr"/>
-          <a:lstStyle/>
-          <a:p>
-            <a:pPr algn="ctr"/>
-            <a:r>
-              <a:rPr lang="en-CA" dirty="0"/>
-              <a:t>Mapped</a:t>
-            </a:r>
-          </a:p>
-        </p:txBody>
-      </p:sp>
-      <p:sp>
-        <p:nvSpPr>
-          <p:cNvPr id="22" name="Arc 21">
-            <a:extLst>
-              <a:ext uri="{FF2B5EF4-FFF2-40B4-BE49-F238E27FC236}">
-                <a16:creationId xmlns:a16="http://schemas.microsoft.com/office/drawing/2014/main" id="{27EE9C2B-6459-2C6C-8D5C-81764BAA92F3}"/>
-              </a:ext>
-            </a:extLst>
-          </p:cNvPr>
-          <p:cNvSpPr/>
-          <p:nvPr/>
-        </p:nvSpPr>
-        <p:spPr>
-          <a:xfrm rot="10473571">
-            <a:off x="1469369" y="2657872"/>
-            <a:ext cx="11180083" cy="1976071"/>
-          </a:xfrm>
-          <a:prstGeom prst="arc">
-            <a:avLst>
-              <a:gd name="adj1" fmla="val 14666811"/>
-              <a:gd name="adj2" fmla="val 56514"/>
-            </a:avLst>
-          </a:prstGeom>
-          <a:ln w="34925">
-            <a:solidFill>
-              <a:schemeClr val="accent2"/>
-            </a:solidFill>
-            <a:headEnd type="triangle"/>
-            <a:tailEnd type="none"/>
-          </a:ln>
-        </p:spPr>
-        <p:style>
-          <a:lnRef idx="1">
-            <a:schemeClr val="accent1"/>
-          </a:lnRef>
-          <a:fillRef idx="0">
-            <a:schemeClr val="accent1"/>
-          </a:fillRef>
-          <a:effectRef idx="0">
-            <a:schemeClr val="accent1"/>
-          </a:effectRef>
-          <a:fontRef idx="minor">
-            <a:schemeClr val="tx1"/>
-          </a:fontRef>
-        </p:style>
-        <p:txBody>
-          <a:bodyPr rtlCol="0" anchor="ctr"/>
-          <a:lstStyle/>
-          <a:p>
-            <a:pPr algn="ctr"/>
-            <a:endParaRPr lang="en-CA"/>
-          </a:p>
-        </p:txBody>
-      </p:sp>
-    </p:spTree>
-    <p:extLst>
-      <p:ext uri="{BB962C8B-B14F-4D97-AF65-F5344CB8AC3E}">
-        <p14:creationId xmlns:p14="http://schemas.microsoft.com/office/powerpoint/2010/main" val="966650535"/>
-      </p:ext>
-    </p:extLst>
-  </p:cSld>
-  <p:clrMapOvr>
-    <a:masterClrMapping/>
-  </p:clrMapOvr>
-</p:sld>
-</file>
-
-<file path=ppt/slides/slide37.xml><?xml version="1.0" encoding="utf-8"?>
 <p:sld xmlns:a="http://schemas.openxmlformats.org/drawingml/2006/main" xmlns:r="http://schemas.openxmlformats.org/officeDocument/2006/relationships" xmlns:p="http://schemas.openxmlformats.org/presentationml/2006/main">
   <p:cSld>
     <p:spTree>
@@ -28433,7 +28874,7 @@
           <a:p>
             <a:fld id="{4BAA6517-F367-4EB3-AFA6-036DD26A3111}" type="slidenum">
               <a:rPr lang="en-CA" smtClean="0"/>
-              <a:t>37</a:t>
+              <a:t>36</a:t>
             </a:fld>
             <a:endParaRPr lang="en-CA"/>
           </a:p>
@@ -28452,7 +28893,7 @@
 </p:sld>
 </file>
 
-<file path=ppt/slides/slide38.xml><?xml version="1.0" encoding="utf-8"?>
+<file path=ppt/slides/slide37.xml><?xml version="1.0" encoding="utf-8"?>
 <p:sld xmlns:a="http://schemas.openxmlformats.org/drawingml/2006/main" xmlns:r="http://schemas.openxmlformats.org/officeDocument/2006/relationships" xmlns:p="http://schemas.openxmlformats.org/presentationml/2006/main">
   <p:cSld>
     <p:spTree>
@@ -28596,7 +29037,7 @@
           <a:p>
             <a:fld id="{4BAA6517-F367-4EB3-AFA6-036DD26A3111}" type="slidenum">
               <a:rPr lang="en-CA" smtClean="0"/>
-              <a:t>38</a:t>
+              <a:t>37</a:t>
             </a:fld>
             <a:endParaRPr lang="en-CA"/>
           </a:p>
@@ -28615,7 +29056,7 @@
 </p:sld>
 </file>
 
-<file path=ppt/slides/slide39.xml><?xml version="1.0" encoding="utf-8"?>
+<file path=ppt/slides/slide38.xml><?xml version="1.0" encoding="utf-8"?>
 <p:sld xmlns:a="http://schemas.openxmlformats.org/drawingml/2006/main" xmlns:r="http://schemas.openxmlformats.org/officeDocument/2006/relationships" xmlns:p="http://schemas.openxmlformats.org/presentationml/2006/main">
   <p:cSld>
     <p:spTree>
@@ -28747,7 +29188,7 @@
           <a:p>
             <a:fld id="{4BAA6517-F367-4EB3-AFA6-036DD26A3111}" type="slidenum">
               <a:rPr lang="en-CA" smtClean="0"/>
-              <a:t>39</a:t>
+              <a:t>38</a:t>
             </a:fld>
             <a:endParaRPr lang="en-CA"/>
           </a:p>
@@ -28766,195 +29207,7 @@
 </p:sld>
 </file>
 
-<file path=ppt/slides/slide4.xml><?xml version="1.0" encoding="utf-8"?>
-<p:sld xmlns:a="http://schemas.openxmlformats.org/drawingml/2006/main" xmlns:r="http://schemas.openxmlformats.org/officeDocument/2006/relationships" xmlns:p="http://schemas.openxmlformats.org/presentationml/2006/main">
-  <p:cSld>
-    <p:spTree>
-      <p:nvGrpSpPr>
-        <p:cNvPr id="1" name=""/>
-        <p:cNvGrpSpPr/>
-        <p:nvPr/>
-      </p:nvGrpSpPr>
-      <p:grpSpPr>
-        <a:xfrm>
-          <a:off x="0" y="0"/>
-          <a:ext cx="0" cy="0"/>
-          <a:chOff x="0" y="0"/>
-          <a:chExt cx="0" cy="0"/>
-        </a:xfrm>
-      </p:grpSpPr>
-      <p:sp>
-        <p:nvSpPr>
-          <p:cNvPr id="2" name="Title 1">
-            <a:extLst>
-              <a:ext uri="{FF2B5EF4-FFF2-40B4-BE49-F238E27FC236}">
-                <a16:creationId xmlns:a16="http://schemas.microsoft.com/office/drawing/2014/main" id="{B0740988-6744-1734-F5BE-D27ADC304665}"/>
-              </a:ext>
-            </a:extLst>
-          </p:cNvPr>
-          <p:cNvSpPr>
-            <a:spLocks noGrp="1"/>
-          </p:cNvSpPr>
-          <p:nvPr>
-            <p:ph type="title"/>
-          </p:nvPr>
-        </p:nvSpPr>
-        <p:spPr>
-          <a:xfrm>
-            <a:off x="1097280" y="286603"/>
-            <a:ext cx="10058400" cy="1450757"/>
-          </a:xfrm>
-        </p:spPr>
-        <p:txBody>
-          <a:bodyPr>
-            <a:normAutofit/>
-          </a:bodyPr>
-          <a:lstStyle/>
-          <a:p>
-            <a:r>
-              <a:rPr lang="en-CA" dirty="0"/>
-              <a:t>Thesis Proposal: Reviewed</a:t>
-            </a:r>
-          </a:p>
-        </p:txBody>
-      </p:sp>
-      <p:sp>
-        <p:nvSpPr>
-          <p:cNvPr id="3" name="Content Placeholder 2">
-            <a:extLst>
-              <a:ext uri="{FF2B5EF4-FFF2-40B4-BE49-F238E27FC236}">
-                <a16:creationId xmlns:a16="http://schemas.microsoft.com/office/drawing/2014/main" id="{F53430AD-B666-A202-060D-B0383A6AD396}"/>
-              </a:ext>
-            </a:extLst>
-          </p:cNvPr>
-          <p:cNvSpPr>
-            <a:spLocks noGrp="1"/>
-          </p:cNvSpPr>
-          <p:nvPr>
-            <p:ph idx="1"/>
-          </p:nvPr>
-        </p:nvSpPr>
-        <p:spPr>
-          <a:xfrm>
-            <a:off x="1097279" y="1845734"/>
-            <a:ext cx="6454987" cy="4023360"/>
-          </a:xfrm>
-        </p:spPr>
-        <p:txBody>
-          <a:bodyPr>
-            <a:normAutofit/>
-          </a:bodyPr>
-          <a:lstStyle/>
-          <a:p>
-            <a:r>
-              <a:rPr lang="en-US" dirty="0"/>
-              <a:t>In-silico, track the flow of blood voxels through a </a:t>
-            </a:r>
-            <a:r>
-              <a:rPr lang="en-US" u="sng" dirty="0"/>
-              <a:t>whole-body phantom</a:t>
-            </a:r>
-            <a:r>
-              <a:rPr lang="en-US" dirty="0"/>
-              <a:t> undergoing TBI, calculate their cumulative dose, and compare the dose to the voxels.</a:t>
-            </a:r>
-          </a:p>
-          <a:p>
-            <a:r>
-              <a:rPr lang="en-US" dirty="0"/>
-              <a:t>Whole Body Phantom (4D XCAT) model will unite a blood flow model and Monte Carlo (MC) Simulations to determine dose.</a:t>
-            </a:r>
-          </a:p>
-          <a:p>
-            <a:r>
-              <a:rPr lang="en-US" dirty="0"/>
-              <a:t>Model the following delivery methods in MC:</a:t>
-            </a:r>
-          </a:p>
-          <a:p>
-            <a:pPr lvl="1">
-              <a:buFont typeface="Arial" panose="020B0604020202020204" pitchFamily="34" charset="0"/>
-              <a:buChar char="•"/>
-            </a:pPr>
-            <a:r>
-              <a:rPr lang="en-US" dirty="0"/>
-              <a:t>Sweeping Co-60 </a:t>
-            </a:r>
-          </a:p>
-          <a:p>
-            <a:pPr lvl="1">
-              <a:buFont typeface="Arial" panose="020B0604020202020204" pitchFamily="34" charset="0"/>
-              <a:buChar char="•"/>
-            </a:pPr>
-            <a:r>
-              <a:rPr lang="en-US" dirty="0"/>
-              <a:t>Extended POP </a:t>
-            </a:r>
-          </a:p>
-          <a:p>
-            <a:pPr lvl="1">
-              <a:buFont typeface="Arial" panose="020B0604020202020204" pitchFamily="34" charset="0"/>
-              <a:buChar char="•"/>
-            </a:pPr>
-            <a:r>
-              <a:rPr lang="en-US" dirty="0"/>
-              <a:t>VMAT TBI</a:t>
-            </a:r>
-          </a:p>
-          <a:p>
-            <a:endParaRPr lang="en-CA" dirty="0"/>
-          </a:p>
-          <a:p>
-            <a:pPr marL="0" indent="0">
-              <a:buNone/>
-            </a:pPr>
-            <a:endParaRPr lang="en-CA" dirty="0"/>
-          </a:p>
-        </p:txBody>
-      </p:sp>
-      <p:pic>
-        <p:nvPicPr>
-          <p:cNvPr id="4" name="Picture 3">
-            <a:extLst>
-              <a:ext uri="{FF2B5EF4-FFF2-40B4-BE49-F238E27FC236}">
-                <a16:creationId xmlns:a16="http://schemas.microsoft.com/office/drawing/2014/main" id="{480263E8-46DC-95E0-079F-D585E49A6418}"/>
-              </a:ext>
-            </a:extLst>
-          </p:cNvPr>
-          <p:cNvPicPr>
-            <a:picLocks noChangeAspect="1"/>
-          </p:cNvPicPr>
-          <p:nvPr/>
-        </p:nvPicPr>
-        <p:blipFill>
-          <a:blip r:embed="rId3"/>
-          <a:srcRect l="5965" r="1345"/>
-          <a:stretch/>
-        </p:blipFill>
-        <p:spPr>
-          <a:xfrm>
-            <a:off x="8020570" y="1916318"/>
-            <a:ext cx="3564878" cy="3471012"/>
-          </a:xfrm>
-          <a:prstGeom prst="rect">
-            <a:avLst/>
-          </a:prstGeom>
-        </p:spPr>
-      </p:pic>
-    </p:spTree>
-    <p:extLst>
-      <p:ext uri="{BB962C8B-B14F-4D97-AF65-F5344CB8AC3E}">
-        <p14:creationId xmlns:p14="http://schemas.microsoft.com/office/powerpoint/2010/main" val="1839444309"/>
-      </p:ext>
-    </p:extLst>
-  </p:cSld>
-  <p:clrMapOvr>
-    <a:masterClrMapping/>
-  </p:clrMapOvr>
-</p:sld>
-</file>
-
-<file path=ppt/slides/slide40.xml><?xml version="1.0" encoding="utf-8"?>
+<file path=ppt/slides/slide39.xml><?xml version="1.0" encoding="utf-8"?>
 <p:sld xmlns:a="http://schemas.openxmlformats.org/drawingml/2006/main" xmlns:r="http://schemas.openxmlformats.org/officeDocument/2006/relationships" xmlns:p="http://schemas.openxmlformats.org/presentationml/2006/main">
   <p:cSld>
     <p:spTree>
@@ -29086,7 +29339,7 @@
           <a:p>
             <a:fld id="{4BAA6517-F367-4EB3-AFA6-036DD26A3111}" type="slidenum">
               <a:rPr lang="en-CA" smtClean="0"/>
-              <a:t>40</a:t>
+              <a:t>39</a:t>
             </a:fld>
             <a:endParaRPr lang="en-CA"/>
           </a:p>
@@ -29326,7 +29579,195 @@
 </p:sld>
 </file>
 
-<file path=ppt/slides/slide41.xml><?xml version="1.0" encoding="utf-8"?>
+<file path=ppt/slides/slide4.xml><?xml version="1.0" encoding="utf-8"?>
+<p:sld xmlns:a="http://schemas.openxmlformats.org/drawingml/2006/main" xmlns:r="http://schemas.openxmlformats.org/officeDocument/2006/relationships" xmlns:p="http://schemas.openxmlformats.org/presentationml/2006/main">
+  <p:cSld>
+    <p:spTree>
+      <p:nvGrpSpPr>
+        <p:cNvPr id="1" name=""/>
+        <p:cNvGrpSpPr/>
+        <p:nvPr/>
+      </p:nvGrpSpPr>
+      <p:grpSpPr>
+        <a:xfrm>
+          <a:off x="0" y="0"/>
+          <a:ext cx="0" cy="0"/>
+          <a:chOff x="0" y="0"/>
+          <a:chExt cx="0" cy="0"/>
+        </a:xfrm>
+      </p:grpSpPr>
+      <p:sp>
+        <p:nvSpPr>
+          <p:cNvPr id="2" name="Title 1">
+            <a:extLst>
+              <a:ext uri="{FF2B5EF4-FFF2-40B4-BE49-F238E27FC236}">
+                <a16:creationId xmlns:a16="http://schemas.microsoft.com/office/drawing/2014/main" id="{B0740988-6744-1734-F5BE-D27ADC304665}"/>
+              </a:ext>
+            </a:extLst>
+          </p:cNvPr>
+          <p:cNvSpPr>
+            <a:spLocks noGrp="1"/>
+          </p:cNvSpPr>
+          <p:nvPr>
+            <p:ph type="title"/>
+          </p:nvPr>
+        </p:nvSpPr>
+        <p:spPr>
+          <a:xfrm>
+            <a:off x="1097280" y="286603"/>
+            <a:ext cx="10058400" cy="1450757"/>
+          </a:xfrm>
+        </p:spPr>
+        <p:txBody>
+          <a:bodyPr>
+            <a:normAutofit/>
+          </a:bodyPr>
+          <a:lstStyle/>
+          <a:p>
+            <a:r>
+              <a:rPr lang="en-CA" dirty="0"/>
+              <a:t>Thesis Proposal: Reviewed</a:t>
+            </a:r>
+          </a:p>
+        </p:txBody>
+      </p:sp>
+      <p:sp>
+        <p:nvSpPr>
+          <p:cNvPr id="3" name="Content Placeholder 2">
+            <a:extLst>
+              <a:ext uri="{FF2B5EF4-FFF2-40B4-BE49-F238E27FC236}">
+                <a16:creationId xmlns:a16="http://schemas.microsoft.com/office/drawing/2014/main" id="{F53430AD-B666-A202-060D-B0383A6AD396}"/>
+              </a:ext>
+            </a:extLst>
+          </p:cNvPr>
+          <p:cNvSpPr>
+            <a:spLocks noGrp="1"/>
+          </p:cNvSpPr>
+          <p:nvPr>
+            <p:ph idx="1"/>
+          </p:nvPr>
+        </p:nvSpPr>
+        <p:spPr>
+          <a:xfrm>
+            <a:off x="1097279" y="1845734"/>
+            <a:ext cx="6454987" cy="4023360"/>
+          </a:xfrm>
+        </p:spPr>
+        <p:txBody>
+          <a:bodyPr>
+            <a:normAutofit/>
+          </a:bodyPr>
+          <a:lstStyle/>
+          <a:p>
+            <a:r>
+              <a:rPr lang="en-US" dirty="0"/>
+              <a:t>In-silico, track the flow of blood voxels through a </a:t>
+            </a:r>
+            <a:r>
+              <a:rPr lang="en-US" u="sng" dirty="0"/>
+              <a:t>whole-body phantom</a:t>
+            </a:r>
+            <a:r>
+              <a:rPr lang="en-US" dirty="0"/>
+              <a:t> undergoing TBI, calculate their cumulative dose, and compare the dose to the voxels.</a:t>
+            </a:r>
+          </a:p>
+          <a:p>
+            <a:r>
+              <a:rPr lang="en-US" dirty="0"/>
+              <a:t>Whole Body Phantom (4D XCAT) model will unite a blood flow model and Monte Carlo (MC) Simulations to determine dose.</a:t>
+            </a:r>
+          </a:p>
+          <a:p>
+            <a:r>
+              <a:rPr lang="en-US" dirty="0"/>
+              <a:t>Model the following delivery methods in MC:</a:t>
+            </a:r>
+          </a:p>
+          <a:p>
+            <a:pPr lvl="1">
+              <a:buFont typeface="Arial" panose="020B0604020202020204" pitchFamily="34" charset="0"/>
+              <a:buChar char="•"/>
+            </a:pPr>
+            <a:r>
+              <a:rPr lang="en-US" dirty="0"/>
+              <a:t>Sweeping Co-60 </a:t>
+            </a:r>
+          </a:p>
+          <a:p>
+            <a:pPr lvl="1">
+              <a:buFont typeface="Arial" panose="020B0604020202020204" pitchFamily="34" charset="0"/>
+              <a:buChar char="•"/>
+            </a:pPr>
+            <a:r>
+              <a:rPr lang="en-US" dirty="0"/>
+              <a:t>Extended POP </a:t>
+            </a:r>
+          </a:p>
+          <a:p>
+            <a:pPr lvl="1">
+              <a:buFont typeface="Arial" panose="020B0604020202020204" pitchFamily="34" charset="0"/>
+              <a:buChar char="•"/>
+            </a:pPr>
+            <a:r>
+              <a:rPr lang="en-US" dirty="0"/>
+              <a:t>VMAT TBI</a:t>
+            </a:r>
+          </a:p>
+          <a:p>
+            <a:endParaRPr lang="en-CA" dirty="0"/>
+          </a:p>
+          <a:p>
+            <a:pPr marL="0" indent="0">
+              <a:buNone/>
+            </a:pPr>
+            <a:endParaRPr lang="en-CA" dirty="0"/>
+          </a:p>
+        </p:txBody>
+      </p:sp>
+      <p:pic>
+        <p:nvPicPr>
+          <p:cNvPr id="4" name="Picture 3">
+            <a:extLst>
+              <a:ext uri="{FF2B5EF4-FFF2-40B4-BE49-F238E27FC236}">
+                <a16:creationId xmlns:a16="http://schemas.microsoft.com/office/drawing/2014/main" id="{480263E8-46DC-95E0-079F-D585E49A6418}"/>
+              </a:ext>
+            </a:extLst>
+          </p:cNvPr>
+          <p:cNvPicPr>
+            <a:picLocks noChangeAspect="1"/>
+          </p:cNvPicPr>
+          <p:nvPr/>
+        </p:nvPicPr>
+        <p:blipFill>
+          <a:blip r:embed="rId3"/>
+          <a:srcRect l="5965" r="1345"/>
+          <a:stretch/>
+        </p:blipFill>
+        <p:spPr>
+          <a:xfrm>
+            <a:off x="8020570" y="1916318"/>
+            <a:ext cx="3564878" cy="3471012"/>
+          </a:xfrm>
+          <a:prstGeom prst="rect">
+            <a:avLst/>
+          </a:prstGeom>
+        </p:spPr>
+      </p:pic>
+    </p:spTree>
+    <p:extLst>
+      <p:ext uri="{BB962C8B-B14F-4D97-AF65-F5344CB8AC3E}">
+        <p14:creationId xmlns:p14="http://schemas.microsoft.com/office/powerpoint/2010/main" val="1839444309"/>
+      </p:ext>
+    </p:extLst>
+  </p:cSld>
+  <p:clrMapOvr>
+    <a:masterClrMapping/>
+  </p:clrMapOvr>
+</p:sld>
+</file>
+
+<file path=ppt/slides/slide40.xml><?xml version="1.0" encoding="utf-8"?>
 <p:sld xmlns:a="http://schemas.openxmlformats.org/drawingml/2006/main" xmlns:r="http://schemas.openxmlformats.org/officeDocument/2006/relationships" xmlns:p="http://schemas.openxmlformats.org/presentationml/2006/main">
   <p:cSld>
     <p:spTree>
@@ -29458,7 +29899,7 @@
           <a:p>
             <a:fld id="{4BAA6517-F367-4EB3-AFA6-036DD26A3111}" type="slidenum">
               <a:rPr lang="en-CA" smtClean="0"/>
-              <a:t>41</a:t>
+              <a:t>40</a:t>
             </a:fld>
             <a:endParaRPr lang="en-CA"/>
           </a:p>
@@ -30240,7 +30681,7 @@
 </p:sld>
 </file>
 
-<file path=ppt/slides/slide42.xml><?xml version="1.0" encoding="utf-8"?>
+<file path=ppt/slides/slide41.xml><?xml version="1.0" encoding="utf-8"?>
 <p:sld xmlns:a="http://schemas.openxmlformats.org/drawingml/2006/main" xmlns:r="http://schemas.openxmlformats.org/officeDocument/2006/relationships" xmlns:p="http://schemas.openxmlformats.org/presentationml/2006/main">
   <p:cSld>
     <p:spTree>
@@ -30291,7 +30732,7 @@
           <a:p>
             <a:fld id="{1E5564C7-97C0-40C1-9717-452594735347}" type="slidenum">
               <a:rPr lang="en-CA" smtClean="0"/>
-              <a:t>42</a:t>
+              <a:t>41</a:t>
             </a:fld>
             <a:endParaRPr lang="en-CA" dirty="0"/>
           </a:p>
@@ -30756,7 +31197,7 @@
 </p:sld>
 </file>
 
-<file path=ppt/slides/slide43.xml><?xml version="1.0" encoding="utf-8"?>
+<file path=ppt/slides/slide42.xml><?xml version="1.0" encoding="utf-8"?>
 <p:sld xmlns:a="http://schemas.openxmlformats.org/drawingml/2006/main" xmlns:r="http://schemas.openxmlformats.org/officeDocument/2006/relationships" xmlns:p="http://schemas.openxmlformats.org/presentationml/2006/main">
   <p:cSld>
     <p:spTree>
@@ -30853,7 +31294,7 @@
           <a:p>
             <a:fld id="{4BAA6517-F367-4EB3-AFA6-036DD26A3111}" type="slidenum">
               <a:rPr lang="en-CA" smtClean="0"/>
-              <a:t>43</a:t>
+              <a:t>42</a:t>
             </a:fld>
             <a:endParaRPr lang="en-CA"/>
           </a:p>
@@ -30977,7 +31418,7 @@
 </p:sld>
 </file>
 
-<file path=ppt/slides/slide44.xml><?xml version="1.0" encoding="utf-8"?>
+<file path=ppt/slides/slide43.xml><?xml version="1.0" encoding="utf-8"?>
 <p:sld xmlns:a="http://schemas.openxmlformats.org/drawingml/2006/main" xmlns:r="http://schemas.openxmlformats.org/officeDocument/2006/relationships" xmlns:p="http://schemas.openxmlformats.org/presentationml/2006/main">
   <p:cSld>
     <p:spTree>
@@ -31045,7 +31486,7 @@
           <a:p>
             <a:fld id="{4BAA6517-F367-4EB3-AFA6-036DD26A3111}" type="slidenum">
               <a:rPr lang="en-CA" smtClean="0"/>
-              <a:t>44</a:t>
+              <a:t>43</a:t>
             </a:fld>
             <a:endParaRPr lang="en-CA"/>
           </a:p>
@@ -31067,7 +31508,7 @@
             <p:ph idx="1"/>
             <p:extLst>
               <p:ext uri="{D42A27DB-BD31-4B8C-83A1-F6EECF244321}">
-                <p14:modId xmlns:p14="http://schemas.microsoft.com/office/powerpoint/2010/main" val="4242674288"/>
+                <p14:modId xmlns:p14="http://schemas.microsoft.com/office/powerpoint/2010/main" val="5032215"/>
               </p:ext>
             </p:extLst>
           </p:nvPr>
@@ -31120,7 +31561,7 @@
                     <a:p>
                       <a:r>
                         <a:rPr lang="en-US" u="sng" dirty="0"/>
-                        <a:t>1E4</a:t>
+                        <a:t>500</a:t>
                       </a:r>
                       <a:endParaRPr lang="en-CA" u="sng" dirty="0"/>
                     </a:p>
@@ -31390,7 +31831,7 @@
                 </a:pPr>
                 <a:r>
                   <a:rPr lang="en-US" dirty="0"/>
-                  <a:t>Weighted dose results with:</a:t>
+                  <a:t>Scaled dose results with:</a:t>
                 </a:r>
               </a:p>
               <a:p>
@@ -31404,7 +31845,7 @@
                       <a:rPr lang="en-US" sz="2800" b="0" i="1" smtClean="0">
                         <a:latin typeface="Cambria Math" panose="02040503050406030204" pitchFamily="18" charset="0"/>
                       </a:rPr>
-                      <m:t>𝑤</m:t>
+                      <m:t>𝑠</m:t>
                     </m:r>
                     <m:r>
                       <a:rPr lang="en-US" sz="2800" b="0" i="1" smtClean="0">
@@ -31553,7 +31994,7 @@
 </p:sld>
 </file>
 
-<file path=ppt/slides/slide45.xml><?xml version="1.0" encoding="utf-8"?>
+<file path=ppt/slides/slide44.xml><?xml version="1.0" encoding="utf-8"?>
 <p:sld xmlns:a="http://schemas.openxmlformats.org/drawingml/2006/main" xmlns:r="http://schemas.openxmlformats.org/officeDocument/2006/relationships" xmlns:p="http://schemas.openxmlformats.org/presentationml/2006/main">
   <p:cSld>
     <p:spTree>
@@ -31561,7 +32002,7 @@
         <p:cNvPr id="1" name="">
           <a:extLst>
             <a:ext uri="{FF2B5EF4-FFF2-40B4-BE49-F238E27FC236}">
-              <a16:creationId xmlns:a16="http://schemas.microsoft.com/office/drawing/2014/main" id="{2F2729D6-7118-2AD6-C347-1DF1F90B494D}"/>
+              <a16:creationId xmlns:a16="http://schemas.microsoft.com/office/drawing/2014/main" id="{DAEFADA9-538D-359B-7453-5298A6224AC6}"/>
             </a:ext>
           </a:extLst>
         </p:cNvPr>
@@ -31581,7 +32022,7 @@
           <p:cNvPr id="2" name="Title 1">
             <a:extLst>
               <a:ext uri="{FF2B5EF4-FFF2-40B4-BE49-F238E27FC236}">
-                <a16:creationId xmlns:a16="http://schemas.microsoft.com/office/drawing/2014/main" id="{80A2470D-C81C-6F2B-6020-41AF8978D8AB}"/>
+                <a16:creationId xmlns:a16="http://schemas.microsoft.com/office/drawing/2014/main" id="{3CC480B5-BBD3-2D04-1CF7-BC94BB8E05FB}"/>
               </a:ext>
             </a:extLst>
           </p:cNvPr>
@@ -31599,7 +32040,7 @@
           <a:p>
             <a:r>
               <a:rPr lang="en-CA" dirty="0"/>
-              <a:t>Prelim Dose Results</a:t>
+              <a:t>Prelim Dose Results: Unscaled</a:t>
             </a:r>
           </a:p>
         </p:txBody>
@@ -31609,7 +32050,7 @@
           <p:cNvPr id="4" name="Slide Number Placeholder 3">
             <a:extLst>
               <a:ext uri="{FF2B5EF4-FFF2-40B4-BE49-F238E27FC236}">
-                <a16:creationId xmlns:a16="http://schemas.microsoft.com/office/drawing/2014/main" id="{5273EFC6-3006-30E3-AC28-ED4776A53D83}"/>
+                <a16:creationId xmlns:a16="http://schemas.microsoft.com/office/drawing/2014/main" id="{20A5A72B-0DE5-BA42-032C-36EDA6B789DE}"/>
               </a:ext>
             </a:extLst>
           </p:cNvPr>
@@ -31627,7 +32068,7 @@
           <a:p>
             <a:fld id="{4BAA6517-F367-4EB3-AFA6-036DD26A3111}" type="slidenum">
               <a:rPr lang="en-CA" smtClean="0"/>
-              <a:t>45</a:t>
+              <a:t>44</a:t>
             </a:fld>
             <a:endParaRPr lang="en-CA"/>
           </a:p>
@@ -31638,7 +32079,7 @@
           <p:cNvPr id="8" name="Content Placeholder 7">
             <a:extLst>
               <a:ext uri="{FF2B5EF4-FFF2-40B4-BE49-F238E27FC236}">
-                <a16:creationId xmlns:a16="http://schemas.microsoft.com/office/drawing/2014/main" id="{4E5122EF-A248-5DCC-0797-283450E8ECF0}"/>
+                <a16:creationId xmlns:a16="http://schemas.microsoft.com/office/drawing/2014/main" id="{81FEC0F4-7F61-9D31-A62B-524B432E9531}"/>
               </a:ext>
             </a:extLst>
           </p:cNvPr>
@@ -31647,6 +32088,11 @@
           </p:cNvGraphicFramePr>
           <p:nvPr>
             <p:ph idx="1"/>
+            <p:extLst>
+              <p:ext uri="{D42A27DB-BD31-4B8C-83A1-F6EECF244321}">
+                <p14:modId xmlns:p14="http://schemas.microsoft.com/office/powerpoint/2010/main" val="2137855339"/>
+              </p:ext>
+            </p:extLst>
           </p:nvPr>
         </p:nvGraphicFramePr>
         <p:xfrm>
@@ -31697,7 +32143,673 @@
                     <a:p>
                       <a:r>
                         <a:rPr lang="en-US" u="sng" dirty="0"/>
-                        <a:t>1E4</a:t>
+                        <a:t>500</a:t>
+                      </a:r>
+                      <a:endParaRPr lang="en-CA" u="sng" dirty="0"/>
+                    </a:p>
+                  </a:txBody>
+                  <a:tcPr/>
+                </a:tc>
+                <a:extLst>
+                  <a:ext uri="{0D108BD9-81ED-4DB2-BD59-A6C34878D82A}">
+                    <a16:rowId xmlns:a16="http://schemas.microsoft.com/office/drawing/2014/main" val="1000427557"/>
+                  </a:ext>
+                </a:extLst>
+              </a:tr>
+              <a:tr h="355711">
+                <a:tc>
+                  <a:txBody>
+                    <a:bodyPr/>
+                    <a:lstStyle/>
+                    <a:p>
+                      <a:r>
+                        <a:rPr lang="en-US" dirty="0"/>
+                        <a:t>Time step size (s)</a:t>
+                      </a:r>
+                      <a:endParaRPr lang="en-CA" dirty="0"/>
+                    </a:p>
+                  </a:txBody>
+                  <a:tcPr/>
+                </a:tc>
+                <a:tc>
+                  <a:txBody>
+                    <a:bodyPr/>
+                    <a:lstStyle/>
+                    <a:p>
+                      <a:r>
+                        <a:rPr lang="en-US" dirty="0"/>
+                        <a:t>0.002 </a:t>
+                      </a:r>
+                      <a:endParaRPr lang="en-CA" dirty="0"/>
+                    </a:p>
+                  </a:txBody>
+                  <a:tcPr/>
+                </a:tc>
+                <a:extLst>
+                  <a:ext uri="{0D108BD9-81ED-4DB2-BD59-A6C34878D82A}">
+                    <a16:rowId xmlns:a16="http://schemas.microsoft.com/office/drawing/2014/main" val="657170188"/>
+                  </a:ext>
+                </a:extLst>
+              </a:tr>
+              <a:tr h="370840">
+                <a:tc>
+                  <a:txBody>
+                    <a:bodyPr/>
+                    <a:lstStyle/>
+                    <a:p>
+                      <a:r>
+                        <a:rPr lang="en-US" dirty="0"/>
+                        <a:t>Time to Steady State (s)</a:t>
+                      </a:r>
+                      <a:endParaRPr lang="en-CA" dirty="0"/>
+                    </a:p>
+                  </a:txBody>
+                  <a:tcPr/>
+                </a:tc>
+                <a:tc>
+                  <a:txBody>
+                    <a:bodyPr/>
+                    <a:lstStyle/>
+                    <a:p>
+                      <a:r>
+                        <a:rPr lang="en-US" dirty="0"/>
+                        <a:t>382 </a:t>
+                      </a:r>
+                      <a:endParaRPr lang="en-CA" dirty="0"/>
+                    </a:p>
+                  </a:txBody>
+                  <a:tcPr/>
+                </a:tc>
+                <a:extLst>
+                  <a:ext uri="{0D108BD9-81ED-4DB2-BD59-A6C34878D82A}">
+                    <a16:rowId xmlns:a16="http://schemas.microsoft.com/office/drawing/2014/main" val="1442426439"/>
+                  </a:ext>
+                </a:extLst>
+              </a:tr>
+              <a:tr h="370840">
+                <a:tc>
+                  <a:txBody>
+                    <a:bodyPr/>
+                    <a:lstStyle/>
+                    <a:p>
+                      <a:r>
+                        <a:rPr lang="en-US" dirty="0"/>
+                        <a:t>Delivery per Field (s)</a:t>
+                      </a:r>
+                      <a:endParaRPr lang="en-CA" dirty="0"/>
+                    </a:p>
+                  </a:txBody>
+                  <a:tcPr/>
+                </a:tc>
+                <a:tc>
+                  <a:txBody>
+                    <a:bodyPr/>
+                    <a:lstStyle/>
+                    <a:p>
+                      <a:r>
+                        <a:rPr lang="en-US" dirty="0"/>
+                        <a:t>408.6</a:t>
+                      </a:r>
+                      <a:endParaRPr lang="en-CA" dirty="0"/>
+                    </a:p>
+                  </a:txBody>
+                  <a:tcPr/>
+                </a:tc>
+                <a:extLst>
+                  <a:ext uri="{0D108BD9-81ED-4DB2-BD59-A6C34878D82A}">
+                    <a16:rowId xmlns:a16="http://schemas.microsoft.com/office/drawing/2014/main" val="3059569768"/>
+                  </a:ext>
+                </a:extLst>
+              </a:tr>
+              <a:tr h="370840">
+                <a:tc>
+                  <a:txBody>
+                    <a:bodyPr/>
+                    <a:lstStyle/>
+                    <a:p>
+                      <a:r>
+                        <a:rPr lang="en-US" dirty="0"/>
+                        <a:t>Time to “Flip” Patient (s)</a:t>
+                      </a:r>
+                      <a:endParaRPr lang="en-CA" dirty="0"/>
+                    </a:p>
+                  </a:txBody>
+                  <a:tcPr/>
+                </a:tc>
+                <a:tc>
+                  <a:txBody>
+                    <a:bodyPr/>
+                    <a:lstStyle/>
+                    <a:p>
+                      <a:r>
+                        <a:rPr lang="en-US" dirty="0"/>
+                        <a:t>900 </a:t>
+                      </a:r>
+                      <a:endParaRPr lang="en-CA" dirty="0"/>
+                    </a:p>
+                  </a:txBody>
+                  <a:tcPr/>
+                </a:tc>
+                <a:extLst>
+                  <a:ext uri="{0D108BD9-81ED-4DB2-BD59-A6C34878D82A}">
+                    <a16:rowId xmlns:a16="http://schemas.microsoft.com/office/drawing/2014/main" val="3426520378"/>
+                  </a:ext>
+                </a:extLst>
+              </a:tr>
+            </a:tbl>
+          </a:graphicData>
+        </a:graphic>
+      </p:graphicFrame>
+      <mc:AlternateContent xmlns:mc="http://schemas.openxmlformats.org/markup-compatibility/2006">
+        <mc:Choice xmlns:a14="http://schemas.microsoft.com/office/drawing/2010/main" Requires="a14">
+          <p:sp>
+            <p:nvSpPr>
+              <p:cNvPr id="9" name="TextBox 8">
+                <a:extLst>
+                  <a:ext uri="{FF2B5EF4-FFF2-40B4-BE49-F238E27FC236}">
+                    <a16:creationId xmlns:a16="http://schemas.microsoft.com/office/drawing/2014/main" id="{CA4D99C5-9246-2276-889D-400EEC6BBB00}"/>
+                  </a:ext>
+                </a:extLst>
+              </p:cNvPr>
+              <p:cNvSpPr txBox="1"/>
+              <p:nvPr/>
+            </p:nvSpPr>
+            <p:spPr>
+              <a:xfrm>
+                <a:off x="1210962" y="1960605"/>
+                <a:ext cx="5909566" cy="3322063"/>
+              </a:xfrm>
+              <a:prstGeom prst="rect">
+                <a:avLst/>
+              </a:prstGeom>
+              <a:noFill/>
+            </p:spPr>
+            <p:txBody>
+              <a:bodyPr wrap="none" rtlCol="0">
+                <a:spAutoFit/>
+              </a:bodyPr>
+              <a:lstStyle/>
+              <a:p>
+                <a:pPr marL="285750" indent="-285750">
+                  <a:buFont typeface="Arial" panose="020B0604020202020204" pitchFamily="34" charset="0"/>
+                  <a:buChar char="•"/>
+                </a:pPr>
+                <a:r>
+                  <a:rPr lang="en-US" dirty="0"/>
+                  <a:t>Monte Carlo</a:t>
+                </a:r>
+              </a:p>
+              <a:p>
+                <a:pPr marL="742950" lvl="1" indent="-285750">
+                  <a:buFont typeface="Arial" panose="020B0604020202020204" pitchFamily="34" charset="0"/>
+                  <a:buChar char="•"/>
+                </a:pPr>
+                <a:r>
+                  <a:rPr lang="en-US" dirty="0"/>
+                  <a:t>Ran AP and PA fields</a:t>
+                </a:r>
+              </a:p>
+              <a:p>
+                <a:pPr marL="742950" lvl="1" indent="-285750">
+                  <a:buFont typeface="Arial" panose="020B0604020202020204" pitchFamily="34" charset="0"/>
+                  <a:buChar char="•"/>
+                </a:pPr>
+                <a:r>
+                  <a:rPr lang="en-US" dirty="0"/>
+                  <a:t>2 billion particles each</a:t>
+                </a:r>
+              </a:p>
+              <a:p>
+                <a:pPr marL="742950" lvl="1" indent="-285750">
+                  <a:buFont typeface="Arial" panose="020B0604020202020204" pitchFamily="34" charset="0"/>
+                  <a:buChar char="•"/>
+                </a:pPr>
+                <a:r>
+                  <a:rPr lang="en-US" dirty="0"/>
+                  <a:t>Produced 4D Dose files with vessels as VOI</a:t>
+                </a:r>
+              </a:p>
+              <a:p>
+                <a:pPr marL="742950" lvl="1" indent="-285750">
+                  <a:buFont typeface="Arial" panose="020B0604020202020204" pitchFamily="34" charset="0"/>
+                  <a:buChar char="•"/>
+                </a:pPr>
+                <a:endParaRPr lang="en-US" dirty="0"/>
+              </a:p>
+              <a:p>
+                <a:pPr marL="285750" indent="-285750">
+                  <a:buFont typeface="Arial" panose="020B0604020202020204" pitchFamily="34" charset="0"/>
+                  <a:buChar char="•"/>
+                </a:pPr>
+                <a:r>
+                  <a:rPr lang="en-US" dirty="0"/>
+                  <a:t>Blood Flow Simulation</a:t>
+                </a:r>
+              </a:p>
+              <a:p>
+                <a:pPr marL="742950" lvl="1" indent="-285750">
+                  <a:buFont typeface="Arial" panose="020B0604020202020204" pitchFamily="34" charset="0"/>
+                  <a:buChar char="•"/>
+                </a:pPr>
+                <a:r>
+                  <a:rPr lang="en-US" dirty="0"/>
+                  <a:t>Ran a smaller number of particles (&lt;1E5)</a:t>
+                </a:r>
+              </a:p>
+              <a:p>
+                <a:pPr marL="742950" lvl="1" indent="-285750">
+                  <a:buFont typeface="Arial" panose="020B0604020202020204" pitchFamily="34" charset="0"/>
+                  <a:buChar char="•"/>
+                </a:pPr>
+                <a:r>
+                  <a:rPr lang="en-US" dirty="0"/>
+                  <a:t>Only tracking dose delivered within the blood vessels</a:t>
+                </a:r>
+              </a:p>
+              <a:p>
+                <a:pPr marL="742950" lvl="1" indent="-285750">
+                  <a:buFont typeface="Arial" panose="020B0604020202020204" pitchFamily="34" charset="0"/>
+                  <a:buChar char="•"/>
+                </a:pPr>
+                <a:r>
+                  <a:rPr lang="en-US" dirty="0"/>
+                  <a:t>Scaled dose results with:</a:t>
+                </a:r>
+              </a:p>
+              <a:p>
+                <a:pPr marL="1200150" lvl="2" indent="-285750">
+                  <a:buFont typeface="Arial" panose="020B0604020202020204" pitchFamily="34" charset="0"/>
+                  <a:buChar char="•"/>
+                </a:pPr>
+                <a14:m>
+                  <m:oMath xmlns:m="http://schemas.openxmlformats.org/officeDocument/2006/math">
+                    <m:r>
+                      <a:rPr lang="en-US" sz="2800" b="0" i="1" smtClean="0">
+                        <a:latin typeface="Cambria Math" panose="02040503050406030204" pitchFamily="18" charset="0"/>
+                      </a:rPr>
+                      <m:t>𝑠</m:t>
+                    </m:r>
+                    <m:r>
+                      <a:rPr lang="en-US" sz="2800" b="0" i="1" smtClean="0">
+                        <a:latin typeface="Cambria Math" panose="02040503050406030204" pitchFamily="18" charset="0"/>
+                      </a:rPr>
+                      <m:t>= </m:t>
+                    </m:r>
+                    <m:f>
+                      <m:fPr>
+                        <m:ctrlPr>
+                          <a:rPr lang="en-US" sz="2800" b="0" i="1" smtClean="0">
+                            <a:latin typeface="Cambria Math" panose="02040503050406030204" pitchFamily="18" charset="0"/>
+                          </a:rPr>
+                        </m:ctrlPr>
+                      </m:fPr>
+                      <m:num>
+                        <m:r>
+                          <a:rPr lang="en-US" sz="2800" b="0" i="1" smtClean="0">
+                            <a:latin typeface="Cambria Math" panose="02040503050406030204" pitchFamily="18" charset="0"/>
+                          </a:rPr>
+                          <m:t>2 </m:t>
+                        </m:r>
+                        <m:r>
+                          <a:rPr lang="en-US" sz="2800" b="0" i="1" smtClean="0">
+                            <a:latin typeface="Cambria Math" panose="02040503050406030204" pitchFamily="18" charset="0"/>
+                            <a:ea typeface="Cambria Math" panose="02040503050406030204" pitchFamily="18" charset="0"/>
+                          </a:rPr>
+                          <m:t>∙ </m:t>
+                        </m:r>
+                        <m:sSub>
+                          <m:sSubPr>
+                            <m:ctrlPr>
+                              <a:rPr lang="en-US" sz="2800" b="0" i="1" smtClean="0">
+                                <a:latin typeface="Cambria Math" panose="02040503050406030204" pitchFamily="18" charset="0"/>
+                              </a:rPr>
+                            </m:ctrlPr>
+                          </m:sSubPr>
+                          <m:e>
+                            <m:r>
+                              <a:rPr lang="en-US" sz="2800" b="0" i="1" smtClean="0">
+                                <a:latin typeface="Cambria Math" panose="02040503050406030204" pitchFamily="18" charset="0"/>
+                              </a:rPr>
+                              <m:t>𝑇</m:t>
+                            </m:r>
+                          </m:e>
+                          <m:sub>
+                            <m:r>
+                              <a:rPr lang="en-US" sz="2800" b="0" i="1" smtClean="0">
+                                <a:latin typeface="Cambria Math" panose="02040503050406030204" pitchFamily="18" charset="0"/>
+                              </a:rPr>
+                              <m:t>𝑓𝑖𝑒𝑙𝑑</m:t>
+                            </m:r>
+                          </m:sub>
+                        </m:sSub>
+                      </m:num>
+                      <m:den>
+                        <m:sSub>
+                          <m:sSubPr>
+                            <m:ctrlPr>
+                              <a:rPr lang="en-US" sz="2800" b="0" i="1" smtClean="0">
+                                <a:latin typeface="Cambria Math" panose="02040503050406030204" pitchFamily="18" charset="0"/>
+                              </a:rPr>
+                            </m:ctrlPr>
+                          </m:sSubPr>
+                          <m:e>
+                            <m:r>
+                              <a:rPr lang="en-US" sz="2800" b="0" i="1" smtClean="0">
+                                <a:latin typeface="Cambria Math" panose="02040503050406030204" pitchFamily="18" charset="0"/>
+                              </a:rPr>
+                              <m:t>𝑇</m:t>
+                            </m:r>
+                          </m:e>
+                          <m:sub>
+                            <m:r>
+                              <a:rPr lang="en-US" sz="2800" b="0" i="1" smtClean="0">
+                                <a:latin typeface="Cambria Math" panose="02040503050406030204" pitchFamily="18" charset="0"/>
+                              </a:rPr>
+                              <m:t>𝑒𝑥𝑝𝑜𝑠𝑢𝑟𝑒</m:t>
+                            </m:r>
+                          </m:sub>
+                        </m:sSub>
+                      </m:den>
+                    </m:f>
+                  </m:oMath>
+                </a14:m>
+                <a:endParaRPr lang="en-US" sz="2800" dirty="0"/>
+              </a:p>
+            </p:txBody>
+          </p:sp>
+        </mc:Choice>
+        <mc:Fallback>
+          <p:sp>
+            <p:nvSpPr>
+              <p:cNvPr id="9" name="TextBox 8">
+                <a:extLst>
+                  <a:ext uri="{FF2B5EF4-FFF2-40B4-BE49-F238E27FC236}">
+                    <a16:creationId xmlns:a16="http://schemas.microsoft.com/office/drawing/2014/main" id="{CA4D99C5-9246-2276-889D-400EEC6BBB00}"/>
+                  </a:ext>
+                </a:extLst>
+              </p:cNvPr>
+              <p:cNvSpPr txBox="1">
+                <a:spLocks noRot="1" noChangeAspect="1" noMove="1" noResize="1" noEditPoints="1" noAdjustHandles="1" noChangeArrowheads="1" noChangeShapeType="1" noTextEdit="1"/>
+              </p:cNvSpPr>
+              <p:nvPr/>
+            </p:nvSpPr>
+            <p:spPr>
+              <a:xfrm>
+                <a:off x="1210962" y="1960605"/>
+                <a:ext cx="5909566" cy="3322063"/>
+              </a:xfrm>
+              <a:prstGeom prst="rect">
+                <a:avLst/>
+              </a:prstGeom>
+              <a:blipFill>
+                <a:blip r:embed="rId2"/>
+                <a:stretch>
+                  <a:fillRect l="-722" t="-1101" r="-206"/>
+                </a:stretch>
+              </a:blipFill>
+            </p:spPr>
+            <p:txBody>
+              <a:bodyPr/>
+              <a:lstStyle/>
+              <a:p>
+                <a:r>
+                  <a:rPr lang="en-CA">
+                    <a:noFill/>
+                  </a:rPr>
+                  <a:t> </a:t>
+                </a:r>
+              </a:p>
+            </p:txBody>
+          </p:sp>
+        </mc:Fallback>
+      </mc:AlternateContent>
+      <p:pic>
+        <p:nvPicPr>
+          <p:cNvPr id="10" name="Picture 9">
+            <a:extLst>
+              <a:ext uri="{FF2B5EF4-FFF2-40B4-BE49-F238E27FC236}">
+                <a16:creationId xmlns:a16="http://schemas.microsoft.com/office/drawing/2014/main" id="{860861D9-A603-8073-3281-6BE23A1CD29C}"/>
+              </a:ext>
+            </a:extLst>
+          </p:cNvPr>
+          <p:cNvPicPr>
+            <a:picLocks noChangeAspect="1"/>
+          </p:cNvPicPr>
+          <p:nvPr/>
+        </p:nvPicPr>
+        <p:blipFill>
+          <a:blip r:embed="rId3"/>
+          <a:stretch>
+            <a:fillRect/>
+          </a:stretch>
+        </p:blipFill>
+        <p:spPr>
+          <a:xfrm>
+            <a:off x="1172459" y="1737360"/>
+            <a:ext cx="5975697" cy="4403558"/>
+          </a:xfrm>
+          <a:prstGeom prst="rect">
+            <a:avLst/>
+          </a:prstGeom>
+        </p:spPr>
+      </p:pic>
+      <p:sp>
+        <p:nvSpPr>
+          <p:cNvPr id="5" name="Rectangle: Rounded Corners 4">
+            <a:extLst>
+              <a:ext uri="{FF2B5EF4-FFF2-40B4-BE49-F238E27FC236}">
+                <a16:creationId xmlns:a16="http://schemas.microsoft.com/office/drawing/2014/main" id="{78555901-5776-9642-4A82-5D54EC671375}"/>
+              </a:ext>
+            </a:extLst>
+          </p:cNvPr>
+          <p:cNvSpPr/>
+          <p:nvPr/>
+        </p:nvSpPr>
+        <p:spPr>
+          <a:xfrm>
+            <a:off x="3560812" y="5861437"/>
+            <a:ext cx="1790833" cy="148176"/>
+          </a:xfrm>
+          <a:prstGeom prst="roundRect">
+            <a:avLst/>
+          </a:prstGeom>
+          <a:solidFill>
+            <a:schemeClr val="accent2">
+              <a:alpha val="25000"/>
+            </a:schemeClr>
+          </a:solidFill>
+          <a:ln>
+            <a:noFill/>
+          </a:ln>
+        </p:spPr>
+        <p:style>
+          <a:lnRef idx="2">
+            <a:schemeClr val="accent1">
+              <a:shade val="15000"/>
+            </a:schemeClr>
+          </a:lnRef>
+          <a:fillRef idx="1">
+            <a:schemeClr val="accent1"/>
+          </a:fillRef>
+          <a:effectRef idx="0">
+            <a:schemeClr val="accent1"/>
+          </a:effectRef>
+          <a:fontRef idx="minor">
+            <a:schemeClr val="lt1"/>
+          </a:fontRef>
+        </p:style>
+        <p:txBody>
+          <a:bodyPr rtlCol="0" anchor="ctr"/>
+          <a:lstStyle/>
+          <a:p>
+            <a:pPr algn="ctr"/>
+            <a:endParaRPr lang="en-CA"/>
+          </a:p>
+        </p:txBody>
+      </p:sp>
+    </p:spTree>
+    <p:extLst>
+      <p:ext uri="{BB962C8B-B14F-4D97-AF65-F5344CB8AC3E}">
+        <p14:creationId xmlns:p14="http://schemas.microsoft.com/office/powerpoint/2010/main" val="272743774"/>
+      </p:ext>
+    </p:extLst>
+  </p:cSld>
+  <p:clrMapOvr>
+    <a:masterClrMapping/>
+  </p:clrMapOvr>
+</p:sld>
+</file>
+
+<file path=ppt/slides/slide45.xml><?xml version="1.0" encoding="utf-8"?>
+<p:sld xmlns:a="http://schemas.openxmlformats.org/drawingml/2006/main" xmlns:r="http://schemas.openxmlformats.org/officeDocument/2006/relationships" xmlns:p="http://schemas.openxmlformats.org/presentationml/2006/main">
+  <p:cSld>
+    <p:spTree>
+      <p:nvGrpSpPr>
+        <p:cNvPr id="1" name="">
+          <a:extLst>
+            <a:ext uri="{FF2B5EF4-FFF2-40B4-BE49-F238E27FC236}">
+              <a16:creationId xmlns:a16="http://schemas.microsoft.com/office/drawing/2014/main" id="{2F2729D6-7118-2AD6-C347-1DF1F90B494D}"/>
+            </a:ext>
+          </a:extLst>
+        </p:cNvPr>
+        <p:cNvGrpSpPr/>
+        <p:nvPr/>
+      </p:nvGrpSpPr>
+      <p:grpSpPr>
+        <a:xfrm>
+          <a:off x="0" y="0"/>
+          <a:ext cx="0" cy="0"/>
+          <a:chOff x="0" y="0"/>
+          <a:chExt cx="0" cy="0"/>
+        </a:xfrm>
+      </p:grpSpPr>
+      <p:sp>
+        <p:nvSpPr>
+          <p:cNvPr id="2" name="Title 1">
+            <a:extLst>
+              <a:ext uri="{FF2B5EF4-FFF2-40B4-BE49-F238E27FC236}">
+                <a16:creationId xmlns:a16="http://schemas.microsoft.com/office/drawing/2014/main" id="{80A2470D-C81C-6F2B-6020-41AF8978D8AB}"/>
+              </a:ext>
+            </a:extLst>
+          </p:cNvPr>
+          <p:cNvSpPr>
+            <a:spLocks noGrp="1"/>
+          </p:cNvSpPr>
+          <p:nvPr>
+            <p:ph type="title"/>
+          </p:nvPr>
+        </p:nvSpPr>
+        <p:spPr/>
+        <p:txBody>
+          <a:bodyPr/>
+          <a:lstStyle/>
+          <a:p>
+            <a:r>
+              <a:rPr lang="en-CA" dirty="0"/>
+              <a:t>Prelim Dose Results: Scaled</a:t>
+            </a:r>
+          </a:p>
+        </p:txBody>
+      </p:sp>
+      <p:sp>
+        <p:nvSpPr>
+          <p:cNvPr id="4" name="Slide Number Placeholder 3">
+            <a:extLst>
+              <a:ext uri="{FF2B5EF4-FFF2-40B4-BE49-F238E27FC236}">
+                <a16:creationId xmlns:a16="http://schemas.microsoft.com/office/drawing/2014/main" id="{5273EFC6-3006-30E3-AC28-ED4776A53D83}"/>
+              </a:ext>
+            </a:extLst>
+          </p:cNvPr>
+          <p:cNvSpPr>
+            <a:spLocks noGrp="1"/>
+          </p:cNvSpPr>
+          <p:nvPr>
+            <p:ph type="sldNum" sz="quarter" idx="12"/>
+          </p:nvPr>
+        </p:nvSpPr>
+        <p:spPr/>
+        <p:txBody>
+          <a:bodyPr/>
+          <a:lstStyle/>
+          <a:p>
+            <a:fld id="{4BAA6517-F367-4EB3-AFA6-036DD26A3111}" type="slidenum">
+              <a:rPr lang="en-CA" smtClean="0"/>
+              <a:t>45</a:t>
+            </a:fld>
+            <a:endParaRPr lang="en-CA"/>
+          </a:p>
+        </p:txBody>
+      </p:sp>
+      <p:graphicFrame>
+        <p:nvGraphicFramePr>
+          <p:cNvPr id="8" name="Content Placeholder 7">
+            <a:extLst>
+              <a:ext uri="{FF2B5EF4-FFF2-40B4-BE49-F238E27FC236}">
+                <a16:creationId xmlns:a16="http://schemas.microsoft.com/office/drawing/2014/main" id="{4E5122EF-A248-5DCC-0797-283450E8ECF0}"/>
+              </a:ext>
+            </a:extLst>
+          </p:cNvPr>
+          <p:cNvGraphicFramePr>
+            <a:graphicFrameLocks noGrp="1"/>
+          </p:cNvGraphicFramePr>
+          <p:nvPr>
+            <p:ph idx="1"/>
+            <p:extLst>
+              <p:ext uri="{D42A27DB-BD31-4B8C-83A1-F6EECF244321}">
+                <p14:modId xmlns:p14="http://schemas.microsoft.com/office/powerpoint/2010/main" val="3265702833"/>
+              </p:ext>
+            </p:extLst>
+          </p:nvPr>
+        </p:nvGraphicFramePr>
+        <p:xfrm>
+          <a:off x="9046475" y="1912165"/>
+          <a:ext cx="2675968" cy="4023360"/>
+        </p:xfrm>
+        <a:graphic>
+          <a:graphicData uri="http://schemas.openxmlformats.org/drawingml/2006/table">
+            <a:tbl>
+              <a:tblPr bandRow="1">
+                <a:tableStyleId>{5C22544A-7EE6-4342-B048-85BDC9FD1C3A}</a:tableStyleId>
+              </a:tblPr>
+              <a:tblGrid>
+                <a:gridCol w="1337984">
+                  <a:extLst>
+                    <a:ext uri="{9D8B030D-6E8A-4147-A177-3AD203B41FA5}">
+                      <a16:colId xmlns:a16="http://schemas.microsoft.com/office/drawing/2014/main" val="917422986"/>
+                    </a:ext>
+                  </a:extLst>
+                </a:gridCol>
+                <a:gridCol w="1337984">
+                  <a:extLst>
+                    <a:ext uri="{9D8B030D-6E8A-4147-A177-3AD203B41FA5}">
+                      <a16:colId xmlns:a16="http://schemas.microsoft.com/office/drawing/2014/main" val="3736676220"/>
+                    </a:ext>
+                  </a:extLst>
+                </a:gridCol>
+              </a:tblGrid>
+              <a:tr h="370840">
+                <a:tc>
+                  <a:txBody>
+                    <a:bodyPr/>
+                    <a:lstStyle/>
+                    <a:p>
+                      <a:r>
+                        <a:rPr lang="en-US" dirty="0"/>
+                        <a:t>Number of Blood Volumes</a:t>
+                      </a:r>
+                      <a:endParaRPr lang="en-CA" dirty="0"/>
+                    </a:p>
+                  </a:txBody>
+                  <a:tcPr/>
+                </a:tc>
+                <a:tc>
+                  <a:txBody>
+                    <a:bodyPr/>
+                    <a:lstStyle/>
+                    <a:p>
+                      <a:r>
+                        <a:rPr lang="en-US" u="sng" dirty="0"/>
+                        <a:t>500</a:t>
                       </a:r>
                       <a:endParaRPr lang="en-CA" u="sng" dirty="0"/>
                     </a:p>
@@ -31967,7 +33079,7 @@
                 </a:pPr>
                 <a:r>
                   <a:rPr lang="en-US" dirty="0"/>
-                  <a:t>Weighted dose results with:</a:t>
+                  <a:t>Scaled dose results with:</a:t>
                 </a:r>
               </a:p>
               <a:p>
@@ -31981,7 +33093,7 @@
                       <a:rPr lang="en-US" sz="2800" b="0" i="1" smtClean="0">
                         <a:latin typeface="Cambria Math" panose="02040503050406030204" pitchFamily="18" charset="0"/>
                       </a:rPr>
-                      <m:t>𝑤</m:t>
+                      <m:t>𝑠</m:t>
                     </m:r>
                     <m:r>
                       <a:rPr lang="en-US" sz="2800" b="0" i="1" smtClean="0">
@@ -32117,6 +33229,272 @@
           </p:sp>
         </mc:Fallback>
       </mc:AlternateContent>
+      <mc:AlternateContent xmlns:mc="http://schemas.openxmlformats.org/markup-compatibility/2006">
+        <mc:Choice xmlns:a14="http://schemas.microsoft.com/office/drawing/2010/main" Requires="a14">
+          <p:sp>
+            <p:nvSpPr>
+              <p:cNvPr id="12" name="TextBox 11">
+                <a:extLst>
+                  <a:ext uri="{FF2B5EF4-FFF2-40B4-BE49-F238E27FC236}">
+                    <a16:creationId xmlns:a16="http://schemas.microsoft.com/office/drawing/2014/main" id="{AFB38B58-6F54-90E7-E3D0-1D0779D39035}"/>
+                  </a:ext>
+                </a:extLst>
+              </p:cNvPr>
+              <p:cNvSpPr txBox="1"/>
+              <p:nvPr/>
+            </p:nvSpPr>
+            <p:spPr>
+              <a:xfrm>
+                <a:off x="7274978" y="2030000"/>
+                <a:ext cx="1617046" cy="697883"/>
+              </a:xfrm>
+              <a:prstGeom prst="rect">
+                <a:avLst/>
+              </a:prstGeom>
+              <a:solidFill>
+                <a:schemeClr val="accent1">
+                  <a:lumMod val="60000"/>
+                  <a:lumOff val="40000"/>
+                </a:schemeClr>
+              </a:solidFill>
+            </p:spPr>
+            <p:txBody>
+              <a:bodyPr wrap="square">
+                <a:spAutoFit/>
+              </a:bodyPr>
+              <a:lstStyle/>
+              <a:p>
+                <a14:m>
+                  <m:oMathPara xmlns:m="http://schemas.openxmlformats.org/officeDocument/2006/math">
+                    <m:oMathParaPr>
+                      <m:jc m:val="centerGroup"/>
+                    </m:oMathParaPr>
+                    <m:oMath xmlns:m="http://schemas.openxmlformats.org/officeDocument/2006/math">
+                      <m:r>
+                        <a:rPr lang="en-US" b="0" i="1" smtClean="0">
+                          <a:latin typeface="Cambria Math" panose="02040503050406030204" pitchFamily="18" charset="0"/>
+                        </a:rPr>
+                        <m:t>𝑠</m:t>
+                      </m:r>
+                      <m:r>
+                        <a:rPr lang="en-US" b="0" i="1" smtClean="0">
+                          <a:latin typeface="Cambria Math" panose="02040503050406030204" pitchFamily="18" charset="0"/>
+                        </a:rPr>
+                        <m:t>= </m:t>
+                      </m:r>
+                      <m:f>
+                        <m:fPr>
+                          <m:ctrlPr>
+                            <a:rPr lang="en-US" b="0" i="1" smtClean="0">
+                              <a:latin typeface="Cambria Math" panose="02040503050406030204" pitchFamily="18" charset="0"/>
+                            </a:rPr>
+                          </m:ctrlPr>
+                        </m:fPr>
+                        <m:num>
+                          <m:r>
+                            <a:rPr lang="en-US" b="0" i="1" smtClean="0">
+                              <a:latin typeface="Cambria Math" panose="02040503050406030204" pitchFamily="18" charset="0"/>
+                            </a:rPr>
+                            <m:t>2 </m:t>
+                          </m:r>
+                          <m:r>
+                            <a:rPr lang="en-US" b="0" i="1" smtClean="0">
+                              <a:latin typeface="Cambria Math" panose="02040503050406030204" pitchFamily="18" charset="0"/>
+                              <a:ea typeface="Cambria Math" panose="02040503050406030204" pitchFamily="18" charset="0"/>
+                            </a:rPr>
+                            <m:t>∙ </m:t>
+                          </m:r>
+                          <m:sSub>
+                            <m:sSubPr>
+                              <m:ctrlPr>
+                                <a:rPr lang="en-US" b="0" i="1" smtClean="0">
+                                  <a:latin typeface="Cambria Math" panose="02040503050406030204" pitchFamily="18" charset="0"/>
+                                </a:rPr>
+                              </m:ctrlPr>
+                            </m:sSubPr>
+                            <m:e>
+                              <m:r>
+                                <a:rPr lang="en-US" b="0" i="1" smtClean="0">
+                                  <a:latin typeface="Cambria Math" panose="02040503050406030204" pitchFamily="18" charset="0"/>
+                                </a:rPr>
+                                <m:t>𝑇</m:t>
+                              </m:r>
+                            </m:e>
+                            <m:sub>
+                              <m:r>
+                                <a:rPr lang="en-US" b="0" i="1" smtClean="0">
+                                  <a:latin typeface="Cambria Math" panose="02040503050406030204" pitchFamily="18" charset="0"/>
+                                </a:rPr>
+                                <m:t>𝑓𝑖𝑒𝑙𝑑</m:t>
+                              </m:r>
+                            </m:sub>
+                          </m:sSub>
+                        </m:num>
+                        <m:den>
+                          <m:sSub>
+                            <m:sSubPr>
+                              <m:ctrlPr>
+                                <a:rPr lang="en-US" b="0" i="1" smtClean="0">
+                                  <a:latin typeface="Cambria Math" panose="02040503050406030204" pitchFamily="18" charset="0"/>
+                                </a:rPr>
+                              </m:ctrlPr>
+                            </m:sSubPr>
+                            <m:e>
+                              <m:r>
+                                <a:rPr lang="en-US" b="0" i="1" smtClean="0">
+                                  <a:latin typeface="Cambria Math" panose="02040503050406030204" pitchFamily="18" charset="0"/>
+                                </a:rPr>
+                                <m:t>𝑇</m:t>
+                              </m:r>
+                            </m:e>
+                            <m:sub>
+                              <m:r>
+                                <a:rPr lang="en-US" b="0" i="1" smtClean="0">
+                                  <a:latin typeface="Cambria Math" panose="02040503050406030204" pitchFamily="18" charset="0"/>
+                                </a:rPr>
+                                <m:t>𝑒𝑥𝑝𝑜𝑠𝑢𝑟𝑒</m:t>
+                              </m:r>
+                            </m:sub>
+                          </m:sSub>
+                        </m:den>
+                      </m:f>
+                    </m:oMath>
+                  </m:oMathPara>
+                </a14:m>
+                <a:endParaRPr lang="en-US" dirty="0"/>
+              </a:p>
+            </p:txBody>
+          </p:sp>
+        </mc:Choice>
+        <mc:Fallback>
+          <p:sp>
+            <p:nvSpPr>
+              <p:cNvPr id="12" name="TextBox 11">
+                <a:extLst>
+                  <a:ext uri="{FF2B5EF4-FFF2-40B4-BE49-F238E27FC236}">
+                    <a16:creationId xmlns:a16="http://schemas.microsoft.com/office/drawing/2014/main" id="{AFB38B58-6F54-90E7-E3D0-1D0779D39035}"/>
+                  </a:ext>
+                </a:extLst>
+              </p:cNvPr>
+              <p:cNvSpPr txBox="1">
+                <a:spLocks noRot="1" noChangeAspect="1" noMove="1" noResize="1" noEditPoints="1" noAdjustHandles="1" noChangeArrowheads="1" noChangeShapeType="1" noTextEdit="1"/>
+              </p:cNvSpPr>
+              <p:nvPr/>
+            </p:nvSpPr>
+            <p:spPr>
+              <a:xfrm>
+                <a:off x="7274978" y="2030000"/>
+                <a:ext cx="1617046" cy="697883"/>
+              </a:xfrm>
+              <a:prstGeom prst="rect">
+                <a:avLst/>
+              </a:prstGeom>
+              <a:blipFill>
+                <a:blip r:embed="rId3"/>
+                <a:stretch>
+                  <a:fillRect/>
+                </a:stretch>
+              </a:blipFill>
+            </p:spPr>
+            <p:txBody>
+              <a:bodyPr/>
+              <a:lstStyle/>
+              <a:p>
+                <a:r>
+                  <a:rPr lang="en-CA">
+                    <a:noFill/>
+                  </a:rPr>
+                  <a:t> </a:t>
+                </a:r>
+              </a:p>
+            </p:txBody>
+          </p:sp>
+        </mc:Fallback>
+      </mc:AlternateContent>
+      <p:pic>
+        <p:nvPicPr>
+          <p:cNvPr id="16" name="Picture 15">
+            <a:extLst>
+              <a:ext uri="{FF2B5EF4-FFF2-40B4-BE49-F238E27FC236}">
+                <a16:creationId xmlns:a16="http://schemas.microsoft.com/office/drawing/2014/main" id="{84C5BEB6-F1E6-E9A4-7358-5DDE5DB87D81}"/>
+              </a:ext>
+            </a:extLst>
+          </p:cNvPr>
+          <p:cNvPicPr>
+            <a:picLocks noChangeAspect="1"/>
+          </p:cNvPicPr>
+          <p:nvPr/>
+        </p:nvPicPr>
+        <p:blipFill>
+          <a:blip r:embed="rId4"/>
+          <a:stretch>
+            <a:fillRect/>
+          </a:stretch>
+        </p:blipFill>
+        <p:spPr>
+          <a:xfrm>
+            <a:off x="1078305" y="1834019"/>
+            <a:ext cx="6042222" cy="4452580"/>
+          </a:xfrm>
+          <a:prstGeom prst="rect">
+            <a:avLst/>
+          </a:prstGeom>
+        </p:spPr>
+      </p:pic>
+      <p:sp>
+        <p:nvSpPr>
+          <p:cNvPr id="10" name="Rectangle: Rounded Corners 9">
+            <a:extLst>
+              <a:ext uri="{FF2B5EF4-FFF2-40B4-BE49-F238E27FC236}">
+                <a16:creationId xmlns:a16="http://schemas.microsoft.com/office/drawing/2014/main" id="{9464EF32-4DCE-47DD-2114-D871731619AF}"/>
+              </a:ext>
+            </a:extLst>
+          </p:cNvPr>
+          <p:cNvSpPr/>
+          <p:nvPr/>
+        </p:nvSpPr>
+        <p:spPr>
+          <a:xfrm>
+            <a:off x="3520679" y="5982050"/>
+            <a:ext cx="1723456" cy="193040"/>
+          </a:xfrm>
+          <a:prstGeom prst="roundRect">
+            <a:avLst/>
+          </a:prstGeom>
+          <a:solidFill>
+            <a:schemeClr val="accent2">
+              <a:alpha val="25000"/>
+            </a:schemeClr>
+          </a:solidFill>
+          <a:ln>
+            <a:noFill/>
+          </a:ln>
+        </p:spPr>
+        <p:style>
+          <a:lnRef idx="2">
+            <a:schemeClr val="accent1">
+              <a:shade val="15000"/>
+            </a:schemeClr>
+          </a:lnRef>
+          <a:fillRef idx="1">
+            <a:schemeClr val="accent1"/>
+          </a:fillRef>
+          <a:effectRef idx="0">
+            <a:schemeClr val="accent1"/>
+          </a:effectRef>
+          <a:fontRef idx="minor">
+            <a:schemeClr val="lt1"/>
+          </a:fontRef>
+        </p:style>
+        <p:txBody>
+          <a:bodyPr rtlCol="0" anchor="ctr"/>
+          <a:lstStyle/>
+          <a:p>
+            <a:pPr algn="ctr"/>
+            <a:endParaRPr lang="en-CA"/>
+          </a:p>
+        </p:txBody>
+      </p:sp>
     </p:spTree>
     <p:extLst>
       <p:ext uri="{BB962C8B-B14F-4D97-AF65-F5344CB8AC3E}">
@@ -32135,7 +33513,13 @@
   <p:cSld>
     <p:spTree>
       <p:nvGrpSpPr>
-        <p:cNvPr id="1" name=""/>
+        <p:cNvPr id="1" name="">
+          <a:extLst>
+            <a:ext uri="{FF2B5EF4-FFF2-40B4-BE49-F238E27FC236}">
+              <a16:creationId xmlns:a16="http://schemas.microsoft.com/office/drawing/2014/main" id="{30666419-326B-F236-88A9-861B52E71B5E}"/>
+            </a:ext>
+          </a:extLst>
+        </p:cNvPr>
         <p:cNvGrpSpPr/>
         <p:nvPr/>
       </p:nvGrpSpPr>
@@ -32152,7 +33536,7 @@
           <p:cNvPr id="2" name="Title 1">
             <a:extLst>
               <a:ext uri="{FF2B5EF4-FFF2-40B4-BE49-F238E27FC236}">
-                <a16:creationId xmlns:a16="http://schemas.microsoft.com/office/drawing/2014/main" id="{9042161B-7CDF-F28C-41E7-F4D22FAADFCA}"/>
+                <a16:creationId xmlns:a16="http://schemas.microsoft.com/office/drawing/2014/main" id="{033F8C8D-AE5C-946D-F9E3-4C077A4A184D}"/>
               </a:ext>
             </a:extLst>
           </p:cNvPr>
@@ -32170,17 +33554,214 @@
           <a:p>
             <a:r>
               <a:rPr lang="en-CA" dirty="0"/>
-              <a:t>Anticaption for Projects 3</a:t>
-            </a:r>
+              <a:t>Prelim Dose Results</a:t>
+            </a:r>
+          </a:p>
+        </p:txBody>
+      </p:sp>
+      <p:pic>
+        <p:nvPicPr>
+          <p:cNvPr id="20" name="Picture 19">
+            <a:extLst>
+              <a:ext uri="{FF2B5EF4-FFF2-40B4-BE49-F238E27FC236}">
+                <a16:creationId xmlns:a16="http://schemas.microsoft.com/office/drawing/2014/main" id="{63CEAB17-B2EB-4346-9E6A-8EEC578AC92A}"/>
+              </a:ext>
+            </a:extLst>
+          </p:cNvPr>
+          <p:cNvPicPr>
+            <a:picLocks noChangeAspect="1"/>
+          </p:cNvPicPr>
+          <p:nvPr/>
+        </p:nvPicPr>
+        <p:blipFill>
+          <a:blip r:embed="rId2"/>
+          <a:stretch>
+            <a:fillRect/>
+          </a:stretch>
+        </p:blipFill>
+        <p:spPr>
+          <a:xfrm>
+            <a:off x="6404643" y="1845734"/>
+            <a:ext cx="5787358" cy="4264768"/>
+          </a:xfrm>
+          <a:prstGeom prst="rect">
+            <a:avLst/>
+          </a:prstGeom>
+        </p:spPr>
+      </p:pic>
+      <p:sp>
+        <p:nvSpPr>
+          <p:cNvPr id="4" name="Slide Number Placeholder 3">
+            <a:extLst>
+              <a:ext uri="{FF2B5EF4-FFF2-40B4-BE49-F238E27FC236}">
+                <a16:creationId xmlns:a16="http://schemas.microsoft.com/office/drawing/2014/main" id="{596FA5DB-92E2-53F2-C662-C77BF28CB9BB}"/>
+              </a:ext>
+            </a:extLst>
+          </p:cNvPr>
+          <p:cNvSpPr>
+            <a:spLocks noGrp="1"/>
+          </p:cNvSpPr>
+          <p:nvPr>
+            <p:ph type="sldNum" sz="quarter" idx="12"/>
+          </p:nvPr>
+        </p:nvSpPr>
+        <p:spPr/>
+        <p:txBody>
+          <a:bodyPr/>
+          <a:lstStyle/>
+          <a:p>
+            <a:fld id="{4BAA6517-F367-4EB3-AFA6-036DD26A3111}" type="slidenum">
+              <a:rPr lang="en-CA" smtClean="0"/>
+              <a:t>46</a:t>
+            </a:fld>
+            <a:endParaRPr lang="en-CA"/>
           </a:p>
         </p:txBody>
       </p:sp>
       <p:sp>
         <p:nvSpPr>
-          <p:cNvPr id="3" name="Content Placeholder 2">
-            <a:extLst>
-              <a:ext uri="{FF2B5EF4-FFF2-40B4-BE49-F238E27FC236}">
-                <a16:creationId xmlns:a16="http://schemas.microsoft.com/office/drawing/2014/main" id="{6E3F26EC-8641-6786-F377-F9E210E48069}"/>
+          <p:cNvPr id="12" name="Rectangle: Rounded Corners 11">
+            <a:extLst>
+              <a:ext uri="{FF2B5EF4-FFF2-40B4-BE49-F238E27FC236}">
+                <a16:creationId xmlns:a16="http://schemas.microsoft.com/office/drawing/2014/main" id="{89754CA8-E7C7-5C9D-CA4F-E3F69BEBEF59}"/>
+              </a:ext>
+            </a:extLst>
+          </p:cNvPr>
+          <p:cNvSpPr/>
+          <p:nvPr/>
+        </p:nvSpPr>
+        <p:spPr>
+          <a:xfrm>
+            <a:off x="8642952" y="5821680"/>
+            <a:ext cx="1723456" cy="193040"/>
+          </a:xfrm>
+          <a:prstGeom prst="roundRect">
+            <a:avLst/>
+          </a:prstGeom>
+          <a:solidFill>
+            <a:schemeClr val="accent2">
+              <a:alpha val="25000"/>
+            </a:schemeClr>
+          </a:solidFill>
+          <a:ln>
+            <a:noFill/>
+          </a:ln>
+        </p:spPr>
+        <p:style>
+          <a:lnRef idx="2">
+            <a:schemeClr val="accent1">
+              <a:shade val="15000"/>
+            </a:schemeClr>
+          </a:lnRef>
+          <a:fillRef idx="1">
+            <a:schemeClr val="accent1"/>
+          </a:fillRef>
+          <a:effectRef idx="0">
+            <a:schemeClr val="accent1"/>
+          </a:effectRef>
+          <a:fontRef idx="minor">
+            <a:schemeClr val="lt1"/>
+          </a:fontRef>
+        </p:style>
+        <p:txBody>
+          <a:bodyPr rtlCol="0" anchor="ctr"/>
+          <a:lstStyle/>
+          <a:p>
+            <a:pPr algn="ctr"/>
+            <a:endParaRPr lang="en-CA"/>
+          </a:p>
+        </p:txBody>
+      </p:sp>
+      <p:pic>
+        <p:nvPicPr>
+          <p:cNvPr id="16" name="Picture 15">
+            <a:extLst>
+              <a:ext uri="{FF2B5EF4-FFF2-40B4-BE49-F238E27FC236}">
+                <a16:creationId xmlns:a16="http://schemas.microsoft.com/office/drawing/2014/main" id="{DB5961C8-B0F7-525C-AEDF-A5E1F161170D}"/>
+              </a:ext>
+            </a:extLst>
+          </p:cNvPr>
+          <p:cNvPicPr>
+            <a:picLocks noChangeAspect="1"/>
+          </p:cNvPicPr>
+          <p:nvPr/>
+        </p:nvPicPr>
+        <p:blipFill>
+          <a:blip r:embed="rId3"/>
+          <a:stretch>
+            <a:fillRect/>
+          </a:stretch>
+        </p:blipFill>
+        <p:spPr>
+          <a:xfrm>
+            <a:off x="0" y="1845734"/>
+            <a:ext cx="5787358" cy="4264768"/>
+          </a:xfrm>
+          <a:prstGeom prst="rect">
+            <a:avLst/>
+          </a:prstGeom>
+        </p:spPr>
+      </p:pic>
+      <p:sp>
+        <p:nvSpPr>
+          <p:cNvPr id="11" name="Rectangle: Rounded Corners 10">
+            <a:extLst>
+              <a:ext uri="{FF2B5EF4-FFF2-40B4-BE49-F238E27FC236}">
+                <a16:creationId xmlns:a16="http://schemas.microsoft.com/office/drawing/2014/main" id="{BF46D7DC-F988-3424-44BE-24CC2660B2FA}"/>
+              </a:ext>
+            </a:extLst>
+          </p:cNvPr>
+          <p:cNvSpPr/>
+          <p:nvPr/>
+        </p:nvSpPr>
+        <p:spPr>
+          <a:xfrm>
+            <a:off x="2397760" y="5821680"/>
+            <a:ext cx="1463040" cy="193040"/>
+          </a:xfrm>
+          <a:prstGeom prst="roundRect">
+            <a:avLst/>
+          </a:prstGeom>
+          <a:solidFill>
+            <a:schemeClr val="accent2">
+              <a:alpha val="25000"/>
+            </a:schemeClr>
+          </a:solidFill>
+          <a:ln>
+            <a:noFill/>
+          </a:ln>
+        </p:spPr>
+        <p:style>
+          <a:lnRef idx="2">
+            <a:schemeClr val="accent1">
+              <a:shade val="15000"/>
+            </a:schemeClr>
+          </a:lnRef>
+          <a:fillRef idx="1">
+            <a:schemeClr val="accent1"/>
+          </a:fillRef>
+          <a:effectRef idx="0">
+            <a:schemeClr val="accent1"/>
+          </a:effectRef>
+          <a:fontRef idx="minor">
+            <a:schemeClr val="lt1"/>
+          </a:fontRef>
+        </p:style>
+        <p:txBody>
+          <a:bodyPr rtlCol="0" anchor="ctr"/>
+          <a:lstStyle/>
+          <a:p>
+            <a:pPr algn="ctr"/>
+            <a:endParaRPr lang="en-CA"/>
+          </a:p>
+        </p:txBody>
+      </p:sp>
+      <p:sp>
+        <p:nvSpPr>
+          <p:cNvPr id="18" name="Content Placeholder 17">
+            <a:extLst>
+              <a:ext uri="{FF2B5EF4-FFF2-40B4-BE49-F238E27FC236}">
+                <a16:creationId xmlns:a16="http://schemas.microsoft.com/office/drawing/2014/main" id="{BCB180CE-82E6-914F-1F0B-65478C6D8241}"/>
               </a:ext>
             </a:extLst>
           </p:cNvPr>
@@ -32196,108 +33777,14 @@
           <a:bodyPr/>
           <a:lstStyle/>
           <a:p>
-            <a:r>
-              <a:rPr lang="en-US" dirty="0"/>
-              <a:t>Model the following:</a:t>
-            </a:r>
-          </a:p>
-          <a:p>
-            <a:pPr lvl="1"/>
-            <a:r>
-              <a:rPr lang="en-US" dirty="0"/>
-              <a:t>Extended POP: most common in Canada as of 2017  </a:t>
-            </a:r>
-          </a:p>
-          <a:p>
-            <a:pPr lvl="1"/>
-            <a:r>
-              <a:rPr lang="en-US" dirty="0"/>
-              <a:t>TBI VMAT: as delivered at BC Cancer – Vancouver</a:t>
-            </a:r>
-          </a:p>
-          <a:p>
-            <a:pPr lvl="2"/>
-            <a:r>
-              <a:rPr lang="en-US" dirty="0"/>
-              <a:t>Q: Are their variables we can vary during the treatment planning process?</a:t>
-            </a:r>
-          </a:p>
-          <a:p>
-            <a:r>
-              <a:rPr lang="en-CA" dirty="0"/>
-              <a:t>Compare the standard deviation of the dose to the BVs for all treatments</a:t>
-            </a:r>
-          </a:p>
-        </p:txBody>
-      </p:sp>
-      <p:sp>
-        <p:nvSpPr>
-          <p:cNvPr id="4" name="Slide Number Placeholder 3">
-            <a:extLst>
-              <a:ext uri="{FF2B5EF4-FFF2-40B4-BE49-F238E27FC236}">
-                <a16:creationId xmlns:a16="http://schemas.microsoft.com/office/drawing/2014/main" id="{13756F0E-AACC-4950-1B4D-D99BD134EFD4}"/>
-              </a:ext>
-            </a:extLst>
-          </p:cNvPr>
-          <p:cNvSpPr>
-            <a:spLocks noGrp="1"/>
-          </p:cNvSpPr>
-          <p:nvPr>
-            <p:ph type="sldNum" sz="quarter" idx="12"/>
-          </p:nvPr>
-        </p:nvSpPr>
-        <p:spPr/>
-        <p:txBody>
-          <a:bodyPr/>
-          <a:lstStyle/>
-          <a:p>
-            <a:fld id="{4BAA6517-F367-4EB3-AFA6-036DD26A3111}" type="slidenum">
-              <a:rPr lang="en-CA" smtClean="0"/>
-              <a:t>46</a:t>
-            </a:fld>
-            <a:endParaRPr lang="en-CA"/>
-          </a:p>
-        </p:txBody>
-      </p:sp>
-      <p:sp>
-        <p:nvSpPr>
-          <p:cNvPr id="6" name="TextBox 5">
-            <a:extLst>
-              <a:ext uri="{FF2B5EF4-FFF2-40B4-BE49-F238E27FC236}">
-                <a16:creationId xmlns:a16="http://schemas.microsoft.com/office/drawing/2014/main" id="{1E5CA64C-3F42-93AF-F7C6-81ACDD9AC1CE}"/>
-              </a:ext>
-            </a:extLst>
-          </p:cNvPr>
-          <p:cNvSpPr txBox="1"/>
-          <p:nvPr/>
-        </p:nvSpPr>
-        <p:spPr>
-          <a:xfrm>
-            <a:off x="-76201" y="6411514"/>
-            <a:ext cx="10620376" cy="461665"/>
-          </a:xfrm>
-          <a:prstGeom prst="rect">
-            <a:avLst/>
-          </a:prstGeom>
-          <a:noFill/>
-        </p:spPr>
-        <p:txBody>
-          <a:bodyPr wrap="square">
-            <a:spAutoFit/>
-          </a:bodyPr>
-          <a:lstStyle/>
-          <a:p>
-            <a:r>
-              <a:rPr lang="en-US" sz="1200" dirty="0"/>
-              <a:t>R. C. N. Studinski, D. J. Fraser, R. S. Samant, and M. S. MacPherson, “Current practice in total-body irradiation: results of a Canada-wide survey,” Curr Oncol, vol. 24, no. 3, pp. 181–186, June 2017.</a:t>
-            </a:r>
+            <a:endParaRPr lang="en-CA" dirty="0"/>
           </a:p>
         </p:txBody>
       </p:sp>
     </p:spTree>
     <p:extLst>
       <p:ext uri="{BB962C8B-B14F-4D97-AF65-F5344CB8AC3E}">
-        <p14:creationId xmlns:p14="http://schemas.microsoft.com/office/powerpoint/2010/main" val="1703520566"/>
+        <p14:creationId xmlns:p14="http://schemas.microsoft.com/office/powerpoint/2010/main" val="1201778334"/>
       </p:ext>
     </p:extLst>
   </p:cSld>
@@ -32329,7 +33816,7 @@
           <p:cNvPr id="2" name="Title 1">
             <a:extLst>
               <a:ext uri="{FF2B5EF4-FFF2-40B4-BE49-F238E27FC236}">
-                <a16:creationId xmlns:a16="http://schemas.microsoft.com/office/drawing/2014/main" id="{3EDEF5C6-E751-BA09-05B4-81E901FCDD87}"/>
+                <a16:creationId xmlns:a16="http://schemas.microsoft.com/office/drawing/2014/main" id="{9042161B-7CDF-F28C-41E7-F4D22FAADFCA}"/>
               </a:ext>
             </a:extLst>
           </p:cNvPr>
@@ -32347,7 +33834,7 @@
           <a:p>
             <a:r>
               <a:rPr lang="en-CA" dirty="0"/>
-              <a:t>Publications Anticipated and Issues</a:t>
+              <a:t>Anticipating Projects 3</a:t>
             </a:r>
           </a:p>
         </p:txBody>
@@ -32357,7 +33844,7 @@
           <p:cNvPr id="3" name="Content Placeholder 2">
             <a:extLst>
               <a:ext uri="{FF2B5EF4-FFF2-40B4-BE49-F238E27FC236}">
-                <a16:creationId xmlns:a16="http://schemas.microsoft.com/office/drawing/2014/main" id="{F471E1CA-CE51-C89C-79CA-FD3BEA12F86E}"/>
+                <a16:creationId xmlns:a16="http://schemas.microsoft.com/office/drawing/2014/main" id="{6E3F26EC-8641-6786-F377-F9E210E48069}"/>
               </a:ext>
             </a:extLst>
           </p:cNvPr>
@@ -32375,25 +33862,35 @@
           <a:p>
             <a:r>
               <a:rPr lang="en-US" dirty="0"/>
-              <a:t>Submitted Project 1 – Blood Flow Model to Physics in Medicine &amp; Biology and the paper was rejected.</a:t>
-            </a:r>
-          </a:p>
-          <a:p>
+              <a:t>Model the following:</a:t>
+            </a:r>
+          </a:p>
+          <a:p>
+            <a:pPr lvl="1"/>
             <a:r>
               <a:rPr lang="en-US" dirty="0"/>
-              <a:t>The </a:t>
-            </a:r>
-            <a:r>
-              <a:rPr lang="en-US" u="sng" dirty="0"/>
-              <a:t>lack of dosimetric results </a:t>
-            </a:r>
+              <a:t>Extended POP: most common in Canada as of 2017  </a:t>
+            </a:r>
+          </a:p>
+          <a:p>
+            <a:pPr lvl="1"/>
             <a:r>
               <a:rPr lang="en-US" dirty="0"/>
-              <a:t>was a significant piece of feedback. </a:t>
-            </a:r>
-          </a:p>
-          <a:p>
-            <a:endParaRPr lang="en-US" dirty="0"/>
+              <a:t>TBI VMAT: as delivered at BC Cancer – Vancouver</a:t>
+            </a:r>
+          </a:p>
+          <a:p>
+            <a:pPr lvl="2"/>
+            <a:r>
+              <a:rPr lang="en-US" dirty="0"/>
+              <a:t>Q: Are their variables we can vary during the treatment planning process?</a:t>
+            </a:r>
+          </a:p>
+          <a:p>
+            <a:r>
+              <a:rPr lang="en-CA" dirty="0"/>
+              <a:t>Compare the standard deviation of the dose to the BVs for all treatments</a:t>
+            </a:r>
           </a:p>
         </p:txBody>
       </p:sp>
@@ -32402,7 +33899,7 @@
           <p:cNvPr id="4" name="Slide Number Placeholder 3">
             <a:extLst>
               <a:ext uri="{FF2B5EF4-FFF2-40B4-BE49-F238E27FC236}">
-                <a16:creationId xmlns:a16="http://schemas.microsoft.com/office/drawing/2014/main" id="{9661F0E0-CD0C-229E-5D94-ADA60FEBC43E}"/>
+                <a16:creationId xmlns:a16="http://schemas.microsoft.com/office/drawing/2014/main" id="{13756F0E-AACC-4950-1B4D-D99BD134EFD4}"/>
               </a:ext>
             </a:extLst>
           </p:cNvPr>
@@ -32421,6 +33918,173 @@
             <a:fld id="{4BAA6517-F367-4EB3-AFA6-036DD26A3111}" type="slidenum">
               <a:rPr lang="en-CA" smtClean="0"/>
               <a:t>47</a:t>
+            </a:fld>
+            <a:endParaRPr lang="en-CA"/>
+          </a:p>
+        </p:txBody>
+      </p:sp>
+      <p:sp>
+        <p:nvSpPr>
+          <p:cNvPr id="6" name="TextBox 5">
+            <a:extLst>
+              <a:ext uri="{FF2B5EF4-FFF2-40B4-BE49-F238E27FC236}">
+                <a16:creationId xmlns:a16="http://schemas.microsoft.com/office/drawing/2014/main" id="{1E5CA64C-3F42-93AF-F7C6-81ACDD9AC1CE}"/>
+              </a:ext>
+            </a:extLst>
+          </p:cNvPr>
+          <p:cNvSpPr txBox="1"/>
+          <p:nvPr/>
+        </p:nvSpPr>
+        <p:spPr>
+          <a:xfrm>
+            <a:off x="-76201" y="6411514"/>
+            <a:ext cx="10620376" cy="461665"/>
+          </a:xfrm>
+          <a:prstGeom prst="rect">
+            <a:avLst/>
+          </a:prstGeom>
+          <a:noFill/>
+        </p:spPr>
+        <p:txBody>
+          <a:bodyPr wrap="square">
+            <a:spAutoFit/>
+          </a:bodyPr>
+          <a:lstStyle/>
+          <a:p>
+            <a:r>
+              <a:rPr lang="en-US" sz="1200" dirty="0"/>
+              <a:t>R. C. N. Studinski, D. J. Fraser, R. S. Samant, and M. S. MacPherson, “Current practice in total-body irradiation: results of a Canada-wide survey,” Curr Oncol, vol. 24, no. 3, pp. 181–186, June 2017.</a:t>
+            </a:r>
+          </a:p>
+        </p:txBody>
+      </p:sp>
+    </p:spTree>
+    <p:extLst>
+      <p:ext uri="{BB962C8B-B14F-4D97-AF65-F5344CB8AC3E}">
+        <p14:creationId xmlns:p14="http://schemas.microsoft.com/office/powerpoint/2010/main" val="1703520566"/>
+      </p:ext>
+    </p:extLst>
+  </p:cSld>
+  <p:clrMapOvr>
+    <a:masterClrMapping/>
+  </p:clrMapOvr>
+</p:sld>
+</file>
+
+<file path=ppt/slides/slide48.xml><?xml version="1.0" encoding="utf-8"?>
+<p:sld xmlns:a="http://schemas.openxmlformats.org/drawingml/2006/main" xmlns:r="http://schemas.openxmlformats.org/officeDocument/2006/relationships" xmlns:p="http://schemas.openxmlformats.org/presentationml/2006/main">
+  <p:cSld>
+    <p:spTree>
+      <p:nvGrpSpPr>
+        <p:cNvPr id="1" name=""/>
+        <p:cNvGrpSpPr/>
+        <p:nvPr/>
+      </p:nvGrpSpPr>
+      <p:grpSpPr>
+        <a:xfrm>
+          <a:off x="0" y="0"/>
+          <a:ext cx="0" cy="0"/>
+          <a:chOff x="0" y="0"/>
+          <a:chExt cx="0" cy="0"/>
+        </a:xfrm>
+      </p:grpSpPr>
+      <p:sp>
+        <p:nvSpPr>
+          <p:cNvPr id="2" name="Title 1">
+            <a:extLst>
+              <a:ext uri="{FF2B5EF4-FFF2-40B4-BE49-F238E27FC236}">
+                <a16:creationId xmlns:a16="http://schemas.microsoft.com/office/drawing/2014/main" id="{3EDEF5C6-E751-BA09-05B4-81E901FCDD87}"/>
+              </a:ext>
+            </a:extLst>
+          </p:cNvPr>
+          <p:cNvSpPr>
+            <a:spLocks noGrp="1"/>
+          </p:cNvSpPr>
+          <p:nvPr>
+            <p:ph type="title"/>
+          </p:nvPr>
+        </p:nvSpPr>
+        <p:spPr/>
+        <p:txBody>
+          <a:bodyPr/>
+          <a:lstStyle/>
+          <a:p>
+            <a:r>
+              <a:rPr lang="en-CA" dirty="0"/>
+              <a:t>Publications Anticipated and Issues</a:t>
+            </a:r>
+          </a:p>
+        </p:txBody>
+      </p:sp>
+      <p:sp>
+        <p:nvSpPr>
+          <p:cNvPr id="3" name="Content Placeholder 2">
+            <a:extLst>
+              <a:ext uri="{FF2B5EF4-FFF2-40B4-BE49-F238E27FC236}">
+                <a16:creationId xmlns:a16="http://schemas.microsoft.com/office/drawing/2014/main" id="{F471E1CA-CE51-C89C-79CA-FD3BEA12F86E}"/>
+              </a:ext>
+            </a:extLst>
+          </p:cNvPr>
+          <p:cNvSpPr>
+            <a:spLocks noGrp="1"/>
+          </p:cNvSpPr>
+          <p:nvPr>
+            <p:ph idx="1"/>
+          </p:nvPr>
+        </p:nvSpPr>
+        <p:spPr/>
+        <p:txBody>
+          <a:bodyPr/>
+          <a:lstStyle/>
+          <a:p>
+            <a:r>
+              <a:rPr lang="en-US" dirty="0"/>
+              <a:t>Submitted Project 1 – Blood Flow Model to Physics in Medicine &amp; Biology and the paper was rejected.</a:t>
+            </a:r>
+          </a:p>
+          <a:p>
+            <a:r>
+              <a:rPr lang="en-US" dirty="0"/>
+              <a:t>The </a:t>
+            </a:r>
+            <a:r>
+              <a:rPr lang="en-US" u="sng" dirty="0"/>
+              <a:t>lack of dosimetric results </a:t>
+            </a:r>
+            <a:r>
+              <a:rPr lang="en-US" dirty="0"/>
+              <a:t>was a significant piece of feedback. </a:t>
+            </a:r>
+          </a:p>
+          <a:p>
+            <a:endParaRPr lang="en-US" dirty="0"/>
+          </a:p>
+        </p:txBody>
+      </p:sp>
+      <p:sp>
+        <p:nvSpPr>
+          <p:cNvPr id="4" name="Slide Number Placeholder 3">
+            <a:extLst>
+              <a:ext uri="{FF2B5EF4-FFF2-40B4-BE49-F238E27FC236}">
+                <a16:creationId xmlns:a16="http://schemas.microsoft.com/office/drawing/2014/main" id="{9661F0E0-CD0C-229E-5D94-ADA60FEBC43E}"/>
+              </a:ext>
+            </a:extLst>
+          </p:cNvPr>
+          <p:cNvSpPr>
+            <a:spLocks noGrp="1"/>
+          </p:cNvSpPr>
+          <p:nvPr>
+            <p:ph type="sldNum" sz="quarter" idx="12"/>
+          </p:nvPr>
+        </p:nvSpPr>
+        <p:spPr/>
+        <p:txBody>
+          <a:bodyPr/>
+          <a:lstStyle/>
+          <a:p>
+            <a:fld id="{4BAA6517-F367-4EB3-AFA6-036DD26A3111}" type="slidenum">
+              <a:rPr lang="en-CA" smtClean="0"/>
+              <a:t>48</a:t>
             </a:fld>
             <a:endParaRPr lang="en-CA"/>
           </a:p>
@@ -32439,7 +34103,7 @@
 </p:sld>
 </file>
 
-<file path=ppt/slides/slide48.xml><?xml version="1.0" encoding="utf-8"?>
+<file path=ppt/slides/slide49.xml><?xml version="1.0" encoding="utf-8"?>
 <p:sld xmlns:a="http://schemas.openxmlformats.org/drawingml/2006/main" xmlns:r="http://schemas.openxmlformats.org/officeDocument/2006/relationships" xmlns:p="http://schemas.openxmlformats.org/presentationml/2006/main">
   <p:cSld>
     <p:spTree>
@@ -32548,7 +34212,7 @@
             </a:pPr>
             <a:r>
               <a:rPr lang="en-US" dirty="0"/>
-              <a:t>Re-submit with additional focus on validation metrics (other piece of feedback)</a:t>
+              <a:t>Re-submit with additional focus on validation metrics </a:t>
             </a:r>
           </a:p>
           <a:p>
@@ -32591,7 +34255,7 @@
           <a:p>
             <a:fld id="{4BAA6517-F367-4EB3-AFA6-036DD26A3111}" type="slidenum">
               <a:rPr lang="en-CA" smtClean="0"/>
-              <a:t>48</a:t>
+              <a:t>49</a:t>
             </a:fld>
             <a:endParaRPr lang="en-CA"/>
           </a:p>
@@ -32601,120 +34265,6 @@
     <p:extLst>
       <p:ext uri="{BB962C8B-B14F-4D97-AF65-F5344CB8AC3E}">
         <p14:creationId xmlns:p14="http://schemas.microsoft.com/office/powerpoint/2010/main" val="1362057303"/>
-      </p:ext>
-    </p:extLst>
-  </p:cSld>
-  <p:clrMapOvr>
-    <a:masterClrMapping/>
-  </p:clrMapOvr>
-</p:sld>
-</file>
-
-<file path=ppt/slides/slide49.xml><?xml version="1.0" encoding="utf-8"?>
-<p:sld xmlns:a="http://schemas.openxmlformats.org/drawingml/2006/main" xmlns:r="http://schemas.openxmlformats.org/officeDocument/2006/relationships" xmlns:p="http://schemas.openxmlformats.org/presentationml/2006/main">
-  <p:cSld>
-    <p:spTree>
-      <p:nvGrpSpPr>
-        <p:cNvPr id="1" name=""/>
-        <p:cNvGrpSpPr/>
-        <p:nvPr/>
-      </p:nvGrpSpPr>
-      <p:grpSpPr>
-        <a:xfrm>
-          <a:off x="0" y="0"/>
-          <a:ext cx="0" cy="0"/>
-          <a:chOff x="0" y="0"/>
-          <a:chExt cx="0" cy="0"/>
-        </a:xfrm>
-      </p:grpSpPr>
-      <p:sp>
-        <p:nvSpPr>
-          <p:cNvPr id="2" name="Title 1">
-            <a:extLst>
-              <a:ext uri="{FF2B5EF4-FFF2-40B4-BE49-F238E27FC236}">
-                <a16:creationId xmlns:a16="http://schemas.microsoft.com/office/drawing/2014/main" id="{F535EC0F-8FB7-5780-47B9-FF7762017EC9}"/>
-              </a:ext>
-            </a:extLst>
-          </p:cNvPr>
-          <p:cNvSpPr>
-            <a:spLocks noGrp="1"/>
-          </p:cNvSpPr>
-          <p:nvPr>
-            <p:ph type="ctrTitle"/>
-          </p:nvPr>
-        </p:nvSpPr>
-        <p:spPr/>
-        <p:txBody>
-          <a:bodyPr>
-            <a:normAutofit fontScale="90000"/>
-          </a:bodyPr>
-          <a:lstStyle/>
-          <a:p>
-            <a:r>
-              <a:rPr lang="en-CA" dirty="0"/>
-              <a:t>Big Question: Do you feel like the outlined work meets the requirement to fill the body of my thesis?</a:t>
-            </a:r>
-          </a:p>
-        </p:txBody>
-      </p:sp>
-      <p:sp>
-        <p:nvSpPr>
-          <p:cNvPr id="3" name="Subtitle 2">
-            <a:extLst>
-              <a:ext uri="{FF2B5EF4-FFF2-40B4-BE49-F238E27FC236}">
-                <a16:creationId xmlns:a16="http://schemas.microsoft.com/office/drawing/2014/main" id="{AE81CEBC-BCCE-7303-A4F1-D1D30EB13CDC}"/>
-              </a:ext>
-            </a:extLst>
-          </p:cNvPr>
-          <p:cNvSpPr>
-            <a:spLocks noGrp="1"/>
-          </p:cNvSpPr>
-          <p:nvPr>
-            <p:ph type="subTitle" idx="1"/>
-          </p:nvPr>
-        </p:nvSpPr>
-        <p:spPr/>
-        <p:txBody>
-          <a:bodyPr/>
-          <a:lstStyle/>
-          <a:p>
-            <a:endParaRPr lang="en-CA" dirty="0"/>
-          </a:p>
-        </p:txBody>
-      </p:sp>
-      <p:sp>
-        <p:nvSpPr>
-          <p:cNvPr id="4" name="Slide Number Placeholder 3">
-            <a:extLst>
-              <a:ext uri="{FF2B5EF4-FFF2-40B4-BE49-F238E27FC236}">
-                <a16:creationId xmlns:a16="http://schemas.microsoft.com/office/drawing/2014/main" id="{EA34D409-7197-5D88-7B2A-5228A145AB20}"/>
-              </a:ext>
-            </a:extLst>
-          </p:cNvPr>
-          <p:cNvSpPr>
-            <a:spLocks noGrp="1"/>
-          </p:cNvSpPr>
-          <p:nvPr>
-            <p:ph type="sldNum" sz="quarter" idx="12"/>
-          </p:nvPr>
-        </p:nvSpPr>
-        <p:spPr/>
-        <p:txBody>
-          <a:bodyPr/>
-          <a:lstStyle/>
-          <a:p>
-            <a:fld id="{4BAA6517-F367-4EB3-AFA6-036DD26A3111}" type="slidenum">
-              <a:rPr lang="en-CA" smtClean="0"/>
-              <a:t>49</a:t>
-            </a:fld>
-            <a:endParaRPr lang="en-CA"/>
-          </a:p>
-        </p:txBody>
-      </p:sp>
-    </p:spTree>
-    <p:extLst>
-      <p:ext uri="{BB962C8B-B14F-4D97-AF65-F5344CB8AC3E}">
-        <p14:creationId xmlns:p14="http://schemas.microsoft.com/office/powerpoint/2010/main" val="3042671859"/>
       </p:ext>
     </p:extLst>
   </p:cSld>
@@ -33248,7 +34798,7 @@
           <p:cNvPr id="2" name="Title 1">
             <a:extLst>
               <a:ext uri="{FF2B5EF4-FFF2-40B4-BE49-F238E27FC236}">
-                <a16:creationId xmlns:a16="http://schemas.microsoft.com/office/drawing/2014/main" id="{E278983D-EBB6-683C-94AD-CAED3B799030}"/>
+                <a16:creationId xmlns:a16="http://schemas.microsoft.com/office/drawing/2014/main" id="{F535EC0F-8FB7-5780-47B9-FF7762017EC9}"/>
               </a:ext>
             </a:extLst>
           </p:cNvPr>
@@ -33256,7 +34806,37 @@
             <a:spLocks noGrp="1"/>
           </p:cNvSpPr>
           <p:nvPr>
-            <p:ph type="title"/>
+            <p:ph type="ctrTitle"/>
+          </p:nvPr>
+        </p:nvSpPr>
+        <p:spPr/>
+        <p:txBody>
+          <a:bodyPr>
+            <a:normAutofit fontScale="90000"/>
+          </a:bodyPr>
+          <a:lstStyle/>
+          <a:p>
+            <a:r>
+              <a:rPr lang="en-CA" dirty="0"/>
+              <a:t>Big Question: Do you feel like the outlined work meets the requirement to fill the body of my thesis?</a:t>
+            </a:r>
+          </a:p>
+        </p:txBody>
+      </p:sp>
+      <p:sp>
+        <p:nvSpPr>
+          <p:cNvPr id="3" name="Subtitle 2">
+            <a:extLst>
+              <a:ext uri="{FF2B5EF4-FFF2-40B4-BE49-F238E27FC236}">
+                <a16:creationId xmlns:a16="http://schemas.microsoft.com/office/drawing/2014/main" id="{AE81CEBC-BCCE-7303-A4F1-D1D30EB13CDC}"/>
+              </a:ext>
+            </a:extLst>
+          </p:cNvPr>
+          <p:cNvSpPr>
+            <a:spLocks noGrp="1"/>
+          </p:cNvSpPr>
+          <p:nvPr>
+            <p:ph type="subTitle" idx="1"/>
           </p:nvPr>
         </p:nvSpPr>
         <p:spPr/>
@@ -33264,19 +34844,16 @@
           <a:bodyPr/>
           <a:lstStyle/>
           <a:p>
-            <a:r>
-              <a:rPr lang="en-CA" dirty="0"/>
-              <a:t>Thank you.</a:t>
-            </a:r>
+            <a:endParaRPr lang="en-CA" dirty="0"/>
           </a:p>
         </p:txBody>
       </p:sp>
       <p:sp>
         <p:nvSpPr>
-          <p:cNvPr id="3" name="Slide Number Placeholder 2">
-            <a:extLst>
-              <a:ext uri="{FF2B5EF4-FFF2-40B4-BE49-F238E27FC236}">
-                <a16:creationId xmlns:a16="http://schemas.microsoft.com/office/drawing/2014/main" id="{07CB0118-3CE2-03A0-E7ED-D643FAD19369}"/>
+          <p:cNvPr id="4" name="Slide Number Placeholder 3">
+            <a:extLst>
+              <a:ext uri="{FF2B5EF4-FFF2-40B4-BE49-F238E27FC236}">
+                <a16:creationId xmlns:a16="http://schemas.microsoft.com/office/drawing/2014/main" id="{EA34D409-7197-5D88-7B2A-5228A145AB20}"/>
               </a:ext>
             </a:extLst>
           </p:cNvPr>
@@ -33300,79 +34877,10 @@
           </a:p>
         </p:txBody>
       </p:sp>
-      <p:sp>
-        <p:nvSpPr>
-          <p:cNvPr id="4" name="TextBox 3">
-            <a:extLst>
-              <a:ext uri="{FF2B5EF4-FFF2-40B4-BE49-F238E27FC236}">
-                <a16:creationId xmlns:a16="http://schemas.microsoft.com/office/drawing/2014/main" id="{19852B46-B54C-4E6C-E740-7995F03FCA56}"/>
-              </a:ext>
-            </a:extLst>
-          </p:cNvPr>
-          <p:cNvSpPr txBox="1"/>
-          <p:nvPr/>
-        </p:nvSpPr>
-        <p:spPr>
-          <a:xfrm>
-            <a:off x="1200150" y="2047875"/>
-            <a:ext cx="9248750" cy="2246769"/>
-          </a:xfrm>
-          <a:prstGeom prst="rect">
-            <a:avLst/>
-          </a:prstGeom>
-          <a:noFill/>
-        </p:spPr>
-        <p:txBody>
-          <a:bodyPr wrap="none" rtlCol="0">
-            <a:spAutoFit/>
-          </a:bodyPr>
-          <a:lstStyle/>
-          <a:p>
-            <a:r>
-              <a:rPr lang="en-US" sz="2800" dirty="0"/>
-              <a:t>Questions for you:</a:t>
-            </a:r>
-          </a:p>
-          <a:p>
-            <a:pPr marL="285750" indent="-285750">
-              <a:buFont typeface="Arial" panose="020B0604020202020204" pitchFamily="34" charset="0"/>
-              <a:buChar char="•"/>
-            </a:pPr>
-            <a:r>
-              <a:rPr lang="en-US" sz="2800" dirty="0"/>
-              <a:t>Thoughts on publication issue?</a:t>
-            </a:r>
-          </a:p>
-          <a:p>
-            <a:pPr marL="285750" indent="-285750">
-              <a:buFont typeface="Arial" panose="020B0604020202020204" pitchFamily="34" charset="0"/>
-              <a:buChar char="•"/>
-            </a:pPr>
-            <a:r>
-              <a:rPr lang="en-US" sz="2800" dirty="0"/>
-              <a:t>Thoughts on work and future work constituting a full thesis?</a:t>
-            </a:r>
-          </a:p>
-          <a:p>
-            <a:pPr marL="285750" indent="-285750">
-              <a:buFont typeface="Arial" panose="020B0604020202020204" pitchFamily="34" charset="0"/>
-              <a:buChar char="•"/>
-            </a:pPr>
-            <a:endParaRPr lang="en-US" sz="2800" dirty="0"/>
-          </a:p>
-          <a:p>
-            <a:r>
-              <a:rPr lang="en-US" sz="2800" dirty="0"/>
-              <a:t>Questions for me?</a:t>
-            </a:r>
-            <a:endParaRPr lang="en-CA" sz="2800" dirty="0"/>
-          </a:p>
-        </p:txBody>
-      </p:sp>
     </p:spTree>
     <p:extLst>
       <p:ext uri="{BB962C8B-B14F-4D97-AF65-F5344CB8AC3E}">
-        <p14:creationId xmlns:p14="http://schemas.microsoft.com/office/powerpoint/2010/main" val="4088362699"/>
+        <p14:creationId xmlns:p14="http://schemas.microsoft.com/office/powerpoint/2010/main" val="3042671859"/>
       </p:ext>
     </p:extLst>
   </p:cSld>
@@ -33401,6 +34909,162 @@
       </p:grpSpPr>
       <p:sp>
         <p:nvSpPr>
+          <p:cNvPr id="2" name="Title 1">
+            <a:extLst>
+              <a:ext uri="{FF2B5EF4-FFF2-40B4-BE49-F238E27FC236}">
+                <a16:creationId xmlns:a16="http://schemas.microsoft.com/office/drawing/2014/main" id="{E278983D-EBB6-683C-94AD-CAED3B799030}"/>
+              </a:ext>
+            </a:extLst>
+          </p:cNvPr>
+          <p:cNvSpPr>
+            <a:spLocks noGrp="1"/>
+          </p:cNvSpPr>
+          <p:nvPr>
+            <p:ph type="title"/>
+          </p:nvPr>
+        </p:nvSpPr>
+        <p:spPr/>
+        <p:txBody>
+          <a:bodyPr/>
+          <a:lstStyle/>
+          <a:p>
+            <a:r>
+              <a:rPr lang="en-CA" dirty="0"/>
+              <a:t>Thank you.</a:t>
+            </a:r>
+          </a:p>
+        </p:txBody>
+      </p:sp>
+      <p:sp>
+        <p:nvSpPr>
+          <p:cNvPr id="3" name="Slide Number Placeholder 2">
+            <a:extLst>
+              <a:ext uri="{FF2B5EF4-FFF2-40B4-BE49-F238E27FC236}">
+                <a16:creationId xmlns:a16="http://schemas.microsoft.com/office/drawing/2014/main" id="{07CB0118-3CE2-03A0-E7ED-D643FAD19369}"/>
+              </a:ext>
+            </a:extLst>
+          </p:cNvPr>
+          <p:cNvSpPr>
+            <a:spLocks noGrp="1"/>
+          </p:cNvSpPr>
+          <p:nvPr>
+            <p:ph type="sldNum" sz="quarter" idx="12"/>
+          </p:nvPr>
+        </p:nvSpPr>
+        <p:spPr/>
+        <p:txBody>
+          <a:bodyPr/>
+          <a:lstStyle/>
+          <a:p>
+            <a:fld id="{4BAA6517-F367-4EB3-AFA6-036DD26A3111}" type="slidenum">
+              <a:rPr lang="en-CA" smtClean="0"/>
+              <a:t>51</a:t>
+            </a:fld>
+            <a:endParaRPr lang="en-CA"/>
+          </a:p>
+        </p:txBody>
+      </p:sp>
+      <p:sp>
+        <p:nvSpPr>
+          <p:cNvPr id="4" name="TextBox 3">
+            <a:extLst>
+              <a:ext uri="{FF2B5EF4-FFF2-40B4-BE49-F238E27FC236}">
+                <a16:creationId xmlns:a16="http://schemas.microsoft.com/office/drawing/2014/main" id="{19852B46-B54C-4E6C-E740-7995F03FCA56}"/>
+              </a:ext>
+            </a:extLst>
+          </p:cNvPr>
+          <p:cNvSpPr txBox="1"/>
+          <p:nvPr/>
+        </p:nvSpPr>
+        <p:spPr>
+          <a:xfrm>
+            <a:off x="1200150" y="2047875"/>
+            <a:ext cx="9248750" cy="2246769"/>
+          </a:xfrm>
+          <a:prstGeom prst="rect">
+            <a:avLst/>
+          </a:prstGeom>
+          <a:noFill/>
+        </p:spPr>
+        <p:txBody>
+          <a:bodyPr wrap="none" rtlCol="0">
+            <a:spAutoFit/>
+          </a:bodyPr>
+          <a:lstStyle/>
+          <a:p>
+            <a:r>
+              <a:rPr lang="en-US" sz="2800" dirty="0"/>
+              <a:t>Questions for you:</a:t>
+            </a:r>
+          </a:p>
+          <a:p>
+            <a:pPr marL="285750" indent="-285750">
+              <a:buFont typeface="Arial" panose="020B0604020202020204" pitchFamily="34" charset="0"/>
+              <a:buChar char="•"/>
+            </a:pPr>
+            <a:r>
+              <a:rPr lang="en-US" sz="2800" dirty="0"/>
+              <a:t>Thoughts on publication issue?</a:t>
+            </a:r>
+          </a:p>
+          <a:p>
+            <a:pPr marL="285750" indent="-285750">
+              <a:buFont typeface="Arial" panose="020B0604020202020204" pitchFamily="34" charset="0"/>
+              <a:buChar char="•"/>
+            </a:pPr>
+            <a:r>
+              <a:rPr lang="en-US" sz="2800" dirty="0"/>
+              <a:t>Thoughts on work and future work constituting a full thesis?</a:t>
+            </a:r>
+          </a:p>
+          <a:p>
+            <a:pPr marL="285750" indent="-285750">
+              <a:buFont typeface="Arial" panose="020B0604020202020204" pitchFamily="34" charset="0"/>
+              <a:buChar char="•"/>
+            </a:pPr>
+            <a:endParaRPr lang="en-US" sz="2800" dirty="0"/>
+          </a:p>
+          <a:p>
+            <a:r>
+              <a:rPr lang="en-US" sz="2800" dirty="0"/>
+              <a:t>Questions for me?</a:t>
+            </a:r>
+            <a:endParaRPr lang="en-CA" sz="2800" dirty="0"/>
+          </a:p>
+        </p:txBody>
+      </p:sp>
+    </p:spTree>
+    <p:extLst>
+      <p:ext uri="{BB962C8B-B14F-4D97-AF65-F5344CB8AC3E}">
+        <p14:creationId xmlns:p14="http://schemas.microsoft.com/office/powerpoint/2010/main" val="4088362699"/>
+      </p:ext>
+    </p:extLst>
+  </p:cSld>
+  <p:clrMapOvr>
+    <a:masterClrMapping/>
+  </p:clrMapOvr>
+</p:sld>
+</file>
+
+<file path=ppt/slides/slide52.xml><?xml version="1.0" encoding="utf-8"?>
+<p:sld xmlns:a="http://schemas.openxmlformats.org/drawingml/2006/main" xmlns:r="http://schemas.openxmlformats.org/officeDocument/2006/relationships" xmlns:p="http://schemas.openxmlformats.org/presentationml/2006/main">
+  <p:cSld>
+    <p:spTree>
+      <p:nvGrpSpPr>
+        <p:cNvPr id="1" name=""/>
+        <p:cNvGrpSpPr/>
+        <p:nvPr/>
+      </p:nvGrpSpPr>
+      <p:grpSpPr>
+        <a:xfrm>
+          <a:off x="0" y="0"/>
+          <a:ext cx="0" cy="0"/>
+          <a:chOff x="0" y="0"/>
+          <a:chExt cx="0" cy="0"/>
+        </a:xfrm>
+      </p:grpSpPr>
+      <p:sp>
+        <p:nvSpPr>
           <p:cNvPr id="6" name="Slide Number Placeholder 5">
             <a:extLst>
               <a:ext uri="{FF2B5EF4-FFF2-40B4-BE49-F238E27FC236}">
@@ -33427,7 +35091,7 @@
           <a:p>
             <a:fld id="{1E5564C7-97C0-40C1-9717-452594735347}" type="slidenum">
               <a:rPr lang="en-CA" smtClean="0"/>
-              <a:t>51</a:t>
+              <a:t>52</a:t>
             </a:fld>
             <a:endParaRPr lang="en-CA" dirty="0"/>
           </a:p>
@@ -34023,7 +35687,7 @@
 </p:sld>
 </file>
 
-<file path=ppt/slides/slide52.xml><?xml version="1.0" encoding="utf-8"?>
+<file path=ppt/slides/slide53.xml><?xml version="1.0" encoding="utf-8"?>
 <p:sld xmlns:a="http://schemas.openxmlformats.org/drawingml/2006/main" xmlns:r="http://schemas.openxmlformats.org/officeDocument/2006/relationships" xmlns:p="http://schemas.openxmlformats.org/presentationml/2006/main">
   <p:cSld>
     <p:spTree>
@@ -34074,7 +35738,7 @@
           <a:p>
             <a:fld id="{1E5564C7-97C0-40C1-9717-452594735347}" type="slidenum">
               <a:rPr lang="en-CA" smtClean="0"/>
-              <a:t>52</a:t>
+              <a:t>53</a:t>
             </a:fld>
             <a:endParaRPr lang="en-CA" dirty="0"/>
           </a:p>
@@ -34577,7 +36241,7 @@
 </p:sld>
 </file>
 
-<file path=ppt/slides/slide53.xml><?xml version="1.0" encoding="utf-8"?>
+<file path=ppt/slides/slide54.xml><?xml version="1.0" encoding="utf-8"?>
 <p:sld xmlns:a="http://schemas.openxmlformats.org/drawingml/2006/main" xmlns:r="http://schemas.openxmlformats.org/officeDocument/2006/relationships" xmlns:p="http://schemas.openxmlformats.org/presentationml/2006/main">
   <p:cSld>
     <p:spTree>
@@ -34622,7 +36286,7 @@
           <a:p>
             <a:fld id="{1E5564C7-97C0-40C1-9717-452594735347}" type="slidenum">
               <a:rPr lang="en-CA" smtClean="0"/>
-              <a:t>53</a:t>
+              <a:t>54</a:t>
             </a:fld>
             <a:endParaRPr lang="en-CA" dirty="0"/>
           </a:p>
@@ -35733,7 +37397,7 @@
 </p:sld>
 </file>
 
-<file path=ppt/slides/slide54.xml><?xml version="1.0" encoding="utf-8"?>
+<file path=ppt/slides/slide55.xml><?xml version="1.0" encoding="utf-8"?>
 <p:sld xmlns:a="http://schemas.openxmlformats.org/drawingml/2006/main" xmlns:r="http://schemas.openxmlformats.org/officeDocument/2006/relationships" xmlns:p="http://schemas.openxmlformats.org/presentationml/2006/main">
   <p:cSld>
     <p:spTree>
@@ -35778,7 +37442,7 @@
           <a:p>
             <a:fld id="{1E5564C7-97C0-40C1-9717-452594735347}" type="slidenum">
               <a:rPr lang="en-CA" smtClean="0"/>
-              <a:t>54</a:t>
+              <a:t>55</a:t>
             </a:fld>
             <a:endParaRPr lang="en-CA" dirty="0"/>
           </a:p>
